--- a/slides/doc-mt-02-editable-slides.pptx
+++ b/slides/doc-mt-02-editable-slides.pptx
@@ -2110,7 +2110,7 @@
                 <a:ea typeface="Arial" pitchFamily="34" charset="-122"/>
                 <a:cs typeface="Arial" pitchFamily="34" charset="-120"/>
               </a:rPr>
-              <a:t>Figure 1. Figure 1: Mapping tenant tiers across Pattern 1, Pattern 2A/2B, and Pattern 3 under a unified Control Plane.</a:t>
+              <a:t>Figure 1. Mapping tenant tiers across Pattern 1, Pattern 2A/2B, and Pattern 3 under a unified Control Plane.</a:t>
             </a:r>
             <a:endParaRPr lang="en-US" sz="820" dirty="0"/>
           </a:p>
@@ -2178,8 +2178,8 @@
         </p:nvSpPr>
         <p:spPr>
           <a:xfrm>
-            <a:off x="4027932" y="1869948"/>
-            <a:ext cx="1858975" cy="146304"/>
+            <a:off x="4027932" y="1858975"/>
+            <a:ext cx="1773936" cy="105156"/>
           </a:xfrm>
           <a:prstGeom prst="rect">
             <a:avLst/>
@@ -2188,7 +2188,7 @@
           <a:ln/>
         </p:spPr>
         <p:txBody>
-          <a:bodyPr wrap="square" lIns="0" tIns="0" rIns="0" bIns="0" rtlCol="0" anchor="t">
+          <a:bodyPr wrap="none" lIns="0" tIns="0" rIns="0" bIns="0" rtlCol="0" anchor="t">
             <a:normAutofit/>
           </a:bodyPr>
           <a:lstStyle/>
@@ -2200,7 +2200,7 @@
               <a:buNone/>
             </a:pPr>
             <a:r>
-              <a:rPr lang="en-US" sz="460" b="1" dirty="0">
+              <a:rPr lang="en-US" sz="420" b="1" dirty="0">
                 <a:solidFill>
                   <a:srgbClr val="202124"/>
                 </a:solidFill>
@@ -2208,9 +2208,9 @@
                 <a:ea typeface="Arial" pitchFamily="34" charset="-122"/>
                 <a:cs typeface="Arial" pitchFamily="34" charset="-120"/>
               </a:rPr>
-              <a:t>The Multi-Tenant Agentic Triad: Security (Hops 1–5) • FinOps COGS (-84.7%) • Zero-PII Observability</a:t>
-            </a:r>
-            <a:endParaRPr lang="en-US" sz="460" dirty="0"/>
+              <a:t>The Multi-Tenant Agentic Triad: Security (Hops 1–5) • FinOps COGS (-84.7%)</a:t>
+            </a:r>
+            <a:endParaRPr lang="en-US" sz="420" dirty="0"/>
           </a:p>
         </p:txBody>
       </p:sp>
@@ -2249,8 +2249,8 @@
         </p:nvSpPr>
         <p:spPr>
           <a:xfrm>
-            <a:off x="4088282" y="2004365"/>
-            <a:ext cx="1805940" cy="146304"/>
+            <a:off x="4088282" y="1993392"/>
+            <a:ext cx="1723644" cy="105156"/>
           </a:xfrm>
           <a:prstGeom prst="rect">
             <a:avLst/>
@@ -2259,7 +2259,7 @@
           <a:ln/>
         </p:spPr>
         <p:txBody>
-          <a:bodyPr wrap="square" lIns="0" tIns="0" rIns="0" bIns="0" rtlCol="0" anchor="t">
+          <a:bodyPr wrap="none" lIns="0" tIns="0" rIns="0" bIns="0" rtlCol="0" anchor="t">
             <a:normAutofit/>
           </a:bodyPr>
           <a:lstStyle/>
@@ -2271,7 +2271,7 @@
               <a:buNone/>
             </a:pPr>
             <a:r>
-              <a:rPr lang="en-US" sz="460" b="1" dirty="0">
+              <a:rPr lang="en-US" sz="420" b="1" dirty="0">
                 <a:solidFill>
                   <a:srgbClr val="202124"/>
                 </a:solidFill>
@@ -2279,9 +2279,9 @@
                 <a:ea typeface="Arial" pitchFamily="34" charset="-122"/>
                 <a:cs typeface="Arial" pitchFamily="34" charset="-120"/>
               </a:rPr>
-              <a:t>Unified Vertex AI Agent Engine &amp; Google ADK Reference Architecture (20/20 Simulations PASS)</a:t>
-            </a:r>
-            <a:endParaRPr lang="en-US" sz="460" dirty="0"/>
+              <a:t>Unified Vertex AI Agent Engine &amp; Google ADK Reference Architecture</a:t>
+            </a:r>
+            <a:endParaRPr lang="en-US" sz="420" dirty="0"/>
           </a:p>
         </p:txBody>
       </p:sp>
@@ -2320,8 +2320,8 @@
         </p:nvSpPr>
         <p:spPr>
           <a:xfrm>
-            <a:off x="4155034" y="3757270"/>
-            <a:ext cx="1255471" cy="146304"/>
+            <a:off x="4155034" y="3746297"/>
+            <a:ext cx="1255471" cy="105156"/>
           </a:xfrm>
           <a:prstGeom prst="rect">
             <a:avLst/>
@@ -2330,7 +2330,7 @@
           <a:ln/>
         </p:spPr>
         <p:txBody>
-          <a:bodyPr wrap="square" lIns="0" tIns="0" rIns="0" bIns="0" rtlCol="0" anchor="t">
+          <a:bodyPr wrap="none" lIns="0" tIns="0" rIns="0" bIns="0" rtlCol="0" anchor="t">
             <a:normAutofit/>
           </a:bodyPr>
           <a:lstStyle/>
@@ -2391,8 +2391,8 @@
         </p:nvSpPr>
         <p:spPr>
           <a:xfrm>
-            <a:off x="6192317" y="3757270"/>
-            <a:ext cx="1255471" cy="146304"/>
+            <a:off x="6192317" y="3746297"/>
+            <a:ext cx="1255471" cy="105156"/>
           </a:xfrm>
           <a:prstGeom prst="rect">
             <a:avLst/>
@@ -2401,7 +2401,7 @@
           <a:ln/>
         </p:spPr>
         <p:txBody>
-          <a:bodyPr wrap="square" lIns="0" tIns="0" rIns="0" bIns="0" rtlCol="0" anchor="t">
+          <a:bodyPr wrap="none" lIns="0" tIns="0" rIns="0" bIns="0" rtlCol="0" anchor="t">
             <a:normAutofit/>
           </a:bodyPr>
           <a:lstStyle/>
@@ -2421,7 +2421,7 @@
                 <a:ea typeface="Arial" pitchFamily="34" charset="-122"/>
                 <a:cs typeface="Arial" pitchFamily="34" charset="-120"/>
               </a:rPr>
-              <a:t>Triad Pillar 2 (Regulated Scale): Pattern B Silos ($$$) &amp; Pattern C Hybrid ($$)</a:t>
+              <a:t>Triad Pillar 2 (Regulated Scale): Pattern B Silos ($$$) &amp; Pattern C Hybrid</a:t>
             </a:r>
             <a:endParaRPr lang="en-US" sz="385" dirty="0"/>
           </a:p>
@@ -2736,7 +2736,7 @@
         <p:spPr>
           <a:xfrm>
             <a:off x="6881774" y="2161642"/>
-            <a:ext cx="1145743" cy="146304"/>
+            <a:ext cx="1145743" cy="137160"/>
           </a:xfrm>
           <a:prstGeom prst="rect">
             <a:avLst/>
@@ -3960,8 +3960,8 @@
         </p:blipFill>
         <p:spPr>
           <a:xfrm>
-            <a:off x="5576926" y="2516429"/>
-            <a:ext cx="181966" cy="181966"/>
+            <a:off x="5563210" y="2536546"/>
+            <a:ext cx="141732" cy="141732"/>
           </a:xfrm>
           <a:prstGeom prst="rect">
             <a:avLst/>
@@ -3976,8 +3976,8 @@
         </p:nvSpPr>
         <p:spPr>
           <a:xfrm>
-            <a:off x="5795467" y="2474366"/>
-            <a:ext cx="689458" cy="266090"/>
+            <a:off x="5727802" y="2470709"/>
+            <a:ext cx="779069" cy="273406"/>
           </a:xfrm>
           <a:prstGeom prst="rect">
             <a:avLst/>
@@ -3993,12 +3993,12 @@
           <a:p>
             <a:pPr algn="l" indent="0" marL="0">
               <a:lnSpc>
-                <a:spcPct val="86000"/>
-              </a:lnSpc>
-              <a:buNone/>
-            </a:pPr>
-            <a:r>
-              <a:rPr lang="en-US" sz="500" b="1" dirty="0">
+                <a:spcPct val="88000"/>
+              </a:lnSpc>
+              <a:buNone/>
+            </a:pPr>
+            <a:r>
+              <a:rPr lang="en-US" sz="435" b="1" dirty="0">
                 <a:solidFill>
                   <a:srgbClr val="202124"/>
                 </a:solidFill>
@@ -4008,17 +4008,17 @@
               </a:rPr>
               <a:t>External Application Load Balancer</a:t>
             </a:r>
-            <a:endParaRPr lang="en-US" sz="500" dirty="0"/>
+            <a:endParaRPr lang="en-US" sz="435" dirty="0"/>
           </a:p>
           <a:p>
             <a:pPr algn="l" indent="0" marL="0">
               <a:lnSpc>
-                <a:spcPct val="86000"/>
-              </a:lnSpc>
-              <a:buNone/>
-            </a:pPr>
-            <a:r>
-              <a:rPr lang="en-US" sz="430" dirty="0">
+                <a:spcPct val="88000"/>
+              </a:lnSpc>
+              <a:buNone/>
+            </a:pPr>
+            <a:r>
+              <a:rPr lang="en-US" sz="375" dirty="0">
                 <a:solidFill>
                   <a:srgbClr val="3C4043"/>
                 </a:solidFill>
@@ -4028,7 +4028,7 @@
               </a:rPr>
               <a:t>Global Anycast Ingress</a:t>
             </a:r>
-            <a:endParaRPr lang="en-US" sz="500" dirty="0"/>
+            <a:endParaRPr lang="en-US" sz="435" dirty="0"/>
           </a:p>
         </p:txBody>
       </p:sp>
@@ -4075,8 +4075,8 @@
         </p:blipFill>
         <p:spPr>
           <a:xfrm>
-            <a:off x="6969557" y="2416759"/>
-            <a:ext cx="172822" cy="172822"/>
+            <a:off x="6955841" y="2435962"/>
+            <a:ext cx="134417" cy="134417"/>
           </a:xfrm>
           <a:prstGeom prst="rect">
             <a:avLst/>
@@ -4091,8 +4091,8 @@
         </p:nvSpPr>
         <p:spPr>
           <a:xfrm>
-            <a:off x="7178954" y="2377440"/>
-            <a:ext cx="750722" cy="251460"/>
+            <a:off x="7113118" y="2373782"/>
+            <a:ext cx="838505" cy="258775"/>
           </a:xfrm>
           <a:prstGeom prst="rect">
             <a:avLst/>
@@ -4108,12 +4108,12 @@
           <a:p>
             <a:pPr algn="l" indent="0" marL="0">
               <a:lnSpc>
-                <a:spcPct val="86000"/>
-              </a:lnSpc>
-              <a:buNone/>
-            </a:pPr>
-            <a:r>
-              <a:rPr lang="en-US" sz="500" b="1" dirty="0">
+                <a:spcPct val="88000"/>
+              </a:lnSpc>
+              <a:buNone/>
+            </a:pPr>
+            <a:r>
+              <a:rPr lang="en-US" sz="435" b="1" dirty="0">
                 <a:solidFill>
                   <a:srgbClr val="202124"/>
                 </a:solidFill>
@@ -4123,17 +4123,17 @@
               </a:rPr>
               <a:t>Security Command Center</a:t>
             </a:r>
-            <a:endParaRPr lang="en-US" sz="500" dirty="0"/>
+            <a:endParaRPr lang="en-US" sz="435" dirty="0"/>
           </a:p>
           <a:p>
             <a:pPr algn="l" indent="0" marL="0">
               <a:lnSpc>
-                <a:spcPct val="86000"/>
-              </a:lnSpc>
-              <a:buNone/>
-            </a:pPr>
-            <a:r>
-              <a:rPr lang="en-US" sz="430" dirty="0">
+                <a:spcPct val="88000"/>
+              </a:lnSpc>
+              <a:buNone/>
+            </a:pPr>
+            <a:r>
+              <a:rPr lang="en-US" sz="375" dirty="0">
                 <a:solidFill>
                   <a:srgbClr val="3C4043"/>
                 </a:solidFill>
@@ -4143,7 +4143,7 @@
               </a:rPr>
               <a:t>Unified SIEM &amp; Audit Lineage</a:t>
             </a:r>
-            <a:endParaRPr lang="en-US" sz="500" dirty="0"/>
+            <a:endParaRPr lang="en-US" sz="435" dirty="0"/>
           </a:p>
         </p:txBody>
       </p:sp>
@@ -4190,8 +4190,8 @@
         </p:blipFill>
         <p:spPr>
           <a:xfrm>
-            <a:off x="6985102" y="3043123"/>
-            <a:ext cx="163678" cy="163678"/>
+            <a:off x="6971386" y="3061411"/>
+            <a:ext cx="128016" cy="128016"/>
           </a:xfrm>
           <a:prstGeom prst="rect">
             <a:avLst/>
@@ -4206,8 +4206,8 @@
         </p:nvSpPr>
         <p:spPr>
           <a:xfrm>
-            <a:off x="7185355" y="3006547"/>
-            <a:ext cx="730606" cy="236830"/>
+            <a:off x="7121347" y="3002890"/>
+            <a:ext cx="817474" cy="244145"/>
           </a:xfrm>
           <a:prstGeom prst="rect">
             <a:avLst/>
@@ -4223,12 +4223,12 @@
           <a:p>
             <a:pPr algn="l" indent="0" marL="0">
               <a:lnSpc>
-                <a:spcPct val="86000"/>
-              </a:lnSpc>
-              <a:buNone/>
-            </a:pPr>
-            <a:r>
-              <a:rPr lang="en-US" sz="500" b="1" dirty="0">
+                <a:spcPct val="88000"/>
+              </a:lnSpc>
+              <a:buNone/>
+            </a:pPr>
+            <a:r>
+              <a:rPr lang="en-US" sz="435" b="1" dirty="0">
                 <a:solidFill>
                   <a:srgbClr val="202124"/>
                 </a:solidFill>
@@ -4238,17 +4238,17 @@
               </a:rPr>
               <a:t>BigQuery OTel Sink</a:t>
             </a:r>
-            <a:endParaRPr lang="en-US" sz="500" dirty="0"/>
+            <a:endParaRPr lang="en-US" sz="435" dirty="0"/>
           </a:p>
           <a:p>
             <a:pPr algn="l" indent="0" marL="0">
               <a:lnSpc>
-                <a:spcPct val="86000"/>
-              </a:lnSpc>
-              <a:buNone/>
-            </a:pPr>
-            <a:r>
-              <a:rPr lang="en-US" sz="430" dirty="0">
+                <a:spcPct val="88000"/>
+              </a:lnSpc>
+              <a:buNone/>
+            </a:pPr>
+            <a:r>
+              <a:rPr lang="en-US" sz="375" dirty="0">
                 <a:solidFill>
                   <a:srgbClr val="3C4043"/>
                 </a:solidFill>
@@ -4258,7 +4258,7 @@
               </a:rPr>
               <a:t>Zero-PII Cryptographic Spans</a:t>
             </a:r>
-            <a:endParaRPr lang="en-US" sz="500" dirty="0"/>
+            <a:endParaRPr lang="en-US" sz="435" dirty="0"/>
           </a:p>
         </p:txBody>
       </p:sp>
@@ -4305,8 +4305,8 @@
         </p:blipFill>
         <p:spPr>
           <a:xfrm>
-            <a:off x="6992417" y="2735885"/>
-            <a:ext cx="163678" cy="163678"/>
+            <a:off x="6978701" y="2754173"/>
+            <a:ext cx="128016" cy="128016"/>
           </a:xfrm>
           <a:prstGeom prst="rect">
             <a:avLst/>
@@ -4321,8 +4321,8 @@
         </p:nvSpPr>
         <p:spPr>
           <a:xfrm>
-            <a:off x="7192670" y="2699309"/>
-            <a:ext cx="715061" cy="236830"/>
+            <a:off x="7128662" y="2695651"/>
+            <a:ext cx="801014" cy="244145"/>
           </a:xfrm>
           <a:prstGeom prst="rect">
             <a:avLst/>
@@ -4338,12 +4338,12 @@
           <a:p>
             <a:pPr algn="l" indent="0" marL="0">
               <a:lnSpc>
-                <a:spcPct val="86000"/>
-              </a:lnSpc>
-              <a:buNone/>
-            </a:pPr>
-            <a:r>
-              <a:rPr lang="en-US" sz="500" b="1" dirty="0">
+                <a:spcPct val="88000"/>
+              </a:lnSpc>
+              <a:buNone/>
+            </a:pPr>
+            <a:r>
+              <a:rPr lang="en-US" sz="435" b="1" dirty="0">
                 <a:solidFill>
                   <a:srgbClr val="202124"/>
                 </a:solidFill>
@@ -4353,17 +4353,17 @@
               </a:rPr>
               <a:t>3 Chargeback Models</a:t>
             </a:r>
-            <a:endParaRPr lang="en-US" sz="500" dirty="0"/>
+            <a:endParaRPr lang="en-US" sz="435" dirty="0"/>
           </a:p>
           <a:p>
             <a:pPr algn="l" indent="0" marL="0">
               <a:lnSpc>
-                <a:spcPct val="86000"/>
-              </a:lnSpc>
-              <a:buNone/>
-            </a:pPr>
-            <a:r>
-              <a:rPr lang="en-US" sz="430" dirty="0">
+                <a:spcPct val="88000"/>
+              </a:lnSpc>
+              <a:buNone/>
+            </a:pPr>
+            <a:r>
+              <a:rPr lang="en-US" sz="375" dirty="0">
                 <a:solidFill>
                   <a:srgbClr val="3C4043"/>
                 </a:solidFill>
@@ -4373,7 +4373,7 @@
               </a:rPr>
               <a:t>Even, Proportional &amp; Tiered</a:t>
             </a:r>
-            <a:endParaRPr lang="en-US" sz="500" dirty="0"/>
+            <a:endParaRPr lang="en-US" sz="435" dirty="0"/>
           </a:p>
         </p:txBody>
       </p:sp>
@@ -4420,8 +4420,8 @@
         </p:blipFill>
         <p:spPr>
           <a:xfrm>
-            <a:off x="5164531" y="4358030"/>
-            <a:ext cx="177394" cy="177394"/>
+            <a:off x="5150815" y="4377233"/>
+            <a:ext cx="138074" cy="138074"/>
           </a:xfrm>
           <a:prstGeom prst="rect">
             <a:avLst/>
@@ -4436,8 +4436,8 @@
         </p:nvSpPr>
         <p:spPr>
           <a:xfrm>
-            <a:off x="5378501" y="4316882"/>
-            <a:ext cx="513893" cy="258775"/>
+            <a:off x="5311750" y="4313225"/>
+            <a:ext cx="602590" cy="266090"/>
           </a:xfrm>
           <a:prstGeom prst="rect">
             <a:avLst/>
@@ -4453,12 +4453,12 @@
           <a:p>
             <a:pPr algn="l" indent="0" marL="0">
               <a:lnSpc>
-                <a:spcPct val="86000"/>
-              </a:lnSpc>
-              <a:buNone/>
-            </a:pPr>
-            <a:r>
-              <a:rPr lang="en-US" sz="500" b="1" dirty="0">
+                <a:spcPct val="88000"/>
+              </a:lnSpc>
+              <a:buNone/>
+            </a:pPr>
+            <a:r>
+              <a:rPr lang="en-US" sz="435" b="1" dirty="0">
                 <a:solidFill>
                   <a:srgbClr val="202124"/>
                 </a:solidFill>
@@ -4468,17 +4468,17 @@
               </a:rPr>
               <a:t>Thinking Budget Cap</a:t>
             </a:r>
-            <a:endParaRPr lang="en-US" sz="500" dirty="0"/>
+            <a:endParaRPr lang="en-US" sz="435" dirty="0"/>
           </a:p>
           <a:p>
             <a:pPr algn="l" indent="0" marL="0">
               <a:lnSpc>
-                <a:spcPct val="86000"/>
-              </a:lnSpc>
-              <a:buNone/>
-            </a:pPr>
-            <a:r>
-              <a:rPr lang="en-US" sz="430" dirty="0">
+                <a:spcPct val="88000"/>
+              </a:lnSpc>
+              <a:buNone/>
+            </a:pPr>
+            <a:r>
+              <a:rPr lang="en-US" sz="375" dirty="0">
                 <a:solidFill>
                   <a:srgbClr val="3C4043"/>
                 </a:solidFill>
@@ -4488,7 +4488,7 @@
               </a:rPr>
               <a:t>Clamps 4k Std vs 8k Ent</a:t>
             </a:r>
-            <a:endParaRPr lang="en-US" sz="500" dirty="0"/>
+            <a:endParaRPr lang="en-US" sz="435" dirty="0"/>
           </a:p>
         </p:txBody>
       </p:sp>
@@ -4535,8 +4535,8 @@
         </p:blipFill>
         <p:spPr>
           <a:xfrm>
-            <a:off x="5164531" y="4897526"/>
-            <a:ext cx="177394" cy="177394"/>
+            <a:off x="5150815" y="4916729"/>
+            <a:ext cx="138074" cy="138074"/>
           </a:xfrm>
           <a:prstGeom prst="rect">
             <a:avLst/>
@@ -4551,8 +4551,8 @@
         </p:nvSpPr>
         <p:spPr>
           <a:xfrm>
-            <a:off x="5378501" y="4856378"/>
-            <a:ext cx="513893" cy="258775"/>
+            <a:off x="5311750" y="4852721"/>
+            <a:ext cx="602590" cy="266090"/>
           </a:xfrm>
           <a:prstGeom prst="rect">
             <a:avLst/>
@@ -4568,12 +4568,12 @@
           <a:p>
             <a:pPr algn="l" indent="0" marL="0">
               <a:lnSpc>
-                <a:spcPct val="86000"/>
-              </a:lnSpc>
-              <a:buNone/>
-            </a:pPr>
-            <a:r>
-              <a:rPr lang="en-US" sz="500" b="1" dirty="0">
+                <a:spcPct val="88000"/>
+              </a:lnSpc>
+              <a:buNone/>
+            </a:pPr>
+            <a:r>
+              <a:rPr lang="en-US" sz="435" b="1" dirty="0">
                 <a:solidFill>
                   <a:srgbClr val="202124"/>
                 </a:solidFill>
@@ -4583,17 +4583,17 @@
               </a:rPr>
               <a:t>2LO &amp; 3LO Auth Mgr</a:t>
             </a:r>
-            <a:endParaRPr lang="en-US" sz="500" dirty="0"/>
+            <a:endParaRPr lang="en-US" sz="435" dirty="0"/>
           </a:p>
           <a:p>
             <a:pPr algn="l" indent="0" marL="0">
               <a:lnSpc>
-                <a:spcPct val="86000"/>
-              </a:lnSpc>
-              <a:buNone/>
-            </a:pPr>
-            <a:r>
-              <a:rPr lang="en-US" sz="430" dirty="0">
+                <a:spcPct val="88000"/>
+              </a:lnSpc>
+              <a:buNone/>
+            </a:pPr>
+            <a:r>
+              <a:rPr lang="en-US" sz="375" dirty="0">
                 <a:solidFill>
                   <a:srgbClr val="3C4043"/>
                 </a:solidFill>
@@ -4603,7 +4603,7 @@
               </a:rPr>
               <a:t>Scoped Per-Tenant Vault</a:t>
             </a:r>
-            <a:endParaRPr lang="en-US" sz="500" dirty="0"/>
+            <a:endParaRPr lang="en-US" sz="435" dirty="0"/>
           </a:p>
         </p:txBody>
       </p:sp>
@@ -4650,8 +4650,8 @@
         </p:blipFill>
         <p:spPr>
           <a:xfrm>
-            <a:off x="5164531" y="5459882"/>
-            <a:ext cx="177394" cy="177394"/>
+            <a:off x="5150815" y="5479085"/>
+            <a:ext cx="138074" cy="138074"/>
           </a:xfrm>
           <a:prstGeom prst="rect">
             <a:avLst/>
@@ -4666,8 +4666,8 @@
         </p:nvSpPr>
         <p:spPr>
           <a:xfrm>
-            <a:off x="5378501" y="5418734"/>
-            <a:ext cx="513893" cy="258775"/>
+            <a:off x="5311750" y="5415077"/>
+            <a:ext cx="602590" cy="266090"/>
           </a:xfrm>
           <a:prstGeom prst="rect">
             <a:avLst/>
@@ -4683,12 +4683,12 @@
           <a:p>
             <a:pPr algn="l" indent="0" marL="0">
               <a:lnSpc>
-                <a:spcPct val="86000"/>
-              </a:lnSpc>
-              <a:buNone/>
-            </a:pPr>
-            <a:r>
-              <a:rPr lang="en-US" sz="500" b="1" dirty="0">
+                <a:spcPct val="88000"/>
+              </a:lnSpc>
+              <a:buNone/>
+            </a:pPr>
+            <a:r>
+              <a:rPr lang="en-US" sz="435" b="1" dirty="0">
                 <a:solidFill>
                   <a:srgbClr val="202124"/>
                 </a:solidFill>
@@ -4698,17 +4698,17 @@
               </a:rPr>
               <a:t>AlloyDB RLS &amp; L1–L5</a:t>
             </a:r>
-            <a:endParaRPr lang="en-US" sz="500" dirty="0"/>
+            <a:endParaRPr lang="en-US" sz="435" dirty="0"/>
           </a:p>
           <a:p>
             <a:pPr algn="l" indent="0" marL="0">
               <a:lnSpc>
-                <a:spcPct val="86000"/>
-              </a:lnSpc>
-              <a:buNone/>
-            </a:pPr>
-            <a:r>
-              <a:rPr lang="en-US" sz="430" dirty="0">
+                <a:spcPct val="88000"/>
+              </a:lnSpc>
+              <a:buNone/>
+            </a:pPr>
+            <a:r>
+              <a:rPr lang="en-US" sz="375" dirty="0">
                 <a:solidFill>
                   <a:srgbClr val="3C4043"/>
                 </a:solidFill>
@@ -4718,7 +4718,7 @@
               </a:rPr>
               <a:t>Shared Storage Density</a:t>
             </a:r>
-            <a:endParaRPr lang="en-US" sz="500" dirty="0"/>
+            <a:endParaRPr lang="en-US" sz="435" dirty="0"/>
           </a:p>
         </p:txBody>
       </p:sp>
@@ -4765,8 +4765,8 @@
         </p:blipFill>
         <p:spPr>
           <a:xfrm>
-            <a:off x="7201814" y="4358030"/>
-            <a:ext cx="177394" cy="177394"/>
+            <a:off x="7188098" y="4377233"/>
+            <a:ext cx="138074" cy="138074"/>
           </a:xfrm>
           <a:prstGeom prst="rect">
             <a:avLst/>
@@ -4781,8 +4781,8 @@
         </p:nvSpPr>
         <p:spPr>
           <a:xfrm>
-            <a:off x="7415784" y="4316882"/>
-            <a:ext cx="513893" cy="258775"/>
+            <a:off x="7349033" y="4313225"/>
+            <a:ext cx="602590" cy="266090"/>
           </a:xfrm>
           <a:prstGeom prst="rect">
             <a:avLst/>
@@ -4798,12 +4798,12 @@
           <a:p>
             <a:pPr algn="l" indent="0" marL="0">
               <a:lnSpc>
-                <a:spcPct val="86000"/>
-              </a:lnSpc>
-              <a:buNone/>
-            </a:pPr>
-            <a:r>
-              <a:rPr lang="en-US" sz="500" b="1" dirty="0">
+                <a:spcPct val="88000"/>
+              </a:lnSpc>
+              <a:buNone/>
+            </a:pPr>
+            <a:r>
+              <a:rPr lang="en-US" sz="435" b="1" dirty="0">
                 <a:solidFill>
                   <a:srgbClr val="202124"/>
                 </a:solidFill>
@@ -4813,17 +4813,17 @@
               </a:rPr>
               <a:t>PSC Spoke Runtime</a:t>
             </a:r>
-            <a:endParaRPr lang="en-US" sz="500" dirty="0"/>
+            <a:endParaRPr lang="en-US" sz="435" dirty="0"/>
           </a:p>
           <a:p>
             <a:pPr algn="l" indent="0" marL="0">
               <a:lnSpc>
-                <a:spcPct val="86000"/>
-              </a:lnSpc>
-              <a:buNone/>
-            </a:pPr>
-            <a:r>
-              <a:rPr lang="en-US" sz="430" dirty="0">
+                <a:spcPct val="88000"/>
+              </a:lnSpc>
+              <a:buNone/>
+            </a:pPr>
+            <a:r>
+              <a:rPr lang="en-US" sz="375" dirty="0">
                 <a:solidFill>
                   <a:srgbClr val="3C4043"/>
                 </a:solidFill>
@@ -4833,7 +4833,7 @@
               </a:rPr>
               <a:t>3-Phase Live Tier Upgrade</a:t>
             </a:r>
-            <a:endParaRPr lang="en-US" sz="500" dirty="0"/>
+            <a:endParaRPr lang="en-US" sz="435" dirty="0"/>
           </a:p>
         </p:txBody>
       </p:sp>
@@ -4880,8 +4880,8 @@
         </p:blipFill>
         <p:spPr>
           <a:xfrm>
-            <a:off x="7201814" y="4897526"/>
-            <a:ext cx="177394" cy="177394"/>
+            <a:off x="7188098" y="4916729"/>
+            <a:ext cx="138074" cy="138074"/>
           </a:xfrm>
           <a:prstGeom prst="rect">
             <a:avLst/>
@@ -4896,8 +4896,8 @@
         </p:nvSpPr>
         <p:spPr>
           <a:xfrm>
-            <a:off x="7415784" y="4856378"/>
-            <a:ext cx="513893" cy="258775"/>
+            <a:off x="7349033" y="4852721"/>
+            <a:ext cx="602590" cy="266090"/>
           </a:xfrm>
           <a:prstGeom prst="rect">
             <a:avLst/>
@@ -4913,12 +4913,12 @@
           <a:p>
             <a:pPr algn="l" indent="0" marL="0">
               <a:lnSpc>
-                <a:spcPct val="86000"/>
-              </a:lnSpc>
-              <a:buNone/>
-            </a:pPr>
-            <a:r>
-              <a:rPr lang="en-US" sz="500" b="1" dirty="0">
+                <a:spcPct val="88000"/>
+              </a:lnSpc>
+              <a:buNone/>
+            </a:pPr>
+            <a:r>
+              <a:rPr lang="en-US" sz="435" b="1" dirty="0">
                 <a:solidFill>
                   <a:srgbClr val="202124"/>
                 </a:solidFill>
@@ -4928,17 +4928,17 @@
               </a:rPr>
               <a:t>Dedicated Silo MCP</a:t>
             </a:r>
-            <a:endParaRPr lang="en-US" sz="500" dirty="0"/>
+            <a:endParaRPr lang="en-US" sz="435" dirty="0"/>
           </a:p>
           <a:p>
             <a:pPr algn="l" indent="0" marL="0">
               <a:lnSpc>
-                <a:spcPct val="86000"/>
-              </a:lnSpc>
-              <a:buNone/>
-            </a:pPr>
-            <a:r>
-              <a:rPr lang="en-US" sz="430" dirty="0">
+                <a:spcPct val="88000"/>
+              </a:lnSpc>
+              <a:buNone/>
+            </a:pPr>
+            <a:r>
+              <a:rPr lang="en-US" sz="375" dirty="0">
                 <a:solidFill>
                   <a:srgbClr val="3C4043"/>
                 </a:solidFill>
@@ -4948,7 +4948,7 @@
               </a:rPr>
               <a:t>Zero Cross-Project Egress</a:t>
             </a:r>
-            <a:endParaRPr lang="en-US" sz="500" dirty="0"/>
+            <a:endParaRPr lang="en-US" sz="435" dirty="0"/>
           </a:p>
         </p:txBody>
       </p:sp>
@@ -4995,8 +4995,8 @@
         </p:blipFill>
         <p:spPr>
           <a:xfrm>
-            <a:off x="7201814" y="5459882"/>
-            <a:ext cx="177394" cy="177394"/>
+            <a:off x="7188098" y="5479085"/>
+            <a:ext cx="138074" cy="138074"/>
           </a:xfrm>
           <a:prstGeom prst="rect">
             <a:avLst/>
@@ -5011,8 +5011,8 @@
         </p:nvSpPr>
         <p:spPr>
           <a:xfrm>
-            <a:off x="7415784" y="5418734"/>
-            <a:ext cx="513893" cy="258775"/>
+            <a:off x="7349033" y="5415077"/>
+            <a:ext cx="602590" cy="266090"/>
           </a:xfrm>
           <a:prstGeom prst="rect">
             <a:avLst/>
@@ -5028,12 +5028,12 @@
           <a:p>
             <a:pPr algn="l" indent="0" marL="0">
               <a:lnSpc>
-                <a:spcPct val="86000"/>
-              </a:lnSpc>
-              <a:buNone/>
-            </a:pPr>
-            <a:r>
-              <a:rPr lang="en-US" sz="500" b="1" dirty="0">
+                <a:spcPct val="88000"/>
+              </a:lnSpc>
+              <a:buNone/>
+            </a:pPr>
+            <a:r>
+              <a:rPr lang="en-US" sz="435" b="1" dirty="0">
                 <a:solidFill>
                   <a:srgbClr val="202124"/>
                 </a:solidFill>
@@ -5043,17 +5043,17 @@
               </a:rPr>
               <a:t>Cloud KMS CMEK Lock</a:t>
             </a:r>
-            <a:endParaRPr lang="en-US" sz="500" dirty="0"/>
+            <a:endParaRPr lang="en-US" sz="435" dirty="0"/>
           </a:p>
           <a:p>
             <a:pPr algn="l" indent="0" marL="0">
               <a:lnSpc>
-                <a:spcPct val="86000"/>
-              </a:lnSpc>
-              <a:buNone/>
-            </a:pPr>
-            <a:r>
-              <a:rPr lang="en-US" sz="430" dirty="0">
+                <a:spcPct val="88000"/>
+              </a:lnSpc>
+              <a:buNone/>
+            </a:pPr>
+            <a:r>
+              <a:rPr lang="en-US" sz="375" dirty="0">
                 <a:solidFill>
                   <a:srgbClr val="3C4043"/>
                 </a:solidFill>
@@ -5063,7 +5063,7 @@
               </a:rPr>
               <a:t>Instant HTTP 423 Kill-Switch</a:t>
             </a:r>
-            <a:endParaRPr lang="en-US" sz="500" dirty="0"/>
+            <a:endParaRPr lang="en-US" sz="435" dirty="0"/>
           </a:p>
         </p:txBody>
       </p:sp>
@@ -5110,8 +5110,8 @@
         </p:blipFill>
         <p:spPr>
           <a:xfrm>
-            <a:off x="5666537" y="3065069"/>
-            <a:ext cx="158191" cy="158191"/>
+            <a:off x="5652821" y="3081528"/>
+            <a:ext cx="123444" cy="123444"/>
           </a:xfrm>
           <a:prstGeom prst="rect">
             <a:avLst/>
@@ -5126,8 +5126,8 @@
         </p:nvSpPr>
         <p:spPr>
           <a:xfrm>
-            <a:off x="5861304" y="3029407"/>
-            <a:ext cx="570586" cy="228600"/>
+            <a:off x="5799125" y="3025750"/>
+            <a:ext cx="655625" cy="235915"/>
           </a:xfrm>
           <a:prstGeom prst="rect">
             <a:avLst/>
@@ -5143,12 +5143,12 @@
           <a:p>
             <a:pPr algn="l" indent="0" marL="0">
               <a:lnSpc>
-                <a:spcPct val="86000"/>
-              </a:lnSpc>
-              <a:buNone/>
-            </a:pPr>
-            <a:r>
-              <a:rPr lang="en-US" sz="500" b="1" dirty="0">
+                <a:spcPct val="88000"/>
+              </a:lnSpc>
+              <a:buNone/>
+            </a:pPr>
+            <a:r>
+              <a:rPr lang="en-US" sz="435" b="1" dirty="0">
                 <a:solidFill>
                   <a:srgbClr val="202124"/>
                 </a:solidFill>
@@ -5158,17 +5158,17 @@
               </a:rPr>
               <a:t>Architecture Selector</a:t>
             </a:r>
-            <a:endParaRPr lang="en-US" sz="500" dirty="0"/>
+            <a:endParaRPr lang="en-US" sz="435" dirty="0"/>
           </a:p>
           <a:p>
             <a:pPr algn="l" indent="0" marL="0">
               <a:lnSpc>
-                <a:spcPct val="86000"/>
-              </a:lnSpc>
-              <a:buNone/>
-            </a:pPr>
-            <a:r>
-              <a:rPr lang="en-US" sz="430" dirty="0">
+                <a:spcPct val="88000"/>
+              </a:lnSpc>
+              <a:buNone/>
+            </a:pPr>
+            <a:r>
+              <a:rPr lang="en-US" sz="375" dirty="0">
                 <a:solidFill>
                   <a:srgbClr val="3C4043"/>
                 </a:solidFill>
@@ -5178,7 +5178,7 @@
               </a:rPr>
               <a:t>Routes Pattern A, B or C</a:t>
             </a:r>
-            <a:endParaRPr lang="en-US" sz="500" dirty="0"/>
+            <a:endParaRPr lang="en-US" sz="435" dirty="0"/>
           </a:p>
         </p:txBody>
       </p:sp>
@@ -5225,8 +5225,8 @@
         </p:blipFill>
         <p:spPr>
           <a:xfrm>
-            <a:off x="4243730" y="4169664"/>
-            <a:ext cx="172822" cy="172822"/>
+            <a:off x="4230014" y="4190695"/>
+            <a:ext cx="130759" cy="130759"/>
           </a:xfrm>
           <a:prstGeom prst="rect">
             <a:avLst/>
@@ -5241,8 +5241,8 @@
         </p:nvSpPr>
         <p:spPr>
           <a:xfrm>
-            <a:off x="4453128" y="4130345"/>
-            <a:ext cx="444398" cy="251460"/>
+            <a:off x="4383634" y="4126687"/>
+            <a:ext cx="536753" cy="258775"/>
           </a:xfrm>
           <a:prstGeom prst="rect">
             <a:avLst/>
@@ -5258,12 +5258,12 @@
           <a:p>
             <a:pPr algn="l" indent="0" marL="0">
               <a:lnSpc>
-                <a:spcPct val="86000"/>
-              </a:lnSpc>
-              <a:buNone/>
-            </a:pPr>
-            <a:r>
-              <a:rPr lang="en-US" sz="500" b="1" dirty="0">
+                <a:spcPct val="88000"/>
+              </a:lnSpc>
+              <a:buNone/>
+            </a:pPr>
+            <a:r>
+              <a:rPr lang="en-US" sz="435" b="1" dirty="0">
                 <a:solidFill>
                   <a:srgbClr val="202124"/>
                 </a:solidFill>
@@ -5273,17 +5273,17 @@
               </a:rPr>
               <a:t>Valkey Rate Bulkhead</a:t>
             </a:r>
-            <a:endParaRPr lang="en-US" sz="500" dirty="0"/>
+            <a:endParaRPr lang="en-US" sz="435" dirty="0"/>
           </a:p>
           <a:p>
             <a:pPr algn="l" indent="0" marL="0">
               <a:lnSpc>
-                <a:spcPct val="86000"/>
-              </a:lnSpc>
-              <a:buNone/>
-            </a:pPr>
-            <a:r>
-              <a:rPr lang="en-US" sz="430" dirty="0">
+                <a:spcPct val="88000"/>
+              </a:lnSpc>
+              <a:buNone/>
+            </a:pPr>
+            <a:r>
+              <a:rPr lang="en-US" sz="375" dirty="0">
                 <a:solidFill>
                   <a:srgbClr val="3C4043"/>
                 </a:solidFill>
@@ -5293,7 +5293,7 @@
               </a:rPr>
               <a:t>120 RPM Std / 600 RPM Ent</a:t>
             </a:r>
-            <a:endParaRPr lang="en-US" sz="500" dirty="0"/>
+            <a:endParaRPr lang="en-US" sz="435" dirty="0"/>
           </a:p>
         </p:txBody>
       </p:sp>
@@ -5340,8 +5340,8 @@
         </p:blipFill>
         <p:spPr>
           <a:xfrm>
-            <a:off x="4243730" y="5052974"/>
-            <a:ext cx="172822" cy="172822"/>
+            <a:off x="4230014" y="5074006"/>
+            <a:ext cx="130759" cy="130759"/>
           </a:xfrm>
           <a:prstGeom prst="rect">
             <a:avLst/>
@@ -5356,8 +5356,8 @@
         </p:nvSpPr>
         <p:spPr>
           <a:xfrm>
-            <a:off x="4453128" y="5013655"/>
-            <a:ext cx="444398" cy="251460"/>
+            <a:off x="4383634" y="5009998"/>
+            <a:ext cx="536753" cy="258775"/>
           </a:xfrm>
           <a:prstGeom prst="rect">
             <a:avLst/>
@@ -5373,12 +5373,12 @@
           <a:p>
             <a:pPr algn="l" indent="0" marL="0">
               <a:lnSpc>
-                <a:spcPct val="86000"/>
-              </a:lnSpc>
-              <a:buNone/>
-            </a:pPr>
-            <a:r>
-              <a:rPr lang="en-US" sz="500" b="1" dirty="0">
+                <a:spcPct val="88000"/>
+              </a:lnSpc>
+              <a:buNone/>
+            </a:pPr>
+            <a:r>
+              <a:rPr lang="en-US" sz="435" b="1" dirty="0">
                 <a:solidFill>
                   <a:srgbClr val="202124"/>
                 </a:solidFill>
@@ -5388,17 +5388,17 @@
               </a:rPr>
               <a:t>ContextCacheConfig</a:t>
             </a:r>
-            <a:endParaRPr lang="en-US" sz="500" dirty="0"/>
+            <a:endParaRPr lang="en-US" sz="435" dirty="0"/>
           </a:p>
           <a:p>
             <a:pPr algn="l" indent="0" marL="0">
               <a:lnSpc>
-                <a:spcPct val="86000"/>
-              </a:lnSpc>
-              <a:buNone/>
-            </a:pPr>
-            <a:r>
-              <a:rPr lang="en-US" sz="430" dirty="0">
+                <a:spcPct val="88000"/>
+              </a:lnSpc>
+              <a:buNone/>
+            </a:pPr>
+            <a:r>
+              <a:rPr lang="en-US" sz="375" dirty="0">
                 <a:solidFill>
                   <a:srgbClr val="3C4043"/>
                 </a:solidFill>
@@ -5408,7 +5408,7 @@
               </a:rPr>
               <a:t>90% Discount on 32k Prefix</a:t>
             </a:r>
-            <a:endParaRPr lang="en-US" sz="500" dirty="0"/>
+            <a:endParaRPr lang="en-US" sz="435" dirty="0"/>
           </a:p>
         </p:txBody>
       </p:sp>
@@ -5455,8 +5455,8 @@
         </p:blipFill>
         <p:spPr>
           <a:xfrm>
-            <a:off x="6281014" y="4169664"/>
-            <a:ext cx="172822" cy="172822"/>
+            <a:off x="6267298" y="4190695"/>
+            <a:ext cx="130759" cy="130759"/>
           </a:xfrm>
           <a:prstGeom prst="rect">
             <a:avLst/>
@@ -5471,8 +5471,8 @@
         </p:nvSpPr>
         <p:spPr>
           <a:xfrm>
-            <a:off x="6490411" y="4130345"/>
-            <a:ext cx="444398" cy="251460"/>
+            <a:off x="6420917" y="4126687"/>
+            <a:ext cx="536753" cy="258775"/>
           </a:xfrm>
           <a:prstGeom prst="rect">
             <a:avLst/>
@@ -5488,12 +5488,12 @@
           <a:p>
             <a:pPr algn="l" indent="0" marL="0">
               <a:lnSpc>
-                <a:spcPct val="86000"/>
-              </a:lnSpc>
-              <a:buNone/>
-            </a:pPr>
-            <a:r>
-              <a:rPr lang="en-US" sz="500" b="1" dirty="0">
+                <a:spcPct val="88000"/>
+              </a:lnSpc>
+              <a:buNone/>
+            </a:pPr>
+            <a:r>
+              <a:rPr lang="en-US" sz="435" b="1" dirty="0">
                 <a:solidFill>
                   <a:srgbClr val="202124"/>
                 </a:solidFill>
@@ -5503,17 +5503,17 @@
               </a:rPr>
               <a:t>VPC-SC &amp; IAM PAB</a:t>
             </a:r>
-            <a:endParaRPr lang="en-US" sz="500" dirty="0"/>
+            <a:endParaRPr lang="en-US" sz="435" dirty="0"/>
           </a:p>
           <a:p>
             <a:pPr algn="l" indent="0" marL="0">
               <a:lnSpc>
-                <a:spcPct val="86000"/>
-              </a:lnSpc>
-              <a:buNone/>
-            </a:pPr>
-            <a:r>
-              <a:rPr lang="en-US" sz="430" dirty="0">
+                <a:spcPct val="88000"/>
+              </a:lnSpc>
+              <a:buNone/>
+            </a:pPr>
+            <a:r>
+              <a:rPr lang="en-US" sz="375" dirty="0">
                 <a:solidFill>
                   <a:srgbClr val="3C4043"/>
                 </a:solidFill>
@@ -5523,7 +5523,7 @@
               </a:rPr>
               <a:t>Hard Perimeter Isolation</a:t>
             </a:r>
-            <a:endParaRPr lang="en-US" sz="500" dirty="0"/>
+            <a:endParaRPr lang="en-US" sz="435" dirty="0"/>
           </a:p>
         </p:txBody>
       </p:sp>
@@ -5570,8 +5570,8 @@
         </p:blipFill>
         <p:spPr>
           <a:xfrm>
-            <a:off x="6281014" y="4550969"/>
-            <a:ext cx="172822" cy="172822"/>
+            <a:off x="6267298" y="4572000"/>
+            <a:ext cx="130759" cy="130759"/>
           </a:xfrm>
           <a:prstGeom prst="rect">
             <a:avLst/>
@@ -5586,8 +5586,8 @@
         </p:nvSpPr>
         <p:spPr>
           <a:xfrm>
-            <a:off x="6490411" y="4511650"/>
-            <a:ext cx="444398" cy="251460"/>
+            <a:off x="6420917" y="4507992"/>
+            <a:ext cx="536753" cy="258775"/>
           </a:xfrm>
           <a:prstGeom prst="rect">
             <a:avLst/>
@@ -5603,12 +5603,12 @@
           <a:p>
             <a:pPr algn="l" indent="0" marL="0">
               <a:lnSpc>
-                <a:spcPct val="86000"/>
-              </a:lnSpc>
-              <a:buNone/>
-            </a:pPr>
-            <a:r>
-              <a:rPr lang="en-US" sz="500" b="1" dirty="0">
+                <a:spcPct val="88000"/>
+              </a:lnSpc>
+              <a:buNone/>
+            </a:pPr>
+            <a:r>
+              <a:rPr lang="en-US" sz="435" b="1" dirty="0">
                 <a:solidFill>
                   <a:srgbClr val="202124"/>
                 </a:solidFill>
@@ -5618,17 +5618,17 @@
               </a:rPr>
               <a:t>Gemma 3 &amp; Claude 3.7</a:t>
             </a:r>
-            <a:endParaRPr lang="en-US" sz="500" dirty="0"/>
+            <a:endParaRPr lang="en-US" sz="435" dirty="0"/>
           </a:p>
           <a:p>
             <a:pPr algn="l" indent="0" marL="0">
               <a:lnSpc>
-                <a:spcPct val="86000"/>
-              </a:lnSpc>
-              <a:buNone/>
-            </a:pPr>
-            <a:r>
-              <a:rPr lang="en-US" sz="430" dirty="0">
+                <a:spcPct val="88000"/>
+              </a:lnSpc>
+              <a:buNone/>
+            </a:pPr>
+            <a:r>
+              <a:rPr lang="en-US" sz="375" dirty="0">
                 <a:solidFill>
                   <a:srgbClr val="3C4043"/>
                 </a:solidFill>
@@ -5638,7 +5638,7 @@
               </a:rPr>
               <a:t>Air-Gapped GKE &amp; Dedicated PT</a:t>
             </a:r>
-            <a:endParaRPr lang="en-US" sz="500" dirty="0"/>
+            <a:endParaRPr lang="en-US" sz="435" dirty="0"/>
           </a:p>
         </p:txBody>
       </p:sp>
@@ -5685,8 +5685,8 @@
         </p:blipFill>
         <p:spPr>
           <a:xfrm>
-            <a:off x="4213555" y="2382926"/>
-            <a:ext cx="158191" cy="158191"/>
+            <a:off x="4199839" y="2399386"/>
+            <a:ext cx="123444" cy="123444"/>
           </a:xfrm>
           <a:prstGeom prst="rect">
             <a:avLst/>
@@ -5701,8 +5701,8 @@
         </p:nvSpPr>
         <p:spPr>
           <a:xfrm>
-            <a:off x="4408322" y="2347265"/>
-            <a:ext cx="496519" cy="228600"/>
+            <a:off x="4346143" y="2343607"/>
+            <a:ext cx="581558" cy="235915"/>
           </a:xfrm>
           <a:prstGeom prst="rect">
             <a:avLst/>
@@ -5718,12 +5718,12 @@
           <a:p>
             <a:pPr algn="l" indent="0" marL="0">
               <a:lnSpc>
-                <a:spcPct val="86000"/>
-              </a:lnSpc>
-              <a:buNone/>
-            </a:pPr>
-            <a:r>
-              <a:rPr lang="en-US" sz="500" b="1" dirty="0">
+                <a:spcPct val="88000"/>
+              </a:lnSpc>
+              <a:buNone/>
+            </a:pPr>
+            <a:r>
+              <a:rPr lang="en-US" sz="435" b="1" dirty="0">
                 <a:solidFill>
                   <a:srgbClr val="202124"/>
                 </a:solidFill>
@@ -5731,19 +5731,19 @@
                 <a:ea typeface="Arial" pitchFamily="34" charset="-122"/>
                 <a:cs typeface="Arial" pitchFamily="34" charset="-120"/>
               </a:rPr>
-              <a:t>Hop 1: Edge PEP</a:t>
-            </a:r>
-            <a:endParaRPr lang="en-US" sz="500" dirty="0"/>
+              <a:t>Hop 1: Cloud Armor</a:t>
+            </a:r>
+            <a:endParaRPr lang="en-US" sz="435" dirty="0"/>
           </a:p>
           <a:p>
             <a:pPr algn="l" indent="0" marL="0">
               <a:lnSpc>
-                <a:spcPct val="86000"/>
-              </a:lnSpc>
-              <a:buNone/>
-            </a:pPr>
-            <a:r>
-              <a:rPr lang="en-US" sz="430" dirty="0">
+                <a:spcPct val="88000"/>
+              </a:lnSpc>
+              <a:buNone/>
+            </a:pPr>
+            <a:r>
+              <a:rPr lang="en-US" sz="375" dirty="0">
                 <a:solidFill>
                   <a:srgbClr val="3C4043"/>
                 </a:solidFill>
@@ -5751,9 +5751,9 @@
                 <a:ea typeface="Arial" pitchFamily="34" charset="-122"/>
                 <a:cs typeface="Arial" pitchFamily="34" charset="-120"/>
               </a:rPr>
-              <a:t>Header Strip + OBO + DPoP</a:t>
-            </a:r>
-            <a:endParaRPr lang="en-US" sz="500" dirty="0"/>
+              <a:t>WAF Header Strip + OBO + DPoP</a:t>
+            </a:r>
+            <a:endParaRPr lang="en-US" sz="435" dirty="0"/>
           </a:p>
         </p:txBody>
       </p:sp>
@@ -5800,8 +5800,8 @@
         </p:blipFill>
         <p:spPr>
           <a:xfrm>
-            <a:off x="4213555" y="2697480"/>
-            <a:ext cx="158191" cy="158191"/>
+            <a:off x="4199839" y="2713939"/>
+            <a:ext cx="123444" cy="123444"/>
           </a:xfrm>
           <a:prstGeom prst="rect">
             <a:avLst/>
@@ -5816,8 +5816,8 @@
         </p:nvSpPr>
         <p:spPr>
           <a:xfrm>
-            <a:off x="4408322" y="2661818"/>
-            <a:ext cx="496519" cy="228600"/>
+            <a:off x="4346143" y="2658161"/>
+            <a:ext cx="581558" cy="235915"/>
           </a:xfrm>
           <a:prstGeom prst="rect">
             <a:avLst/>
@@ -5833,12 +5833,12 @@
           <a:p>
             <a:pPr algn="l" indent="0" marL="0">
               <a:lnSpc>
-                <a:spcPct val="86000"/>
-              </a:lnSpc>
-              <a:buNone/>
-            </a:pPr>
-            <a:r>
-              <a:rPr lang="en-US" sz="500" b="1" dirty="0">
+                <a:spcPct val="88000"/>
+              </a:lnSpc>
+              <a:buNone/>
+            </a:pPr>
+            <a:r>
+              <a:rPr lang="en-US" sz="435" b="1" dirty="0">
                 <a:solidFill>
                   <a:srgbClr val="202124"/>
                 </a:solidFill>
@@ -5848,17 +5848,17 @@
               </a:rPr>
               <a:t>Hop 4: Model Armor</a:t>
             </a:r>
-            <a:endParaRPr lang="en-US" sz="500" dirty="0"/>
+            <a:endParaRPr lang="en-US" sz="435" dirty="0"/>
           </a:p>
           <a:p>
             <a:pPr algn="l" indent="0" marL="0">
               <a:lnSpc>
-                <a:spcPct val="86000"/>
-              </a:lnSpc>
-              <a:buNone/>
-            </a:pPr>
-            <a:r>
-              <a:rPr lang="en-US" sz="430" dirty="0">
+                <a:spcPct val="88000"/>
+              </a:lnSpc>
+              <a:buNone/>
+            </a:pPr>
+            <a:r>
+              <a:rPr lang="en-US" sz="375" dirty="0">
                 <a:solidFill>
                   <a:srgbClr val="3C4043"/>
                 </a:solidFill>
@@ -5868,7 +5868,7 @@
               </a:rPr>
               <a:t>Injection 400 + Policy 422 + SDP</a:t>
             </a:r>
-            <a:endParaRPr lang="en-US" sz="500" dirty="0"/>
+            <a:endParaRPr lang="en-US" sz="435" dirty="0"/>
           </a:p>
         </p:txBody>
       </p:sp>
@@ -5915,8 +5915,8 @@
         </p:blipFill>
         <p:spPr>
           <a:xfrm>
-            <a:off x="4243730" y="3065069"/>
-            <a:ext cx="158191" cy="158191"/>
+            <a:off x="4230014" y="3081528"/>
+            <a:ext cx="123444" cy="123444"/>
           </a:xfrm>
           <a:prstGeom prst="rect">
             <a:avLst/>
@@ -5931,8 +5931,8 @@
         </p:nvSpPr>
         <p:spPr>
           <a:xfrm>
-            <a:off x="4438498" y="3029407"/>
-            <a:ext cx="466344" cy="228600"/>
+            <a:off x="4376318" y="3025750"/>
+            <a:ext cx="551383" cy="235915"/>
           </a:xfrm>
           <a:prstGeom prst="rect">
             <a:avLst/>
@@ -5948,12 +5948,12 @@
           <a:p>
             <a:pPr algn="l" indent="0" marL="0">
               <a:lnSpc>
-                <a:spcPct val="86000"/>
-              </a:lnSpc>
-              <a:buNone/>
-            </a:pPr>
-            <a:r>
-              <a:rPr lang="en-US" sz="500" b="1" dirty="0">
+                <a:spcPct val="88000"/>
+              </a:lnSpc>
+              <a:buNone/>
+            </a:pPr>
+            <a:r>
+              <a:rPr lang="en-US" sz="435" b="1" dirty="0">
                 <a:solidFill>
                   <a:srgbClr val="202124"/>
                 </a:solidFill>
@@ -5963,17 +5963,17 @@
               </a:rPr>
               <a:t>Hop 2: Catalog PDP</a:t>
             </a:r>
-            <a:endParaRPr lang="en-US" sz="500" dirty="0"/>
+            <a:endParaRPr lang="en-US" sz="435" dirty="0"/>
           </a:p>
           <a:p>
             <a:pPr algn="l" indent="0" marL="0">
               <a:lnSpc>
-                <a:spcPct val="86000"/>
-              </a:lnSpc>
-              <a:buNone/>
-            </a:pPr>
-            <a:r>
-              <a:rPr lang="en-US" sz="430" dirty="0">
+                <a:spcPct val="88000"/>
+              </a:lnSpc>
+              <a:buNone/>
+            </a:pPr>
+            <a:r>
+              <a:rPr lang="en-US" sz="375" dirty="0">
                 <a:solidFill>
                   <a:srgbClr val="3C4043"/>
                 </a:solidFill>
@@ -5983,981 +5983,13 @@
               </a:rPr>
               <a:t>Discovery Catalog + Tool Prune</a:t>
             </a:r>
-            <a:endParaRPr lang="en-US" sz="500" dirty="0"/>
-          </a:p>
-        </p:txBody>
-      </p:sp>
-      <p:sp>
-        <p:nvSpPr>
-          <p:cNvPr id="129" name="Text 107"/>
-          <p:cNvSpPr/>
-          <p:nvPr/>
-        </p:nvSpPr>
-        <p:spPr>
-          <a:xfrm>
-            <a:off x="7541057" y="3373222"/>
-            <a:ext cx="546811" cy="161849"/>
-          </a:xfrm>
-          <a:prstGeom prst="rect">
-            <a:avLst/>
-          </a:prstGeom>
-          <a:noFill/>
-          <a:ln/>
-        </p:spPr>
-        <p:txBody>
-          <a:bodyPr wrap="square" lIns="0" tIns="0" rIns="0" bIns="0" rtlCol="0" anchor="ctr">
-            <a:normAutofit/>
-          </a:bodyPr>
-          <a:lstStyle/>
-          <a:p>
-            <a:pPr algn="l" indent="0" marL="0">
-              <a:lnSpc>
-                <a:spcPct val="88000"/>
-              </a:lnSpc>
-              <a:buNone/>
-            </a:pPr>
-            <a:r>
-              <a:rPr lang="en-US" sz="500" b="1" dirty="0">
-                <a:solidFill>
-                  <a:srgbClr val="202124"/>
-                </a:solidFill>
-                <a:latin typeface="Arial" pitchFamily="34" charset="0"/>
-                <a:ea typeface="Arial" pitchFamily="34" charset="-122"/>
-                <a:cs typeface="Arial" pitchFamily="34" charset="-120"/>
-              </a:rPr>
-              <a:t>Real-time COGS &amp;</a:t>
-            </a:r>
-            <a:endParaRPr lang="en-US" sz="500" dirty="0"/>
-          </a:p>
-          <a:p>
-            <a:pPr algn="l" indent="0" marL="0">
-              <a:lnSpc>
-                <a:spcPct val="88000"/>
-              </a:lnSpc>
-              <a:buNone/>
-            </a:pPr>
-            <a:r>
-              <a:rPr lang="en-US" sz="440" dirty="0">
-                <a:solidFill>
-                  <a:srgbClr val="202124"/>
-                </a:solidFill>
-                <a:latin typeface="Arial" pitchFamily="34" charset="0"/>
-                <a:ea typeface="Arial" pitchFamily="34" charset="-122"/>
-                <a:cs typeface="Arial" pitchFamily="34" charset="-120"/>
-              </a:rPr>
-              <a:t>security telemetry</a:t>
-            </a:r>
-            <a:endParaRPr lang="en-US" sz="500" dirty="0"/>
-          </a:p>
-        </p:txBody>
-      </p:sp>
-      <p:sp>
-        <p:nvSpPr>
-          <p:cNvPr id="130" name="Text 108"/>
-          <p:cNvSpPr/>
-          <p:nvPr/>
-        </p:nvSpPr>
-        <p:spPr>
-          <a:xfrm>
-            <a:off x="5237683" y="4654296"/>
-            <a:ext cx="591617" cy="124358"/>
-          </a:xfrm>
-          <a:prstGeom prst="rect">
-            <a:avLst/>
-          </a:prstGeom>
-          <a:noFill/>
-          <a:ln/>
-        </p:spPr>
-        <p:txBody>
-          <a:bodyPr wrap="square" lIns="0" tIns="0" rIns="0" bIns="0" rtlCol="0" anchor="ctr">
-            <a:normAutofit/>
-          </a:bodyPr>
-          <a:lstStyle/>
-          <a:p>
-            <a:pPr algn="ctr" indent="0" marL="0">
-              <a:lnSpc>
-                <a:spcPct val="88000"/>
-              </a:lnSpc>
-              <a:buNone/>
-            </a:pPr>
-            <a:r>
-              <a:rPr lang="en-US" sz="500" b="1" dirty="0">
-                <a:solidFill>
-                  <a:srgbClr val="202124"/>
-                </a:solidFill>
-                <a:latin typeface="Arial" pitchFamily="34" charset="0"/>
-                <a:ea typeface="Arial" pitchFamily="34" charset="-122"/>
-                <a:cs typeface="Arial" pitchFamily="34" charset="-120"/>
-              </a:rPr>
-              <a:t>Zero Cache</a:t>
-            </a:r>
-            <a:endParaRPr lang="en-US" sz="500" dirty="0"/>
-          </a:p>
-          <a:p>
-            <a:pPr algn="ctr" indent="0" marL="0">
-              <a:lnSpc>
-                <a:spcPct val="88000"/>
-              </a:lnSpc>
-              <a:buNone/>
-            </a:pPr>
-            <a:r>
-              <a:rPr lang="en-US" sz="440" dirty="0">
-                <a:solidFill>
-                  <a:srgbClr val="202124"/>
-                </a:solidFill>
-                <a:latin typeface="Arial" pitchFamily="34" charset="0"/>
-                <a:ea typeface="Arial" pitchFamily="34" charset="-122"/>
-                <a:cs typeface="Arial" pitchFamily="34" charset="-120"/>
-              </a:rPr>
-              <a:t>Bleed</a:t>
-            </a:r>
-            <a:endParaRPr lang="en-US" sz="500" dirty="0"/>
-          </a:p>
-        </p:txBody>
-      </p:sp>
-      <p:sp>
-        <p:nvSpPr>
-          <p:cNvPr id="131" name="Text 109"/>
-          <p:cNvSpPr/>
-          <p:nvPr/>
-        </p:nvSpPr>
-        <p:spPr>
-          <a:xfrm>
-            <a:off x="5237683" y="5201107"/>
-            <a:ext cx="591617" cy="124358"/>
-          </a:xfrm>
-          <a:prstGeom prst="rect">
-            <a:avLst/>
-          </a:prstGeom>
-          <a:noFill/>
-          <a:ln/>
-        </p:spPr>
-        <p:txBody>
-          <a:bodyPr wrap="square" lIns="0" tIns="0" rIns="0" bIns="0" rtlCol="0" anchor="ctr">
-            <a:normAutofit/>
-          </a:bodyPr>
-          <a:lstStyle/>
-          <a:p>
-            <a:pPr algn="ctr" indent="0" marL="0">
-              <a:lnSpc>
-                <a:spcPct val="88000"/>
-              </a:lnSpc>
-              <a:buNone/>
-            </a:pPr>
-            <a:r>
-              <a:rPr lang="en-US" sz="500" b="1" dirty="0">
-                <a:solidFill>
-                  <a:srgbClr val="202124"/>
-                </a:solidFill>
-                <a:latin typeface="Arial" pitchFamily="34" charset="0"/>
-                <a:ea typeface="Arial" pitchFamily="34" charset="-122"/>
-                <a:cs typeface="Arial" pitchFamily="34" charset="-120"/>
-              </a:rPr>
-              <a:t>Storage-Engine</a:t>
-            </a:r>
-            <a:endParaRPr lang="en-US" sz="500" dirty="0"/>
-          </a:p>
-          <a:p>
-            <a:pPr algn="ctr" indent="0" marL="0">
-              <a:lnSpc>
-                <a:spcPct val="88000"/>
-              </a:lnSpc>
-              <a:buNone/>
-            </a:pPr>
-            <a:r>
-              <a:rPr lang="en-US" sz="440" dirty="0">
-                <a:solidFill>
-                  <a:srgbClr val="202124"/>
-                </a:solidFill>
-                <a:latin typeface="Arial" pitchFamily="34" charset="0"/>
-                <a:ea typeface="Arial" pitchFamily="34" charset="-122"/>
-                <a:cs typeface="Arial" pitchFamily="34" charset="-120"/>
-              </a:rPr>
-              <a:t>RLS Policy</a:t>
-            </a:r>
-            <a:endParaRPr lang="en-US" sz="500" dirty="0"/>
-          </a:p>
-        </p:txBody>
-      </p:sp>
-      <p:sp>
-        <p:nvSpPr>
-          <p:cNvPr id="132" name="Text 110"/>
-          <p:cNvSpPr/>
-          <p:nvPr/>
-        </p:nvSpPr>
-        <p:spPr>
-          <a:xfrm>
-            <a:off x="7274966" y="4654296"/>
-            <a:ext cx="591617" cy="124358"/>
-          </a:xfrm>
-          <a:prstGeom prst="rect">
-            <a:avLst/>
-          </a:prstGeom>
-          <a:noFill/>
-          <a:ln/>
-        </p:spPr>
-        <p:txBody>
-          <a:bodyPr wrap="square" lIns="0" tIns="0" rIns="0" bIns="0" rtlCol="0" anchor="ctr">
-            <a:normAutofit/>
-          </a:bodyPr>
-          <a:lstStyle/>
-          <a:p>
-            <a:pPr algn="ctr" indent="0" marL="0">
-              <a:lnSpc>
-                <a:spcPct val="88000"/>
-              </a:lnSpc>
-              <a:buNone/>
-            </a:pPr>
-            <a:r>
-              <a:rPr lang="en-US" sz="500" b="1" dirty="0">
-                <a:solidFill>
-                  <a:srgbClr val="202124"/>
-                </a:solidFill>
-                <a:latin typeface="Arial" pitchFamily="34" charset="0"/>
-                <a:ea typeface="Arial" pitchFamily="34" charset="-122"/>
-                <a:cs typeface="Arial" pitchFamily="34" charset="-120"/>
-              </a:rPr>
-              <a:t>Private PSC</a:t>
-            </a:r>
-            <a:endParaRPr lang="en-US" sz="500" dirty="0"/>
-          </a:p>
-          <a:p>
-            <a:pPr algn="ctr" indent="0" marL="0">
-              <a:lnSpc>
-                <a:spcPct val="88000"/>
-              </a:lnSpc>
-              <a:buNone/>
-            </a:pPr>
-            <a:r>
-              <a:rPr lang="en-US" sz="440" dirty="0">
-                <a:solidFill>
-                  <a:srgbClr val="202124"/>
-                </a:solidFill>
-                <a:latin typeface="Arial" pitchFamily="34" charset="0"/>
-                <a:ea typeface="Arial" pitchFamily="34" charset="-122"/>
-                <a:cs typeface="Arial" pitchFamily="34" charset="-120"/>
-              </a:rPr>
-              <a:t>NAT Bridge</a:t>
-            </a:r>
-            <a:endParaRPr lang="en-US" sz="500" dirty="0"/>
-          </a:p>
-        </p:txBody>
-      </p:sp>
-      <p:sp>
-        <p:nvSpPr>
-          <p:cNvPr id="133" name="Text 111"/>
-          <p:cNvSpPr/>
-          <p:nvPr/>
-        </p:nvSpPr>
-        <p:spPr>
-          <a:xfrm>
-            <a:off x="7274966" y="5201107"/>
-            <a:ext cx="591617" cy="124358"/>
-          </a:xfrm>
-          <a:prstGeom prst="rect">
-            <a:avLst/>
-          </a:prstGeom>
-          <a:noFill/>
-          <a:ln/>
-        </p:spPr>
-        <p:txBody>
-          <a:bodyPr wrap="square" lIns="0" tIns="0" rIns="0" bIns="0" rtlCol="0" anchor="ctr">
-            <a:normAutofit/>
-          </a:bodyPr>
-          <a:lstStyle/>
-          <a:p>
-            <a:pPr algn="ctr" indent="0" marL="0">
-              <a:lnSpc>
-                <a:spcPct val="88000"/>
-              </a:lnSpc>
-              <a:buNone/>
-            </a:pPr>
-            <a:r>
-              <a:rPr lang="en-US" sz="500" b="1" dirty="0">
-                <a:solidFill>
-                  <a:srgbClr val="202124"/>
-                </a:solidFill>
-                <a:latin typeface="Arial" pitchFamily="34" charset="0"/>
-                <a:ea typeface="Arial" pitchFamily="34" charset="-122"/>
-                <a:cs typeface="Arial" pitchFamily="34" charset="-120"/>
-              </a:rPr>
-              <a:t>Customer-Revocable</a:t>
-            </a:r>
-            <a:endParaRPr lang="en-US" sz="500" dirty="0"/>
-          </a:p>
-          <a:p>
-            <a:pPr algn="ctr" indent="0" marL="0">
-              <a:lnSpc>
-                <a:spcPct val="88000"/>
-              </a:lnSpc>
-              <a:buNone/>
-            </a:pPr>
-            <a:r>
-              <a:rPr lang="en-US" sz="440" dirty="0">
-                <a:solidFill>
-                  <a:srgbClr val="202124"/>
-                </a:solidFill>
-                <a:latin typeface="Arial" pitchFamily="34" charset="0"/>
-                <a:ea typeface="Arial" pitchFamily="34" charset="-122"/>
-                <a:cs typeface="Arial" pitchFamily="34" charset="-120"/>
-              </a:rPr>
-              <a:t>CMEK Keys</a:t>
-            </a:r>
-            <a:endParaRPr lang="en-US" sz="500" dirty="0"/>
-          </a:p>
-        </p:txBody>
-      </p:sp>
-      <p:sp>
-        <p:nvSpPr>
-          <p:cNvPr id="134" name="Text 112"/>
-          <p:cNvSpPr/>
-          <p:nvPr/>
-        </p:nvSpPr>
-        <p:spPr>
-          <a:xfrm>
-            <a:off x="4432097" y="5328209"/>
-            <a:ext cx="509321" cy="131674"/>
-          </a:xfrm>
-          <a:prstGeom prst="rect">
-            <a:avLst/>
-          </a:prstGeom>
-          <a:noFill/>
-          <a:ln/>
-        </p:spPr>
-        <p:txBody>
-          <a:bodyPr wrap="square" lIns="0" tIns="0" rIns="0" bIns="0" rtlCol="0" anchor="ctr">
-            <a:normAutofit/>
-          </a:bodyPr>
-          <a:lstStyle/>
-          <a:p>
-            <a:pPr algn="l" indent="0" marL="0">
-              <a:lnSpc>
-                <a:spcPct val="88000"/>
-              </a:lnSpc>
-              <a:buNone/>
-            </a:pPr>
-            <a:r>
-              <a:rPr lang="en-US" sz="500" b="1" dirty="0">
-                <a:solidFill>
-                  <a:srgbClr val="202124"/>
-                </a:solidFill>
-                <a:latin typeface="Arial" pitchFamily="34" charset="0"/>
-                <a:ea typeface="Arial" pitchFamily="34" charset="-122"/>
-                <a:cs typeface="Arial" pitchFamily="34" charset="-120"/>
-              </a:rPr>
-              <a:t>90% Cached</a:t>
-            </a:r>
-            <a:endParaRPr lang="en-US" sz="500" dirty="0"/>
-          </a:p>
-          <a:p>
-            <a:pPr algn="l" indent="0" marL="0">
-              <a:lnSpc>
-                <a:spcPct val="88000"/>
-              </a:lnSpc>
-              <a:buNone/>
-            </a:pPr>
-            <a:r>
-              <a:rPr lang="en-US" sz="440" dirty="0">
-                <a:solidFill>
-                  <a:srgbClr val="202124"/>
-                </a:solidFill>
-                <a:latin typeface="Arial" pitchFamily="34" charset="0"/>
-                <a:ea typeface="Arial" pitchFamily="34" charset="-122"/>
-                <a:cs typeface="Arial" pitchFamily="34" charset="-120"/>
-              </a:rPr>
-              <a:t>inference</a:t>
-            </a:r>
-            <a:endParaRPr lang="en-US" sz="500" dirty="0"/>
-          </a:p>
-        </p:txBody>
-      </p:sp>
-      <p:sp>
-        <p:nvSpPr>
-          <p:cNvPr id="135" name="Text 113"/>
-          <p:cNvSpPr/>
-          <p:nvPr/>
-        </p:nvSpPr>
-        <p:spPr>
-          <a:xfrm>
-            <a:off x="6282842" y="3396082"/>
-            <a:ext cx="554126" cy="116129"/>
-          </a:xfrm>
-          <a:prstGeom prst="rect">
-            <a:avLst/>
-          </a:prstGeom>
-          <a:noFill/>
-          <a:ln/>
-        </p:spPr>
-        <p:txBody>
-          <a:bodyPr wrap="square" lIns="0" tIns="0" rIns="0" bIns="0" rtlCol="0" anchor="ctr">
-            <a:normAutofit/>
-          </a:bodyPr>
-          <a:lstStyle/>
-          <a:p>
-            <a:pPr algn="l" indent="0" marL="0">
-              <a:lnSpc>
-                <a:spcPct val="88000"/>
-              </a:lnSpc>
-              <a:buNone/>
-            </a:pPr>
-            <a:r>
-              <a:rPr lang="en-US" sz="500" b="1" dirty="0">
-                <a:solidFill>
-                  <a:srgbClr val="202124"/>
-                </a:solidFill>
-                <a:latin typeface="Arial" pitchFamily="34" charset="0"/>
-                <a:ea typeface="Arial" pitchFamily="34" charset="-122"/>
-                <a:cs typeface="Arial" pitchFamily="34" charset="-120"/>
-              </a:rPr>
-              <a:t>Verified zero-bleed</a:t>
-            </a:r>
-            <a:endParaRPr lang="en-US" sz="500" dirty="0"/>
-          </a:p>
-          <a:p>
-            <a:pPr algn="l" indent="0" marL="0">
-              <a:lnSpc>
-                <a:spcPct val="88000"/>
-              </a:lnSpc>
-              <a:buNone/>
-            </a:pPr>
-            <a:r>
-              <a:rPr lang="en-US" sz="440" dirty="0">
-                <a:solidFill>
-                  <a:srgbClr val="202124"/>
-                </a:solidFill>
-                <a:latin typeface="Arial" pitchFamily="34" charset="0"/>
-                <a:ea typeface="Arial" pitchFamily="34" charset="-122"/>
-                <a:cs typeface="Arial" pitchFamily="34" charset="-120"/>
-              </a:rPr>
-              <a:t>agent completion</a:t>
-            </a:r>
-            <a:endParaRPr lang="en-US" sz="500" dirty="0"/>
-          </a:p>
-        </p:txBody>
-      </p:sp>
-      <p:sp>
-        <p:nvSpPr>
-          <p:cNvPr id="136" name="Text 114"/>
-          <p:cNvSpPr/>
-          <p:nvPr/>
-        </p:nvSpPr>
-        <p:spPr>
-          <a:xfrm>
-            <a:off x="5488229" y="3396082"/>
-            <a:ext cx="494690" cy="116129"/>
-          </a:xfrm>
-          <a:prstGeom prst="rect">
-            <a:avLst/>
-          </a:prstGeom>
-          <a:noFill/>
-          <a:ln/>
-        </p:spPr>
-        <p:txBody>
-          <a:bodyPr wrap="square" lIns="0" tIns="0" rIns="0" bIns="0" rtlCol="0" anchor="ctr">
-            <a:normAutofit/>
-          </a:bodyPr>
-          <a:lstStyle/>
-          <a:p>
-            <a:pPr algn="l" indent="0" marL="0">
-              <a:lnSpc>
-                <a:spcPct val="88000"/>
-              </a:lnSpc>
-              <a:buNone/>
-            </a:pPr>
-            <a:r>
-              <a:rPr lang="en-US" sz="500" b="1" dirty="0">
-                <a:solidFill>
-                  <a:srgbClr val="202124"/>
-                </a:solidFill>
-                <a:latin typeface="Arial" pitchFamily="34" charset="0"/>
-                <a:ea typeface="Arial" pitchFamily="34" charset="-122"/>
-                <a:cs typeface="Arial" pitchFamily="34" charset="-120"/>
-              </a:rPr>
-              <a:t>Dispatch to optimal</a:t>
-            </a:r>
-            <a:endParaRPr lang="en-US" sz="500" dirty="0"/>
-          </a:p>
-          <a:p>
-            <a:pPr algn="l" indent="0" marL="0">
-              <a:lnSpc>
-                <a:spcPct val="88000"/>
-              </a:lnSpc>
-              <a:buNone/>
-            </a:pPr>
-            <a:r>
-              <a:rPr lang="en-US" sz="440" dirty="0">
-                <a:solidFill>
-                  <a:srgbClr val="202124"/>
-                </a:solidFill>
-                <a:latin typeface="Arial" pitchFamily="34" charset="0"/>
-                <a:ea typeface="Arial" pitchFamily="34" charset="-122"/>
-                <a:cs typeface="Arial" pitchFamily="34" charset="-120"/>
-              </a:rPr>
-              <a:t>cost/security tier</a:t>
-            </a:r>
-            <a:endParaRPr lang="en-US" sz="500" dirty="0"/>
-          </a:p>
-        </p:txBody>
-      </p:sp>
-      <p:sp>
-        <p:nvSpPr>
-          <p:cNvPr id="137" name="Text 115"/>
-          <p:cNvSpPr/>
-          <p:nvPr/>
-        </p:nvSpPr>
-        <p:spPr>
-          <a:xfrm>
-            <a:off x="5039258" y="2983687"/>
-            <a:ext cx="502006" cy="109728"/>
-          </a:xfrm>
-          <a:prstGeom prst="rect">
-            <a:avLst/>
-          </a:prstGeom>
-          <a:noFill/>
-          <a:ln/>
-        </p:spPr>
-        <p:txBody>
-          <a:bodyPr wrap="square" lIns="0" tIns="0" rIns="0" bIns="0" rtlCol="0" anchor="ctr">
-            <a:normAutofit/>
-          </a:bodyPr>
-          <a:lstStyle/>
-          <a:p>
-            <a:pPr algn="ctr" indent="0" marL="0">
-              <a:lnSpc>
-                <a:spcPct val="88000"/>
-              </a:lnSpc>
-              <a:buNone/>
-            </a:pPr>
-            <a:r>
-              <a:rPr lang="en-US" sz="500" b="1" dirty="0">
-                <a:solidFill>
-                  <a:srgbClr val="202124"/>
-                </a:solidFill>
-                <a:latin typeface="Arial" pitchFamily="34" charset="0"/>
-                <a:ea typeface="Arial" pitchFamily="34" charset="-122"/>
-                <a:cs typeface="Arial" pitchFamily="34" charset="-120"/>
-              </a:rPr>
-              <a:t>Prune Catalog</a:t>
-            </a:r>
-            <a:endParaRPr lang="en-US" sz="500" dirty="0"/>
-          </a:p>
-          <a:p>
-            <a:pPr algn="ctr" indent="0" marL="0">
-              <a:lnSpc>
-                <a:spcPct val="88000"/>
-              </a:lnSpc>
-              <a:buNone/>
-            </a:pPr>
-            <a:r>
-              <a:rPr lang="en-US" sz="440" dirty="0">
-                <a:solidFill>
-                  <a:srgbClr val="202124"/>
-                </a:solidFill>
-                <a:latin typeface="Arial" pitchFamily="34" charset="0"/>
-                <a:ea typeface="Arial" pitchFamily="34" charset="-122"/>
-                <a:cs typeface="Arial" pitchFamily="34" charset="-120"/>
-              </a:rPr>
-              <a:t>&amp; MCP tools</a:t>
-            </a:r>
-            <a:endParaRPr lang="en-US" sz="500" dirty="0"/>
-          </a:p>
-        </p:txBody>
-      </p:sp>
-      <p:sp>
-        <p:nvSpPr>
-          <p:cNvPr id="138" name="Text 116"/>
-          <p:cNvSpPr/>
-          <p:nvPr/>
-        </p:nvSpPr>
-        <p:spPr>
-          <a:xfrm>
-            <a:off x="4432097" y="4459529"/>
-            <a:ext cx="509321" cy="109728"/>
-          </a:xfrm>
-          <a:prstGeom prst="rect">
-            <a:avLst/>
-          </a:prstGeom>
-          <a:noFill/>
-          <a:ln/>
-        </p:spPr>
-        <p:txBody>
-          <a:bodyPr wrap="square" lIns="0" tIns="0" rIns="0" bIns="0" rtlCol="0" anchor="ctr">
-            <a:normAutofit/>
-          </a:bodyPr>
-          <a:lstStyle/>
-          <a:p>
-            <a:pPr algn="l" indent="0" marL="0">
-              <a:lnSpc>
-                <a:spcPct val="88000"/>
-              </a:lnSpc>
-              <a:buNone/>
-            </a:pPr>
-            <a:r>
-              <a:rPr lang="en-US" sz="500" b="1" dirty="0">
-                <a:solidFill>
-                  <a:srgbClr val="202124"/>
-                </a:solidFill>
-                <a:latin typeface="Arial" pitchFamily="34" charset="0"/>
-                <a:ea typeface="Arial" pitchFamily="34" charset="-122"/>
-                <a:cs typeface="Arial" pitchFamily="34" charset="-120"/>
-              </a:rPr>
-              <a:t>Check quota</a:t>
-            </a:r>
-            <a:endParaRPr lang="en-US" sz="500" dirty="0"/>
-          </a:p>
-        </p:txBody>
-      </p:sp>
-      <p:sp>
-        <p:nvSpPr>
-          <p:cNvPr id="139" name="Text 117"/>
-          <p:cNvSpPr/>
-          <p:nvPr/>
-        </p:nvSpPr>
-        <p:spPr>
-          <a:xfrm>
-            <a:off x="4432097" y="4639666"/>
-            <a:ext cx="509321" cy="109728"/>
-          </a:xfrm>
-          <a:prstGeom prst="rect">
-            <a:avLst/>
-          </a:prstGeom>
-          <a:noFill/>
-          <a:ln/>
-        </p:spPr>
-        <p:txBody>
-          <a:bodyPr wrap="square" lIns="0" tIns="0" rIns="0" bIns="0" rtlCol="0" anchor="ctr">
-            <a:normAutofit/>
-          </a:bodyPr>
-          <a:lstStyle/>
-          <a:p>
-            <a:pPr algn="l" indent="0" marL="0">
-              <a:lnSpc>
-                <a:spcPct val="88000"/>
-              </a:lnSpc>
-              <a:buNone/>
-            </a:pPr>
-            <a:r>
-              <a:rPr lang="en-US" sz="500" b="1" dirty="0">
-                <a:solidFill>
-                  <a:srgbClr val="202124"/>
-                </a:solidFill>
-                <a:latin typeface="Arial" pitchFamily="34" charset="0"/>
-                <a:ea typeface="Arial" pitchFamily="34" charset="-122"/>
-                <a:cs typeface="Arial" pitchFamily="34" charset="-120"/>
-              </a:rPr>
-              <a:t>Log COGS</a:t>
-            </a:r>
-            <a:endParaRPr lang="en-US" sz="500" dirty="0"/>
-          </a:p>
-        </p:txBody>
-      </p:sp>
-      <p:sp>
-        <p:nvSpPr>
-          <p:cNvPr id="140" name="Text 118"/>
-          <p:cNvSpPr/>
-          <p:nvPr/>
-        </p:nvSpPr>
-        <p:spPr>
-          <a:xfrm>
-            <a:off x="5016398" y="2302459"/>
-            <a:ext cx="344729" cy="109728"/>
-          </a:xfrm>
-          <a:prstGeom prst="rect">
-            <a:avLst/>
-          </a:prstGeom>
-          <a:noFill/>
-          <a:ln/>
-        </p:spPr>
-        <p:txBody>
-          <a:bodyPr wrap="square" lIns="0" tIns="0" rIns="0" bIns="0" rtlCol="0" anchor="ctr">
-            <a:normAutofit/>
-          </a:bodyPr>
-          <a:lstStyle/>
-          <a:p>
-            <a:pPr algn="ctr" indent="0" marL="0">
-              <a:lnSpc>
-                <a:spcPct val="88000"/>
-              </a:lnSpc>
-              <a:buNone/>
-            </a:pPr>
-            <a:r>
-              <a:rPr lang="en-US" sz="500" b="1" dirty="0">
-                <a:solidFill>
-                  <a:srgbClr val="202124"/>
-                </a:solidFill>
-                <a:latin typeface="Arial" pitchFamily="34" charset="0"/>
-                <a:ea typeface="Arial" pitchFamily="34" charset="-122"/>
-                <a:cs typeface="Arial" pitchFamily="34" charset="-120"/>
-              </a:rPr>
-              <a:t>Verify OBO</a:t>
-            </a:r>
-            <a:endParaRPr lang="en-US" sz="500" dirty="0"/>
-          </a:p>
-          <a:p>
-            <a:pPr algn="ctr" indent="0" marL="0">
-              <a:lnSpc>
-                <a:spcPct val="88000"/>
-              </a:lnSpc>
-              <a:buNone/>
-            </a:pPr>
-            <a:r>
-              <a:rPr lang="en-US" sz="440" dirty="0">
-                <a:solidFill>
-                  <a:srgbClr val="202124"/>
-                </a:solidFill>
-                <a:latin typeface="Arial" pitchFamily="34" charset="0"/>
-                <a:ea typeface="Arial" pitchFamily="34" charset="-122"/>
-                <a:cs typeface="Arial" pitchFamily="34" charset="-120"/>
-              </a:rPr>
-              <a:t>&amp; DPoP</a:t>
-            </a:r>
-            <a:endParaRPr lang="en-US" sz="500" dirty="0"/>
-          </a:p>
-        </p:txBody>
-      </p:sp>
-      <p:sp>
-        <p:nvSpPr>
-          <p:cNvPr id="141" name="Text 119"/>
-          <p:cNvSpPr/>
-          <p:nvPr/>
-        </p:nvSpPr>
-        <p:spPr>
-          <a:xfrm>
-            <a:off x="5016398" y="2819095"/>
-            <a:ext cx="344729" cy="109728"/>
-          </a:xfrm>
-          <a:prstGeom prst="rect">
-            <a:avLst/>
-          </a:prstGeom>
-          <a:noFill/>
-          <a:ln/>
-        </p:spPr>
-        <p:txBody>
-          <a:bodyPr wrap="square" lIns="0" tIns="0" rIns="0" bIns="0" rtlCol="0" anchor="ctr">
-            <a:normAutofit/>
-          </a:bodyPr>
-          <a:lstStyle/>
-          <a:p>
-            <a:pPr algn="ctr" indent="0" marL="0">
-              <a:lnSpc>
-                <a:spcPct val="88000"/>
-              </a:lnSpc>
-              <a:buNone/>
-            </a:pPr>
-            <a:r>
-              <a:rPr lang="en-US" sz="500" b="1" dirty="0">
-                <a:solidFill>
-                  <a:srgbClr val="202124"/>
-                </a:solidFill>
-                <a:latin typeface="Arial" pitchFamily="34" charset="0"/>
-                <a:ea typeface="Arial" pitchFamily="34" charset="-122"/>
-                <a:cs typeface="Arial" pitchFamily="34" charset="-120"/>
-              </a:rPr>
-              <a:t>Screen &amp;</a:t>
-            </a:r>
-            <a:endParaRPr lang="en-US" sz="500" dirty="0"/>
-          </a:p>
-          <a:p>
-            <a:pPr algn="ctr" indent="0" marL="0">
-              <a:lnSpc>
-                <a:spcPct val="88000"/>
-              </a:lnSpc>
-              <a:buNone/>
-            </a:pPr>
-            <a:r>
-              <a:rPr lang="en-US" sz="440" dirty="0">
-                <a:solidFill>
-                  <a:srgbClr val="202124"/>
-                </a:solidFill>
-                <a:latin typeface="Arial" pitchFamily="34" charset="0"/>
-                <a:ea typeface="Arial" pitchFamily="34" charset="-122"/>
-                <a:cs typeface="Arial" pitchFamily="34" charset="-120"/>
-              </a:rPr>
-              <a:t>redact PII</a:t>
-            </a:r>
-            <a:endParaRPr lang="en-US" sz="500" dirty="0"/>
-          </a:p>
-        </p:txBody>
-      </p:sp>
-      <p:sp>
-        <p:nvSpPr>
-          <p:cNvPr id="142" name="Text 120"/>
-          <p:cNvSpPr/>
-          <p:nvPr/>
-        </p:nvSpPr>
-        <p:spPr>
-          <a:xfrm>
-            <a:off x="6267298" y="1478585"/>
-            <a:ext cx="299923" cy="109728"/>
-          </a:xfrm>
-          <a:prstGeom prst="rect">
-            <a:avLst/>
-          </a:prstGeom>
-          <a:noFill/>
-          <a:ln/>
-        </p:spPr>
-        <p:txBody>
-          <a:bodyPr wrap="square" lIns="0" tIns="0" rIns="0" bIns="0" rtlCol="0" anchor="ctr">
-            <a:normAutofit/>
-          </a:bodyPr>
-          <a:lstStyle/>
-          <a:p>
-            <a:pPr algn="l" indent="0" marL="0">
-              <a:lnSpc>
-                <a:spcPct val="88000"/>
-              </a:lnSpc>
-              <a:buNone/>
-            </a:pPr>
-            <a:r>
-              <a:rPr lang="en-US" sz="500" b="1" dirty="0">
-                <a:solidFill>
-                  <a:srgbClr val="202124"/>
-                </a:solidFill>
-                <a:latin typeface="Arial" pitchFamily="34" charset="0"/>
-                <a:ea typeface="Arial" pitchFamily="34" charset="-122"/>
-                <a:cs typeface="Arial" pitchFamily="34" charset="-120"/>
-              </a:rPr>
-              <a:t>Response</a:t>
-            </a:r>
-            <a:endParaRPr lang="en-US" sz="500" dirty="0"/>
-          </a:p>
-        </p:txBody>
-      </p:sp>
-      <p:sp>
-        <p:nvSpPr>
-          <p:cNvPr id="143" name="Text 121"/>
-          <p:cNvSpPr/>
-          <p:nvPr/>
-        </p:nvSpPr>
-        <p:spPr>
-          <a:xfrm>
-            <a:off x="6267298" y="2838298"/>
-            <a:ext cx="299923" cy="109728"/>
-          </a:xfrm>
-          <a:prstGeom prst="rect">
-            <a:avLst/>
-          </a:prstGeom>
-          <a:noFill/>
-          <a:ln/>
-        </p:spPr>
-        <p:txBody>
-          <a:bodyPr wrap="square" lIns="0" tIns="0" rIns="0" bIns="0" rtlCol="0" anchor="ctr">
-            <a:normAutofit/>
-          </a:bodyPr>
-          <a:lstStyle/>
-          <a:p>
-            <a:pPr algn="l" indent="0" marL="0">
-              <a:lnSpc>
-                <a:spcPct val="88000"/>
-              </a:lnSpc>
-              <a:buNone/>
-            </a:pPr>
-            <a:r>
-              <a:rPr lang="en-US" sz="500" b="1" dirty="0">
-                <a:solidFill>
-                  <a:srgbClr val="202124"/>
-                </a:solidFill>
-                <a:latin typeface="Arial" pitchFamily="34" charset="0"/>
-                <a:ea typeface="Arial" pitchFamily="34" charset="-122"/>
-                <a:cs typeface="Arial" pitchFamily="34" charset="-120"/>
-              </a:rPr>
-              <a:t>Response</a:t>
-            </a:r>
-            <a:endParaRPr lang="en-US" sz="500" dirty="0"/>
-          </a:p>
-        </p:txBody>
-      </p:sp>
-      <p:sp>
-        <p:nvSpPr>
-          <p:cNvPr id="144" name="Text 122"/>
-          <p:cNvSpPr/>
-          <p:nvPr/>
-        </p:nvSpPr>
-        <p:spPr>
-          <a:xfrm>
-            <a:off x="5578754" y="1478585"/>
-            <a:ext cx="262433" cy="109728"/>
-          </a:xfrm>
-          <a:prstGeom prst="rect">
-            <a:avLst/>
-          </a:prstGeom>
-          <a:noFill/>
-          <a:ln/>
-        </p:spPr>
-        <p:txBody>
-          <a:bodyPr wrap="square" lIns="0" tIns="0" rIns="0" bIns="0" rtlCol="0" anchor="ctr">
-            <a:normAutofit/>
-          </a:bodyPr>
-          <a:lstStyle/>
-          <a:p>
-            <a:pPr algn="r" indent="0" marL="0">
-              <a:lnSpc>
-                <a:spcPct val="88000"/>
-              </a:lnSpc>
-              <a:buNone/>
-            </a:pPr>
-            <a:r>
-              <a:rPr lang="en-US" sz="500" b="1" dirty="0">
-                <a:solidFill>
-                  <a:srgbClr val="202124"/>
-                </a:solidFill>
-                <a:latin typeface="Arial" pitchFamily="34" charset="0"/>
-                <a:ea typeface="Arial" pitchFamily="34" charset="-122"/>
-                <a:cs typeface="Arial" pitchFamily="34" charset="-120"/>
-              </a:rPr>
-              <a:t>Request</a:t>
-            </a:r>
-            <a:endParaRPr lang="en-US" sz="500" dirty="0"/>
-          </a:p>
-        </p:txBody>
-      </p:sp>
-      <p:sp>
-        <p:nvSpPr>
-          <p:cNvPr id="145" name="Text 123"/>
-          <p:cNvSpPr/>
-          <p:nvPr/>
-        </p:nvSpPr>
-        <p:spPr>
-          <a:xfrm>
-            <a:off x="5578754" y="2838298"/>
-            <a:ext cx="262433" cy="109728"/>
-          </a:xfrm>
-          <a:prstGeom prst="rect">
-            <a:avLst/>
-          </a:prstGeom>
-          <a:noFill/>
-          <a:ln/>
-        </p:spPr>
-        <p:txBody>
-          <a:bodyPr wrap="square" lIns="0" tIns="0" rIns="0" bIns="0" rtlCol="0" anchor="ctr">
-            <a:normAutofit/>
-          </a:bodyPr>
-          <a:lstStyle/>
-          <a:p>
-            <a:pPr algn="r" indent="0" marL="0">
-              <a:lnSpc>
-                <a:spcPct val="88000"/>
-              </a:lnSpc>
-              <a:buNone/>
-            </a:pPr>
-            <a:r>
-              <a:rPr lang="en-US" sz="500" b="1" dirty="0">
-                <a:solidFill>
-                  <a:srgbClr val="202124"/>
-                </a:solidFill>
-                <a:latin typeface="Arial" pitchFamily="34" charset="0"/>
-                <a:ea typeface="Arial" pitchFamily="34" charset="-122"/>
-                <a:cs typeface="Arial" pitchFamily="34" charset="-120"/>
-              </a:rPr>
-              <a:t>Request</a:t>
-            </a:r>
-            <a:endParaRPr lang="en-US" sz="500" dirty="0"/>
-          </a:p>
-        </p:txBody>
-      </p:sp>
-      <p:sp>
-        <p:nvSpPr>
-          <p:cNvPr id="146" name="Shape 124"/>
+            <a:endParaRPr lang="en-US" sz="435" dirty="0"/>
+          </a:p>
+        </p:txBody>
+      </p:sp>
+      <p:sp>
+        <p:nvSpPr>
+          <p:cNvPr id="129" name="Shape 107"/>
           <p:cNvSpPr/>
           <p:nvPr/>
         </p:nvSpPr>
@@ -6982,7 +6014,7 @@
       </p:sp>
       <p:sp>
         <p:nvSpPr>
-          <p:cNvPr id="147" name="Text 125"/>
+          <p:cNvPr id="130" name="Text 108"/>
           <p:cNvSpPr/>
           <p:nvPr/>
         </p:nvSpPr>
@@ -7021,7 +6053,7 @@
       </p:sp>
       <p:sp>
         <p:nvSpPr>
-          <p:cNvPr id="148" name="Shape 126"/>
+          <p:cNvPr id="131" name="Shape 109"/>
           <p:cNvSpPr/>
           <p:nvPr/>
         </p:nvSpPr>
@@ -7046,7 +6078,7 @@
       </p:sp>
       <p:sp>
         <p:nvSpPr>
-          <p:cNvPr id="149" name="Text 127"/>
+          <p:cNvPr id="132" name="Text 110"/>
           <p:cNvSpPr/>
           <p:nvPr/>
         </p:nvSpPr>
@@ -7085,7 +6117,7 @@
       </p:sp>
       <p:sp>
         <p:nvSpPr>
-          <p:cNvPr id="150" name="Shape 128"/>
+          <p:cNvPr id="133" name="Shape 111"/>
           <p:cNvSpPr/>
           <p:nvPr/>
         </p:nvSpPr>
@@ -7110,7 +6142,7 @@
       </p:sp>
       <p:sp>
         <p:nvSpPr>
-          <p:cNvPr id="151" name="Text 129"/>
+          <p:cNvPr id="134" name="Text 112"/>
           <p:cNvSpPr/>
           <p:nvPr/>
         </p:nvSpPr>
@@ -7149,7 +6181,7 @@
       </p:sp>
       <p:sp>
         <p:nvSpPr>
-          <p:cNvPr id="152" name="Shape 130"/>
+          <p:cNvPr id="135" name="Shape 113"/>
           <p:cNvSpPr/>
           <p:nvPr/>
         </p:nvSpPr>
@@ -7174,7 +6206,7 @@
       </p:sp>
       <p:sp>
         <p:nvSpPr>
-          <p:cNvPr id="153" name="Text 131"/>
+          <p:cNvPr id="136" name="Text 114"/>
           <p:cNvSpPr/>
           <p:nvPr/>
         </p:nvSpPr>
@@ -7213,7 +6245,7 @@
       </p:sp>
       <p:sp>
         <p:nvSpPr>
-          <p:cNvPr id="154" name="Shape 132"/>
+          <p:cNvPr id="137" name="Shape 115"/>
           <p:cNvSpPr/>
           <p:nvPr/>
         </p:nvSpPr>
@@ -7238,7 +6270,7 @@
       </p:sp>
       <p:sp>
         <p:nvSpPr>
-          <p:cNvPr id="155" name="Text 133"/>
+          <p:cNvPr id="138" name="Text 116"/>
           <p:cNvSpPr/>
           <p:nvPr/>
         </p:nvSpPr>
@@ -7277,7 +6309,7 @@
       </p:sp>
       <p:sp>
         <p:nvSpPr>
-          <p:cNvPr id="156" name="Shape 134"/>
+          <p:cNvPr id="139" name="Shape 117"/>
           <p:cNvSpPr/>
           <p:nvPr/>
         </p:nvSpPr>
@@ -7302,7 +6334,7 @@
       </p:sp>
       <p:sp>
         <p:nvSpPr>
-          <p:cNvPr id="157" name="Text 135"/>
+          <p:cNvPr id="140" name="Text 118"/>
           <p:cNvSpPr/>
           <p:nvPr/>
         </p:nvSpPr>
@@ -7341,7 +6373,7 @@
       </p:sp>
       <p:sp>
         <p:nvSpPr>
-          <p:cNvPr id="158" name="Shape 136"/>
+          <p:cNvPr id="141" name="Shape 119"/>
           <p:cNvSpPr/>
           <p:nvPr/>
         </p:nvSpPr>
@@ -7366,7 +6398,7 @@
       </p:sp>
       <p:sp>
         <p:nvSpPr>
-          <p:cNvPr id="159" name="Text 137"/>
+          <p:cNvPr id="142" name="Text 120"/>
           <p:cNvSpPr/>
           <p:nvPr/>
         </p:nvSpPr>
@@ -7405,7 +6437,7 @@
       </p:sp>
       <p:sp>
         <p:nvSpPr>
-          <p:cNvPr id="160" name="Shape 138"/>
+          <p:cNvPr id="143" name="Shape 121"/>
           <p:cNvSpPr/>
           <p:nvPr/>
         </p:nvSpPr>
@@ -7430,7 +6462,7 @@
       </p:sp>
       <p:sp>
         <p:nvSpPr>
-          <p:cNvPr id="161" name="Text 139"/>
+          <p:cNvPr id="144" name="Text 122"/>
           <p:cNvSpPr/>
           <p:nvPr/>
         </p:nvSpPr>
@@ -7469,7 +6501,7 @@
       </p:sp>
       <p:sp>
         <p:nvSpPr>
-          <p:cNvPr id="162" name="Shape 140"/>
+          <p:cNvPr id="145" name="Shape 123"/>
           <p:cNvSpPr/>
           <p:nvPr/>
         </p:nvSpPr>
@@ -7494,7 +6526,7 @@
       </p:sp>
       <p:sp>
         <p:nvSpPr>
-          <p:cNvPr id="163" name="Text 141"/>
+          <p:cNvPr id="146" name="Text 124"/>
           <p:cNvSpPr/>
           <p:nvPr/>
         </p:nvSpPr>
@@ -7528,6 +6560,805 @@
               <a:t>5</a:t>
             </a:r>
             <a:endParaRPr lang="en-US" sz="620" dirty="0"/>
+          </a:p>
+        </p:txBody>
+      </p:sp>
+      <p:sp>
+        <p:nvSpPr>
+          <p:cNvPr id="147" name="Text 125"/>
+          <p:cNvSpPr/>
+          <p:nvPr/>
+        </p:nvSpPr>
+        <p:spPr>
+          <a:xfrm>
+            <a:off x="7416698" y="3397910"/>
+            <a:ext cx="786384" cy="114300"/>
+          </a:xfrm>
+          <a:prstGeom prst="roundRect">
+            <a:avLst>
+              <a:gd name="adj" fmla="val 24000"/>
+            </a:avLst>
+          </a:prstGeom>
+          <a:solidFill>
+            <a:srgbClr val="FFFFFF"/>
+          </a:solidFill>
+          <a:ln w="5080">
+            <a:solidFill>
+              <a:srgbClr val="DADCE0"/>
+            </a:solidFill>
+          </a:ln>
+        </p:spPr>
+        <p:txBody>
+          <a:bodyPr wrap="square" lIns="0" tIns="0" rIns="0" bIns="0" rtlCol="0" anchor="ctr"/>
+          <a:lstStyle/>
+          <a:p>
+            <a:pPr algn="ctr" indent="0" marL="0">
+              <a:buNone/>
+            </a:pPr>
+            <a:r>
+              <a:rPr lang="en-US" sz="420" b="1" dirty="0">
+                <a:solidFill>
+                  <a:srgbClr val="202124"/>
+                </a:solidFill>
+                <a:latin typeface="Arial" pitchFamily="34" charset="0"/>
+                <a:ea typeface="Arial" pitchFamily="34" charset="-122"/>
+                <a:cs typeface="Arial" pitchFamily="34" charset="-120"/>
+              </a:rPr>
+              <a:t>Real-time COGS &amp; security telemetry</a:t>
+            </a:r>
+            <a:endParaRPr lang="en-US" sz="420" dirty="0"/>
+          </a:p>
+        </p:txBody>
+      </p:sp>
+      <p:sp>
+        <p:nvSpPr>
+          <p:cNvPr id="148" name="Text 126"/>
+          <p:cNvSpPr/>
+          <p:nvPr/>
+        </p:nvSpPr>
+        <p:spPr>
+          <a:xfrm>
+            <a:off x="5295290" y="4659782"/>
+            <a:ext cx="468173" cy="114300"/>
+          </a:xfrm>
+          <a:prstGeom prst="roundRect">
+            <a:avLst>
+              <a:gd name="adj" fmla="val 24000"/>
+            </a:avLst>
+          </a:prstGeom>
+          <a:solidFill>
+            <a:srgbClr val="FFFFFF"/>
+          </a:solidFill>
+          <a:ln w="5080">
+            <a:solidFill>
+              <a:srgbClr val="DADCE0"/>
+            </a:solidFill>
+          </a:ln>
+        </p:spPr>
+        <p:txBody>
+          <a:bodyPr wrap="square" lIns="0" tIns="0" rIns="0" bIns="0" rtlCol="0" anchor="ctr"/>
+          <a:lstStyle/>
+          <a:p>
+            <a:pPr algn="ctr" indent="0" marL="0">
+              <a:buNone/>
+            </a:pPr>
+            <a:r>
+              <a:rPr lang="en-US" sz="420" b="1" dirty="0">
+                <a:solidFill>
+                  <a:srgbClr val="202124"/>
+                </a:solidFill>
+                <a:latin typeface="Arial" pitchFamily="34" charset="0"/>
+                <a:ea typeface="Arial" pitchFamily="34" charset="-122"/>
+                <a:cs typeface="Arial" pitchFamily="34" charset="-120"/>
+              </a:rPr>
+              <a:t>Zero Cache Bleed</a:t>
+            </a:r>
+            <a:endParaRPr lang="en-US" sz="420" dirty="0"/>
+          </a:p>
+        </p:txBody>
+      </p:sp>
+      <p:sp>
+        <p:nvSpPr>
+          <p:cNvPr id="149" name="Text 127"/>
+          <p:cNvSpPr/>
+          <p:nvPr/>
+        </p:nvSpPr>
+        <p:spPr>
+          <a:xfrm>
+            <a:off x="5183734" y="5206594"/>
+            <a:ext cx="690372" cy="114300"/>
+          </a:xfrm>
+          <a:prstGeom prst="roundRect">
+            <a:avLst>
+              <a:gd name="adj" fmla="val 24000"/>
+            </a:avLst>
+          </a:prstGeom>
+          <a:solidFill>
+            <a:srgbClr val="FFFFFF"/>
+          </a:solidFill>
+          <a:ln w="5080">
+            <a:solidFill>
+              <a:srgbClr val="DADCE0"/>
+            </a:solidFill>
+          </a:ln>
+        </p:spPr>
+        <p:txBody>
+          <a:bodyPr wrap="square" lIns="0" tIns="0" rIns="0" bIns="0" rtlCol="0" anchor="ctr"/>
+          <a:lstStyle/>
+          <a:p>
+            <a:pPr algn="ctr" indent="0" marL="0">
+              <a:buNone/>
+            </a:pPr>
+            <a:r>
+              <a:rPr lang="en-US" sz="420" b="1" dirty="0">
+                <a:solidFill>
+                  <a:srgbClr val="202124"/>
+                </a:solidFill>
+                <a:latin typeface="Arial" pitchFamily="34" charset="0"/>
+                <a:ea typeface="Arial" pitchFamily="34" charset="-122"/>
+                <a:cs typeface="Arial" pitchFamily="34" charset="-120"/>
+              </a:rPr>
+              <a:t>Storage-Engine RLS Policy</a:t>
+            </a:r>
+            <a:endParaRPr lang="en-US" sz="420" dirty="0"/>
+          </a:p>
+        </p:txBody>
+      </p:sp>
+      <p:sp>
+        <p:nvSpPr>
+          <p:cNvPr id="150" name="Text 128"/>
+          <p:cNvSpPr/>
+          <p:nvPr/>
+        </p:nvSpPr>
+        <p:spPr>
+          <a:xfrm>
+            <a:off x="7258507" y="4659782"/>
+            <a:ext cx="616306" cy="114300"/>
+          </a:xfrm>
+          <a:prstGeom prst="roundRect">
+            <a:avLst>
+              <a:gd name="adj" fmla="val 24000"/>
+            </a:avLst>
+          </a:prstGeom>
+          <a:solidFill>
+            <a:srgbClr val="FFFFFF"/>
+          </a:solidFill>
+          <a:ln w="5080">
+            <a:solidFill>
+              <a:srgbClr val="DADCE0"/>
+            </a:solidFill>
+          </a:ln>
+        </p:spPr>
+        <p:txBody>
+          <a:bodyPr wrap="square" lIns="0" tIns="0" rIns="0" bIns="0" rtlCol="0" anchor="ctr"/>
+          <a:lstStyle/>
+          <a:p>
+            <a:pPr algn="ctr" indent="0" marL="0">
+              <a:buNone/>
+            </a:pPr>
+            <a:r>
+              <a:rPr lang="en-US" sz="420" b="1" dirty="0">
+                <a:solidFill>
+                  <a:srgbClr val="202124"/>
+                </a:solidFill>
+                <a:latin typeface="Arial" pitchFamily="34" charset="0"/>
+                <a:ea typeface="Arial" pitchFamily="34" charset="-122"/>
+                <a:cs typeface="Arial" pitchFamily="34" charset="-120"/>
+              </a:rPr>
+              <a:t>Private PSC NAT Bridge</a:t>
+            </a:r>
+            <a:endParaRPr lang="en-US" sz="420" dirty="0"/>
+          </a:p>
+        </p:txBody>
+      </p:sp>
+      <p:sp>
+        <p:nvSpPr>
+          <p:cNvPr id="151" name="Text 129"/>
+          <p:cNvSpPr/>
+          <p:nvPr/>
+        </p:nvSpPr>
+        <p:spPr>
+          <a:xfrm>
+            <a:off x="7184441" y="5206594"/>
+            <a:ext cx="764438" cy="114300"/>
+          </a:xfrm>
+          <a:prstGeom prst="roundRect">
+            <a:avLst>
+              <a:gd name="adj" fmla="val 24000"/>
+            </a:avLst>
+          </a:prstGeom>
+          <a:solidFill>
+            <a:srgbClr val="FFFFFF"/>
+          </a:solidFill>
+          <a:ln w="5080">
+            <a:solidFill>
+              <a:srgbClr val="DADCE0"/>
+            </a:solidFill>
+          </a:ln>
+        </p:spPr>
+        <p:txBody>
+          <a:bodyPr wrap="square" lIns="0" tIns="0" rIns="0" bIns="0" rtlCol="0" anchor="ctr"/>
+          <a:lstStyle/>
+          <a:p>
+            <a:pPr algn="ctr" indent="0" marL="0">
+              <a:buNone/>
+            </a:pPr>
+            <a:r>
+              <a:rPr lang="en-US" sz="420" b="1" dirty="0">
+                <a:solidFill>
+                  <a:srgbClr val="202124"/>
+                </a:solidFill>
+                <a:latin typeface="Arial" pitchFamily="34" charset="0"/>
+                <a:ea typeface="Arial" pitchFamily="34" charset="-122"/>
+                <a:cs typeface="Arial" pitchFamily="34" charset="-120"/>
+              </a:rPr>
+              <a:t>Customer-Revocable CMEK Keys</a:t>
+            </a:r>
+            <a:endParaRPr lang="en-US" sz="420" dirty="0"/>
+          </a:p>
+        </p:txBody>
+      </p:sp>
+      <p:sp>
+        <p:nvSpPr>
+          <p:cNvPr id="152" name="Text 130"/>
+          <p:cNvSpPr/>
+          <p:nvPr/>
+        </p:nvSpPr>
+        <p:spPr>
+          <a:xfrm>
+            <a:off x="4399178" y="5337353"/>
+            <a:ext cx="566928" cy="114300"/>
+          </a:xfrm>
+          <a:prstGeom prst="roundRect">
+            <a:avLst>
+              <a:gd name="adj" fmla="val 24000"/>
+            </a:avLst>
+          </a:prstGeom>
+          <a:solidFill>
+            <a:srgbClr val="FFFFFF"/>
+          </a:solidFill>
+          <a:ln w="5080">
+            <a:solidFill>
+              <a:srgbClr val="DADCE0"/>
+            </a:solidFill>
+          </a:ln>
+        </p:spPr>
+        <p:txBody>
+          <a:bodyPr wrap="square" lIns="0" tIns="0" rIns="0" bIns="0" rtlCol="0" anchor="ctr"/>
+          <a:lstStyle/>
+          <a:p>
+            <a:pPr algn="ctr" indent="0" marL="0">
+              <a:buNone/>
+            </a:pPr>
+            <a:r>
+              <a:rPr lang="en-US" sz="420" b="1" dirty="0">
+                <a:solidFill>
+                  <a:srgbClr val="202124"/>
+                </a:solidFill>
+                <a:latin typeface="Arial" pitchFamily="34" charset="0"/>
+                <a:ea typeface="Arial" pitchFamily="34" charset="-122"/>
+                <a:cs typeface="Arial" pitchFamily="34" charset="-120"/>
+              </a:rPr>
+              <a:t>90% Cached inference</a:t>
+            </a:r>
+            <a:endParaRPr lang="en-US" sz="420" dirty="0"/>
+          </a:p>
+        </p:txBody>
+      </p:sp>
+      <p:sp>
+        <p:nvSpPr>
+          <p:cNvPr id="153" name="Text 131"/>
+          <p:cNvSpPr/>
+          <p:nvPr/>
+        </p:nvSpPr>
+        <p:spPr>
+          <a:xfrm>
+            <a:off x="6326734" y="3397910"/>
+            <a:ext cx="786384" cy="114300"/>
+          </a:xfrm>
+          <a:prstGeom prst="roundRect">
+            <a:avLst>
+              <a:gd name="adj" fmla="val 24000"/>
+            </a:avLst>
+          </a:prstGeom>
+          <a:solidFill>
+            <a:srgbClr val="FFFFFF"/>
+          </a:solidFill>
+          <a:ln w="5080">
+            <a:solidFill>
+              <a:srgbClr val="DADCE0"/>
+            </a:solidFill>
+          </a:ln>
+        </p:spPr>
+        <p:txBody>
+          <a:bodyPr wrap="square" lIns="0" tIns="0" rIns="0" bIns="0" rtlCol="0" anchor="ctr"/>
+          <a:lstStyle/>
+          <a:p>
+            <a:pPr algn="ctr" indent="0" marL="0">
+              <a:buNone/>
+            </a:pPr>
+            <a:r>
+              <a:rPr lang="en-US" sz="420" b="1" dirty="0">
+                <a:solidFill>
+                  <a:srgbClr val="202124"/>
+                </a:solidFill>
+                <a:latin typeface="Arial" pitchFamily="34" charset="0"/>
+                <a:ea typeface="Arial" pitchFamily="34" charset="-122"/>
+                <a:cs typeface="Arial" pitchFamily="34" charset="-120"/>
+              </a:rPr>
+              <a:t>Verified zero-bleed agent completion</a:t>
+            </a:r>
+            <a:endParaRPr lang="en-US" sz="420" dirty="0"/>
+          </a:p>
+        </p:txBody>
+      </p:sp>
+      <p:sp>
+        <p:nvSpPr>
+          <p:cNvPr id="154" name="Text 132"/>
+          <p:cNvSpPr/>
+          <p:nvPr/>
+        </p:nvSpPr>
+        <p:spPr>
+          <a:xfrm>
+            <a:off x="5338267" y="3397910"/>
+            <a:ext cx="786384" cy="114300"/>
+          </a:xfrm>
+          <a:prstGeom prst="roundRect">
+            <a:avLst>
+              <a:gd name="adj" fmla="val 24000"/>
+            </a:avLst>
+          </a:prstGeom>
+          <a:solidFill>
+            <a:srgbClr val="FFFFFF"/>
+          </a:solidFill>
+          <a:ln w="5080">
+            <a:solidFill>
+              <a:srgbClr val="DADCE0"/>
+            </a:solidFill>
+          </a:ln>
+        </p:spPr>
+        <p:txBody>
+          <a:bodyPr wrap="square" lIns="0" tIns="0" rIns="0" bIns="0" rtlCol="0" anchor="ctr"/>
+          <a:lstStyle/>
+          <a:p>
+            <a:pPr algn="ctr" indent="0" marL="0">
+              <a:buNone/>
+            </a:pPr>
+            <a:r>
+              <a:rPr lang="en-US" sz="420" b="1" dirty="0">
+                <a:solidFill>
+                  <a:srgbClr val="202124"/>
+                </a:solidFill>
+                <a:latin typeface="Arial" pitchFamily="34" charset="0"/>
+                <a:ea typeface="Arial" pitchFamily="34" charset="-122"/>
+                <a:cs typeface="Arial" pitchFamily="34" charset="-120"/>
+              </a:rPr>
+              <a:t>Dispatch to optimal cost/security tier</a:t>
+            </a:r>
+            <a:endParaRPr lang="en-US" sz="420" dirty="0"/>
+          </a:p>
+        </p:txBody>
+      </p:sp>
+      <p:sp>
+        <p:nvSpPr>
+          <p:cNvPr id="155" name="Text 133"/>
+          <p:cNvSpPr/>
+          <p:nvPr/>
+        </p:nvSpPr>
+        <p:spPr>
+          <a:xfrm>
+            <a:off x="4939589" y="2980944"/>
+            <a:ext cx="690372" cy="114300"/>
+          </a:xfrm>
+          <a:prstGeom prst="roundRect">
+            <a:avLst>
+              <a:gd name="adj" fmla="val 24000"/>
+            </a:avLst>
+          </a:prstGeom>
+          <a:solidFill>
+            <a:srgbClr val="FFFFFF"/>
+          </a:solidFill>
+          <a:ln w="5080">
+            <a:solidFill>
+              <a:srgbClr val="DADCE0"/>
+            </a:solidFill>
+          </a:ln>
+        </p:spPr>
+        <p:txBody>
+          <a:bodyPr wrap="square" lIns="0" tIns="0" rIns="0" bIns="0" rtlCol="0" anchor="ctr"/>
+          <a:lstStyle/>
+          <a:p>
+            <a:pPr algn="ctr" indent="0" marL="0">
+              <a:buNone/>
+            </a:pPr>
+            <a:r>
+              <a:rPr lang="en-US" sz="420" b="1" dirty="0">
+                <a:solidFill>
+                  <a:srgbClr val="202124"/>
+                </a:solidFill>
+                <a:latin typeface="Arial" pitchFamily="34" charset="0"/>
+                <a:ea typeface="Arial" pitchFamily="34" charset="-122"/>
+                <a:cs typeface="Arial" pitchFamily="34" charset="-120"/>
+              </a:rPr>
+              <a:t>Prune Catalog &amp; MCP tools</a:t>
+            </a:r>
+            <a:endParaRPr lang="en-US" sz="420" dirty="0"/>
+          </a:p>
+        </p:txBody>
+      </p:sp>
+      <p:sp>
+        <p:nvSpPr>
+          <p:cNvPr id="156" name="Text 134"/>
+          <p:cNvSpPr/>
+          <p:nvPr/>
+        </p:nvSpPr>
+        <p:spPr>
+          <a:xfrm>
+            <a:off x="4508906" y="4445813"/>
+            <a:ext cx="347472" cy="114300"/>
+          </a:xfrm>
+          <a:prstGeom prst="roundRect">
+            <a:avLst>
+              <a:gd name="adj" fmla="val 24000"/>
+            </a:avLst>
+          </a:prstGeom>
+          <a:solidFill>
+            <a:srgbClr val="FFFFFF"/>
+          </a:solidFill>
+          <a:ln w="5080">
+            <a:solidFill>
+              <a:srgbClr val="DADCE0"/>
+            </a:solidFill>
+          </a:ln>
+        </p:spPr>
+        <p:txBody>
+          <a:bodyPr wrap="square" lIns="0" tIns="0" rIns="0" bIns="0" rtlCol="0" anchor="ctr"/>
+          <a:lstStyle/>
+          <a:p>
+            <a:pPr algn="ctr" indent="0" marL="0">
+              <a:buNone/>
+            </a:pPr>
+            <a:r>
+              <a:rPr lang="en-US" sz="420" b="1" dirty="0">
+                <a:solidFill>
+                  <a:srgbClr val="202124"/>
+                </a:solidFill>
+                <a:latin typeface="Arial" pitchFamily="34" charset="0"/>
+                <a:ea typeface="Arial" pitchFamily="34" charset="-122"/>
+                <a:cs typeface="Arial" pitchFamily="34" charset="-120"/>
+              </a:rPr>
+              <a:t>Check quota</a:t>
+            </a:r>
+            <a:endParaRPr lang="en-US" sz="420" dirty="0"/>
+          </a:p>
+        </p:txBody>
+      </p:sp>
+      <p:sp>
+        <p:nvSpPr>
+          <p:cNvPr id="157" name="Text 135"/>
+          <p:cNvSpPr/>
+          <p:nvPr/>
+        </p:nvSpPr>
+        <p:spPr>
+          <a:xfrm>
+            <a:off x="4508906" y="4625950"/>
+            <a:ext cx="347472" cy="114300"/>
+          </a:xfrm>
+          <a:prstGeom prst="roundRect">
+            <a:avLst>
+              <a:gd name="adj" fmla="val 24000"/>
+            </a:avLst>
+          </a:prstGeom>
+          <a:solidFill>
+            <a:srgbClr val="FFFFFF"/>
+          </a:solidFill>
+          <a:ln w="5080">
+            <a:solidFill>
+              <a:srgbClr val="DADCE0"/>
+            </a:solidFill>
+          </a:ln>
+        </p:spPr>
+        <p:txBody>
+          <a:bodyPr wrap="square" lIns="0" tIns="0" rIns="0" bIns="0" rtlCol="0" anchor="ctr"/>
+          <a:lstStyle/>
+          <a:p>
+            <a:pPr algn="ctr" indent="0" marL="0">
+              <a:buNone/>
+            </a:pPr>
+            <a:r>
+              <a:rPr lang="en-US" sz="420" b="1" dirty="0">
+                <a:solidFill>
+                  <a:srgbClr val="202124"/>
+                </a:solidFill>
+                <a:latin typeface="Arial" pitchFamily="34" charset="0"/>
+                <a:ea typeface="Arial" pitchFamily="34" charset="-122"/>
+                <a:cs typeface="Arial" pitchFamily="34" charset="-120"/>
+              </a:rPr>
+              <a:t>Log COGS</a:t>
+            </a:r>
+            <a:endParaRPr lang="en-US" sz="420" dirty="0"/>
+          </a:p>
+        </p:txBody>
+      </p:sp>
+      <p:sp>
+        <p:nvSpPr>
+          <p:cNvPr id="158" name="Text 136"/>
+          <p:cNvSpPr/>
+          <p:nvPr/>
+        </p:nvSpPr>
+        <p:spPr>
+          <a:xfrm>
+            <a:off x="4938674" y="2299716"/>
+            <a:ext cx="492862" cy="114300"/>
+          </a:xfrm>
+          <a:prstGeom prst="roundRect">
+            <a:avLst>
+              <a:gd name="adj" fmla="val 24000"/>
+            </a:avLst>
+          </a:prstGeom>
+          <a:solidFill>
+            <a:srgbClr val="FFFFFF"/>
+          </a:solidFill>
+          <a:ln w="5080">
+            <a:solidFill>
+              <a:srgbClr val="DADCE0"/>
+            </a:solidFill>
+          </a:ln>
+        </p:spPr>
+        <p:txBody>
+          <a:bodyPr wrap="square" lIns="0" tIns="0" rIns="0" bIns="0" rtlCol="0" anchor="ctr"/>
+          <a:lstStyle/>
+          <a:p>
+            <a:pPr algn="ctr" indent="0" marL="0">
+              <a:buNone/>
+            </a:pPr>
+            <a:r>
+              <a:rPr lang="en-US" sz="420" b="1" dirty="0">
+                <a:solidFill>
+                  <a:srgbClr val="202124"/>
+                </a:solidFill>
+                <a:latin typeface="Arial" pitchFamily="34" charset="0"/>
+                <a:ea typeface="Arial" pitchFamily="34" charset="-122"/>
+                <a:cs typeface="Arial" pitchFamily="34" charset="-120"/>
+              </a:rPr>
+              <a:t>Verify OBO &amp; DPoP</a:t>
+            </a:r>
+            <a:endParaRPr lang="en-US" sz="420" dirty="0"/>
+          </a:p>
+        </p:txBody>
+      </p:sp>
+      <p:sp>
+        <p:nvSpPr>
+          <p:cNvPr id="159" name="Text 137"/>
+          <p:cNvSpPr/>
+          <p:nvPr/>
+        </p:nvSpPr>
+        <p:spPr>
+          <a:xfrm>
+            <a:off x="5077663" y="2816352"/>
+            <a:ext cx="542239" cy="114300"/>
+          </a:xfrm>
+          <a:prstGeom prst="roundRect">
+            <a:avLst>
+              <a:gd name="adj" fmla="val 24000"/>
+            </a:avLst>
+          </a:prstGeom>
+          <a:solidFill>
+            <a:srgbClr val="FFFFFF"/>
+          </a:solidFill>
+          <a:ln w="5080">
+            <a:solidFill>
+              <a:srgbClr val="DADCE0"/>
+            </a:solidFill>
+          </a:ln>
+        </p:spPr>
+        <p:txBody>
+          <a:bodyPr wrap="square" lIns="0" tIns="0" rIns="0" bIns="0" rtlCol="0" anchor="ctr"/>
+          <a:lstStyle/>
+          <a:p>
+            <a:pPr algn="ctr" indent="0" marL="0">
+              <a:buNone/>
+            </a:pPr>
+            <a:r>
+              <a:rPr lang="en-US" sz="420" b="1" dirty="0">
+                <a:solidFill>
+                  <a:srgbClr val="202124"/>
+                </a:solidFill>
+                <a:latin typeface="Arial" pitchFamily="34" charset="0"/>
+                <a:ea typeface="Arial" pitchFamily="34" charset="-122"/>
+                <a:cs typeface="Arial" pitchFamily="34" charset="-120"/>
+              </a:rPr>
+              <a:t>Screen &amp; redact PII</a:t>
+            </a:r>
+            <a:endParaRPr lang="en-US" sz="420" dirty="0"/>
+          </a:p>
+        </p:txBody>
+      </p:sp>
+      <p:sp>
+        <p:nvSpPr>
+          <p:cNvPr id="160" name="Text 138"/>
+          <p:cNvSpPr/>
+          <p:nvPr/>
+        </p:nvSpPr>
+        <p:spPr>
+          <a:xfrm>
+            <a:off x="6238951" y="1463954"/>
+            <a:ext cx="347472" cy="114300"/>
+          </a:xfrm>
+          <a:prstGeom prst="roundRect">
+            <a:avLst>
+              <a:gd name="adj" fmla="val 24000"/>
+            </a:avLst>
+          </a:prstGeom>
+          <a:solidFill>
+            <a:srgbClr val="FFFFFF"/>
+          </a:solidFill>
+          <a:ln w="5080">
+            <a:solidFill>
+              <a:srgbClr val="DADCE0"/>
+            </a:solidFill>
+          </a:ln>
+        </p:spPr>
+        <p:txBody>
+          <a:bodyPr wrap="square" lIns="0" tIns="0" rIns="0" bIns="0" rtlCol="0" anchor="ctr"/>
+          <a:lstStyle/>
+          <a:p>
+            <a:pPr algn="ctr" indent="0" marL="0">
+              <a:buNone/>
+            </a:pPr>
+            <a:r>
+              <a:rPr lang="en-US" sz="420" b="1" dirty="0">
+                <a:solidFill>
+                  <a:srgbClr val="202124"/>
+                </a:solidFill>
+                <a:latin typeface="Arial" pitchFamily="34" charset="0"/>
+                <a:ea typeface="Arial" pitchFamily="34" charset="-122"/>
+                <a:cs typeface="Arial" pitchFamily="34" charset="-120"/>
+              </a:rPr>
+              <a:t>Response</a:t>
+            </a:r>
+            <a:endParaRPr lang="en-US" sz="420" dirty="0"/>
+          </a:p>
+        </p:txBody>
+      </p:sp>
+      <p:sp>
+        <p:nvSpPr>
+          <p:cNvPr id="161" name="Text 139"/>
+          <p:cNvSpPr/>
+          <p:nvPr/>
+        </p:nvSpPr>
+        <p:spPr>
+          <a:xfrm>
+            <a:off x="6238951" y="2823667"/>
+            <a:ext cx="347472" cy="114300"/>
+          </a:xfrm>
+          <a:prstGeom prst="roundRect">
+            <a:avLst>
+              <a:gd name="adj" fmla="val 24000"/>
+            </a:avLst>
+          </a:prstGeom>
+          <a:solidFill>
+            <a:srgbClr val="FFFFFF"/>
+          </a:solidFill>
+          <a:ln w="5080">
+            <a:solidFill>
+              <a:srgbClr val="DADCE0"/>
+            </a:solidFill>
+          </a:ln>
+        </p:spPr>
+        <p:txBody>
+          <a:bodyPr wrap="square" lIns="0" tIns="0" rIns="0" bIns="0" rtlCol="0" anchor="ctr"/>
+          <a:lstStyle/>
+          <a:p>
+            <a:pPr algn="ctr" indent="0" marL="0">
+              <a:buNone/>
+            </a:pPr>
+            <a:r>
+              <a:rPr lang="en-US" sz="420" b="1" dirty="0">
+                <a:solidFill>
+                  <a:srgbClr val="202124"/>
+                </a:solidFill>
+                <a:latin typeface="Arial" pitchFamily="34" charset="0"/>
+                <a:ea typeface="Arial" pitchFamily="34" charset="-122"/>
+                <a:cs typeface="Arial" pitchFamily="34" charset="-120"/>
+              </a:rPr>
+              <a:t>Response</a:t>
+            </a:r>
+            <a:endParaRPr lang="en-US" sz="420" dirty="0"/>
+          </a:p>
+        </p:txBody>
+      </p:sp>
+      <p:sp>
+        <p:nvSpPr>
+          <p:cNvPr id="162" name="Text 140"/>
+          <p:cNvSpPr/>
+          <p:nvPr/>
+        </p:nvSpPr>
+        <p:spPr>
+          <a:xfrm>
+            <a:off x="5531206" y="1463954"/>
+            <a:ext cx="347472" cy="114300"/>
+          </a:xfrm>
+          <a:prstGeom prst="roundRect">
+            <a:avLst>
+              <a:gd name="adj" fmla="val 24000"/>
+            </a:avLst>
+          </a:prstGeom>
+          <a:solidFill>
+            <a:srgbClr val="FFFFFF"/>
+          </a:solidFill>
+          <a:ln w="5080">
+            <a:solidFill>
+              <a:srgbClr val="DADCE0"/>
+            </a:solidFill>
+          </a:ln>
+        </p:spPr>
+        <p:txBody>
+          <a:bodyPr wrap="square" lIns="0" tIns="0" rIns="0" bIns="0" rtlCol="0" anchor="ctr"/>
+          <a:lstStyle/>
+          <a:p>
+            <a:pPr algn="ctr" indent="0" marL="0">
+              <a:buNone/>
+            </a:pPr>
+            <a:r>
+              <a:rPr lang="en-US" sz="420" b="1" dirty="0">
+                <a:solidFill>
+                  <a:srgbClr val="202124"/>
+                </a:solidFill>
+                <a:latin typeface="Arial" pitchFamily="34" charset="0"/>
+                <a:ea typeface="Arial" pitchFamily="34" charset="-122"/>
+                <a:cs typeface="Arial" pitchFamily="34" charset="-120"/>
+              </a:rPr>
+              <a:t>Request</a:t>
+            </a:r>
+            <a:endParaRPr lang="en-US" sz="420" dirty="0"/>
+          </a:p>
+        </p:txBody>
+      </p:sp>
+      <p:sp>
+        <p:nvSpPr>
+          <p:cNvPr id="163" name="Text 141"/>
+          <p:cNvSpPr/>
+          <p:nvPr/>
+        </p:nvSpPr>
+        <p:spPr>
+          <a:xfrm>
+            <a:off x="5531206" y="2823667"/>
+            <a:ext cx="347472" cy="114300"/>
+          </a:xfrm>
+          <a:prstGeom prst="roundRect">
+            <a:avLst>
+              <a:gd name="adj" fmla="val 24000"/>
+            </a:avLst>
+          </a:prstGeom>
+          <a:solidFill>
+            <a:srgbClr val="FFFFFF"/>
+          </a:solidFill>
+          <a:ln w="5080">
+            <a:solidFill>
+              <a:srgbClr val="DADCE0"/>
+            </a:solidFill>
+          </a:ln>
+        </p:spPr>
+        <p:txBody>
+          <a:bodyPr wrap="square" lIns="0" tIns="0" rIns="0" bIns="0" rtlCol="0" anchor="ctr"/>
+          <a:lstStyle/>
+          <a:p>
+            <a:pPr algn="ctr" indent="0" marL="0">
+              <a:buNone/>
+            </a:pPr>
+            <a:r>
+              <a:rPr lang="en-US" sz="420" b="1" dirty="0">
+                <a:solidFill>
+                  <a:srgbClr val="202124"/>
+                </a:solidFill>
+                <a:latin typeface="Arial" pitchFamily="34" charset="0"/>
+                <a:ea typeface="Arial" pitchFamily="34" charset="-122"/>
+                <a:cs typeface="Arial" pitchFamily="34" charset="-120"/>
+              </a:rPr>
+              <a:t>Request</a:t>
+            </a:r>
+            <a:endParaRPr lang="en-US" sz="420" dirty="0"/>
           </a:p>
         </p:txBody>
       </p:sp>
@@ -7699,8 +7530,8 @@
         </p:nvSpPr>
         <p:spPr>
           <a:xfrm>
-            <a:off x="749808" y="621792"/>
-            <a:ext cx="10680192" cy="219456"/>
+            <a:off x="749808" y="603504"/>
+            <a:ext cx="10680192" cy="201168"/>
           </a:xfrm>
           <a:prstGeom prst="rect">
             <a:avLst/>
@@ -7716,7 +7547,7 @@
               <a:buNone/>
             </a:pPr>
             <a:r>
-              <a:rPr lang="en-US" sz="940" dirty="0">
+              <a:rPr lang="en-US" sz="920" dirty="0">
                 <a:solidFill>
                   <a:srgbClr val="3C4043"/>
                 </a:solidFill>
@@ -7726,7 +7557,7 @@
               </a:rPr>
               <a:t>The architecture consists of the following components:</a:t>
             </a:r>
-            <a:endParaRPr lang="en-US" sz="940" dirty="0"/>
+            <a:endParaRPr lang="en-US" sz="920" dirty="0"/>
           </a:p>
         </p:txBody>
       </p:sp>
@@ -7738,8 +7569,8 @@
         </p:nvSpPr>
         <p:spPr>
           <a:xfrm>
-            <a:off x="749808" y="877824"/>
-            <a:ext cx="2889504" cy="274320"/>
+            <a:off x="749808" y="841248"/>
+            <a:ext cx="2889504" cy="256032"/>
           </a:xfrm>
           <a:prstGeom prst="rect">
             <a:avLst/>
@@ -7763,8 +7594,8 @@
         </p:nvSpPr>
         <p:spPr>
           <a:xfrm>
-            <a:off x="841248" y="877824"/>
-            <a:ext cx="2706624" cy="274320"/>
+            <a:off x="841248" y="841248"/>
+            <a:ext cx="2706624" cy="256032"/>
           </a:xfrm>
           <a:prstGeom prst="rect">
             <a:avLst/>
@@ -7802,8 +7633,8 @@
         </p:nvSpPr>
         <p:spPr>
           <a:xfrm>
-            <a:off x="3639312" y="877824"/>
-            <a:ext cx="7790688" cy="274320"/>
+            <a:off x="3639312" y="841248"/>
+            <a:ext cx="7790688" cy="256032"/>
           </a:xfrm>
           <a:prstGeom prst="rect">
             <a:avLst/>
@@ -7827,8 +7658,8 @@
         </p:nvSpPr>
         <p:spPr>
           <a:xfrm>
-            <a:off x="3749040" y="877824"/>
-            <a:ext cx="7571232" cy="274320"/>
+            <a:off x="3749040" y="841248"/>
+            <a:ext cx="7571232" cy="256032"/>
           </a:xfrm>
           <a:prstGeom prst="rect">
             <a:avLst/>
@@ -7866,8 +7697,8 @@
         </p:nvSpPr>
         <p:spPr>
           <a:xfrm>
-            <a:off x="749808" y="1152144"/>
-            <a:ext cx="2889504" cy="296266"/>
+            <a:off x="749808" y="1097280"/>
+            <a:ext cx="2889504" cy="338328"/>
           </a:xfrm>
           <a:prstGeom prst="rect">
             <a:avLst/>
@@ -7891,8 +7722,8 @@
         </p:nvSpPr>
         <p:spPr>
           <a:xfrm>
-            <a:off x="841248" y="1170432"/>
-            <a:ext cx="2706624" cy="259690"/>
+            <a:off x="841248" y="1115568"/>
+            <a:ext cx="2706624" cy="301752"/>
           </a:xfrm>
           <a:prstGeom prst="rect">
             <a:avLst/>
@@ -7901,14 +7732,16 @@
           <a:ln/>
         </p:spPr>
         <p:txBody>
-          <a:bodyPr wrap="square" rtlCol="0" anchor="ctr"/>
-          <a:lstStyle/>
-          <a:p>
-            <a:pPr indent="0" marL="0">
-              <a:buNone/>
-            </a:pPr>
-            <a:r>
-              <a:rPr lang="en-US" sz="780" b="1" dirty="0">
+          <a:bodyPr wrap="square" rtlCol="0" anchor="ctr">
+            <a:normAutofit/>
+          </a:bodyPr>
+          <a:lstStyle/>
+          <a:p>
+            <a:pPr indent="0" marL="0">
+              <a:buNone/>
+            </a:pPr>
+            <a:r>
+              <a:rPr lang="en-US" sz="750" b="1" dirty="0">
                 <a:solidFill>
                   <a:srgbClr val="202124"/>
                 </a:solidFill>
@@ -7923,7 +7756,7 @@
               <a:buNone/>
             </a:pPr>
             <a:r>
-              <a:rPr lang="en-US" sz="670" dirty="0">
+              <a:rPr lang="en-US" sz="650" dirty="0">
                 <a:solidFill>
                   <a:srgbClr val="5F6368"/>
                 </a:solidFill>
@@ -7931,9 +7764,9 @@
                 <a:ea typeface="Arial" pitchFamily="34" charset="-122"/>
                 <a:cs typeface="Arial" pitchFamily="34" charset="-120"/>
               </a:rPr>
-              <a:t>Outer security and governance boundary that prevents unauthorized data exfiltration.</a:t>
-            </a:r>
-            <a:endParaRPr lang="en-US" sz="780" dirty="0"/>
+              <a:t>Outer security and governance boundary that prevents unauthorized data.</a:t>
+            </a:r>
+            <a:endParaRPr lang="en-US" sz="750" dirty="0"/>
           </a:p>
         </p:txBody>
       </p:sp>
@@ -7945,8 +7778,8 @@
         </p:nvSpPr>
         <p:spPr>
           <a:xfrm>
-            <a:off x="3639312" y="1152144"/>
-            <a:ext cx="7790688" cy="296266"/>
+            <a:off x="3639312" y="1097280"/>
+            <a:ext cx="7790688" cy="338328"/>
           </a:xfrm>
           <a:prstGeom prst="rect">
             <a:avLst/>
@@ -7970,8 +7803,8 @@
         </p:nvSpPr>
         <p:spPr>
           <a:xfrm>
-            <a:off x="3749040" y="1170432"/>
-            <a:ext cx="7571232" cy="259690"/>
+            <a:off x="3749040" y="1115568"/>
+            <a:ext cx="7571232" cy="301752"/>
           </a:xfrm>
           <a:prstGeom prst="rect">
             <a:avLst/>
@@ -7980,14 +7813,19 @@
           <a:ln/>
         </p:spPr>
         <p:txBody>
-          <a:bodyPr wrap="square" rtlCol="0" anchor="ctr"/>
-          <a:lstStyle/>
-          <a:p>
-            <a:pPr indent="0" marL="0">
-              <a:buNone/>
-            </a:pPr>
-            <a:r>
-              <a:rPr lang="en-US" sz="720" b="1" dirty="0">
+          <a:bodyPr wrap="square" rtlCol="0" anchor="ctr">
+            <a:normAutofit/>
+          </a:bodyPr>
+          <a:lstStyle/>
+          <a:p>
+            <a:pPr indent="0" marL="0">
+              <a:lnSpc>
+                <a:spcPct val="102000"/>
+              </a:lnSpc>
+              <a:buNone/>
+            </a:pPr>
+            <a:r>
+              <a:rPr lang="en-US" sz="690" b="1" dirty="0">
                 <a:solidFill>
                   <a:srgbClr val="202124"/>
                 </a:solidFill>
@@ -7998,10 +7836,13 @@
               <a:t>• The Multi-Tenant Agentic Triad: Security • FinOps COGS • Zero-PII Observability: </a:t>
             </a:r>
             <a:pPr indent="0" marL="0">
-              <a:buNone/>
-            </a:pPr>
-            <a:r>
-              <a:rPr lang="en-US" sz="700" dirty="0">
+              <a:lnSpc>
+                <a:spcPct val="102000"/>
+              </a:lnSpc>
+              <a:buNone/>
+            </a:pPr>
+            <a:r>
+              <a:rPr lang="en-US" sz="670" dirty="0">
                 <a:solidFill>
                   <a:srgbClr val="3C4043"/>
                 </a:solidFill>
@@ -8011,7 +7852,7 @@
               </a:rPr>
               <a:t>Enforces VPC Service Controls service perimeters around hub and spoke projects to block unauthorized cross-perimeter data movement.</a:t>
             </a:r>
-            <a:endParaRPr lang="en-US" sz="720" dirty="0"/>
+            <a:endParaRPr lang="en-US" sz="690" dirty="0"/>
           </a:p>
         </p:txBody>
       </p:sp>
@@ -8023,8 +7864,8 @@
         </p:nvSpPr>
         <p:spPr>
           <a:xfrm>
-            <a:off x="749808" y="1448410"/>
-            <a:ext cx="2889504" cy="786384"/>
+            <a:off x="749808" y="1435608"/>
+            <a:ext cx="2889504" cy="822960"/>
           </a:xfrm>
           <a:prstGeom prst="rect">
             <a:avLst/>
@@ -8048,8 +7889,8 @@
         </p:nvSpPr>
         <p:spPr>
           <a:xfrm>
-            <a:off x="841248" y="1466698"/>
-            <a:ext cx="2706624" cy="749808"/>
+            <a:off x="841248" y="1453896"/>
+            <a:ext cx="2706624" cy="786384"/>
           </a:xfrm>
           <a:prstGeom prst="rect">
             <a:avLst/>
@@ -8058,14 +7899,16 @@
           <a:ln/>
         </p:spPr>
         <p:txBody>
-          <a:bodyPr wrap="square" rtlCol="0" anchor="ctr"/>
-          <a:lstStyle/>
-          <a:p>
-            <a:pPr indent="0" marL="0">
-              <a:buNone/>
-            </a:pPr>
-            <a:r>
-              <a:rPr lang="en-US" sz="780" b="1" dirty="0">
+          <a:bodyPr wrap="square" rtlCol="0" anchor="ctr">
+            <a:normAutofit/>
+          </a:bodyPr>
+          <a:lstStyle/>
+          <a:p>
+            <a:pPr indent="0" marL="0">
+              <a:buNone/>
+            </a:pPr>
+            <a:r>
+              <a:rPr lang="en-US" sz="750" b="1" dirty="0">
                 <a:solidFill>
                   <a:srgbClr val="202124"/>
                 </a:solidFill>
@@ -8080,7 +7923,7 @@
               <a:buNone/>
             </a:pPr>
             <a:r>
-              <a:rPr lang="en-US" sz="670" dirty="0">
+              <a:rPr lang="en-US" sz="650" dirty="0">
                 <a:solidFill>
                   <a:srgbClr val="5F6368"/>
                 </a:solidFill>
@@ -8090,7 +7933,7 @@
               </a:rPr>
               <a:t>Centralized ingress and control plane managing edge security, identity verification, and request routing.</a:t>
             </a:r>
-            <a:endParaRPr lang="en-US" sz="780" dirty="0"/>
+            <a:endParaRPr lang="en-US" sz="750" dirty="0"/>
           </a:p>
         </p:txBody>
       </p:sp>
@@ -8102,8 +7945,8 @@
         </p:nvSpPr>
         <p:spPr>
           <a:xfrm>
-            <a:off x="3639312" y="1448410"/>
-            <a:ext cx="7790688" cy="786384"/>
+            <a:off x="3639312" y="1435608"/>
+            <a:ext cx="7790688" cy="822960"/>
           </a:xfrm>
           <a:prstGeom prst="rect">
             <a:avLst/>
@@ -8127,8 +7970,8 @@
         </p:nvSpPr>
         <p:spPr>
           <a:xfrm>
-            <a:off x="3749040" y="1466698"/>
-            <a:ext cx="7571232" cy="749808"/>
+            <a:off x="3749040" y="1453896"/>
+            <a:ext cx="7571232" cy="786384"/>
           </a:xfrm>
           <a:prstGeom prst="rect">
             <a:avLst/>
@@ -8137,14 +7980,19 @@
           <a:ln/>
         </p:spPr>
         <p:txBody>
-          <a:bodyPr wrap="square" rtlCol="0" anchor="ctr"/>
-          <a:lstStyle/>
-          <a:p>
-            <a:pPr indent="0" marL="0">
-              <a:buNone/>
-            </a:pPr>
-            <a:r>
-              <a:rPr lang="en-US" sz="720" b="1" dirty="0">
+          <a:bodyPr wrap="square" rtlCol="0" anchor="ctr">
+            <a:normAutofit/>
+          </a:bodyPr>
+          <a:lstStyle/>
+          <a:p>
+            <a:pPr indent="0" marL="0">
+              <a:lnSpc>
+                <a:spcPct val="102000"/>
+              </a:lnSpc>
+              <a:buNone/>
+            </a:pPr>
+            <a:r>
+              <a:rPr lang="en-US" sz="690" b="1" dirty="0">
                 <a:solidFill>
                   <a:srgbClr val="202124"/>
                 </a:solidFill>
@@ -8155,10 +8003,13 @@
               <a:t>• External Application Load Balancer: </a:t>
             </a:r>
             <a:pPr indent="0" marL="0">
-              <a:buNone/>
-            </a:pPr>
-            <a:r>
-              <a:rPr lang="en-US" sz="700" dirty="0">
+              <a:lnSpc>
+                <a:spcPct val="102000"/>
+              </a:lnSpc>
+              <a:buNone/>
+            </a:pPr>
+            <a:r>
+              <a:rPr lang="en-US" sz="670" dirty="0">
                 <a:solidFill>
                   <a:srgbClr val="3C4043"/>
                 </a:solidFill>
@@ -8170,10 +8021,13 @@
 </a:t>
             </a:r>
             <a:pPr indent="0" marL="0">
-              <a:buNone/>
-            </a:pPr>
-            <a:r>
-              <a:rPr lang="en-US" sz="720" b="1" dirty="0">
+              <a:lnSpc>
+                <a:spcPct val="102000"/>
+              </a:lnSpc>
+              <a:buNone/>
+            </a:pPr>
+            <a:r>
+              <a:rPr lang="en-US" sz="690" b="1" dirty="0">
                 <a:solidFill>
                   <a:srgbClr val="202124"/>
                 </a:solidFill>
@@ -8181,13 +8035,16 @@
                 <a:ea typeface="Arial" pitchFamily="34" charset="-122"/>
                 <a:cs typeface="Arial" pitchFamily="34" charset="-120"/>
               </a:rPr>
-              <a:t>• Hop 1: Edge PEP &amp; Hop 2: Catalog PDP: </a:t>
-            </a:r>
-            <a:pPr indent="0" marL="0">
-              <a:buNone/>
-            </a:pPr>
-            <a:r>
-              <a:rPr lang="en-US" sz="700" dirty="0">
+              <a:t>• Hop 1: Cloud Armor &amp; Hop 2: Catalog PDP: </a:t>
+            </a:r>
+            <a:pPr indent="0" marL="0">
+              <a:lnSpc>
+                <a:spcPct val="102000"/>
+              </a:lnSpc>
+              <a:buNone/>
+            </a:pPr>
+            <a:r>
+              <a:rPr lang="en-US" sz="670" dirty="0">
                 <a:solidFill>
                   <a:srgbClr val="3C4043"/>
                 </a:solidFill>
@@ -8199,10 +8056,13 @@
 </a:t>
             </a:r>
             <a:pPr indent="0" marL="0">
-              <a:buNone/>
-            </a:pPr>
-            <a:r>
-              <a:rPr lang="en-US" sz="720" b="1" dirty="0">
+              <a:lnSpc>
+                <a:spcPct val="102000"/>
+              </a:lnSpc>
+              <a:buNone/>
+            </a:pPr>
+            <a:r>
+              <a:rPr lang="en-US" sz="690" b="1" dirty="0">
                 <a:solidFill>
                   <a:srgbClr val="202124"/>
                 </a:solidFill>
@@ -8213,10 +8073,13 @@
               <a:t>• Hop 4: Model Armor: </a:t>
             </a:r>
             <a:pPr indent="0" marL="0">
-              <a:buNone/>
-            </a:pPr>
-            <a:r>
-              <a:rPr lang="en-US" sz="700" dirty="0">
+              <a:lnSpc>
+                <a:spcPct val="102000"/>
+              </a:lnSpc>
+              <a:buNone/>
+            </a:pPr>
+            <a:r>
+              <a:rPr lang="en-US" sz="670" dirty="0">
                 <a:solidFill>
                   <a:srgbClr val="3C4043"/>
                 </a:solidFill>
@@ -8228,10 +8091,13 @@
 </a:t>
             </a:r>
             <a:pPr indent="0" marL="0">
-              <a:buNone/>
-            </a:pPr>
-            <a:r>
-              <a:rPr lang="en-US" sz="720" b="1" dirty="0">
+              <a:lnSpc>
+                <a:spcPct val="102000"/>
+              </a:lnSpc>
+              <a:buNone/>
+            </a:pPr>
+            <a:r>
+              <a:rPr lang="en-US" sz="690" b="1" dirty="0">
                 <a:solidFill>
                   <a:srgbClr val="202124"/>
                 </a:solidFill>
@@ -8242,10 +8108,13 @@
               <a:t>• Architecture Selector: </a:t>
             </a:r>
             <a:pPr indent="0" marL="0">
-              <a:buNone/>
-            </a:pPr>
-            <a:r>
-              <a:rPr lang="en-US" sz="700" dirty="0">
+              <a:lnSpc>
+                <a:spcPct val="102000"/>
+              </a:lnSpc>
+              <a:buNone/>
+            </a:pPr>
+            <a:r>
+              <a:rPr lang="en-US" sz="670" dirty="0">
                 <a:solidFill>
                   <a:srgbClr val="3C4043"/>
                 </a:solidFill>
@@ -8255,7 +8124,7 @@
               </a:rPr>
               <a:t>Serverless routing service that validates caller tokens and dispatches requests to the target execution spoke.</a:t>
             </a:r>
-            <a:endParaRPr lang="en-US" sz="720" dirty="0"/>
+            <a:endParaRPr lang="en-US" sz="690" dirty="0"/>
           </a:p>
         </p:txBody>
       </p:sp>
@@ -8267,8 +8136,8 @@
         </p:nvSpPr>
         <p:spPr>
           <a:xfrm>
-            <a:off x="749808" y="2234794"/>
-            <a:ext cx="2889504" cy="615391"/>
+            <a:off x="749808" y="2258568"/>
+            <a:ext cx="2889504" cy="822960"/>
           </a:xfrm>
           <a:prstGeom prst="rect">
             <a:avLst/>
@@ -8292,8 +8161,8 @@
         </p:nvSpPr>
         <p:spPr>
           <a:xfrm>
-            <a:off x="841248" y="2253082"/>
-            <a:ext cx="2706624" cy="578815"/>
+            <a:off x="841248" y="2276856"/>
+            <a:ext cx="2706624" cy="786384"/>
           </a:xfrm>
           <a:prstGeom prst="rect">
             <a:avLst/>
@@ -8302,14 +8171,16 @@
           <a:ln/>
         </p:spPr>
         <p:txBody>
-          <a:bodyPr wrap="square" rtlCol="0" anchor="ctr"/>
-          <a:lstStyle/>
-          <a:p>
-            <a:pPr indent="0" marL="0">
-              <a:buNone/>
-            </a:pPr>
-            <a:r>
-              <a:rPr lang="en-US" sz="780" b="1" dirty="0">
+          <a:bodyPr wrap="square" rtlCol="0" anchor="ctr">
+            <a:normAutofit/>
+          </a:bodyPr>
+          <a:lstStyle/>
+          <a:p>
+            <a:pPr indent="0" marL="0">
+              <a:buNone/>
+            </a:pPr>
+            <a:r>
+              <a:rPr lang="en-US" sz="750" b="1" dirty="0">
                 <a:solidFill>
                   <a:srgbClr val="202124"/>
                 </a:solidFill>
@@ -8324,7 +8195,7 @@
               <a:buNone/>
             </a:pPr>
             <a:r>
-              <a:rPr lang="en-US" sz="670" dirty="0">
+              <a:rPr lang="en-US" sz="650" dirty="0">
                 <a:solidFill>
                   <a:srgbClr val="5F6368"/>
                 </a:solidFill>
@@ -8334,7 +8205,7 @@
               </a:rPr>
               <a:t>Dedicated governance plane providing unified security posture, cryptographic key management, and OpenTelemetry observability.</a:t>
             </a:r>
-            <a:endParaRPr lang="en-US" sz="780" dirty="0"/>
+            <a:endParaRPr lang="en-US" sz="750" dirty="0"/>
           </a:p>
         </p:txBody>
       </p:sp>
@@ -8346,8 +8217,8 @@
         </p:nvSpPr>
         <p:spPr>
           <a:xfrm>
-            <a:off x="3639312" y="2234794"/>
-            <a:ext cx="7790688" cy="615391"/>
+            <a:off x="3639312" y="2258568"/>
+            <a:ext cx="7790688" cy="822960"/>
           </a:xfrm>
           <a:prstGeom prst="rect">
             <a:avLst/>
@@ -8371,8 +8242,8 @@
         </p:nvSpPr>
         <p:spPr>
           <a:xfrm>
-            <a:off x="3749040" y="2253082"/>
-            <a:ext cx="7571232" cy="578815"/>
+            <a:off x="3749040" y="2276856"/>
+            <a:ext cx="7571232" cy="786384"/>
           </a:xfrm>
           <a:prstGeom prst="rect">
             <a:avLst/>
@@ -8381,14 +8252,19 @@
           <a:ln/>
         </p:spPr>
         <p:txBody>
-          <a:bodyPr wrap="square" rtlCol="0" anchor="ctr"/>
-          <a:lstStyle/>
-          <a:p>
-            <a:pPr indent="0" marL="0">
-              <a:buNone/>
-            </a:pPr>
-            <a:r>
-              <a:rPr lang="en-US" sz="720" b="1" dirty="0">
+          <a:bodyPr wrap="square" rtlCol="0" anchor="ctr">
+            <a:normAutofit/>
+          </a:bodyPr>
+          <a:lstStyle/>
+          <a:p>
+            <a:pPr indent="0" marL="0">
+              <a:lnSpc>
+                <a:spcPct val="102000"/>
+              </a:lnSpc>
+              <a:buNone/>
+            </a:pPr>
+            <a:r>
+              <a:rPr lang="en-US" sz="690" b="1" dirty="0">
                 <a:solidFill>
                   <a:srgbClr val="202124"/>
                 </a:solidFill>
@@ -8399,10 +8275,13 @@
               <a:t>• Security Command Center: </a:t>
             </a:r>
             <a:pPr indent="0" marL="0">
-              <a:buNone/>
-            </a:pPr>
-            <a:r>
-              <a:rPr lang="en-US" sz="700" dirty="0">
+              <a:lnSpc>
+                <a:spcPct val="102000"/>
+              </a:lnSpc>
+              <a:buNone/>
+            </a:pPr>
+            <a:r>
+              <a:rPr lang="en-US" sz="670" dirty="0">
                 <a:solidFill>
                   <a:srgbClr val="3C4043"/>
                 </a:solidFill>
@@ -8414,10 +8293,13 @@
 </a:t>
             </a:r>
             <a:pPr indent="0" marL="0">
-              <a:buNone/>
-            </a:pPr>
-            <a:r>
-              <a:rPr lang="en-US" sz="720" b="1" dirty="0">
+              <a:lnSpc>
+                <a:spcPct val="102000"/>
+              </a:lnSpc>
+              <a:buNone/>
+            </a:pPr>
+            <a:r>
+              <a:rPr lang="en-US" sz="690" b="1" dirty="0">
                 <a:solidFill>
                   <a:srgbClr val="202124"/>
                 </a:solidFill>
@@ -8428,10 +8310,13 @@
               <a:t>• 3 Chargeback Models: </a:t>
             </a:r>
             <a:pPr indent="0" marL="0">
-              <a:buNone/>
-            </a:pPr>
-            <a:r>
-              <a:rPr lang="en-US" sz="700" dirty="0">
+              <a:lnSpc>
+                <a:spcPct val="102000"/>
+              </a:lnSpc>
+              <a:buNone/>
+            </a:pPr>
+            <a:r>
+              <a:rPr lang="en-US" sz="670" dirty="0">
                 <a:solidFill>
                   <a:srgbClr val="3C4043"/>
                 </a:solidFill>
@@ -8443,10 +8328,13 @@
 </a:t>
             </a:r>
             <a:pPr indent="0" marL="0">
-              <a:buNone/>
-            </a:pPr>
-            <a:r>
-              <a:rPr lang="en-US" sz="720" b="1" dirty="0">
+              <a:lnSpc>
+                <a:spcPct val="102000"/>
+              </a:lnSpc>
+              <a:buNone/>
+            </a:pPr>
+            <a:r>
+              <a:rPr lang="en-US" sz="690" b="1" dirty="0">
                 <a:solidFill>
                   <a:srgbClr val="202124"/>
                 </a:solidFill>
@@ -8457,10 +8345,13 @@
               <a:t>• BigQuery OTel Sink: </a:t>
             </a:r>
             <a:pPr indent="0" marL="0">
-              <a:buNone/>
-            </a:pPr>
-            <a:r>
-              <a:rPr lang="en-US" sz="700" dirty="0">
+              <a:lnSpc>
+                <a:spcPct val="102000"/>
+              </a:lnSpc>
+              <a:buNone/>
+            </a:pPr>
+            <a:r>
+              <a:rPr lang="en-US" sz="670" dirty="0">
                 <a:solidFill>
                   <a:srgbClr val="3C4043"/>
                 </a:solidFill>
@@ -8470,7 +8361,7 @@
               </a:rPr>
               <a:t>Aggregates audit logs, execution traces, and OpenTelemetry FinOps telemetry into BigQuery.</a:t>
             </a:r>
-            <a:endParaRPr lang="en-US" sz="720" dirty="0"/>
+            <a:endParaRPr lang="en-US" sz="690" dirty="0"/>
           </a:p>
         </p:txBody>
       </p:sp>
@@ -8482,8 +8373,8 @@
         </p:nvSpPr>
         <p:spPr>
           <a:xfrm>
-            <a:off x="749808" y="2850185"/>
-            <a:ext cx="2889504" cy="296266"/>
+            <a:off x="749808" y="3081528"/>
+            <a:ext cx="2889504" cy="338328"/>
           </a:xfrm>
           <a:prstGeom prst="rect">
             <a:avLst/>
@@ -8507,8 +8398,8 @@
         </p:nvSpPr>
         <p:spPr>
           <a:xfrm>
-            <a:off x="841248" y="2868473"/>
-            <a:ext cx="2706624" cy="259690"/>
+            <a:off x="841248" y="3099816"/>
+            <a:ext cx="2706624" cy="301752"/>
           </a:xfrm>
           <a:prstGeom prst="rect">
             <a:avLst/>
@@ -8517,14 +8408,16 @@
           <a:ln/>
         </p:spPr>
         <p:txBody>
-          <a:bodyPr wrap="square" rtlCol="0" anchor="ctr"/>
-          <a:lstStyle/>
-          <a:p>
-            <a:pPr indent="0" marL="0">
-              <a:buNone/>
-            </a:pPr>
-            <a:r>
-              <a:rPr lang="en-US" sz="780" b="1" dirty="0">
+          <a:bodyPr wrap="square" rtlCol="0" anchor="ctr">
+            <a:normAutofit/>
+          </a:bodyPr>
+          <a:lstStyle/>
+          <a:p>
+            <a:pPr indent="0" marL="0">
+              <a:buNone/>
+            </a:pPr>
+            <a:r>
+              <a:rPr lang="en-US" sz="750" b="1" dirty="0">
                 <a:solidFill>
                   <a:srgbClr val="202124"/>
                 </a:solidFill>
@@ -8539,7 +8432,7 @@
               <a:buNone/>
             </a:pPr>
             <a:r>
-              <a:rPr lang="en-US" sz="670" dirty="0">
+              <a:rPr lang="en-US" sz="650" dirty="0">
                 <a:solidFill>
                   <a:srgbClr val="5F6368"/>
                 </a:solidFill>
@@ -8549,7 +8442,7 @@
               </a:rPr>
               <a:t>Identity and resource isolation boundary restricting principal access so workloads.</a:t>
             </a:r>
-            <a:endParaRPr lang="en-US" sz="780" dirty="0"/>
+            <a:endParaRPr lang="en-US" sz="750" dirty="0"/>
           </a:p>
         </p:txBody>
       </p:sp>
@@ -8561,8 +8454,8 @@
         </p:nvSpPr>
         <p:spPr>
           <a:xfrm>
-            <a:off x="3639312" y="2850185"/>
-            <a:ext cx="7790688" cy="296266"/>
+            <a:off x="3639312" y="3081528"/>
+            <a:ext cx="7790688" cy="338328"/>
           </a:xfrm>
           <a:prstGeom prst="rect">
             <a:avLst/>
@@ -8586,8 +8479,8 @@
         </p:nvSpPr>
         <p:spPr>
           <a:xfrm>
-            <a:off x="3749040" y="2868473"/>
-            <a:ext cx="7571232" cy="259690"/>
+            <a:off x="3749040" y="3099816"/>
+            <a:ext cx="7571232" cy="301752"/>
           </a:xfrm>
           <a:prstGeom prst="rect">
             <a:avLst/>
@@ -8596,14 +8489,19 @@
           <a:ln/>
         </p:spPr>
         <p:txBody>
-          <a:bodyPr wrap="square" rtlCol="0" anchor="ctr"/>
-          <a:lstStyle/>
-          <a:p>
-            <a:pPr indent="0" marL="0">
-              <a:buNone/>
-            </a:pPr>
-            <a:r>
-              <a:rPr lang="en-US" sz="720" b="1" dirty="0">
+          <a:bodyPr wrap="square" rtlCol="0" anchor="ctr">
+            <a:normAutofit/>
+          </a:bodyPr>
+          <a:lstStyle/>
+          <a:p>
+            <a:pPr indent="0" marL="0">
+              <a:lnSpc>
+                <a:spcPct val="102000"/>
+              </a:lnSpc>
+              <a:buNone/>
+            </a:pPr>
+            <a:r>
+              <a:rPr lang="en-US" sz="690" b="1" dirty="0">
                 <a:solidFill>
                   <a:srgbClr val="202124"/>
                 </a:solidFill>
@@ -8614,10 +8512,13 @@
               <a:t>• Unified Vertex AI Agent Engine &amp; Google ADK Reference Architecture: </a:t>
             </a:r>
             <a:pPr indent="0" marL="0">
-              <a:buNone/>
-            </a:pPr>
-            <a:r>
-              <a:rPr lang="en-US" sz="700" dirty="0">
+              <a:lnSpc>
+                <a:spcPct val="102000"/>
+              </a:lnSpc>
+              <a:buNone/>
+            </a:pPr>
+            <a:r>
+              <a:rPr lang="en-US" sz="670" dirty="0">
                 <a:solidFill>
                   <a:srgbClr val="3C4043"/>
                 </a:solidFill>
@@ -8627,7 +8528,7 @@
               </a:rPr>
               <a:t>Binds IAM Principal Access Boundary (PAB) policies to spoke principals so credentials and tool calls remain strictly scoped to their authorized boundary.</a:t>
             </a:r>
-            <a:endParaRPr lang="en-US" sz="720" dirty="0"/>
+            <a:endParaRPr lang="en-US" sz="690" dirty="0"/>
           </a:p>
         </p:txBody>
       </p:sp>
@@ -8639,8 +8540,8 @@
         </p:nvSpPr>
         <p:spPr>
           <a:xfrm>
-            <a:off x="749808" y="3146450"/>
-            <a:ext cx="2889504" cy="785470"/>
+            <a:off x="749808" y="3419856"/>
+            <a:ext cx="2889504" cy="822960"/>
           </a:xfrm>
           <a:prstGeom prst="rect">
             <a:avLst/>
@@ -8664,8 +8565,8 @@
         </p:nvSpPr>
         <p:spPr>
           <a:xfrm>
-            <a:off x="841248" y="3164738"/>
-            <a:ext cx="2706624" cy="748894"/>
+            <a:off x="841248" y="3438144"/>
+            <a:ext cx="2706624" cy="786384"/>
           </a:xfrm>
           <a:prstGeom prst="rect">
             <a:avLst/>
@@ -8674,14 +8575,16 @@
           <a:ln/>
         </p:spPr>
         <p:txBody>
-          <a:bodyPr wrap="square" rtlCol="0" anchor="ctr"/>
-          <a:lstStyle/>
-          <a:p>
-            <a:pPr indent="0" marL="0">
-              <a:buNone/>
-            </a:pPr>
-            <a:r>
-              <a:rPr lang="en-US" sz="780" b="1" dirty="0">
+          <a:bodyPr wrap="square" rtlCol="0" anchor="ctr">
+            <a:normAutofit/>
+          </a:bodyPr>
+          <a:lstStyle/>
+          <a:p>
+            <a:pPr indent="0" marL="0">
+              <a:buNone/>
+            </a:pPr>
+            <a:r>
+              <a:rPr lang="en-US" sz="750" b="1" dirty="0">
                 <a:solidFill>
                   <a:srgbClr val="202124"/>
                 </a:solidFill>
@@ -8696,7 +8599,7 @@
               <a:buNone/>
             </a:pPr>
             <a:r>
-              <a:rPr lang="en-US" sz="670" dirty="0">
+              <a:rPr lang="en-US" sz="650" dirty="0">
                 <a:solidFill>
                   <a:srgbClr val="5F6368"/>
                 </a:solidFill>
@@ -8706,7 +8609,7 @@
               </a:rPr>
               <a:t>Isolated Google Cloud execution spokes.</a:t>
             </a:r>
-            <a:endParaRPr lang="en-US" sz="780" dirty="0"/>
+            <a:endParaRPr lang="en-US" sz="750" dirty="0"/>
           </a:p>
         </p:txBody>
       </p:sp>
@@ -8718,8 +8621,8 @@
         </p:nvSpPr>
         <p:spPr>
           <a:xfrm>
-            <a:off x="3639312" y="3146450"/>
-            <a:ext cx="7790688" cy="785470"/>
+            <a:off x="3639312" y="3419856"/>
+            <a:ext cx="7790688" cy="822960"/>
           </a:xfrm>
           <a:prstGeom prst="rect">
             <a:avLst/>
@@ -8743,8 +8646,8 @@
         </p:nvSpPr>
         <p:spPr>
           <a:xfrm>
-            <a:off x="3749040" y="3164738"/>
-            <a:ext cx="7571232" cy="748894"/>
+            <a:off x="3749040" y="3438144"/>
+            <a:ext cx="7571232" cy="786384"/>
           </a:xfrm>
           <a:prstGeom prst="rect">
             <a:avLst/>
@@ -8753,14 +8656,19 @@
           <a:ln/>
         </p:spPr>
         <p:txBody>
-          <a:bodyPr wrap="square" rtlCol="0" anchor="ctr"/>
-          <a:lstStyle/>
-          <a:p>
-            <a:pPr indent="0" marL="0">
-              <a:buNone/>
-            </a:pPr>
-            <a:r>
-              <a:rPr lang="en-US" sz="720" b="1" dirty="0">
+          <a:bodyPr wrap="square" rtlCol="0" anchor="ctr">
+            <a:normAutofit/>
+          </a:bodyPr>
+          <a:lstStyle/>
+          <a:p>
+            <a:pPr indent="0" marL="0">
+              <a:lnSpc>
+                <a:spcPct val="102000"/>
+              </a:lnSpc>
+              <a:buNone/>
+            </a:pPr>
+            <a:r>
+              <a:rPr lang="en-US" sz="690" b="1" dirty="0">
                 <a:solidFill>
                   <a:srgbClr val="202124"/>
                 </a:solidFill>
@@ -8771,10 +8679,13 @@
               <a:t>• Thinking Budget Cap: </a:t>
             </a:r>
             <a:pPr indent="0" marL="0">
-              <a:buNone/>
-            </a:pPr>
-            <a:r>
-              <a:rPr lang="en-US" sz="700" dirty="0">
+              <a:lnSpc>
+                <a:spcPct val="102000"/>
+              </a:lnSpc>
+              <a:buNone/>
+            </a:pPr>
+            <a:r>
+              <a:rPr lang="en-US" sz="670" dirty="0">
                 <a:solidFill>
                   <a:srgbClr val="3C4043"/>
                 </a:solidFill>
@@ -8786,10 +8697,13 @@
 </a:t>
             </a:r>
             <a:pPr indent="0" marL="0">
-              <a:buNone/>
-            </a:pPr>
-            <a:r>
-              <a:rPr lang="en-US" sz="720" b="1" dirty="0">
+              <a:lnSpc>
+                <a:spcPct val="102000"/>
+              </a:lnSpc>
+              <a:buNone/>
+            </a:pPr>
+            <a:r>
+              <a:rPr lang="en-US" sz="690" b="1" dirty="0">
                 <a:solidFill>
                   <a:srgbClr val="202124"/>
                 </a:solidFill>
@@ -8800,10 +8714,13 @@
               <a:t>• Valkey Rate Bulkhead: </a:t>
             </a:r>
             <a:pPr indent="0" marL="0">
-              <a:buNone/>
-            </a:pPr>
-            <a:r>
-              <a:rPr lang="en-US" sz="700" dirty="0">
+              <a:lnSpc>
+                <a:spcPct val="102000"/>
+              </a:lnSpc>
+              <a:buNone/>
+            </a:pPr>
+            <a:r>
+              <a:rPr lang="en-US" sz="670" dirty="0">
                 <a:solidFill>
                   <a:srgbClr val="3C4043"/>
                 </a:solidFill>
@@ -8815,10 +8732,13 @@
 </a:t>
             </a:r>
             <a:pPr indent="0" marL="0">
-              <a:buNone/>
-            </a:pPr>
-            <a:r>
-              <a:rPr lang="en-US" sz="720" b="1" dirty="0">
+              <a:lnSpc>
+                <a:spcPct val="102000"/>
+              </a:lnSpc>
+              <a:buNone/>
+            </a:pPr>
+            <a:r>
+              <a:rPr lang="en-US" sz="690" b="1" dirty="0">
                 <a:solidFill>
                   <a:srgbClr val="202124"/>
                 </a:solidFill>
@@ -8829,10 +8749,13 @@
               <a:t>• 2LO &amp; 3LO Auth Mgr: </a:t>
             </a:r>
             <a:pPr indent="0" marL="0">
-              <a:buNone/>
-            </a:pPr>
-            <a:r>
-              <a:rPr lang="en-US" sz="700" dirty="0">
+              <a:lnSpc>
+                <a:spcPct val="102000"/>
+              </a:lnSpc>
+              <a:buNone/>
+            </a:pPr>
+            <a:r>
+              <a:rPr lang="en-US" sz="670" dirty="0">
                 <a:solidFill>
                   <a:srgbClr val="3C4043"/>
                 </a:solidFill>
@@ -8844,10 +8767,13 @@
 </a:t>
             </a:r>
             <a:pPr indent="0" marL="0">
-              <a:buNone/>
-            </a:pPr>
-            <a:r>
-              <a:rPr lang="en-US" sz="720" b="1" dirty="0">
+              <a:lnSpc>
+                <a:spcPct val="102000"/>
+              </a:lnSpc>
+              <a:buNone/>
+            </a:pPr>
+            <a:r>
+              <a:rPr lang="en-US" sz="690" b="1" dirty="0">
                 <a:solidFill>
                   <a:srgbClr val="202124"/>
                 </a:solidFill>
@@ -8858,10 +8784,13 @@
               <a:t>• AlloyDB RLS &amp; L1–L5: </a:t>
             </a:r>
             <a:pPr indent="0" marL="0">
-              <a:buNone/>
-            </a:pPr>
-            <a:r>
-              <a:rPr lang="en-US" sz="700" dirty="0">
+              <a:lnSpc>
+                <a:spcPct val="102000"/>
+              </a:lnSpc>
+              <a:buNone/>
+            </a:pPr>
+            <a:r>
+              <a:rPr lang="en-US" sz="670" dirty="0">
                 <a:solidFill>
                   <a:srgbClr val="3C4043"/>
                 </a:solidFill>
@@ -8871,7 +8800,7 @@
               </a:rPr>
               <a:t>Isolated persistence layer enforcing access boundaries, vector namespaces, and encryption at rest.</a:t>
             </a:r>
-            <a:endParaRPr lang="en-US" sz="720" dirty="0"/>
+            <a:endParaRPr lang="en-US" sz="690" dirty="0"/>
           </a:p>
         </p:txBody>
       </p:sp>
@@ -8883,7 +8812,7 @@
         </p:nvSpPr>
         <p:spPr>
           <a:xfrm>
-            <a:off x="749808" y="4041648"/>
+            <a:off x="749808" y="4315968"/>
             <a:ext cx="10680192" cy="0"/>
           </a:xfrm>
           <a:prstGeom prst="line">
@@ -8906,8 +8835,8 @@
         </p:nvSpPr>
         <p:spPr>
           <a:xfrm>
-            <a:off x="749808" y="4114800"/>
-            <a:ext cx="10680192" cy="256032"/>
+            <a:off x="749808" y="4370832"/>
+            <a:ext cx="10680192" cy="237744"/>
           </a:xfrm>
           <a:prstGeom prst="rect">
             <a:avLst/>
@@ -8923,7 +8852,7 @@
               <a:buNone/>
             </a:pPr>
             <a:r>
-              <a:rPr lang="en-US" sz="1300" dirty="0">
+              <a:rPr lang="en-US" sz="1250" dirty="0">
                 <a:solidFill>
                   <a:srgbClr val="202124"/>
                 </a:solidFill>
@@ -8933,7 +8862,7 @@
               </a:rPr>
               <a:t>Agentic flow</a:t>
             </a:r>
-            <a:endParaRPr lang="en-US" sz="1300" dirty="0"/>
+            <a:endParaRPr lang="en-US" sz="1250" dirty="0"/>
           </a:p>
         </p:txBody>
       </p:sp>
@@ -8945,8 +8874,8 @@
         </p:nvSpPr>
         <p:spPr>
           <a:xfrm>
-            <a:off x="749808" y="4407408"/>
-            <a:ext cx="10680192" cy="2139696"/>
+            <a:off x="749808" y="4626864"/>
+            <a:ext cx="10680192" cy="1901952"/>
           </a:xfrm>
           <a:prstGeom prst="rect">
             <a:avLst/>
@@ -8955,17 +8884,19 @@
           <a:ln/>
         </p:spPr>
         <p:txBody>
-          <a:bodyPr wrap="square" rtlCol="0" anchor="t"/>
-          <a:lstStyle/>
-          <a:p>
-            <a:pPr indent="0" marL="0">
-              <a:lnSpc>
-                <a:spcPct val="108000"/>
-              </a:lnSpc>
-              <a:buNone/>
-            </a:pPr>
-            <a:r>
-              <a:rPr lang="en-US" sz="740" b="1" dirty="0">
+          <a:bodyPr wrap="square" rtlCol="0" anchor="t">
+            <a:normAutofit/>
+          </a:bodyPr>
+          <a:lstStyle/>
+          <a:p>
+            <a:pPr indent="0" marL="0">
+              <a:lnSpc>
+                <a:spcPct val="106000"/>
+              </a:lnSpc>
+              <a:buNone/>
+            </a:pPr>
+            <a:r>
+              <a:rPr lang="en-US" sz="730" b="1" dirty="0">
                 <a:solidFill>
                   <a:srgbClr val="202124"/>
                 </a:solidFill>
@@ -8977,12 +8908,12 @@
             </a:r>
             <a:pPr indent="0" marL="0">
               <a:lnSpc>
-                <a:spcPct val="108000"/>
-              </a:lnSpc>
-              <a:buNone/>
-            </a:pPr>
-            <a:r>
-              <a:rPr lang="en-US" sz="730" dirty="0">
+                <a:spcPct val="106000"/>
+              </a:lnSpc>
+              <a:buNone/>
+            </a:pPr>
+            <a:r>
+              <a:rPr lang="en-US" sz="720" dirty="0">
                 <a:solidFill>
                   <a:srgbClr val="3C4043"/>
                 </a:solidFill>
@@ -8995,12 +8926,12 @@
             </a:r>
             <a:pPr indent="0" marL="0">
               <a:lnSpc>
-                <a:spcPct val="108000"/>
-              </a:lnSpc>
-              <a:buNone/>
-            </a:pPr>
-            <a:r>
-              <a:rPr lang="en-US" sz="740" b="1" dirty="0">
+                <a:spcPct val="106000"/>
+              </a:lnSpc>
+              <a:buNone/>
+            </a:pPr>
+            <a:r>
+              <a:rPr lang="en-US" sz="730" b="1" dirty="0">
                 <a:solidFill>
                   <a:srgbClr val="202124"/>
                 </a:solidFill>
@@ -9012,12 +8943,12 @@
             </a:r>
             <a:pPr indent="0" marL="0">
               <a:lnSpc>
-                <a:spcPct val="108000"/>
-              </a:lnSpc>
-              <a:buNone/>
-            </a:pPr>
-            <a:r>
-              <a:rPr lang="en-US" sz="730" dirty="0">
+                <a:spcPct val="106000"/>
+              </a:lnSpc>
+              <a:buNone/>
+            </a:pPr>
+            <a:r>
+              <a:rPr lang="en-US" sz="720" dirty="0">
                 <a:solidFill>
                   <a:srgbClr val="3C4043"/>
                 </a:solidFill>
@@ -9025,17 +8956,17 @@
                 <a:ea typeface="Arial" pitchFamily="34" charset="-122"/>
                 <a:cs typeface="Arial" pitchFamily="34" charset="-120"/>
               </a:rPr>
-              <a:t>After passing policy and security checks across Hop 1: Edge PEP, Hop 4: Model Armor, and Hop 2: Catalog PDP, the request is forwarded to Architecture Selector.
+              <a:t>After passing policy and security checks across Hop 1: Cloud Armor, Hop 4: Model Armor, and Hop 2: Catalog PDP, the request is forwarded to Architecture Selector.
 </a:t>
             </a:r>
             <a:pPr indent="0" marL="0">
               <a:lnSpc>
-                <a:spcPct val="108000"/>
-              </a:lnSpc>
-              <a:buNone/>
-            </a:pPr>
-            <a:r>
-              <a:rPr lang="en-US" sz="740" b="1" dirty="0">
+                <a:spcPct val="106000"/>
+              </a:lnSpc>
+              <a:buNone/>
+            </a:pPr>
+            <a:r>
+              <a:rPr lang="en-US" sz="730" b="1" dirty="0">
                 <a:solidFill>
                   <a:srgbClr val="202124"/>
                 </a:solidFill>
@@ -9047,12 +8978,12 @@
             </a:r>
             <a:pPr indent="0" marL="0">
               <a:lnSpc>
-                <a:spcPct val="108000"/>
-              </a:lnSpc>
-              <a:buNone/>
-            </a:pPr>
-            <a:r>
-              <a:rPr lang="en-US" sz="730" dirty="0">
+                <a:spcPct val="106000"/>
+              </a:lnSpc>
+              <a:buNone/>
+            </a:pPr>
+            <a:r>
+              <a:rPr lang="en-US" sz="720" dirty="0">
                 <a:solidFill>
                   <a:srgbClr val="3C4043"/>
                 </a:solidFill>
@@ -9065,12 +8996,12 @@
             </a:r>
             <a:pPr indent="0" marL="0">
               <a:lnSpc>
-                <a:spcPct val="108000"/>
-              </a:lnSpc>
-              <a:buNone/>
-            </a:pPr>
-            <a:r>
-              <a:rPr lang="en-US" sz="740" b="1" dirty="0">
+                <a:spcPct val="106000"/>
+              </a:lnSpc>
+              <a:buNone/>
+            </a:pPr>
+            <a:r>
+              <a:rPr lang="en-US" sz="730" b="1" dirty="0">
                 <a:solidFill>
                   <a:srgbClr val="202124"/>
                 </a:solidFill>
@@ -9082,12 +9013,12 @@
             </a:r>
             <a:pPr indent="0" marL="0">
               <a:lnSpc>
-                <a:spcPct val="108000"/>
-              </a:lnSpc>
-              <a:buNone/>
-            </a:pPr>
-            <a:r>
-              <a:rPr lang="en-US" sz="730" dirty="0">
+                <a:spcPct val="106000"/>
+              </a:lnSpc>
+              <a:buNone/>
+            </a:pPr>
+            <a:r>
+              <a:rPr lang="en-US" sz="720" dirty="0">
                 <a:solidFill>
                   <a:srgbClr val="3C4043"/>
                 </a:solidFill>
@@ -9100,12 +9031,12 @@
             </a:r>
             <a:pPr indent="0" marL="0">
               <a:lnSpc>
-                <a:spcPct val="108000"/>
-              </a:lnSpc>
-              <a:buNone/>
-            </a:pPr>
-            <a:r>
-              <a:rPr lang="en-US" sz="700" b="1" dirty="0">
+                <a:spcPct val="106000"/>
+              </a:lnSpc>
+              <a:buNone/>
+            </a:pPr>
+            <a:r>
+              <a:rPr lang="en-US" sz="690" b="1" dirty="0">
                 <a:solidFill>
                   <a:srgbClr val="202124"/>
                 </a:solidFill>
@@ -9117,12 +9048,12 @@
             </a:r>
             <a:pPr indent="0" marL="0">
               <a:lnSpc>
-                <a:spcPct val="108000"/>
-              </a:lnSpc>
-              <a:buNone/>
-            </a:pPr>
-            <a:r>
-              <a:rPr lang="en-US" sz="690" dirty="0">
+                <a:spcPct val="106000"/>
+              </a:lnSpc>
+              <a:buNone/>
+            </a:pPr>
+            <a:r>
+              <a:rPr lang="en-US" sz="680" dirty="0">
                 <a:solidFill>
                   <a:srgbClr val="3C4043"/>
                 </a:solidFill>
@@ -9135,12 +9066,12 @@
             </a:r>
             <a:pPr indent="0" marL="0">
               <a:lnSpc>
-                <a:spcPct val="108000"/>
-              </a:lnSpc>
-              <a:buNone/>
-            </a:pPr>
-            <a:r>
-              <a:rPr lang="en-US" sz="700" b="1" dirty="0">
+                <a:spcPct val="106000"/>
+              </a:lnSpc>
+              <a:buNone/>
+            </a:pPr>
+            <a:r>
+              <a:rPr lang="en-US" sz="690" b="1" dirty="0">
                 <a:solidFill>
                   <a:srgbClr val="202124"/>
                 </a:solidFill>
@@ -9152,12 +9083,12 @@
             </a:r>
             <a:pPr indent="0" marL="0">
               <a:lnSpc>
-                <a:spcPct val="108000"/>
-              </a:lnSpc>
-              <a:buNone/>
-            </a:pPr>
-            <a:r>
-              <a:rPr lang="en-US" sz="690" dirty="0">
+                <a:spcPct val="106000"/>
+              </a:lnSpc>
+              <a:buNone/>
+            </a:pPr>
+            <a:r>
+              <a:rPr lang="en-US" sz="680" dirty="0">
                 <a:solidFill>
                   <a:srgbClr val="3C4043"/>
                 </a:solidFill>
@@ -9170,12 +9101,12 @@
             </a:r>
             <a:pPr indent="0" marL="0">
               <a:lnSpc>
-                <a:spcPct val="108000"/>
-              </a:lnSpc>
-              <a:buNone/>
-            </a:pPr>
-            <a:r>
-              <a:rPr lang="en-US" sz="700" b="1" dirty="0">
+                <a:spcPct val="106000"/>
+              </a:lnSpc>
+              <a:buNone/>
+            </a:pPr>
+            <a:r>
+              <a:rPr lang="en-US" sz="690" b="1" dirty="0">
                 <a:solidFill>
                   <a:srgbClr val="202124"/>
                 </a:solidFill>
@@ -9187,12 +9118,12 @@
             </a:r>
             <a:pPr indent="0" marL="0">
               <a:lnSpc>
-                <a:spcPct val="108000"/>
-              </a:lnSpc>
-              <a:buNone/>
-            </a:pPr>
-            <a:r>
-              <a:rPr lang="en-US" sz="690" dirty="0">
+                <a:spcPct val="106000"/>
+              </a:lnSpc>
+              <a:buNone/>
+            </a:pPr>
+            <a:r>
+              <a:rPr lang="en-US" sz="680" dirty="0">
                 <a:solidFill>
                   <a:srgbClr val="3C4043"/>
                 </a:solidFill>
@@ -9205,12 +9136,12 @@
             </a:r>
             <a:pPr indent="0" marL="0">
               <a:lnSpc>
-                <a:spcPct val="108000"/>
-              </a:lnSpc>
-              <a:buNone/>
-            </a:pPr>
-            <a:r>
-              <a:rPr lang="en-US" sz="700" b="1" dirty="0">
+                <a:spcPct val="106000"/>
+              </a:lnSpc>
+              <a:buNone/>
+            </a:pPr>
+            <a:r>
+              <a:rPr lang="en-US" sz="690" b="1" dirty="0">
                 <a:solidFill>
                   <a:srgbClr val="202124"/>
                 </a:solidFill>
@@ -9222,12 +9153,12 @@
             </a:r>
             <a:pPr indent="0" marL="0">
               <a:lnSpc>
-                <a:spcPct val="108000"/>
-              </a:lnSpc>
-              <a:buNone/>
-            </a:pPr>
-            <a:r>
-              <a:rPr lang="en-US" sz="690" dirty="0">
+                <a:spcPct val="106000"/>
+              </a:lnSpc>
+              <a:buNone/>
+            </a:pPr>
+            <a:r>
+              <a:rPr lang="en-US" sz="680" dirty="0">
                 <a:solidFill>
                   <a:srgbClr val="3C4043"/>
                 </a:solidFill>
@@ -9240,12 +9171,12 @@
             </a:r>
             <a:pPr indent="0" marL="0">
               <a:lnSpc>
-                <a:spcPct val="108000"/>
-              </a:lnSpc>
-              <a:buNone/>
-            </a:pPr>
-            <a:r>
-              <a:rPr lang="en-US" sz="740" b="1" dirty="0">
+                <a:spcPct val="106000"/>
+              </a:lnSpc>
+              <a:buNone/>
+            </a:pPr>
+            <a:r>
+              <a:rPr lang="en-US" sz="730" b="1" dirty="0">
                 <a:solidFill>
                   <a:srgbClr val="202124"/>
                 </a:solidFill>
@@ -9257,12 +9188,12 @@
             </a:r>
             <a:pPr indent="0" marL="0">
               <a:lnSpc>
-                <a:spcPct val="108000"/>
-              </a:lnSpc>
-              <a:buNone/>
-            </a:pPr>
-            <a:r>
-              <a:rPr lang="en-US" sz="730" dirty="0">
+                <a:spcPct val="106000"/>
+              </a:lnSpc>
+              <a:buNone/>
+            </a:pPr>
+            <a:r>
+              <a:rPr lang="en-US" sz="720" dirty="0">
                 <a:solidFill>
                   <a:srgbClr val="3C4043"/>
                 </a:solidFill>
@@ -9275,12 +9206,12 @@
             </a:r>
             <a:pPr indent="0" marL="0">
               <a:lnSpc>
-                <a:spcPct val="108000"/>
-              </a:lnSpc>
-              <a:buNone/>
-            </a:pPr>
-            <a:r>
-              <a:rPr lang="en-US" sz="740" b="1" dirty="0">
+                <a:spcPct val="106000"/>
+              </a:lnSpc>
+              <a:buNone/>
+            </a:pPr>
+            <a:r>
+              <a:rPr lang="en-US" sz="730" b="1" dirty="0">
                 <a:solidFill>
                   <a:srgbClr val="202124"/>
                 </a:solidFill>
@@ -9292,12 +9223,12 @@
             </a:r>
             <a:pPr indent="0" marL="0">
               <a:lnSpc>
-                <a:spcPct val="108000"/>
-              </a:lnSpc>
-              <a:buNone/>
-            </a:pPr>
-            <a:r>
-              <a:rPr lang="en-US" sz="730" dirty="0">
+                <a:spcPct val="106000"/>
+              </a:lnSpc>
+              <a:buNone/>
+            </a:pPr>
+            <a:r>
+              <a:rPr lang="en-US" sz="720" dirty="0">
                 <a:solidFill>
                   <a:srgbClr val="3C4043"/>
                 </a:solidFill>
@@ -9310,12 +9241,12 @@
             </a:r>
             <a:pPr indent="0" marL="0">
               <a:lnSpc>
-                <a:spcPct val="108000"/>
-              </a:lnSpc>
-              <a:buNone/>
-            </a:pPr>
-            <a:r>
-              <a:rPr lang="en-US" sz="740" b="1" dirty="0">
+                <a:spcPct val="106000"/>
+              </a:lnSpc>
+              <a:buNone/>
+            </a:pPr>
+            <a:r>
+              <a:rPr lang="en-US" sz="730" b="1" dirty="0">
                 <a:solidFill>
                   <a:srgbClr val="202124"/>
                 </a:solidFill>
@@ -9327,12 +9258,12 @@
             </a:r>
             <a:pPr indent="0" marL="0">
               <a:lnSpc>
-                <a:spcPct val="108000"/>
-              </a:lnSpc>
-              <a:buNone/>
-            </a:pPr>
-            <a:r>
-              <a:rPr lang="en-US" sz="730" dirty="0">
+                <a:spcPct val="106000"/>
+              </a:lnSpc>
+              <a:buNone/>
+            </a:pPr>
+            <a:r>
+              <a:rPr lang="en-US" sz="720" dirty="0">
                 <a:solidFill>
                   <a:srgbClr val="3C4043"/>
                 </a:solidFill>
@@ -9343,7 +9274,7 @@
               <a:t>The verified response returns to the caller through the Triad Pillar 1: Zero-Trust Cryptographic Security, while structured OpenTelemetry audit and FinOps spans stream to the Triad Pillar 3: Privacy- Preserving OTel &amp; Chargeback.
 </a:t>
             </a:r>
-            <a:endParaRPr lang="en-US" sz="740" dirty="0"/>
+            <a:endParaRPr lang="en-US" sz="730" dirty="0"/>
           </a:p>
         </p:txBody>
       </p:sp>
@@ -9515,8 +9446,8 @@
         </p:nvSpPr>
         <p:spPr>
           <a:xfrm>
-            <a:off x="749808" y="658368"/>
-            <a:ext cx="10680192" cy="310896"/>
+            <a:off x="749808" y="621792"/>
+            <a:ext cx="10680192" cy="274320"/>
           </a:xfrm>
           <a:prstGeom prst="rect">
             <a:avLst/>
@@ -9532,7 +9463,7 @@
               <a:buNone/>
             </a:pPr>
             <a:r>
-              <a:rPr lang="en-US" sz="1550" dirty="0">
+              <a:rPr lang="en-US" sz="1500" dirty="0">
                 <a:solidFill>
                   <a:srgbClr val="202124"/>
                 </a:solidFill>
@@ -9542,7 +9473,7 @@
               </a:rPr>
               <a:t>Products used</a:t>
             </a:r>
-            <a:endParaRPr lang="en-US" sz="1550" dirty="0"/>
+            <a:endParaRPr lang="en-US" sz="1500" dirty="0"/>
           </a:p>
         </p:txBody>
       </p:sp>
@@ -9554,8 +9485,8 @@
         </p:nvSpPr>
         <p:spPr>
           <a:xfrm>
-            <a:off x="749808" y="1005840"/>
-            <a:ext cx="10680192" cy="219456"/>
+            <a:off x="749808" y="914400"/>
+            <a:ext cx="10680192" cy="329184"/>
           </a:xfrm>
           <a:prstGeom prst="rect">
             <a:avLst/>
@@ -9564,14 +9495,14 @@
           <a:ln/>
         </p:spPr>
         <p:txBody>
-          <a:bodyPr wrap="square" rtlCol="0" anchor="ctr"/>
-          <a:lstStyle/>
-          <a:p>
-            <a:pPr indent="0" marL="0">
-              <a:buNone/>
-            </a:pPr>
-            <a:r>
-              <a:rPr lang="en-US" sz="920" dirty="0">
+          <a:bodyPr wrap="square" rtlCol="0" anchor="t"/>
+          <a:lstStyle/>
+          <a:p>
+            <a:pPr indent="0" marL="0">
+              <a:buNone/>
+            </a:pPr>
+            <a:r>
+              <a:rPr lang="en-US" sz="860" dirty="0">
                 <a:solidFill>
                   <a:srgbClr val="3C4043"/>
                 </a:solidFill>
@@ -9581,7 +9512,7 @@
               </a:rPr>
               <a:t>This reference architecture uses the following Google Cloud services and open-source frameworks to implement Agent Deployment Models: Navigating the Agentic Trilemma Across Pool, Bridge &amp; Silo.</a:t>
             </a:r>
-            <a:endParaRPr lang="en-US" sz="920" dirty="0"/>
+            <a:endParaRPr lang="en-US" sz="860" dirty="0"/>
           </a:p>
         </p:txBody>
       </p:sp>
@@ -9593,8 +9524,8 @@
         </p:nvSpPr>
         <p:spPr>
           <a:xfrm>
-            <a:off x="877824" y="1280160"/>
-            <a:ext cx="10552176" cy="1993392"/>
+            <a:off x="877824" y="1261872"/>
+            <a:ext cx="10552176" cy="2011680"/>
           </a:xfrm>
           <a:prstGeom prst="rect">
             <a:avLst/>
@@ -9603,17 +9534,19 @@
           <a:ln/>
         </p:spPr>
         <p:txBody>
-          <a:bodyPr wrap="square" rtlCol="0" anchor="t"/>
-          <a:lstStyle/>
-          <a:p>
-            <a:pPr indent="0" marL="0">
-              <a:lnSpc>
-                <a:spcPct val="124000"/>
-              </a:lnSpc>
-              <a:buNone/>
-            </a:pPr>
-            <a:r>
-              <a:rPr lang="en-US" sz="840" b="1" dirty="0">
+          <a:bodyPr wrap="square" rtlCol="0" anchor="t">
+            <a:normAutofit/>
+          </a:bodyPr>
+          <a:lstStyle/>
+          <a:p>
+            <a:pPr indent="0" marL="0">
+              <a:lnSpc>
+                <a:spcPct val="118000"/>
+              </a:lnSpc>
+              <a:buNone/>
+            </a:pPr>
+            <a:r>
+              <a:rPr lang="en-US" sz="810" b="1" dirty="0">
                 <a:solidFill>
                   <a:srgbClr val="1A73E8"/>
                 </a:solidFill>
@@ -9625,12 +9558,12 @@
             </a:r>
             <a:pPr indent="0" marL="0">
               <a:lnSpc>
-                <a:spcPct val="124000"/>
-              </a:lnSpc>
-              <a:buNone/>
-            </a:pPr>
-            <a:r>
-              <a:rPr lang="en-US" sz="820" dirty="0">
+                <a:spcPct val="118000"/>
+              </a:lnSpc>
+              <a:buNone/>
+            </a:pPr>
+            <a:r>
+              <a:rPr lang="en-US" sz="790" dirty="0">
                 <a:solidFill>
                   <a:srgbClr val="3C4043"/>
                 </a:solidFill>
@@ -9643,12 +9576,12 @@
             </a:r>
             <a:pPr indent="0" marL="0">
               <a:lnSpc>
-                <a:spcPct val="124000"/>
-              </a:lnSpc>
-              <a:buNone/>
-            </a:pPr>
-            <a:r>
-              <a:rPr lang="en-US" sz="840" b="1" dirty="0">
+                <a:spcPct val="118000"/>
+              </a:lnSpc>
+              <a:buNone/>
+            </a:pPr>
+            <a:r>
+              <a:rPr lang="en-US" sz="810" b="1" dirty="0">
                 <a:solidFill>
                   <a:srgbClr val="1A73E8"/>
                 </a:solidFill>
@@ -9660,12 +9593,12 @@
             </a:r>
             <a:pPr indent="0" marL="0">
               <a:lnSpc>
-                <a:spcPct val="124000"/>
-              </a:lnSpc>
-              <a:buNone/>
-            </a:pPr>
-            <a:r>
-              <a:rPr lang="en-US" sz="820" dirty="0">
+                <a:spcPct val="118000"/>
+              </a:lnSpc>
+              <a:buNone/>
+            </a:pPr>
+            <a:r>
+              <a:rPr lang="en-US" sz="790" dirty="0">
                 <a:solidFill>
                   <a:srgbClr val="3C4043"/>
                 </a:solidFill>
@@ -9678,12 +9611,12 @@
             </a:r>
             <a:pPr indent="0" marL="0">
               <a:lnSpc>
-                <a:spcPct val="124000"/>
-              </a:lnSpc>
-              <a:buNone/>
-            </a:pPr>
-            <a:r>
-              <a:rPr lang="en-US" sz="840" b="1" dirty="0">
+                <a:spcPct val="118000"/>
+              </a:lnSpc>
+              <a:buNone/>
+            </a:pPr>
+            <a:r>
+              <a:rPr lang="en-US" sz="810" b="1" dirty="0">
                 <a:solidFill>
                   <a:srgbClr val="1A73E8"/>
                 </a:solidFill>
@@ -9695,12 +9628,12 @@
             </a:r>
             <a:pPr indent="0" marL="0">
               <a:lnSpc>
-                <a:spcPct val="124000"/>
-              </a:lnSpc>
-              <a:buNone/>
-            </a:pPr>
-            <a:r>
-              <a:rPr lang="en-US" sz="820" dirty="0">
+                <a:spcPct val="118000"/>
+              </a:lnSpc>
+              <a:buNone/>
+            </a:pPr>
+            <a:r>
+              <a:rPr lang="en-US" sz="790" dirty="0">
                 <a:solidFill>
                   <a:srgbClr val="3C4043"/>
                 </a:solidFill>
@@ -9713,12 +9646,12 @@
             </a:r>
             <a:pPr indent="0" marL="0">
               <a:lnSpc>
-                <a:spcPct val="124000"/>
-              </a:lnSpc>
-              <a:buNone/>
-            </a:pPr>
-            <a:r>
-              <a:rPr lang="en-US" sz="840" b="1" dirty="0">
+                <a:spcPct val="118000"/>
+              </a:lnSpc>
+              <a:buNone/>
+            </a:pPr>
+            <a:r>
+              <a:rPr lang="en-US" sz="810" b="1" dirty="0">
                 <a:solidFill>
                   <a:srgbClr val="1A73E8"/>
                 </a:solidFill>
@@ -9730,12 +9663,12 @@
             </a:r>
             <a:pPr indent="0" marL="0">
               <a:lnSpc>
-                <a:spcPct val="124000"/>
-              </a:lnSpc>
-              <a:buNone/>
-            </a:pPr>
-            <a:r>
-              <a:rPr lang="en-US" sz="820" dirty="0">
+                <a:spcPct val="118000"/>
+              </a:lnSpc>
+              <a:buNone/>
+            </a:pPr>
+            <a:r>
+              <a:rPr lang="en-US" sz="790" dirty="0">
                 <a:solidFill>
                   <a:srgbClr val="3C4043"/>
                 </a:solidFill>
@@ -9748,12 +9681,12 @@
             </a:r>
             <a:pPr indent="0" marL="0">
               <a:lnSpc>
-                <a:spcPct val="124000"/>
-              </a:lnSpc>
-              <a:buNone/>
-            </a:pPr>
-            <a:r>
-              <a:rPr lang="en-US" sz="840" b="1" dirty="0">
+                <a:spcPct val="118000"/>
+              </a:lnSpc>
+              <a:buNone/>
+            </a:pPr>
+            <a:r>
+              <a:rPr lang="en-US" sz="810" b="1" dirty="0">
                 <a:solidFill>
                   <a:srgbClr val="1A73E8"/>
                 </a:solidFill>
@@ -9765,12 +9698,12 @@
             </a:r>
             <a:pPr indent="0" marL="0">
               <a:lnSpc>
-                <a:spcPct val="124000"/>
-              </a:lnSpc>
-              <a:buNone/>
-            </a:pPr>
-            <a:r>
-              <a:rPr lang="en-US" sz="820" dirty="0">
+                <a:spcPct val="118000"/>
+              </a:lnSpc>
+              <a:buNone/>
+            </a:pPr>
+            <a:r>
+              <a:rPr lang="en-US" sz="790" dirty="0">
                 <a:solidFill>
                   <a:srgbClr val="3C4043"/>
                 </a:solidFill>
@@ -9783,12 +9716,12 @@
             </a:r>
             <a:pPr indent="0" marL="0">
               <a:lnSpc>
-                <a:spcPct val="124000"/>
-              </a:lnSpc>
-              <a:buNone/>
-            </a:pPr>
-            <a:r>
-              <a:rPr lang="en-US" sz="840" b="1" dirty="0">
+                <a:spcPct val="118000"/>
+              </a:lnSpc>
+              <a:buNone/>
+            </a:pPr>
+            <a:r>
+              <a:rPr lang="en-US" sz="810" b="1" dirty="0">
                 <a:solidFill>
                   <a:srgbClr val="1A73E8"/>
                 </a:solidFill>
@@ -9800,12 +9733,12 @@
             </a:r>
             <a:pPr indent="0" marL="0">
               <a:lnSpc>
-                <a:spcPct val="124000"/>
-              </a:lnSpc>
-              <a:buNone/>
-            </a:pPr>
-            <a:r>
-              <a:rPr lang="en-US" sz="820" dirty="0">
+                <a:spcPct val="118000"/>
+              </a:lnSpc>
+              <a:buNone/>
+            </a:pPr>
+            <a:r>
+              <a:rPr lang="en-US" sz="790" dirty="0">
                 <a:solidFill>
                   <a:srgbClr val="3C4043"/>
                 </a:solidFill>
@@ -9815,43 +9748,165 @@
               </a:rPr>
               <a:t>Serverless enterprise data warehouse aggregating OpenTelemetry execution spans, audit logs, and token chargeback analytics.</a:t>
             </a:r>
+            <a:endParaRPr lang="en-US" sz="810" dirty="0"/>
+          </a:p>
+        </p:txBody>
+      </p:sp>
+      <p:sp>
+        <p:nvSpPr>
+          <p:cNvPr id="9" name="Shape 7"/>
+          <p:cNvSpPr/>
+          <p:nvPr/>
+        </p:nvSpPr>
+        <p:spPr>
+          <a:xfrm>
+            <a:off x="749808" y="3346704"/>
+            <a:ext cx="10680192" cy="0"/>
+          </a:xfrm>
+          <a:prstGeom prst="line">
+            <a:avLst/>
+          </a:prstGeom>
+          <a:noFill/>
+          <a:ln w="9525">
+            <a:solidFill>
+              <a:srgbClr val="DADCE0"/>
+            </a:solidFill>
+            <a:prstDash val="solid"/>
+          </a:ln>
+        </p:spPr>
+      </p:sp>
+      <p:sp>
+        <p:nvSpPr>
+          <p:cNvPr id="10" name="Text 8"/>
+          <p:cNvSpPr/>
+          <p:nvPr/>
+        </p:nvSpPr>
+        <p:spPr>
+          <a:xfrm>
+            <a:off x="749808" y="3419856"/>
+            <a:ext cx="10680192" cy="274320"/>
+          </a:xfrm>
+          <a:prstGeom prst="rect">
+            <a:avLst/>
+          </a:prstGeom>
+          <a:noFill/>
+          <a:ln/>
+        </p:spPr>
+        <p:txBody>
+          <a:bodyPr wrap="square" rtlCol="0" anchor="ctr"/>
+          <a:lstStyle/>
+          <a:p>
+            <a:pPr indent="0" marL="0">
+              <a:buNone/>
+            </a:pPr>
+            <a:r>
+              <a:rPr lang="en-US" sz="1500" dirty="0">
+                <a:solidFill>
+                  <a:srgbClr val="202124"/>
+                </a:solidFill>
+                <a:latin typeface="Arial" pitchFamily="34" charset="0"/>
+                <a:ea typeface="Arial" pitchFamily="34" charset="-122"/>
+                <a:cs typeface="Arial" pitchFamily="34" charset="-120"/>
+              </a:rPr>
+              <a:t>Use case</a:t>
+            </a:r>
+            <a:endParaRPr lang="en-US" sz="1500" dirty="0"/>
+          </a:p>
+        </p:txBody>
+      </p:sp>
+      <p:sp>
+        <p:nvSpPr>
+          <p:cNvPr id="11" name="Text 9"/>
+          <p:cNvSpPr/>
+          <p:nvPr/>
+        </p:nvSpPr>
+        <p:spPr>
+          <a:xfrm>
+            <a:off x="749808" y="3712464"/>
+            <a:ext cx="10680192" cy="237744"/>
+          </a:xfrm>
+          <a:prstGeom prst="rect">
+            <a:avLst/>
+          </a:prstGeom>
+          <a:noFill/>
+          <a:ln/>
+        </p:spPr>
+        <p:txBody>
+          <a:bodyPr wrap="square" rtlCol="0" anchor="ctr"/>
+          <a:lstStyle/>
+          <a:p>
+            <a:pPr indent="0" marL="0">
+              <a:buNone/>
+            </a:pPr>
+            <a:r>
+              <a:rPr lang="en-US" sz="1100" b="1" dirty="0">
+                <a:solidFill>
+                  <a:srgbClr val="202124"/>
+                </a:solidFill>
+                <a:latin typeface="Arial" pitchFamily="34" charset="0"/>
+                <a:ea typeface="Arial" pitchFamily="34" charset="-122"/>
+                <a:cs typeface="Arial" pitchFamily="34" charset="-120"/>
+              </a:rPr>
+              <a:t>Comparing the Three Core Tenancy Topologies Across All 7 Subsystems</a:t>
+            </a:r>
+            <a:endParaRPr lang="en-US" sz="1100" dirty="0"/>
+          </a:p>
+        </p:txBody>
+      </p:sp>
+      <p:sp>
+        <p:nvSpPr>
+          <p:cNvPr id="12" name="Text 10"/>
+          <p:cNvSpPr/>
+          <p:nvPr/>
+        </p:nvSpPr>
+        <p:spPr>
+          <a:xfrm>
+            <a:off x="749808" y="3986784"/>
+            <a:ext cx="10680192" cy="749808"/>
+          </a:xfrm>
+          <a:prstGeom prst="rect">
+            <a:avLst/>
+          </a:prstGeom>
+          <a:noFill/>
+          <a:ln/>
+        </p:spPr>
+        <p:txBody>
+          <a:bodyPr wrap="square" rtlCol="0" anchor="t">
+            <a:normAutofit/>
+          </a:bodyPr>
+          <a:lstStyle/>
+          <a:p>
+            <a:pPr indent="0" marL="0">
+              <a:lnSpc>
+                <a:spcPct val="114000"/>
+              </a:lnSpc>
+              <a:buNone/>
+            </a:pPr>
+            <a:r>
+              <a:rPr lang="en-US" sz="840" dirty="0">
+                <a:solidFill>
+                  <a:srgbClr val="3C4043"/>
+                </a:solidFill>
+                <a:latin typeface="Arial" pitchFamily="34" charset="0"/>
+                <a:ea typeface="Arial" pitchFamily="34" charset="-122"/>
+                <a:cs typeface="Arial" pitchFamily="34" charset="-120"/>
+              </a:rPr>
+              <a:t>Every multi-tenant agent deployment maps the seven core subsystems—Inbound Identity, Ingress Gateway, Agent Runtime, Memory Bank, Foundation Models, Egress Gateway, and Data/Tool Fabric—across three canonical topologies.</a:t>
+            </a:r>
             <a:endParaRPr lang="en-US" sz="840" dirty="0"/>
           </a:p>
         </p:txBody>
       </p:sp>
       <p:sp>
         <p:nvSpPr>
-          <p:cNvPr id="9" name="Shape 7"/>
-          <p:cNvSpPr/>
-          <p:nvPr/>
-        </p:nvSpPr>
-        <p:spPr>
-          <a:xfrm>
-            <a:off x="749808" y="3383280"/>
-            <a:ext cx="10680192" cy="0"/>
-          </a:xfrm>
-          <a:prstGeom prst="line">
-            <a:avLst/>
-          </a:prstGeom>
-          <a:noFill/>
-          <a:ln w="9525">
-            <a:solidFill>
-              <a:srgbClr val="DADCE0"/>
-            </a:solidFill>
-            <a:prstDash val="solid"/>
-          </a:ln>
-        </p:spPr>
-      </p:sp>
-      <p:sp>
-        <p:nvSpPr>
-          <p:cNvPr id="10" name="Text 8"/>
-          <p:cNvSpPr/>
-          <p:nvPr/>
-        </p:nvSpPr>
-        <p:spPr>
-          <a:xfrm>
-            <a:off x="749808" y="3511296"/>
-            <a:ext cx="10680192" cy="310896"/>
+          <p:cNvPr id="13" name="Text 11"/>
+          <p:cNvSpPr/>
+          <p:nvPr/>
+        </p:nvSpPr>
+        <p:spPr>
+          <a:xfrm>
+            <a:off x="749808" y="4773168"/>
+            <a:ext cx="10680192" cy="201168"/>
           </a:xfrm>
           <a:prstGeom prst="rect">
             <a:avLst/>
@@ -9867,7 +9922,51 @@
               <a:buNone/>
             </a:pPr>
             <a:r>
-              <a:rPr lang="en-US" sz="1550" dirty="0">
+              <a:rPr lang="en-US" sz="860" dirty="0">
+                <a:solidFill>
+                  <a:srgbClr val="3C4043"/>
+                </a:solidFill>
+                <a:latin typeface="Arial" pitchFamily="34" charset="0"/>
+                <a:ea typeface="Arial" pitchFamily="34" charset="-122"/>
+                <a:cs typeface="Arial" pitchFamily="34" charset="-120"/>
+              </a:rPr>
+              <a:t>For this use case, the architecture provides the following benefits:</a:t>
+            </a:r>
+            <a:endParaRPr lang="en-US" sz="860" dirty="0"/>
+          </a:p>
+        </p:txBody>
+      </p:sp>
+      <p:sp>
+        <p:nvSpPr>
+          <p:cNvPr id="14" name="Text 12"/>
+          <p:cNvSpPr/>
+          <p:nvPr/>
+        </p:nvSpPr>
+        <p:spPr>
+          <a:xfrm>
+            <a:off x="877824" y="5010912"/>
+            <a:ext cx="10552176" cy="1481328"/>
+          </a:xfrm>
+          <a:prstGeom prst="rect">
+            <a:avLst/>
+          </a:prstGeom>
+          <a:noFill/>
+          <a:ln/>
+        </p:spPr>
+        <p:txBody>
+          <a:bodyPr wrap="square" rtlCol="0" anchor="t">
+            <a:normAutofit/>
+          </a:bodyPr>
+          <a:lstStyle/>
+          <a:p>
+            <a:pPr indent="0" marL="0">
+              <a:lnSpc>
+                <a:spcPct val="116000"/>
+              </a:lnSpc>
+              <a:buNone/>
+            </a:pPr>
+            <a:r>
+              <a:rPr lang="en-US" sz="800" b="1" dirty="0">
                 <a:solidFill>
                   <a:srgbClr val="202124"/>
                 </a:solidFill>
@@ -9875,178 +9974,16 @@
                 <a:ea typeface="Arial" pitchFamily="34" charset="-122"/>
                 <a:cs typeface="Arial" pitchFamily="34" charset="-120"/>
               </a:rPr>
-              <a:t>Use case</a:t>
-            </a:r>
-            <a:endParaRPr lang="en-US" sz="1550" dirty="0"/>
-          </a:p>
-        </p:txBody>
-      </p:sp>
-      <p:sp>
-        <p:nvSpPr>
-          <p:cNvPr id="11" name="Text 9"/>
-          <p:cNvSpPr/>
-          <p:nvPr/>
-        </p:nvSpPr>
-        <p:spPr>
-          <a:xfrm>
-            <a:off x="749808" y="3858768"/>
-            <a:ext cx="10680192" cy="256032"/>
-          </a:xfrm>
-          <a:prstGeom prst="rect">
-            <a:avLst/>
-          </a:prstGeom>
-          <a:noFill/>
-          <a:ln/>
-        </p:spPr>
-        <p:txBody>
-          <a:bodyPr wrap="square" rtlCol="0" anchor="ctr"/>
-          <a:lstStyle/>
-          <a:p>
-            <a:pPr indent="0" marL="0">
-              <a:buNone/>
-            </a:pPr>
-            <a:r>
-              <a:rPr lang="en-US" sz="1150" b="1" dirty="0">
-                <a:solidFill>
-                  <a:srgbClr val="202124"/>
-                </a:solidFill>
-                <a:latin typeface="Arial" pitchFamily="34" charset="0"/>
-                <a:ea typeface="Arial" pitchFamily="34" charset="-122"/>
-                <a:cs typeface="Arial" pitchFamily="34" charset="-120"/>
-              </a:rPr>
-              <a:t>Comparing the Three Core Tenancy Topologies Across All 7 Subsystems</a:t>
-            </a:r>
-            <a:endParaRPr lang="en-US" sz="1150" dirty="0"/>
-          </a:p>
-        </p:txBody>
-      </p:sp>
-      <p:sp>
-        <p:nvSpPr>
-          <p:cNvPr id="12" name="Text 10"/>
-          <p:cNvSpPr/>
-          <p:nvPr/>
-        </p:nvSpPr>
-        <p:spPr>
-          <a:xfrm>
-            <a:off x="749808" y="4151376"/>
-            <a:ext cx="10680192" cy="658368"/>
-          </a:xfrm>
-          <a:prstGeom prst="rect">
-            <a:avLst/>
-          </a:prstGeom>
-          <a:noFill/>
-          <a:ln/>
-        </p:spPr>
-        <p:txBody>
-          <a:bodyPr wrap="square" rtlCol="0" anchor="t"/>
-          <a:lstStyle/>
-          <a:p>
-            <a:pPr indent="0" marL="0">
-              <a:lnSpc>
-                <a:spcPct val="118000"/>
-              </a:lnSpc>
-              <a:buNone/>
-            </a:pPr>
-            <a:r>
-              <a:rPr lang="en-US" sz="880" dirty="0">
-                <a:solidFill>
-                  <a:srgbClr val="3C4043"/>
-                </a:solidFill>
-                <a:latin typeface="Arial" pitchFamily="34" charset="0"/>
-                <a:ea typeface="Arial" pitchFamily="34" charset="-122"/>
-                <a:cs typeface="Arial" pitchFamily="34" charset="-120"/>
-              </a:rPr>
-              <a:t>Every multi-tenant agent deployment maps the seven core subsystems—Inbound Identity, Ingress Gateway, Agent Runtime, Memory Bank, Foundation Models, Egress Gateway, and Data/Tool Fabric—across three canonical topologies.</a:t>
-            </a:r>
-            <a:endParaRPr lang="en-US" sz="880" dirty="0"/>
-          </a:p>
-        </p:txBody>
-      </p:sp>
-      <p:sp>
-        <p:nvSpPr>
-          <p:cNvPr id="13" name="Text 11"/>
-          <p:cNvSpPr/>
-          <p:nvPr/>
-        </p:nvSpPr>
-        <p:spPr>
-          <a:xfrm>
-            <a:off x="749808" y="4846320"/>
-            <a:ext cx="10680192" cy="201168"/>
-          </a:xfrm>
-          <a:prstGeom prst="rect">
-            <a:avLst/>
-          </a:prstGeom>
-          <a:noFill/>
-          <a:ln/>
-        </p:spPr>
-        <p:txBody>
-          <a:bodyPr wrap="square" rtlCol="0" anchor="ctr"/>
-          <a:lstStyle/>
-          <a:p>
-            <a:pPr indent="0" marL="0">
-              <a:buNone/>
-            </a:pPr>
-            <a:r>
-              <a:rPr lang="en-US" sz="880" dirty="0">
-                <a:solidFill>
-                  <a:srgbClr val="3C4043"/>
-                </a:solidFill>
-                <a:latin typeface="Arial" pitchFamily="34" charset="0"/>
-                <a:ea typeface="Arial" pitchFamily="34" charset="-122"/>
-                <a:cs typeface="Arial" pitchFamily="34" charset="-120"/>
-              </a:rPr>
-              <a:t>For this use case, the architecture provides the following benefits:</a:t>
-            </a:r>
-            <a:endParaRPr lang="en-US" sz="880" dirty="0"/>
-          </a:p>
-        </p:txBody>
-      </p:sp>
-      <p:sp>
-        <p:nvSpPr>
-          <p:cNvPr id="14" name="Text 12"/>
-          <p:cNvSpPr/>
-          <p:nvPr/>
-        </p:nvSpPr>
-        <p:spPr>
-          <a:xfrm>
-            <a:off x="877824" y="5084064"/>
-            <a:ext cx="10552176" cy="1426464"/>
-          </a:xfrm>
-          <a:prstGeom prst="rect">
-            <a:avLst/>
-          </a:prstGeom>
-          <a:noFill/>
-          <a:ln/>
-        </p:spPr>
-        <p:txBody>
-          <a:bodyPr wrap="square" rtlCol="0" anchor="t"/>
-          <a:lstStyle/>
-          <a:p>
-            <a:pPr indent="0" marL="0">
-              <a:lnSpc>
-                <a:spcPct val="120000"/>
-              </a:lnSpc>
-              <a:buNone/>
-            </a:pPr>
-            <a:r>
-              <a:rPr lang="en-US" sz="820" b="1" dirty="0">
-                <a:solidFill>
-                  <a:srgbClr val="202124"/>
-                </a:solidFill>
-                <a:latin typeface="Arial" pitchFamily="34" charset="0"/>
-                <a:ea typeface="Arial" pitchFamily="34" charset="-122"/>
-                <a:cs typeface="Arial" pitchFamily="34" charset="-120"/>
-              </a:rPr>
               <a:t>•  Strict data isolation: </a:t>
             </a:r>
             <a:pPr indent="0" marL="0">
               <a:lnSpc>
-                <a:spcPct val="120000"/>
-              </a:lnSpc>
-              <a:buNone/>
-            </a:pPr>
-            <a:r>
-              <a:rPr lang="en-US" sz="800" dirty="0">
+                <a:spcPct val="116000"/>
+              </a:lnSpc>
+              <a:buNone/>
+            </a:pPr>
+            <a:r>
+              <a:rPr lang="en-US" sz="780" dirty="0">
                 <a:solidFill>
                   <a:srgbClr val="3C4043"/>
                 </a:solidFill>
@@ -10059,12 +9996,12 @@
             </a:r>
             <a:pPr indent="0" marL="0">
               <a:lnSpc>
-                <a:spcPct val="120000"/>
-              </a:lnSpc>
-              <a:buNone/>
-            </a:pPr>
-            <a:r>
-              <a:rPr lang="en-US" sz="820" b="1" dirty="0">
+                <a:spcPct val="116000"/>
+              </a:lnSpc>
+              <a:buNone/>
+            </a:pPr>
+            <a:r>
+              <a:rPr lang="en-US" sz="800" b="1" dirty="0">
                 <a:solidFill>
                   <a:srgbClr val="202124"/>
                 </a:solidFill>
@@ -10076,12 +10013,12 @@
             </a:r>
             <a:pPr indent="0" marL="0">
               <a:lnSpc>
-                <a:spcPct val="120000"/>
-              </a:lnSpc>
-              <a:buNone/>
-            </a:pPr>
-            <a:r>
-              <a:rPr lang="en-US" sz="800" dirty="0">
+                <a:spcPct val="116000"/>
+              </a:lnSpc>
+              <a:buNone/>
+            </a:pPr>
+            <a:r>
+              <a:rPr lang="en-US" sz="780" dirty="0">
                 <a:solidFill>
                   <a:srgbClr val="3C4043"/>
                 </a:solidFill>
@@ -10094,12 +10031,12 @@
             </a:r>
             <a:pPr indent="0" marL="0">
               <a:lnSpc>
-                <a:spcPct val="120000"/>
-              </a:lnSpc>
-              <a:buNone/>
-            </a:pPr>
-            <a:r>
-              <a:rPr lang="en-US" sz="820" b="1" dirty="0">
+                <a:spcPct val="116000"/>
+              </a:lnSpc>
+              <a:buNone/>
+            </a:pPr>
+            <a:r>
+              <a:rPr lang="en-US" sz="800" b="1" dirty="0">
                 <a:solidFill>
                   <a:srgbClr val="202124"/>
                 </a:solidFill>
@@ -10111,12 +10048,12 @@
             </a:r>
             <a:pPr indent="0" marL="0">
               <a:lnSpc>
-                <a:spcPct val="120000"/>
-              </a:lnSpc>
-              <a:buNone/>
-            </a:pPr>
-            <a:r>
-              <a:rPr lang="en-US" sz="800" dirty="0">
+                <a:spcPct val="116000"/>
+              </a:lnSpc>
+              <a:buNone/>
+            </a:pPr>
+            <a:r>
+              <a:rPr lang="en-US" sz="780" dirty="0">
                 <a:solidFill>
                   <a:srgbClr val="3C4043"/>
                 </a:solidFill>
@@ -10124,17 +10061,17 @@
                 <a:ea typeface="Arial" pitchFamily="34" charset="-122"/>
                 <a:cs typeface="Arial" pitchFamily="34" charset="-120"/>
               </a:rPr>
-              <a:t>Agent Runtime provisions sub-second warm-start execution with Agent Sandboxes backed by gVisor microVMs. Agent Sessions and Agent Memory Bank provide managed multi-tenant hierarchical memory with tenant-isolated.
+              <a:t>Agent Runtime provisions sub-second warm-start execution with Agent Sandboxes backed by gVisor microVMs.
 </a:t>
             </a:r>
             <a:pPr indent="0" marL="0">
               <a:lnSpc>
-                <a:spcPct val="120000"/>
-              </a:lnSpc>
-              <a:buNone/>
-            </a:pPr>
-            <a:r>
-              <a:rPr lang="en-US" sz="820" b="1" dirty="0">
+                <a:spcPct val="116000"/>
+              </a:lnSpc>
+              <a:buNone/>
+            </a:pPr>
+            <a:r>
+              <a:rPr lang="en-US" sz="800" b="1" dirty="0">
                 <a:solidFill>
                   <a:srgbClr val="202124"/>
                 </a:solidFill>
@@ -10146,12 +10083,12 @@
             </a:r>
             <a:pPr indent="0" marL="0">
               <a:lnSpc>
-                <a:spcPct val="120000"/>
-              </a:lnSpc>
-              <a:buNone/>
-            </a:pPr>
-            <a:r>
-              <a:rPr lang="en-US" sz="800" dirty="0">
+                <a:spcPct val="116000"/>
+              </a:lnSpc>
+              <a:buNone/>
+            </a:pPr>
+            <a:r>
+              <a:rPr lang="en-US" sz="780" dirty="0">
                 <a:solidFill>
                   <a:srgbClr val="3C4043"/>
                 </a:solidFill>
@@ -10161,7 +10098,7 @@
               </a:rPr>
               <a:t>Agent Gateway and Agent Registry enforce tenant-scoped agent authorization and dynamic tool entitlements.</a:t>
             </a:r>
-            <a:endParaRPr lang="en-US" sz="820" dirty="0"/>
+            <a:endParaRPr lang="en-US" sz="800" dirty="0"/>
           </a:p>
         </p:txBody>
       </p:sp>
@@ -10382,7 +10319,9 @@
           <a:ln/>
         </p:spPr>
         <p:txBody>
-          <a:bodyPr wrap="square" rtlCol="0" anchor="t"/>
+          <a:bodyPr wrap="square" rtlCol="0" anchor="t">
+            <a:normAutofit/>
+          </a:bodyPr>
           <a:lstStyle/>
           <a:p>
             <a:pPr indent="0" marL="0">
@@ -10392,7 +10331,7 @@
               <a:buNone/>
             </a:pPr>
             <a:r>
-              <a:rPr lang="en-US" sz="820" b="1" dirty="0">
+              <a:rPr lang="en-US" sz="810" b="1" dirty="0">
                 <a:solidFill>
                   <a:srgbClr val="202124"/>
                 </a:solidFill>
@@ -10452,7 +10391,7 @@
                 <a:ea typeface="Arial" pitchFamily="34" charset="-122"/>
                 <a:cs typeface="Arial" pitchFamily="34" charset="-120"/>
               </a:rPr>
-              <a:t>For internet-facing workloads, retain the global External Application Load Balancer with Hop 1: Edge PEP and Hop 4: Model Armor.
+              <a:t>For internet-facing workloads, retain the global External Application Load Balancer with Hop 1: Cloud Armor and Hop 4: Model Armor.
 </a:t>
             </a:r>
             <a:pPr indent="0" marL="0">
@@ -10461,14 +10400,8 @@
               </a:lnSpc>
               <a:buNone/>
             </a:pPr>
-            <a:pPr indent="0" marL="0">
-              <a:lnSpc>
-                <a:spcPct val="112000"/>
-              </a:lnSpc>
-              <a:buNone/>
-            </a:pPr>
-            <a:r>
-              <a:rPr lang="en-US" sz="820" b="1" dirty="0">
+            <a:r>
+              <a:rPr lang="en-US" sz="810" b="1" dirty="0">
                 <a:solidFill>
                   <a:srgbClr val="202124"/>
                 </a:solidFill>
@@ -10531,7 +10464,7 @@
               <a:t>Spoke-local 2LO &amp; 3LO Auth Mgr: Maximizes blast-radius containment by keeping credentials, service accounts, and data access strictly inside.; Shared enterprise tool gateway: Consolidates stateless, non-tenant-specific MCP tools into a central hub project via Private Service Connect.
 </a:t>
             </a:r>
-            <a:endParaRPr lang="en-US" sz="820" dirty="0"/>
+            <a:endParaRPr lang="en-US" sz="810" dirty="0"/>
           </a:p>
         </p:txBody>
       </p:sp>
@@ -10935,14 +10868,16 @@
           <a:ln/>
         </p:spPr>
         <p:txBody>
-          <a:bodyPr wrap="square" rtlCol="0" anchor="ctr"/>
-          <a:lstStyle/>
-          <a:p>
-            <a:pPr indent="0" marL="0">
-              <a:buNone/>
-            </a:pPr>
-            <a:r>
-              <a:rPr lang="en-US" sz="720" b="1" dirty="0">
+          <a:bodyPr wrap="square" rtlCol="0" anchor="ctr">
+            <a:normAutofit/>
+          </a:bodyPr>
+          <a:lstStyle/>
+          <a:p>
+            <a:pPr indent="0" marL="0">
+              <a:buNone/>
+            </a:pPr>
+            <a:r>
+              <a:rPr lang="en-US" sz="710" b="1" dirty="0">
                 <a:solidFill>
                   <a:srgbClr val="202124"/>
                 </a:solidFill>
@@ -10950,16 +10885,16 @@
                 <a:ea typeface="Arial" pitchFamily="34" charset="-122"/>
                 <a:cs typeface="Arial" pitchFamily="34" charset="-120"/>
               </a:rPr>
-              <a:t>• The Multi-Tenant Agentic Triad: Security • FinOps COGS • Zero-PII Observability &amp; Unified Vertex AI Agent Engine &amp; Google ADK Reference Architecture</a:t>
-            </a:r>
-            <a:endParaRPr lang="en-US" sz="720" dirty="0"/>
-          </a:p>
-          <a:p>
-            <a:pPr indent="0" marL="0">
-              <a:buNone/>
-            </a:pPr>
-            <a:r>
-              <a:rPr lang="en-US" sz="720" b="1" dirty="0">
+              <a:t>• VPC Service Controls &amp; Access Boundaries</a:t>
+            </a:r>
+            <a:endParaRPr lang="en-US" sz="710" dirty="0"/>
+          </a:p>
+          <a:p>
+            <a:pPr indent="0" marL="0">
+              <a:buNone/>
+            </a:pPr>
+            <a:r>
+              <a:rPr lang="en-US" sz="710" b="1" dirty="0">
                 <a:solidFill>
                   <a:srgbClr val="202124"/>
                 </a:solidFill>
@@ -10967,16 +10902,16 @@
                 <a:ea typeface="Arial" pitchFamily="34" charset="-122"/>
                 <a:cs typeface="Arial" pitchFamily="34" charset="-120"/>
               </a:rPr>
-              <a:t>• Hop 1: Edge PEP, Hop 4: Model Armor &amp; Valkey Rate Bulkhead</a:t>
-            </a:r>
-            <a:endParaRPr lang="en-US" sz="720" dirty="0"/>
-          </a:p>
-          <a:p>
-            <a:pPr indent="0" marL="0">
-              <a:buNone/>
-            </a:pPr>
-            <a:r>
-              <a:rPr lang="en-US" sz="720" b="1" dirty="0">
+              <a:t>• Hop 1: Cloud Armor &amp; Hop 4: Model Armor &amp; Valkey Rate Bulkhead</a:t>
+            </a:r>
+            <a:endParaRPr lang="en-US" sz="710" dirty="0"/>
+          </a:p>
+          <a:p>
+            <a:pPr indent="0" marL="0">
+              <a:buNone/>
+            </a:pPr>
+            <a:r>
+              <a:rPr lang="en-US" sz="710" b="1" dirty="0">
                 <a:solidFill>
                   <a:srgbClr val="202124"/>
                 </a:solidFill>
@@ -10986,7 +10921,7 @@
               </a:rPr>
               <a:t>• AlloyDB RLS &amp; L1–L5 &amp; 3 Chargeback Models</a:t>
             </a:r>
-            <a:endParaRPr lang="en-US" sz="720" dirty="0"/>
+            <a:endParaRPr lang="en-US" sz="710" dirty="0"/>
           </a:p>
         </p:txBody>
       </p:sp>
@@ -11033,14 +10968,16 @@
           <a:ln/>
         </p:spPr>
         <p:txBody>
-          <a:bodyPr wrap="square" rtlCol="0" anchor="ctr"/>
-          <a:lstStyle/>
-          <a:p>
-            <a:pPr indent="0" marL="0">
-              <a:buNone/>
-            </a:pPr>
-            <a:r>
-              <a:rPr lang="en-US" sz="710" b="1" dirty="0">
+          <a:bodyPr wrap="square" rtlCol="0" anchor="ctr">
+            <a:normAutofit/>
+          </a:bodyPr>
+          <a:lstStyle/>
+          <a:p>
+            <a:pPr indent="0" marL="0">
+              <a:buNone/>
+            </a:pPr>
+            <a:r>
+              <a:rPr lang="en-US" sz="700" b="1" dirty="0">
                 <a:solidFill>
                   <a:srgbClr val="202124"/>
                 </a:solidFill>
@@ -11048,13 +10985,13 @@
                 <a:ea typeface="Arial" pitchFamily="34" charset="-122"/>
                 <a:cs typeface="Arial" pitchFamily="34" charset="-120"/>
               </a:rPr>
-              <a:t>• The Multi-Tenant Agentic Triad: Security • FinOps COGS • Zero-PII Observability &amp; Unified Vertex AI Agent Engine &amp; Google ADK Reference Architecture: </a:t>
-            </a:r>
-            <a:pPr indent="0" marL="0">
-              <a:buNone/>
-            </a:pPr>
-            <a:r>
-              <a:rPr lang="en-US" sz="700" dirty="0">
+              <a:t>• VPC Service Controls &amp; Access Boundaries: </a:t>
+            </a:r>
+            <a:pPr indent="0" marL="0">
+              <a:buNone/>
+            </a:pPr>
+            <a:r>
+              <a:rPr lang="en-US" sz="690" dirty="0">
                 <a:solidFill>
                   <a:srgbClr val="3C4043"/>
                 </a:solidFill>
@@ -11062,14 +10999,14 @@
                 <a:ea typeface="Arial" pitchFamily="34" charset="-122"/>
                 <a:cs typeface="Arial" pitchFamily="34" charset="-120"/>
               </a:rPr>
-              <a:t>Enforce The Multi-Tenant Agentic Triad: Security • FinOps COGS • Zero-PII Observability perimeters around hub and spoke projects to block unauthorized data exfiltration, and bind.
+              <a:t>Enforce VPC Service Controls perimeters around hub and spoke projects to block unauthorized data exfiltration, and bind Principal Access Boundary (PAB) policies to spoke principals.
 </a:t>
             </a:r>
             <a:pPr indent="0" marL="0">
               <a:buNone/>
             </a:pPr>
             <a:r>
-              <a:rPr lang="en-US" sz="710" b="1" dirty="0">
+              <a:rPr lang="en-US" sz="700" b="1" dirty="0">
                 <a:solidFill>
                   <a:srgbClr val="202124"/>
                 </a:solidFill>
@@ -11077,13 +11014,13 @@
                 <a:ea typeface="Arial" pitchFamily="34" charset="-122"/>
                 <a:cs typeface="Arial" pitchFamily="34" charset="-120"/>
               </a:rPr>
-              <a:t>• Hop 1: Edge PEP, Hop 4: Model Armor &amp; Valkey Rate Bulkhead: </a:t>
-            </a:r>
-            <a:pPr indent="0" marL="0">
-              <a:buNone/>
-            </a:pPr>
-            <a:r>
-              <a:rPr lang="en-US" sz="700" dirty="0">
+              <a:t>• Hop 1: Cloud Armor &amp; Hop 4: Model Armor &amp; Valkey Rate Bulkhead: </a:t>
+            </a:r>
+            <a:pPr indent="0" marL="0">
+              <a:buNone/>
+            </a:pPr>
+            <a:r>
+              <a:rPr lang="en-US" sz="690" dirty="0">
                 <a:solidFill>
                   <a:srgbClr val="3C4043"/>
                 </a:solidFill>
@@ -11091,14 +11028,14 @@
                 <a:ea typeface="Arial" pitchFamily="34" charset="-122"/>
                 <a:cs typeface="Arial" pitchFamily="34" charset="-120"/>
               </a:rPr>
-              <a:t>Strip client-supplied privilege headers at the edge, verify caller identity claims, and screen both incoming prompts and outgoing completions with Valkey Rate Bulkhead.
+              <a:t>Strip client-supplied privilege headers at the edge, verify caller identity claims, and screen prompts and completions with Valkey Rate Bulkhead.
 </a:t>
             </a:r>
             <a:pPr indent="0" marL="0">
               <a:buNone/>
             </a:pPr>
             <a:r>
-              <a:rPr lang="en-US" sz="710" b="1" dirty="0">
+              <a:rPr lang="en-US" sz="700" b="1" dirty="0">
                 <a:solidFill>
                   <a:srgbClr val="202124"/>
                 </a:solidFill>
@@ -11112,7 +11049,7 @@
               <a:buNone/>
             </a:pPr>
             <a:r>
-              <a:rPr lang="en-US" sz="700" dirty="0">
+              <a:rPr lang="en-US" sz="690" dirty="0">
                 <a:solidFill>
                   <a:srgbClr val="3C4043"/>
                 </a:solidFill>
@@ -11122,7 +11059,7 @@
               </a:rPr>
               <a:t>Encrypt state at rest with Customer-Managed Encryption Keys and enforce least-privilege access scopes on AlloyDB RLS &amp; L1–L5.</a:t>
             </a:r>
-            <a:endParaRPr lang="en-US" sz="710" dirty="0"/>
+            <a:endParaRPr lang="en-US" sz="700" dirty="0"/>
           </a:p>
         </p:txBody>
       </p:sp>
@@ -11233,14 +11170,16 @@
           <a:ln/>
         </p:spPr>
         <p:txBody>
-          <a:bodyPr wrap="square" rtlCol="0" anchor="ctr"/>
-          <a:lstStyle/>
-          <a:p>
-            <a:pPr indent="0" marL="0">
-              <a:buNone/>
-            </a:pPr>
-            <a:r>
-              <a:rPr lang="en-US" sz="720" b="1" dirty="0">
+          <a:bodyPr wrap="square" rtlCol="0" anchor="ctr">
+            <a:normAutofit/>
+          </a:bodyPr>
+          <a:lstStyle/>
+          <a:p>
+            <a:pPr indent="0" marL="0">
+              <a:buNone/>
+            </a:pPr>
+            <a:r>
+              <a:rPr lang="en-US" sz="710" b="1" dirty="0">
                 <a:solidFill>
                   <a:srgbClr val="202124"/>
                 </a:solidFill>
@@ -11250,14 +11189,14 @@
               </a:rPr>
               <a:t>• External Application Load Balancer &amp; Architecture Selector</a:t>
             </a:r>
-            <a:endParaRPr lang="en-US" sz="720" dirty="0"/>
-          </a:p>
-          <a:p>
-            <a:pPr indent="0" marL="0">
-              <a:buNone/>
-            </a:pPr>
-            <a:r>
-              <a:rPr lang="en-US" sz="720" b="1" dirty="0">
+            <a:endParaRPr lang="en-US" sz="710" dirty="0"/>
+          </a:p>
+          <a:p>
+            <a:pPr indent="0" marL="0">
+              <a:buNone/>
+            </a:pPr>
+            <a:r>
+              <a:rPr lang="en-US" sz="710" b="1" dirty="0">
                 <a:solidFill>
                   <a:srgbClr val="202124"/>
                 </a:solidFill>
@@ -11267,14 +11206,14 @@
               </a:rPr>
               <a:t>• Thinking Budget Cap &amp; 2LO &amp; 3LO Auth Mgr</a:t>
             </a:r>
-            <a:endParaRPr lang="en-US" sz="720" dirty="0"/>
-          </a:p>
-          <a:p>
-            <a:pPr indent="0" marL="0">
-              <a:buNone/>
-            </a:pPr>
-            <a:r>
-              <a:rPr lang="en-US" sz="720" b="1" dirty="0">
+            <a:endParaRPr lang="en-US" sz="710" dirty="0"/>
+          </a:p>
+          <a:p>
+            <a:pPr indent="0" marL="0">
+              <a:buNone/>
+            </a:pPr>
+            <a:r>
+              <a:rPr lang="en-US" sz="710" b="1" dirty="0">
                 <a:solidFill>
                   <a:srgbClr val="202124"/>
                 </a:solidFill>
@@ -11284,7 +11223,7 @@
               </a:rPr>
               <a:t>• AlloyDB RLS &amp; L1–L5</a:t>
             </a:r>
-            <a:endParaRPr lang="en-US" sz="720" dirty="0"/>
+            <a:endParaRPr lang="en-US" sz="710" dirty="0"/>
           </a:p>
         </p:txBody>
       </p:sp>
@@ -11331,14 +11270,16 @@
           <a:ln/>
         </p:spPr>
         <p:txBody>
-          <a:bodyPr wrap="square" rtlCol="0" anchor="ctr"/>
-          <a:lstStyle/>
-          <a:p>
-            <a:pPr indent="0" marL="0">
-              <a:buNone/>
-            </a:pPr>
-            <a:r>
-              <a:rPr lang="en-US" sz="710" b="1" dirty="0">
+          <a:bodyPr wrap="square" rtlCol="0" anchor="ctr">
+            <a:normAutofit/>
+          </a:bodyPr>
+          <a:lstStyle/>
+          <a:p>
+            <a:pPr indent="0" marL="0">
+              <a:buNone/>
+            </a:pPr>
+            <a:r>
+              <a:rPr lang="en-US" sz="700" b="1" dirty="0">
                 <a:solidFill>
                   <a:srgbClr val="202124"/>
                 </a:solidFill>
@@ -11352,7 +11293,7 @@
               <a:buNone/>
             </a:pPr>
             <a:r>
-              <a:rPr lang="en-US" sz="700" dirty="0">
+              <a:rPr lang="en-US" sz="690" dirty="0">
                 <a:solidFill>
                   <a:srgbClr val="3C4043"/>
                 </a:solidFill>
@@ -11367,7 +11308,7 @@
               <a:buNone/>
             </a:pPr>
             <a:r>
-              <a:rPr lang="en-US" sz="710" b="1" dirty="0">
+              <a:rPr lang="en-US" sz="700" b="1" dirty="0">
                 <a:solidFill>
                   <a:srgbClr val="202124"/>
                 </a:solidFill>
@@ -11381,7 +11322,7 @@
               <a:buNone/>
             </a:pPr>
             <a:r>
-              <a:rPr lang="en-US" sz="700" dirty="0">
+              <a:rPr lang="en-US" sz="690" dirty="0">
                 <a:solidFill>
                   <a:srgbClr val="3C4043"/>
                 </a:solidFill>
@@ -11396,7 +11337,7 @@
               <a:buNone/>
             </a:pPr>
             <a:r>
-              <a:rPr lang="en-US" sz="710" b="1" dirty="0">
+              <a:rPr lang="en-US" sz="700" b="1" dirty="0">
                 <a:solidFill>
                   <a:srgbClr val="202124"/>
                 </a:solidFill>
@@ -11410,7 +11351,7 @@
               <a:buNone/>
             </a:pPr>
             <a:r>
-              <a:rPr lang="en-US" sz="700" dirty="0">
+              <a:rPr lang="en-US" sz="690" dirty="0">
                 <a:solidFill>
                   <a:srgbClr val="3C4043"/>
                 </a:solidFill>
@@ -11420,7 +11361,7 @@
               </a:rPr>
               <a:t>Enable regional high availability and Point-in-Time Recovery on AlloyDB RLS &amp; L1–L5 with automated backup verification.</a:t>
             </a:r>
-            <a:endParaRPr lang="en-US" sz="710" dirty="0"/>
+            <a:endParaRPr lang="en-US" sz="700" dirty="0"/>
           </a:p>
         </p:txBody>
       </p:sp>
@@ -11531,14 +11472,16 @@
           <a:ln/>
         </p:spPr>
         <p:txBody>
-          <a:bodyPr wrap="square" rtlCol="0" anchor="ctr"/>
-          <a:lstStyle/>
-          <a:p>
-            <a:pPr indent="0" marL="0">
-              <a:buNone/>
-            </a:pPr>
-            <a:r>
-              <a:rPr lang="en-US" sz="720" b="1" dirty="0">
+          <a:bodyPr wrap="square" rtlCol="0" anchor="ctr">
+            <a:normAutofit/>
+          </a:bodyPr>
+          <a:lstStyle/>
+          <a:p>
+            <a:pPr indent="0" marL="0">
+              <a:buNone/>
+            </a:pPr>
+            <a:r>
+              <a:rPr lang="en-US" sz="710" b="1" dirty="0">
                 <a:solidFill>
                   <a:srgbClr val="202124"/>
                 </a:solidFill>
@@ -11548,14 +11491,14 @@
               </a:rPr>
               <a:t>• Infrastructure as Code</a:t>
             </a:r>
-            <a:endParaRPr lang="en-US" sz="720" dirty="0"/>
-          </a:p>
-          <a:p>
-            <a:pPr indent="0" marL="0">
-              <a:buNone/>
-            </a:pPr>
-            <a:r>
-              <a:rPr lang="en-US" sz="720" b="1" dirty="0">
+            <a:endParaRPr lang="en-US" sz="710" dirty="0"/>
+          </a:p>
+          <a:p>
+            <a:pPr indent="0" marL="0">
+              <a:buNone/>
+            </a:pPr>
+            <a:r>
+              <a:rPr lang="en-US" sz="710" b="1" dirty="0">
                 <a:solidFill>
                   <a:srgbClr val="202124"/>
                 </a:solidFill>
@@ -11565,14 +11508,14 @@
               </a:rPr>
               <a:t>• Security Command Center &amp; BigQuery OTel Sink</a:t>
             </a:r>
-            <a:endParaRPr lang="en-US" sz="720" dirty="0"/>
-          </a:p>
-          <a:p>
-            <a:pPr indent="0" marL="0">
-              <a:buNone/>
-            </a:pPr>
-            <a:r>
-              <a:rPr lang="en-US" sz="720" b="1" dirty="0">
+            <a:endParaRPr lang="en-US" sz="710" dirty="0"/>
+          </a:p>
+          <a:p>
+            <a:pPr indent="0" marL="0">
+              <a:buNone/>
+            </a:pPr>
+            <a:r>
+              <a:rPr lang="en-US" sz="710" b="1" dirty="0">
                 <a:solidFill>
                   <a:srgbClr val="202124"/>
                 </a:solidFill>
@@ -11582,7 +11525,7 @@
               </a:rPr>
               <a:t>• Automated CI/CD &amp; Red-Team Gates</a:t>
             </a:r>
-            <a:endParaRPr lang="en-US" sz="720" dirty="0"/>
+            <a:endParaRPr lang="en-US" sz="710" dirty="0"/>
           </a:p>
         </p:txBody>
       </p:sp>
@@ -11629,14 +11572,16 @@
           <a:ln/>
         </p:spPr>
         <p:txBody>
-          <a:bodyPr wrap="square" rtlCol="0" anchor="ctr"/>
-          <a:lstStyle/>
-          <a:p>
-            <a:pPr indent="0" marL="0">
-              <a:buNone/>
-            </a:pPr>
-            <a:r>
-              <a:rPr lang="en-US" sz="710" b="1" dirty="0">
+          <a:bodyPr wrap="square" rtlCol="0" anchor="ctr">
+            <a:normAutofit/>
+          </a:bodyPr>
+          <a:lstStyle/>
+          <a:p>
+            <a:pPr indent="0" marL="0">
+              <a:buNone/>
+            </a:pPr>
+            <a:r>
+              <a:rPr lang="en-US" sz="700" b="1" dirty="0">
                 <a:solidFill>
                   <a:srgbClr val="202124"/>
                 </a:solidFill>
@@ -11650,7 +11595,7 @@
               <a:buNone/>
             </a:pPr>
             <a:r>
-              <a:rPr lang="en-US" sz="700" dirty="0">
+              <a:rPr lang="en-US" sz="690" dirty="0">
                 <a:solidFill>
                   <a:srgbClr val="3C4043"/>
                 </a:solidFill>
@@ -11665,7 +11610,7 @@
               <a:buNone/>
             </a:pPr>
             <a:r>
-              <a:rPr lang="en-US" sz="710" b="1" dirty="0">
+              <a:rPr lang="en-US" sz="700" b="1" dirty="0">
                 <a:solidFill>
                   <a:srgbClr val="202124"/>
                 </a:solidFill>
@@ -11679,7 +11624,7 @@
               <a:buNone/>
             </a:pPr>
             <a:r>
-              <a:rPr lang="en-US" sz="700" dirty="0">
+              <a:rPr lang="en-US" sz="690" dirty="0">
                 <a:solidFill>
                   <a:srgbClr val="3C4043"/>
                 </a:solidFill>
@@ -11694,7 +11639,7 @@
               <a:buNone/>
             </a:pPr>
             <a:r>
-              <a:rPr lang="en-US" sz="710" b="1" dirty="0">
+              <a:rPr lang="en-US" sz="700" b="1" dirty="0">
                 <a:solidFill>
                   <a:srgbClr val="202124"/>
                 </a:solidFill>
@@ -11708,7 +11653,7 @@
               <a:buNone/>
             </a:pPr>
             <a:r>
-              <a:rPr lang="en-US" sz="700" dirty="0">
+              <a:rPr lang="en-US" sz="690" dirty="0">
                 <a:solidFill>
                   <a:srgbClr val="3C4043"/>
                 </a:solidFill>
@@ -11718,7 +11663,7 @@
               </a:rPr>
               <a:t>Gate every prompt, model, or tool change on automated Vertex AI Gen AI Evaluation Service benchmarks and security regression checks before production rollout.</a:t>
             </a:r>
-            <a:endParaRPr lang="en-US" sz="710" dirty="0"/>
+            <a:endParaRPr lang="en-US" sz="700" dirty="0"/>
           </a:p>
         </p:txBody>
       </p:sp>
@@ -11829,14 +11774,16 @@
           <a:ln/>
         </p:spPr>
         <p:txBody>
-          <a:bodyPr wrap="square" rtlCol="0" anchor="ctr"/>
-          <a:lstStyle/>
-          <a:p>
-            <a:pPr indent="0" marL="0">
-              <a:buNone/>
-            </a:pPr>
-            <a:r>
-              <a:rPr lang="en-US" sz="720" b="1" dirty="0">
+          <a:bodyPr wrap="square" rtlCol="0" anchor="ctr">
+            <a:normAutofit/>
+          </a:bodyPr>
+          <a:lstStyle/>
+          <a:p>
+            <a:pPr indent="0" marL="0">
+              <a:buNone/>
+            </a:pPr>
+            <a:r>
+              <a:rPr lang="en-US" sz="710" b="1" dirty="0">
                 <a:solidFill>
                   <a:srgbClr val="202124"/>
                 </a:solidFill>
@@ -11846,14 +11793,14 @@
               </a:rPr>
               <a:t>• ContextCacheConfig Context Caching</a:t>
             </a:r>
-            <a:endParaRPr lang="en-US" sz="720" dirty="0"/>
-          </a:p>
-          <a:p>
-            <a:pPr indent="0" marL="0">
-              <a:buNone/>
-            </a:pPr>
-            <a:r>
-              <a:rPr lang="en-US" sz="720" b="1" dirty="0">
+            <a:endParaRPr lang="en-US" sz="710" dirty="0"/>
+          </a:p>
+          <a:p>
+            <a:pPr indent="0" marL="0">
+              <a:buNone/>
+            </a:pPr>
+            <a:r>
+              <a:rPr lang="en-US" sz="710" b="1" dirty="0">
                 <a:solidFill>
                   <a:srgbClr val="202124"/>
                 </a:solidFill>
@@ -11863,14 +11810,14 @@
               </a:rPr>
               <a:t>• Hop 2: Catalog PDP &amp; 2LO &amp; 3LO Auth Mgr</a:t>
             </a:r>
-            <a:endParaRPr lang="en-US" sz="720" dirty="0"/>
-          </a:p>
-          <a:p>
-            <a:pPr indent="0" marL="0">
-              <a:buNone/>
-            </a:pPr>
-            <a:r>
-              <a:rPr lang="en-US" sz="720" b="1" dirty="0">
+            <a:endParaRPr lang="en-US" sz="710" dirty="0"/>
+          </a:p>
+          <a:p>
+            <a:pPr indent="0" marL="0">
+              <a:buNone/>
+            </a:pPr>
+            <a:r>
+              <a:rPr lang="en-US" sz="710" b="1" dirty="0">
                 <a:solidFill>
                   <a:srgbClr val="202124"/>
                 </a:solidFill>
@@ -11880,7 +11827,7 @@
               </a:rPr>
               <a:t>• BigQuery OTel Sink FinOps Attribution</a:t>
             </a:r>
-            <a:endParaRPr lang="en-US" sz="720" dirty="0"/>
+            <a:endParaRPr lang="en-US" sz="710" dirty="0"/>
           </a:p>
         </p:txBody>
       </p:sp>
@@ -11927,14 +11874,16 @@
           <a:ln/>
         </p:spPr>
         <p:txBody>
-          <a:bodyPr wrap="square" rtlCol="0" anchor="ctr"/>
-          <a:lstStyle/>
-          <a:p>
-            <a:pPr indent="0" marL="0">
-              <a:buNone/>
-            </a:pPr>
-            <a:r>
-              <a:rPr lang="en-US" sz="710" b="1" dirty="0">
+          <a:bodyPr wrap="square" rtlCol="0" anchor="ctr">
+            <a:normAutofit/>
+          </a:bodyPr>
+          <a:lstStyle/>
+          <a:p>
+            <a:pPr indent="0" marL="0">
+              <a:buNone/>
+            </a:pPr>
+            <a:r>
+              <a:rPr lang="en-US" sz="700" b="1" dirty="0">
                 <a:solidFill>
                   <a:srgbClr val="202124"/>
                 </a:solidFill>
@@ -11948,7 +11897,7 @@
               <a:buNone/>
             </a:pPr>
             <a:r>
-              <a:rPr lang="en-US" sz="700" dirty="0">
+              <a:rPr lang="en-US" sz="690" dirty="0">
                 <a:solidFill>
                   <a:srgbClr val="3C4043"/>
                 </a:solidFill>
@@ -11963,7 +11912,7 @@
               <a:buNone/>
             </a:pPr>
             <a:r>
-              <a:rPr lang="en-US" sz="710" b="1" dirty="0">
+              <a:rPr lang="en-US" sz="700" b="1" dirty="0">
                 <a:solidFill>
                   <a:srgbClr val="202124"/>
                 </a:solidFill>
@@ -11977,7 +11926,7 @@
               <a:buNone/>
             </a:pPr>
             <a:r>
-              <a:rPr lang="en-US" sz="700" dirty="0">
+              <a:rPr lang="en-US" sz="690" dirty="0">
                 <a:solidFill>
                   <a:srgbClr val="3C4043"/>
                 </a:solidFill>
@@ -11992,7 +11941,7 @@
               <a:buNone/>
             </a:pPr>
             <a:r>
-              <a:rPr lang="en-US" sz="710" b="1" dirty="0">
+              <a:rPr lang="en-US" sz="700" b="1" dirty="0">
                 <a:solidFill>
                   <a:srgbClr val="202124"/>
                 </a:solidFill>
@@ -12006,7 +11955,7 @@
               <a:buNone/>
             </a:pPr>
             <a:r>
-              <a:rPr lang="en-US" sz="700" dirty="0">
+              <a:rPr lang="en-US" sz="690" dirty="0">
                 <a:solidFill>
                   <a:srgbClr val="3C4043"/>
                 </a:solidFill>
@@ -12016,7 +11965,7 @@
               </a:rPr>
               <a:t>Export OpenTelemetry token usage spans and Cloud Billing records to BigQuery to enforce per-spoke quota budgets and automated spend alerts.</a:t>
             </a:r>
-            <a:endParaRPr lang="en-US" sz="710" dirty="0"/>
+            <a:endParaRPr lang="en-US" sz="700" dirty="0"/>
           </a:p>
         </p:txBody>
       </p:sp>
@@ -12394,8 +12343,8 @@
         </p:nvSpPr>
         <p:spPr>
           <a:xfrm>
-            <a:off x="877824" y="1554480"/>
-            <a:ext cx="10424160" cy="1920240"/>
+            <a:off x="877824" y="1536192"/>
+            <a:ext cx="10424160" cy="1956816"/>
           </a:xfrm>
           <a:prstGeom prst="rect">
             <a:avLst/>
@@ -12404,16 +12353,18 @@
           <a:ln/>
         </p:spPr>
         <p:txBody>
-          <a:bodyPr wrap="square" rtlCol="0" anchor="t"/>
-          <a:lstStyle/>
-          <a:p>
-            <a:pPr indent="0" marL="0">
-              <a:lnSpc>
-                <a:spcPct val="112000"/>
-              </a:lnSpc>
-              <a:buNone/>
-            </a:pPr>
-            <a:endParaRPr lang="en-US" sz="740" dirty="0"/>
+          <a:bodyPr wrap="square" rtlCol="0" anchor="t">
+            <a:normAutofit/>
+          </a:bodyPr>
+          <a:lstStyle/>
+          <a:p>
+            <a:pPr indent="0" marL="0">
+              <a:lnSpc>
+                <a:spcPct val="106000"/>
+              </a:lnSpc>
+              <a:buNone/>
+            </a:pPr>
+            <a:endParaRPr lang="en-US" sz="690" dirty="0"/>
           </a:p>
         </p:txBody>
       </p:sp>

--- a/slides/doc-mt-02-editable-slides.pptx
+++ b/slides/doc-mt-02-editable-slides.pptx
@@ -2765,7 +2765,7 @@
                 <a:ea typeface="Arial" pitchFamily="34" charset="-122"/>
                 <a:cs typeface="Arial" pitchFamily="34" charset="-120"/>
               </a:rPr>
-              <a:t>Triad Pillar 3: Privacy- Preserving OTel &amp; Chargeback</a:t>
+              <a:t>Triad Pillar 3: Zero-PII OTel &amp; FinOps Chargeback</a:t>
             </a:r>
             <a:endParaRPr lang="en-US" sz="460" dirty="0"/>
           </a:p>
@@ -3496,6 +3496,7 @@
               <a:srgbClr val="5F6368"/>
             </a:solidFill>
             <a:prstDash val="solid"/>
+            <a:headEnd type="triangle" w="sm" len="sm"/>
           </a:ln>
         </p:spPr>
       </p:sp>
@@ -3543,6 +3544,7 @@
               <a:srgbClr val="5F6368"/>
             </a:solidFill>
             <a:prstDash val="solid"/>
+            <a:headEnd type="triangle" w="sm" len="sm"/>
           </a:ln>
         </p:spPr>
       </p:sp>
@@ -3728,6 +3730,7 @@
               <a:srgbClr val="5F6368"/>
             </a:solidFill>
             <a:prstDash val="solid"/>
+            <a:headEnd type="triangle" w="sm" len="sm"/>
           </a:ln>
         </p:spPr>
       </p:sp>
@@ -3775,6 +3778,7 @@
               <a:srgbClr val="5F6368"/>
             </a:solidFill>
             <a:prstDash val="solid"/>
+            <a:headEnd type="triangle" w="sm" len="sm"/>
           </a:ln>
         </p:spPr>
       </p:sp>
@@ -5616,7 +5620,7 @@
                 <a:ea typeface="Arial" pitchFamily="34" charset="-122"/>
                 <a:cs typeface="Arial" pitchFamily="34" charset="-120"/>
               </a:rPr>
-              <a:t>Gemma 3 &amp; Claude 3.7</a:t>
+              <a:t>Gemma 3 &amp; Gemini 2.5 Pro</a:t>
             </a:r>
             <a:endParaRPr lang="en-US" sz="435" dirty="0"/>
           </a:p>
@@ -8035,7 +8039,7 @@
                 <a:ea typeface="Arial" pitchFamily="34" charset="-122"/>
                 <a:cs typeface="Arial" pitchFamily="34" charset="-120"/>
               </a:rPr>
-              <a:t>• Hop 1: Cloud Armor &amp; Hop 2: Catalog PDP: </a:t>
+              <a:t>• Hop 1: Cloud Armor: </a:t>
             </a:r>
             <a:pPr indent="0" marL="0">
               <a:lnSpc>
@@ -8052,7 +8056,7 @@
                 <a:ea typeface="Arial" pitchFamily="34" charset="-122"/>
                 <a:cs typeface="Arial" pitchFamily="34" charset="-120"/>
               </a:rPr>
-              <a:t>Enforces edge policy rules and screens payloads before reaching the runtime.
+              <a:t>Enforces edge policy rules before reaching the runtime.
 </a:t>
             </a:r>
             <a:pPr indent="0" marL="0">
@@ -8087,7 +8091,7 @@
                 <a:ea typeface="Arial" pitchFamily="34" charset="-122"/>
                 <a:cs typeface="Arial" pitchFamily="34" charset="-120"/>
               </a:rPr>
-              <a:t>Authenticates callers and verifies identity and scope claims before routing.
+              <a:t>Screens incoming prompts and verifies policy constraints at the routing hub.
 </a:t>
             </a:r>
             <a:pPr indent="0" marL="0">
@@ -8105,7 +8109,7 @@
                 <a:ea typeface="Arial" pitchFamily="34" charset="-122"/>
                 <a:cs typeface="Arial" pitchFamily="34" charset="-120"/>
               </a:rPr>
-              <a:t>• Architecture Selector: </a:t>
+              <a:t>• Hop 2: Catalog PDP: </a:t>
             </a:r>
             <a:pPr indent="0" marL="0">
               <a:lnSpc>
@@ -8122,7 +8126,7 @@
                 <a:ea typeface="Arial" pitchFamily="34" charset="-122"/>
                 <a:cs typeface="Arial" pitchFamily="34" charset="-120"/>
               </a:rPr>
-              <a:t>Serverless routing service that validates caller tokens and dispatches requests to the target execution spoke.</a:t>
+              <a:t>Authenticates callers and binds cryptographic identity and scope claims before routing.</a:t>
             </a:r>
             <a:endParaRPr lang="en-US" sz="690" dirty="0"/>
           </a:p>
@@ -8188,7 +8192,7 @@
                 <a:ea typeface="Arial" pitchFamily="34" charset="-122"/>
                 <a:cs typeface="Arial" pitchFamily="34" charset="-120"/>
               </a:rPr>
-              <a:t>Triad Pillar 3: Privacy- Preserving OTel &amp; Chargeback
+              <a:t>Triad Pillar 3: Zero-PII OTel &amp; FinOps Chargeback
 </a:t>
             </a:r>
             <a:pPr indent="0" marL="0">
@@ -8676,7 +8680,7 @@
                 <a:ea typeface="Arial" pitchFamily="34" charset="-122"/>
                 <a:cs typeface="Arial" pitchFamily="34" charset="-120"/>
               </a:rPr>
-              <a:t>• Thinking Budget Cap: </a:t>
+              <a:t>• Thinking Budget Cap / PSC Spoke Runtime: </a:t>
             </a:r>
             <a:pPr indent="0" marL="0">
               <a:lnSpc>
@@ -8693,7 +8697,7 @@
                 <a:ea typeface="Arial" pitchFamily="34" charset="-122"/>
                 <a:cs typeface="Arial" pitchFamily="34" charset="-120"/>
               </a:rPr>
-              <a:t>Core execution environment orchestrating reasoning, memory, and tool execution.
+              <a:t>Core execution environments orchestrating reasoning, memory, and tool execution across left and right spokes.
 </a:t>
             </a:r>
             <a:pPr indent="0" marL="0">
@@ -8711,7 +8715,7 @@
                 <a:ea typeface="Arial" pitchFamily="34" charset="-122"/>
                 <a:cs typeface="Arial" pitchFamily="34" charset="-120"/>
               </a:rPr>
-              <a:t>• Valkey Rate Bulkhead: </a:t>
+              <a:t>• Valkey Rate Bulkhead / VPC-SC &amp; IAM PAB: </a:t>
             </a:r>
             <a:pPr indent="0" marL="0">
               <a:lnSpc>
@@ -8728,7 +8732,7 @@
                 <a:ea typeface="Arial" pitchFamily="34" charset="-122"/>
                 <a:cs typeface="Arial" pitchFamily="34" charset="-120"/>
               </a:rPr>
-              <a:t>Screens prompts and model outputs within the execution boundary to enforce safety and DLP policies.
+              <a:t>Screens prompts and model outputs within each spoke boundary to enforce safety and DLP policies.
 </a:t>
             </a:r>
             <a:pPr indent="0" marL="0">
@@ -8746,7 +8750,7 @@
                 <a:ea typeface="Arial" pitchFamily="34" charset="-122"/>
                 <a:cs typeface="Arial" pitchFamily="34" charset="-120"/>
               </a:rPr>
-              <a:t>• 2LO &amp; 3LO Auth Mgr: </a:t>
+              <a:t>• 2LO &amp; 3LO Auth Mgr / Dedicated Silo MCP: </a:t>
             </a:r>
             <a:pPr indent="0" marL="0">
               <a:lnSpc>
@@ -8763,7 +8767,7 @@
                 <a:ea typeface="Arial" pitchFamily="34" charset="-122"/>
                 <a:cs typeface="Arial" pitchFamily="34" charset="-120"/>
               </a:rPr>
-              <a:t>Serverless tool interface providing standardized, scoped access to enterprise systems.
+              <a:t>Serverless tool interfaces providing standardized, scoped access to enterprise systems.
 </a:t>
             </a:r>
             <a:pPr indent="0" marL="0">
@@ -8781,7 +8785,7 @@
                 <a:ea typeface="Arial" pitchFamily="34" charset="-122"/>
                 <a:cs typeface="Arial" pitchFamily="34" charset="-120"/>
               </a:rPr>
-              <a:t>• AlloyDB RLS &amp; L1–L5: </a:t>
+              <a:t>• AlloyDB RLS &amp; L1–L5 / Cloud KMS CMEK Lock: </a:t>
             </a:r>
             <a:pPr indent="0" marL="0">
               <a:lnSpc>
@@ -8798,7 +8802,7 @@
                 <a:ea typeface="Arial" pitchFamily="34" charset="-122"/>
                 <a:cs typeface="Arial" pitchFamily="34" charset="-120"/>
               </a:rPr>
-              <a:t>Isolated persistence layer enforcing access boundaries, vector namespaces, and encryption at rest.</a:t>
+              <a:t>Isolated persistence layers enforcing access boundaries, vector namespaces, and encryption at rest.</a:t>
             </a:r>
             <a:endParaRPr lang="en-US" sz="690" dirty="0"/>
           </a:p>
@@ -9271,7 +9275,7 @@
                 <a:ea typeface="Arial" pitchFamily="34" charset="-122"/>
                 <a:cs typeface="Arial" pitchFamily="34" charset="-120"/>
               </a:rPr>
-              <a:t>The verified response returns to the caller through the Triad Pillar 1: Zero-Trust Cryptographic Security, while structured OpenTelemetry audit and FinOps spans stream to the Triad Pillar 3: Privacy- Preserving OTel &amp; Chargeback.
+              <a:t>The verified response returns to the caller through the Triad Pillar 1: Zero-Trust Cryptographic Security, while structured OpenTelemetry audit and FinOps spans stream to the Triad Pillar 3: Zero-PII OTel &amp; FinOps Chargeback.
 </a:t>
             </a:r>
             <a:endParaRPr lang="en-US" sz="730" dirty="0"/>

--- a/slides/doc-mt-02-editable-slides.pptx
+++ b/slides/doc-mt-02-editable-slides.pptx
@@ -785,7 +785,7 @@
           <a:p>
             <a:r>
               <a:rPr lang="en-US" dirty="0"/>
-              <a:t>[phased-roadmap-timeline] WS2 • Pattern A High-Density Pooled Deployment &amp; FinOps Roadmap: Workstream 2 Pattern A Timeline  •  Terraform 2.6 Starter → 90% Prefix Cache &amp; Valkey → 10/10 Red-Team Certification</a:t>
+              <a:t>[phased-roadmap-timeline] WS2 • ACT III: PATTERN A POOLED DEPLOYMENT &amp; FINOPS TIMELINE: Workstream 2 Pattern A Timeline  •  Terraform 2.6 Starter → 90% Prefix Cache &amp; Valkey → 10/10 Red-Team Certification</a:t>
             </a:r>
             <a:endParaRPr lang="en-US" dirty="0"/>
           </a:p>
@@ -873,7 +873,7 @@
           <a:p>
             <a:r>
               <a:rPr lang="en-US" dirty="0"/>
-              <a:t>[strategic-operating-model-pillars] WS2 • Pattern A Pooled Economics, Defense-in-Depth &amp; Quota Governance: Workstream 2 Pattern A Operating Model  •  $42/mo Unit Economics + 10/10 Breach Defense + Valkey Quota Bulkheads</a:t>
+              <a:t>[strategic-operating-model-pillars] WS2 • ACT III: PATTERN A POOLED ECONOMICS &amp; QUOTA GOVERNANCE MODEL: Workstream 2 Pattern A Operating Model  •  $42/mo Unit Economics + 10/10 Breach Defense + Valkey Quota Bulkheads</a:t>
             </a:r>
             <a:endParaRPr lang="en-US" dirty="0"/>
           </a:p>
@@ -1592,7 +1592,7 @@
           <a:p>
             <a:r>
               <a:rPr lang="en-US" dirty="0"/>
-              <a:t>[async-state-flow-pipeline] WS2 • Pattern A Valkey Token-Bucket &amp; 90% Prefix Cache FinOps Pipeline: Workstream 2 Pattern A Pipeline  •  Valkey 120/600 RPM Bulkheads + 90% Shared Prefix Cache + 4k/8k Thinking Caps</a:t>
+              <a:t>[async-state-flow-pipeline] WS2 • ACT II: VALKEY TOKEN-BUCKET &amp; 90% PREFIX CACHE FINOPS PIPELINE: Workstream 2 Pattern A Pipeline  •  Valkey 120/600 RPM Bulkheads + 90% Shared Prefix Cache + 4k/8k Thinking Caps</a:t>
             </a:r>
             <a:endParaRPr lang="en-US" dirty="0"/>
           </a:p>
@@ -3178,7 +3178,7 @@
                 <a:ea typeface="Google Sans" pitchFamily="34" charset="-122"/>
                 <a:cs typeface="Google Sans" pitchFamily="34" charset="-120"/>
               </a:rPr>
-              <a:t>OFFICIAL 4-ZONE HUB-AND-SPOKE TOPOLOGY (#78)</a:t>
+              <a:t>3-ACT EXECUTIVE BRIEFING &amp; DELIVERABLE MAP</a:t>
             </a:r>
             <a:endParaRPr lang="en-US" sz="920" dirty="0"/>
           </a:p>
@@ -3240,7 +3240,7 @@
         <p:spPr>
           <a:xfrm>
             <a:off x="7735824" y="1005840"/>
-            <a:ext cx="1353312" cy="219456"/>
+            <a:ext cx="1481328" cy="219456"/>
           </a:xfrm>
           <a:prstGeom prst="roundRect">
             <a:avLst>
@@ -3262,7 +3262,7 @@
         <p:spPr>
           <a:xfrm>
             <a:off x="7735824" y="1005840"/>
-            <a:ext cx="1353312" cy="219456"/>
+            <a:ext cx="1481328" cy="219456"/>
           </a:xfrm>
           <a:prstGeom prst="rect">
             <a:avLst/>
@@ -3278,7 +3278,7 @@
               <a:buNone/>
             </a:pPr>
             <a:r>
-              <a:rPr lang="en-US" sz="680" b="1" dirty="0">
+              <a:rPr lang="en-US" sz="660" b="1" dirty="0">
                 <a:solidFill>
                   <a:srgbClr val="174EA6"/>
                 </a:solidFill>
@@ -3286,9 +3286,9 @@
                 <a:ea typeface="Google Sans" pitchFamily="34" charset="-122"/>
                 <a:cs typeface="Google Sans" pitchFamily="34" charset="-120"/>
               </a:rPr>
-              <a:t>01 • ROUTING HUB</a:t>
-            </a:r>
-            <a:endParaRPr lang="en-US" sz="680" dirty="0"/>
+              <a:t>ACT I • SLIDES 1–4</a:t>
+            </a:r>
+            <a:endParaRPr lang="en-US" sz="660" dirty="0"/>
           </a:p>
         </p:txBody>
       </p:sp>
@@ -3300,8 +3300,8 @@
         </p:nvSpPr>
         <p:spPr>
           <a:xfrm>
-            <a:off x="9162288" y="987552"/>
-            <a:ext cx="2340864" cy="256032"/>
+            <a:off x="9272016" y="987552"/>
+            <a:ext cx="2249424" cy="256032"/>
           </a:xfrm>
           <a:prstGeom prst="rect">
             <a:avLst/>
@@ -3317,7 +3317,7 @@
               <a:buNone/>
             </a:pPr>
             <a:r>
-              <a:rPr lang="en-US" sz="880" b="1" dirty="0">
+              <a:rPr lang="en-US" sz="850" b="1" dirty="0">
                 <a:solidFill>
                   <a:srgbClr val="3C4043"/>
                 </a:solidFill>
@@ -3325,9 +3325,9 @@
                 <a:ea typeface="Google Sans" pitchFamily="34" charset="-122"/>
                 <a:cs typeface="Google Sans" pitchFamily="34" charset="-120"/>
               </a:rPr>
-              <a:t>Edge WAF, OBO/DPoP &amp; Tier Router</a:t>
-            </a:r>
-            <a:endParaRPr lang="en-US" sz="880" dirty="0"/>
+              <a:t>Master Blueprint (#78) &amp; SLO Scorecard</a:t>
+            </a:r>
+            <a:endParaRPr lang="en-US" sz="850" dirty="0"/>
           </a:p>
         </p:txBody>
       </p:sp>
@@ -3356,7 +3356,7 @@
               <a:buNone/>
             </a:pPr>
             <a:r>
-              <a:rPr lang="en-US" sz="790" dirty="0">
+              <a:rPr lang="en-US" sz="780" dirty="0">
                 <a:solidFill>
                   <a:srgbClr val="5F6368"/>
                 </a:solidFill>
@@ -3364,9 +3364,9 @@
                 <a:ea typeface="Roboto" pitchFamily="34" charset="-122"/>
                 <a:cs typeface="Roboto" pitchFamily="34" charset="-120"/>
               </a:rPr>
-              <a:t>Google Cloud Armor, IAP, IAM STS &amp; Agent Engine Registry verify OIDC identity, strip spoofed headers &amp; filter tools.</a:t>
-            </a:r>
-            <a:endParaRPr lang="en-US" sz="790" dirty="0"/>
+              <a:t>Decomposes Figure 1 into 56 editable vector shapes + 23 connectors, quantified unit economics ($42 vs. $1,850/mo) &amp; GCP stack.</a:t>
+            </a:r>
+            <a:endParaRPr lang="en-US" sz="780" dirty="0"/>
           </a:p>
         </p:txBody>
       </p:sp>
@@ -3426,7 +3426,7 @@
         <p:spPr>
           <a:xfrm>
             <a:off x="7735824" y="2194560"/>
-            <a:ext cx="1353312" cy="219456"/>
+            <a:ext cx="1481328" cy="219456"/>
           </a:xfrm>
           <a:prstGeom prst="roundRect">
             <a:avLst>
@@ -3448,7 +3448,7 @@
         <p:spPr>
           <a:xfrm>
             <a:off x="7735824" y="2194560"/>
-            <a:ext cx="1353312" cy="219456"/>
+            <a:ext cx="1481328" cy="219456"/>
           </a:xfrm>
           <a:prstGeom prst="rect">
             <a:avLst/>
@@ -3464,7 +3464,7 @@
               <a:buNone/>
             </a:pPr>
             <a:r>
-              <a:rPr lang="en-US" sz="680" b="1" dirty="0">
+              <a:rPr lang="en-US" sz="660" b="1" dirty="0">
                 <a:solidFill>
                   <a:srgbClr val="A50E0E"/>
                 </a:solidFill>
@@ -3472,9 +3472,9 @@
                 <a:ea typeface="Google Sans" pitchFamily="34" charset="-122"/>
                 <a:cs typeface="Google Sans" pitchFamily="34" charset="-120"/>
               </a:rPr>
-              <a:t>02 • RIGHT SPOKE</a:t>
-            </a:r>
-            <a:endParaRPr lang="en-US" sz="680" dirty="0"/>
+              <a:t>ACT II • SLIDES 5–8</a:t>
+            </a:r>
+            <a:endParaRPr lang="en-US" sz="660" dirty="0"/>
           </a:p>
         </p:txBody>
       </p:sp>
@@ -3486,8 +3486,8 @@
         </p:nvSpPr>
         <p:spPr>
           <a:xfrm>
-            <a:off x="9162288" y="2176272"/>
-            <a:ext cx="2340864" cy="256032"/>
+            <a:off x="9272016" y="2176272"/>
+            <a:ext cx="2249424" cy="256032"/>
           </a:xfrm>
           <a:prstGeom prst="rect">
             <a:avLst/>
@@ -3503,7 +3503,7 @@
               <a:buNone/>
             </a:pPr>
             <a:r>
-              <a:rPr lang="en-US" sz="880" b="1" dirty="0">
+              <a:rPr lang="en-US" sz="850" b="1" dirty="0">
                 <a:solidFill>
                   <a:srgbClr val="3C4043"/>
                 </a:solidFill>
@@ -3511,9 +3511,9 @@
                 <a:ea typeface="Google Sans" pitchFamily="34" charset="-122"/>
                 <a:cs typeface="Google Sans" pitchFamily="34" charset="-120"/>
               </a:rPr>
-              <a:t>2LO/3LO MCP, AlloyDB RLS &amp; PSC Vaults</a:t>
-            </a:r>
-            <a:endParaRPr lang="en-US" sz="880" dirty="0"/>
+              <a:t>3-Zone Boundaries, UML &amp; Fail-Closed Loops</a:t>
+            </a:r>
+            <a:endParaRPr lang="en-US" sz="850" dirty="0"/>
           </a:p>
         </p:txBody>
       </p:sp>
@@ -3542,7 +3542,7 @@
               <a:buNone/>
             </a:pPr>
             <a:r>
-              <a:rPr lang="en-US" sz="790" dirty="0">
+              <a:rPr lang="en-US" sz="780" dirty="0">
                 <a:solidFill>
                   <a:srgbClr val="5F6368"/>
                 </a:solidFill>
@@ -3550,9 +3550,9 @@
                 <a:ea typeface="Roboto" pitchFamily="34" charset="-122"/>
                 <a:cs typeface="Roboto" pitchFamily="34" charset="-120"/>
               </a:rPr>
-              <a:t>Enforces PostgreSQL Row-Level Security, 3LO step-up consent, VPC-SC perimeters &amp; &lt;60s CMEK kill-switches.</a:t>
-            </a:r>
-            <a:endParaRPr lang="en-US" sz="790" dirty="0"/>
+              <a:t>Walks through 3-zone physical/logical boundaries, Hop 1 OBO+DPoP wire transformation, 5-Actor UML sequence &amp; HTTP 401–429 circuit breakers.</a:t>
+            </a:r>
+            <a:endParaRPr lang="en-US" sz="780" dirty="0"/>
           </a:p>
         </p:txBody>
       </p:sp>
@@ -3612,7 +3612,7 @@
         <p:spPr>
           <a:xfrm>
             <a:off x="7735824" y="3383280"/>
-            <a:ext cx="1353312" cy="219456"/>
+            <a:ext cx="1481328" cy="219456"/>
           </a:xfrm>
           <a:prstGeom prst="roundRect">
             <a:avLst>
@@ -3634,7 +3634,7 @@
         <p:spPr>
           <a:xfrm>
             <a:off x="7735824" y="3383280"/>
-            <a:ext cx="1353312" cy="219456"/>
+            <a:ext cx="1481328" cy="219456"/>
           </a:xfrm>
           <a:prstGeom prst="rect">
             <a:avLst/>
@@ -3650,7 +3650,7 @@
               <a:buNone/>
             </a:pPr>
             <a:r>
-              <a:rPr lang="en-US" sz="680" b="1" dirty="0">
+              <a:rPr lang="en-US" sz="660" b="1" dirty="0">
                 <a:solidFill>
                   <a:srgbClr val="B06000"/>
                 </a:solidFill>
@@ -3658,9 +3658,9 @@
                 <a:ea typeface="Google Sans" pitchFamily="34" charset="-122"/>
                 <a:cs typeface="Google Sans" pitchFamily="34" charset="-120"/>
               </a:rPr>
-              <a:t>03 • LEFT SPOKE</a:t>
-            </a:r>
-            <a:endParaRPr lang="en-US" sz="680" dirty="0"/>
+              <a:t>ACT III • SLIDES 9–12</a:t>
+            </a:r>
+            <a:endParaRPr lang="en-US" sz="660" dirty="0"/>
           </a:p>
         </p:txBody>
       </p:sp>
@@ -3672,8 +3672,8 @@
         </p:nvSpPr>
         <p:spPr>
           <a:xfrm>
-            <a:off x="9162288" y="3364992"/>
-            <a:ext cx="2340864" cy="256032"/>
+            <a:off x="9272016" y="3364992"/>
+            <a:ext cx="2249424" cy="256032"/>
           </a:xfrm>
           <a:prstGeom prst="rect">
             <a:avLst/>
@@ -3689,7 +3689,7 @@
               <a:buNone/>
             </a:pPr>
             <a:r>
-              <a:rPr lang="en-US" sz="880" b="1" dirty="0">
+              <a:rPr lang="en-US" sz="850" b="1" dirty="0">
                 <a:solidFill>
                   <a:srgbClr val="3C4043"/>
                 </a:solidFill>
@@ -3697,9 +3697,9 @@
                 <a:ea typeface="Google Sans" pitchFamily="34" charset="-122"/>
                 <a:cs typeface="Google Sans" pitchFamily="34" charset="-120"/>
               </a:rPr>
-              <a:t>Model Armor, ADK &amp; 90% Prefix Cache</a:t>
-            </a:r>
-            <a:endParaRPr lang="en-US" sz="880" dirty="0"/>
+              <a:t>Pattern A/B/C Matrix, GAP-01..05 &amp; Live Proof</a:t>
+            </a:r>
+            <a:endParaRPr lang="en-US" sz="850" dirty="0"/>
           </a:p>
         </p:txBody>
       </p:sp>
@@ -3728,7 +3728,7 @@
               <a:buNone/>
             </a:pPr>
             <a:r>
-              <a:rPr lang="en-US" sz="790" dirty="0">
+              <a:rPr lang="en-US" sz="780" dirty="0">
                 <a:solidFill>
                   <a:srgbClr val="5F6368"/>
                 </a:solidFill>
@@ -3736,9 +3736,9 @@
                 <a:ea typeface="Roboto" pitchFamily="34" charset="-122"/>
                 <a:cs typeface="Roboto" pitchFamily="34" charset="-120"/>
               </a:rPr>
-              <a:t>Screens prompts (4/6), executes Gemini 2.5 Pro with 90% cache (5), clamps RPM in Valkey &amp; isolates L1–L5 memory.</a:t>
-            </a:r>
-            <a:endParaRPr lang="en-US" sz="790" dirty="0"/>
+              <a:t>Compares Pooled, Siloed &amp; Hybrid PSC trade-offs, closes 5 EAP product gaps, embeds 16:9 Cloud Console captures &amp; 6-week rollout.</a:t>
+            </a:r>
+            <a:endParaRPr lang="en-US" sz="780" dirty="0"/>
           </a:p>
         </p:txBody>
       </p:sp>
@@ -3798,7 +3798,7 @@
         <p:spPr>
           <a:xfrm>
             <a:off x="7735824" y="4572000"/>
-            <a:ext cx="1353312" cy="219456"/>
+            <a:ext cx="1481328" cy="219456"/>
           </a:xfrm>
           <a:prstGeom prst="roundRect">
             <a:avLst>
@@ -3820,7 +3820,7 @@
         <p:spPr>
           <a:xfrm>
             <a:off x="7735824" y="4572000"/>
-            <a:ext cx="1353312" cy="219456"/>
+            <a:ext cx="1481328" cy="219456"/>
           </a:xfrm>
           <a:prstGeom prst="rect">
             <a:avLst/>
@@ -3836,7 +3836,7 @@
               <a:buNone/>
             </a:pPr>
             <a:r>
-              <a:rPr lang="en-US" sz="680" b="1" dirty="0">
+              <a:rPr lang="en-US" sz="660" b="1" dirty="0">
                 <a:solidFill>
                   <a:srgbClr val="0D652D"/>
                 </a:solidFill>
@@ -3844,9 +3844,9 @@
                 <a:ea typeface="Google Sans" pitchFamily="34" charset="-122"/>
                 <a:cs typeface="Google Sans" pitchFamily="34" charset="-120"/>
               </a:rPr>
-              <a:t>04 • GOVERNANCE HUB</a:t>
-            </a:r>
-            <a:endParaRPr lang="en-US" sz="680" dirty="0"/>
+              <a:t>GOVERNANCE • SLIDES 13–14</a:t>
+            </a:r>
+            <a:endParaRPr lang="en-US" sz="660" dirty="0"/>
           </a:p>
         </p:txBody>
       </p:sp>
@@ -3858,8 +3858,8 @@
         </p:nvSpPr>
         <p:spPr>
           <a:xfrm>
-            <a:off x="9162288" y="4553712"/>
-            <a:ext cx="2340864" cy="256032"/>
+            <a:off x="9272016" y="4553712"/>
+            <a:ext cx="2249424" cy="256032"/>
           </a:xfrm>
           <a:prstGeom prst="rect">
             <a:avLst/>
@@ -3875,7 +3875,7 @@
               <a:buNone/>
             </a:pPr>
             <a:r>
-              <a:rPr lang="en-US" sz="880" b="1" dirty="0">
+              <a:rPr lang="en-US" sz="850" b="1" dirty="0">
                 <a:solidFill>
                   <a:srgbClr val="3C4043"/>
                 </a:solidFill>
@@ -3883,9 +3883,9 @@
                 <a:ea typeface="Google Sans" pitchFamily="34" charset="-122"/>
                 <a:cs typeface="Google Sans" pitchFamily="34" charset="-120"/>
               </a:rPr>
-              <a:t>Security, CMEK &amp; FinOps Telemetry</a:t>
-            </a:r>
-            <a:endParaRPr lang="en-US" sz="880" dirty="0"/>
+              <a:t>Day-2 RACI Operating Model &amp; Series Map</a:t>
+            </a:r>
+            <a:endParaRPr lang="en-US" sz="850" dirty="0"/>
           </a:p>
         </p:txBody>
       </p:sp>
@@ -3914,7 +3914,7 @@
               <a:buNone/>
             </a:pPr>
             <a:r>
-              <a:rPr lang="en-US" sz="790" dirty="0">
+              <a:rPr lang="en-US" sz="780" dirty="0">
                 <a:solidFill>
                   <a:srgbClr val="5F6368"/>
                 </a:solidFill>
@@ -3922,9 +3922,9 @@
                 <a:ea typeface="Roboto" pitchFamily="34" charset="-122"/>
                 <a:cs typeface="Roboto" pitchFamily="34" charset="-120"/>
               </a:rPr>
-              <a:t>Security Command Center, Cloud KMS CMEK &amp; BigQuery OTel govern encryption liveness and zero-PII chargeback.</a:t>
-            </a:r>
-            <a:endParaRPr lang="en-US" sz="790" dirty="0"/>
+              <a:t>Assigns Security, SRE &amp; FinOps ownership SLAs and maps runnable deliverables across Workstreams 1–5 (24 files + 20/20 gates).</a:t>
+            </a:r>
+            <a:endParaRPr lang="en-US" sz="780" dirty="0"/>
           </a:p>
         </p:txBody>
       </p:sp>
@@ -3980,7 +3980,7 @@
               <a:buNone/>
             </a:pPr>
             <a:r>
-              <a:rPr lang="en-US" sz="740" b="1" dirty="0">
+              <a:rPr lang="en-US" sz="720" b="1" dirty="0">
                 <a:solidFill>
                   <a:srgbClr val="3C4043"/>
                 </a:solidFill>
@@ -3988,9 +3988,9 @@
                 <a:ea typeface="Google Sans" pitchFamily="34" charset="-122"/>
                 <a:cs typeface="Google Sans" pitchFamily="34" charset="-120"/>
               </a:rPr>
-              <a:t>3-Act Executive Arc (14 Slides): Act I Architecture → Act II Runtime → Act III Proof &amp; Rollout</a:t>
-            </a:r>
-            <a:endParaRPr lang="en-US" sz="740" dirty="0"/>
+              <a:t>Verified Across 3 GCP Projects (#248990048888 • #638420508320 • #887605034827) • 12/12 Forensic PASS</a:t>
+            </a:r>
+            <a:endParaRPr lang="en-US" sz="720" dirty="0"/>
           </a:p>
         </p:txBody>
       </p:sp>
@@ -4430,7 +4430,7 @@
                 <a:ea typeface="Google Sans" pitchFamily="34" charset="-122"/>
                 <a:cs typeface="Google Sans" pitchFamily="34" charset="-120"/>
               </a:rPr>
-              <a:t>Design alternatives — FinOps Prefix Caching (84.7% Savings) &amp; Terraform Starter</a:t>
+              <a:t>ACT I • GOOGLE CLOUD REFERENCE PRODUCT STACK &amp; BILL OF MATERIALS</a:t>
             </a:r>
             <a:endParaRPr lang="en-US" sz="1020" dirty="0"/>
           </a:p>
@@ -4535,7 +4535,7 @@
                 <a:ea typeface="Google Sans" pitchFamily="34" charset="-122"/>
                 <a:cs typeface="Google Sans" pitchFamily="34" charset="-120"/>
               </a:rPr>
-              <a:t>Design alternatives — FinOps Prefix Caching (84.7% Savings) &amp; Terraform Starter</a:t>
+              <a:t>FinOps Prefix Caching (84.7% Savings) &amp; Terraform Starter</a:t>
             </a:r>
             <a:endParaRPr lang="en-US" sz="1900" dirty="0"/>
           </a:p>
@@ -4574,7 +4574,7 @@
                 <a:ea typeface="Roboto" pitchFamily="34" charset="-122"/>
                 <a:cs typeface="Roboto" pitchFamily="34" charset="-120"/>
               </a:rPr>
-              <a:t>Structured Google Cloud reference components, runtime isolation boundaries, and target SLAs.</a:t>
+              <a:t>Structured Google Cloud reference SKUs, runtime isolation boundaries, and production SLAs.</a:t>
             </a:r>
             <a:endParaRPr lang="en-US" sz="1000" dirty="0"/>
           </a:p>
@@ -4721,7 +4721,7 @@
                 <a:ea typeface="Google Sans" pitchFamily="34" charset="-122"/>
                 <a:cs typeface="Google Sans" pitchFamily="34" charset="-120"/>
               </a:rPr>
-              <a:t>84.7% Net Inference Cost Reduction</a:t>
+              <a:t>7% Net Inference Cost Reduction</a:t>
             </a:r>
             <a:endParaRPr lang="en-US" sz="1140" dirty="0"/>
           </a:p>
@@ -6896,7 +6896,7 @@
                 <a:ea typeface="Roboto" pitchFamily="34" charset="-122"/>
                 <a:cs typeface="Roboto" pitchFamily="34" charset="-120"/>
               </a:rPr>
-              <a:t>• Project: nitinagga-ge-2 (#638420508320)</a:t>
+              <a:t>• Project: cymbal-pooled-prod (#638420508320)</a:t>
             </a:r>
             <a:endParaRPr lang="en-US" sz="780" dirty="0"/>
           </a:p>
@@ -6913,7 +6913,7 @@
                 <a:ea typeface="Roboto" pitchFamily="34" charset="-122"/>
                 <a:cs typeface="Roboto" pitchFamily="34" charset="-120"/>
               </a:rPr>
-              <a:t>• Sandbox: nitina-ggarwal-sandbox-647724</a:t>
+              <a:t>• Sandbox: cymbal-build-sandbox (#887605034827)</a:t>
             </a:r>
             <a:endParaRPr lang="en-US" sz="780" dirty="0"/>
           </a:p>
@@ -8477,7 +8477,7 @@
                 <a:ea typeface="Google Sans" pitchFamily="34" charset="-122"/>
                 <a:cs typeface="Google Sans" pitchFamily="34" charset="-120"/>
               </a:rPr>
-              <a:t>WS2 • Pattern A High-Density Pooled Deployment &amp; FinOps Roadmap</a:t>
+              <a:t>WS2 • ACT III: PATTERN A POOLED DEPLOYMENT &amp; FINOPS TIMELINE</a:t>
             </a:r>
             <a:endParaRPr lang="en-US" sz="1020" dirty="0"/>
           </a:p>
@@ -8574,7 +8574,7 @@
               <a:buNone/>
             </a:pPr>
             <a:r>
-              <a:rPr lang="en-US" sz="2400" b="1" dirty="0">
+              <a:rPr lang="en-US" sz="2250" b="1" dirty="0">
                 <a:solidFill>
                   <a:srgbClr val="0F2942"/>
                 </a:solidFill>
@@ -8582,9 +8582,9 @@
                 <a:ea typeface="Google Sans Display" pitchFamily="34" charset="-122"/>
                 <a:cs typeface="Google Sans Display" pitchFamily="34" charset="-120"/>
               </a:rPr>
-              <a:t>Pattern A Pooled Multi-Tenant Implementation Timeline</a:t>
-            </a:r>
-            <a:endParaRPr lang="en-US" sz="2400" dirty="0"/>
+              <a:t>6-Week Pattern A Pooled Multi-Tenant Implementation &amp; Red-Team Roadmap</a:t>
+            </a:r>
+            <a:endParaRPr lang="en-US" sz="2250" dirty="0"/>
           </a:p>
         </p:txBody>
       </p:sp>
@@ -8878,66 +8878,6 @@
         </p:nvSpPr>
         <p:spPr>
           <a:xfrm>
-            <a:off x="411480" y="3694176"/>
-            <a:ext cx="237744" cy="237744"/>
-          </a:xfrm>
-          <a:prstGeom prst="ellipse">
-            <a:avLst/>
-          </a:prstGeom>
-          <a:solidFill>
-            <a:srgbClr val="0F2942"/>
-          </a:solidFill>
-          <a:ln/>
-        </p:spPr>
-      </p:sp>
-      <p:sp>
-        <p:nvSpPr>
-          <p:cNvPr id="27" name="Shape 25"/>
-          <p:cNvSpPr/>
-          <p:nvPr/>
-        </p:nvSpPr>
-        <p:spPr>
-          <a:xfrm>
-            <a:off x="3849624" y="3694176"/>
-            <a:ext cx="237744" cy="237744"/>
-          </a:xfrm>
-          <a:prstGeom prst="ellipse">
-            <a:avLst/>
-          </a:prstGeom>
-          <a:solidFill>
-            <a:srgbClr val="0F2942"/>
-          </a:solidFill>
-          <a:ln/>
-        </p:spPr>
-      </p:sp>
-      <p:sp>
-        <p:nvSpPr>
-          <p:cNvPr id="28" name="Shape 26"/>
-          <p:cNvSpPr/>
-          <p:nvPr/>
-        </p:nvSpPr>
-        <p:spPr>
-          <a:xfrm>
-            <a:off x="4251960" y="3694176"/>
-            <a:ext cx="237744" cy="237744"/>
-          </a:xfrm>
-          <a:prstGeom prst="ellipse">
-            <a:avLst/>
-          </a:prstGeom>
-          <a:solidFill>
-            <a:srgbClr val="0D7A75"/>
-          </a:solidFill>
-          <a:ln/>
-        </p:spPr>
-      </p:sp>
-      <p:sp>
-        <p:nvSpPr>
-          <p:cNvPr id="29" name="Shape 27"/>
-          <p:cNvSpPr/>
-          <p:nvPr/>
-        </p:nvSpPr>
-        <p:spPr>
-          <a:xfrm>
             <a:off x="4370832" y="1536192"/>
             <a:ext cx="3438144" cy="4443984"/>
           </a:xfrm>
@@ -8959,7 +8899,7 @@
       </p:sp>
       <p:sp>
         <p:nvSpPr>
-          <p:cNvPr id="30" name="Shape 28"/>
+          <p:cNvPr id="27" name="Shape 25"/>
           <p:cNvSpPr/>
           <p:nvPr/>
         </p:nvSpPr>
@@ -8981,7 +8921,7 @@
       </p:sp>
       <p:sp>
         <p:nvSpPr>
-          <p:cNvPr id="31" name="Text 29"/>
+          <p:cNvPr id="28" name="Text 26"/>
           <p:cNvSpPr/>
           <p:nvPr/>
         </p:nvSpPr>
@@ -9020,7 +8960,7 @@
       </p:sp>
       <p:sp>
         <p:nvSpPr>
-          <p:cNvPr id="32" name="Shape 30"/>
+          <p:cNvPr id="29" name="Shape 27"/>
           <p:cNvSpPr/>
           <p:nvPr/>
         </p:nvSpPr>
@@ -9040,7 +8980,7 @@
       </p:sp>
       <p:sp>
         <p:nvSpPr>
-          <p:cNvPr id="33" name="Text 31"/>
+          <p:cNvPr id="30" name="Text 28"/>
           <p:cNvSpPr/>
           <p:nvPr/>
         </p:nvSpPr>
@@ -9096,7 +9036,7 @@
       </p:sp>
       <p:sp>
         <p:nvSpPr>
-          <p:cNvPr id="34" name="Text 32"/>
+          <p:cNvPr id="31" name="Text 29"/>
           <p:cNvSpPr/>
           <p:nvPr/>
         </p:nvSpPr>
@@ -9135,7 +9075,7 @@
       </p:sp>
       <p:sp>
         <p:nvSpPr>
-          <p:cNvPr id="35" name="Shape 33"/>
+          <p:cNvPr id="32" name="Shape 30"/>
           <p:cNvSpPr/>
           <p:nvPr/>
         </p:nvSpPr>
@@ -9158,7 +9098,7 @@
       </p:sp>
       <p:sp>
         <p:nvSpPr>
-          <p:cNvPr id="36" name="Text 34"/>
+          <p:cNvPr id="33" name="Text 31"/>
           <p:cNvSpPr/>
           <p:nvPr/>
         </p:nvSpPr>
@@ -9214,47 +9154,7 @@
       </p:sp>
       <p:sp>
         <p:nvSpPr>
-          <p:cNvPr id="37" name="Shape 35"/>
-          <p:cNvSpPr/>
-          <p:nvPr/>
-        </p:nvSpPr>
-        <p:spPr>
-          <a:xfrm>
-            <a:off x="7690104" y="3694176"/>
-            <a:ext cx="237744" cy="237744"/>
-          </a:xfrm>
-          <a:prstGeom prst="ellipse">
-            <a:avLst/>
-          </a:prstGeom>
-          <a:solidFill>
-            <a:srgbClr val="0D7A75"/>
-          </a:solidFill>
-          <a:ln/>
-        </p:spPr>
-      </p:sp>
-      <p:sp>
-        <p:nvSpPr>
-          <p:cNvPr id="38" name="Shape 36"/>
-          <p:cNvSpPr/>
-          <p:nvPr/>
-        </p:nvSpPr>
-        <p:spPr>
-          <a:xfrm>
-            <a:off x="8092440" y="3694176"/>
-            <a:ext cx="237744" cy="237744"/>
-          </a:xfrm>
-          <a:prstGeom prst="ellipse">
-            <a:avLst/>
-          </a:prstGeom>
-          <a:solidFill>
-            <a:srgbClr val="54728C"/>
-          </a:solidFill>
-          <a:ln/>
-        </p:spPr>
-      </p:sp>
-      <p:sp>
-        <p:nvSpPr>
-          <p:cNvPr id="39" name="Shape 37"/>
+          <p:cNvPr id="34" name="Shape 32"/>
           <p:cNvSpPr/>
           <p:nvPr/>
         </p:nvSpPr>
@@ -9281,7 +9181,7 @@
       </p:sp>
       <p:sp>
         <p:nvSpPr>
-          <p:cNvPr id="40" name="Shape 38"/>
+          <p:cNvPr id="35" name="Shape 33"/>
           <p:cNvSpPr/>
           <p:nvPr/>
         </p:nvSpPr>
@@ -9303,7 +9203,7 @@
       </p:sp>
       <p:sp>
         <p:nvSpPr>
-          <p:cNvPr id="41" name="Text 39"/>
+          <p:cNvPr id="36" name="Text 34"/>
           <p:cNvSpPr/>
           <p:nvPr/>
         </p:nvSpPr>
@@ -9342,7 +9242,7 @@
       </p:sp>
       <p:sp>
         <p:nvSpPr>
-          <p:cNvPr id="42" name="Shape 40"/>
+          <p:cNvPr id="37" name="Shape 35"/>
           <p:cNvSpPr/>
           <p:nvPr/>
         </p:nvSpPr>
@@ -9362,7 +9262,7 @@
       </p:sp>
       <p:sp>
         <p:nvSpPr>
-          <p:cNvPr id="43" name="Text 41"/>
+          <p:cNvPr id="38" name="Text 36"/>
           <p:cNvSpPr/>
           <p:nvPr/>
         </p:nvSpPr>
@@ -9418,7 +9318,7 @@
       </p:sp>
       <p:sp>
         <p:nvSpPr>
-          <p:cNvPr id="44" name="Text 42"/>
+          <p:cNvPr id="39" name="Text 37"/>
           <p:cNvSpPr/>
           <p:nvPr/>
         </p:nvSpPr>
@@ -9457,7 +9357,7 @@
       </p:sp>
       <p:sp>
         <p:nvSpPr>
-          <p:cNvPr id="45" name="Shape 43"/>
+          <p:cNvPr id="40" name="Shape 38"/>
           <p:cNvSpPr/>
           <p:nvPr/>
         </p:nvSpPr>
@@ -9480,7 +9380,7 @@
       </p:sp>
       <p:sp>
         <p:nvSpPr>
-          <p:cNvPr id="46" name="Text 44"/>
+          <p:cNvPr id="41" name="Text 39"/>
           <p:cNvSpPr/>
           <p:nvPr/>
         </p:nvSpPr>
@@ -9536,7 +9436,173 @@
       </p:sp>
       <p:sp>
         <p:nvSpPr>
+          <p:cNvPr id="42" name="Shape 40"/>
+          <p:cNvSpPr/>
+          <p:nvPr/>
+        </p:nvSpPr>
+        <p:spPr>
+          <a:xfrm>
+            <a:off x="3968496" y="3813048"/>
+            <a:ext cx="402336" cy="0"/>
+          </a:xfrm>
+          <a:prstGeom prst="line">
+            <a:avLst/>
+          </a:prstGeom>
+          <a:noFill/>
+          <a:ln w="28575">
+            <a:solidFill>
+              <a:srgbClr val="0F2942"/>
+            </a:solidFill>
+            <a:prstDash val="solid"/>
+            <a:tailEnd type="triangle" w="sm" len="sm"/>
+          </a:ln>
+        </p:spPr>
+      </p:sp>
+      <p:sp>
+        <p:nvSpPr>
+          <p:cNvPr id="43" name="Shape 41"/>
+          <p:cNvSpPr/>
+          <p:nvPr/>
+        </p:nvSpPr>
+        <p:spPr>
+          <a:xfrm>
+            <a:off x="4059936" y="3401568"/>
+            <a:ext cx="219456" cy="219456"/>
+          </a:xfrm>
+          <a:prstGeom prst="ellipse">
+            <a:avLst/>
+          </a:prstGeom>
+          <a:solidFill>
+            <a:srgbClr val="0F2942"/>
+          </a:solidFill>
+          <a:ln/>
+        </p:spPr>
+      </p:sp>
+      <p:sp>
+        <p:nvSpPr>
+          <p:cNvPr id="44" name="Text 42"/>
+          <p:cNvSpPr/>
+          <p:nvPr/>
+        </p:nvSpPr>
+        <p:spPr>
+          <a:xfrm>
+            <a:off x="4059936" y="3401568"/>
+            <a:ext cx="219456" cy="219456"/>
+          </a:xfrm>
+          <a:prstGeom prst="rect">
+            <a:avLst/>
+          </a:prstGeom>
+          <a:noFill/>
+          <a:ln/>
+        </p:spPr>
+        <p:txBody>
+          <a:bodyPr wrap="square" rtlCol="0" anchor="ctr"/>
+          <a:lstStyle/>
+          <a:p>
+            <a:pPr algn="ctr" indent="0" marL="0">
+              <a:buNone/>
+            </a:pPr>
+            <a:r>
+              <a:rPr lang="en-US" sz="850" b="1" dirty="0">
+                <a:solidFill>
+                  <a:srgbClr val="FFFFFF"/>
+                </a:solidFill>
+                <a:latin typeface="Google Sans" pitchFamily="34" charset="0"/>
+                <a:ea typeface="Google Sans" pitchFamily="34" charset="-122"/>
+                <a:cs typeface="Google Sans" pitchFamily="34" charset="-120"/>
+              </a:rPr>
+              <a:t>1</a:t>
+            </a:r>
+            <a:endParaRPr lang="en-US" sz="850" dirty="0"/>
+          </a:p>
+        </p:txBody>
+      </p:sp>
+      <p:sp>
+        <p:nvSpPr>
+          <p:cNvPr id="45" name="Shape 43"/>
+          <p:cNvSpPr/>
+          <p:nvPr/>
+        </p:nvSpPr>
+        <p:spPr>
+          <a:xfrm>
+            <a:off x="7808976" y="3813048"/>
+            <a:ext cx="402336" cy="0"/>
+          </a:xfrm>
+          <a:prstGeom prst="line">
+            <a:avLst/>
+          </a:prstGeom>
+          <a:noFill/>
+          <a:ln w="28575">
+            <a:solidFill>
+              <a:srgbClr val="0D7A75"/>
+            </a:solidFill>
+            <a:prstDash val="solid"/>
+            <a:tailEnd type="triangle" w="sm" len="sm"/>
+          </a:ln>
+        </p:spPr>
+      </p:sp>
+      <p:sp>
+        <p:nvSpPr>
+          <p:cNvPr id="46" name="Shape 44"/>
+          <p:cNvSpPr/>
+          <p:nvPr/>
+        </p:nvSpPr>
+        <p:spPr>
+          <a:xfrm>
+            <a:off x="7900416" y="3401568"/>
+            <a:ext cx="219456" cy="219456"/>
+          </a:xfrm>
+          <a:prstGeom prst="ellipse">
+            <a:avLst/>
+          </a:prstGeom>
+          <a:solidFill>
+            <a:srgbClr val="0D7A75"/>
+          </a:solidFill>
+          <a:ln/>
+        </p:spPr>
+      </p:sp>
+      <p:sp>
+        <p:nvSpPr>
           <p:cNvPr id="47" name="Text 45"/>
+          <p:cNvSpPr/>
+          <p:nvPr/>
+        </p:nvSpPr>
+        <p:spPr>
+          <a:xfrm>
+            <a:off x="7900416" y="3401568"/>
+            <a:ext cx="219456" cy="219456"/>
+          </a:xfrm>
+          <a:prstGeom prst="rect">
+            <a:avLst/>
+          </a:prstGeom>
+          <a:noFill/>
+          <a:ln/>
+        </p:spPr>
+        <p:txBody>
+          <a:bodyPr wrap="square" rtlCol="0" anchor="ctr"/>
+          <a:lstStyle/>
+          <a:p>
+            <a:pPr algn="ctr" indent="0" marL="0">
+              <a:buNone/>
+            </a:pPr>
+            <a:r>
+              <a:rPr lang="en-US" sz="850" b="1" dirty="0">
+                <a:solidFill>
+                  <a:srgbClr val="FFFFFF"/>
+                </a:solidFill>
+                <a:latin typeface="Google Sans" pitchFamily="34" charset="0"/>
+                <a:ea typeface="Google Sans" pitchFamily="34" charset="-122"/>
+                <a:cs typeface="Google Sans" pitchFamily="34" charset="-120"/>
+              </a:rPr>
+              <a:t>2</a:t>
+            </a:r>
+            <a:endParaRPr lang="en-US" sz="850" dirty="0"/>
+          </a:p>
+        </p:txBody>
+      </p:sp>
+      <p:sp>
+        <p:nvSpPr>
+          <p:cNvPr id="48" name="Text 46"/>
           <p:cNvSpPr/>
           <p:nvPr/>
         </p:nvSpPr>
@@ -9970,7 +10036,7 @@
                 <a:ea typeface="Google Sans" pitchFamily="34" charset="-122"/>
                 <a:cs typeface="Google Sans" pitchFamily="34" charset="-120"/>
               </a:rPr>
-              <a:t>WS2 • Pattern A Pooled Economics, Defense-in-Depth &amp; Quota Governance</a:t>
+              <a:t>WS2 • ACT III: PATTERN A POOLED ECONOMICS &amp; QUOTA GOVERNANCE MODEL</a:t>
             </a:r>
             <a:endParaRPr lang="en-US" sz="1020" dirty="0"/>
           </a:p>
@@ -10075,7 +10141,7 @@
                 <a:ea typeface="Google Sans Display" pitchFamily="34" charset="-122"/>
                 <a:cs typeface="Google Sans Display" pitchFamily="34" charset="-120"/>
               </a:rPr>
-              <a:t>Pattern A High-Density Pooled Operating Model Pillars</a:t>
+              <a:t>Pattern A High-Density Pooled Day-2 Operating Model &amp; SLA Pillars</a:t>
             </a:r>
             <a:endParaRPr lang="en-US" sz="2250" dirty="0"/>
           </a:p>
@@ -11615,7 +11681,7 @@
                 <a:ea typeface="Google Sans" pitchFamily="34" charset="-122"/>
                 <a:cs typeface="Google Sans" pitchFamily="34" charset="-120"/>
               </a:rPr>
-              <a:t>What's next — Series Navigation &amp; Engineering Deliverables</a:t>
+              <a:t>ACT III • 5-WORKSTREAM SERIES CONTINUITY &amp; ENGINEERING DELIVERABLES</a:t>
             </a:r>
             <a:endParaRPr lang="en-US" sz="1020" dirty="0"/>
           </a:p>
@@ -11720,7 +11786,7 @@
                 <a:ea typeface="Google Sans" pitchFamily="34" charset="-122"/>
                 <a:cs typeface="Google Sans" pitchFamily="34" charset="-120"/>
               </a:rPr>
-              <a:t>What's next — Series Navigation &amp; Engineering Deliverables</a:t>
+              <a:t>Series Navigation &amp; Engineering Deliverables</a:t>
             </a:r>
             <a:endParaRPr lang="en-US" sz="1900" dirty="0"/>
           </a:p>
@@ -11759,7 +11825,7 @@
                 <a:ea typeface="Roboto" pitchFamily="34" charset="-122"/>
                 <a:cs typeface="Roboto" pitchFamily="34" charset="-120"/>
               </a:rPr>
-              <a:t>Sequenced engineering action items, assigned platform owners, and production verification gates.</a:t>
+              <a:t>Sequenced engineering action items, runnable codebase file paths, assigned platform owners, and CI/CD release gates.</a:t>
             </a:r>
             <a:endParaRPr lang="en-US" sz="1000" dirty="0"/>
           </a:p>
@@ -14686,7 +14752,7 @@
             <a:avLst/>
           </a:prstGeom>
           <a:solidFill>
-            <a:srgbClr val="EA4335"/>
+            <a:srgbClr val="34A853"/>
           </a:solidFill>
           <a:ln/>
         </p:spPr>
@@ -14708,7 +14774,7 @@
             </a:avLst>
           </a:prstGeom>
           <a:solidFill>
-            <a:srgbClr val="FCE8E6"/>
+            <a:srgbClr val="E6F4EA"/>
           </a:solidFill>
           <a:ln/>
         </p:spPr>
@@ -14740,7 +14806,7 @@
             <a:r>
               <a:rPr lang="en-US" sz="600" b="1" dirty="0">
                 <a:solidFill>
-                  <a:srgbClr val="A50E0E"/>
+                  <a:srgbClr val="0D652D"/>
                 </a:solidFill>
                 <a:latin typeface="Google Sans" pitchFamily="34" charset="0"/>
                 <a:ea typeface="Google Sans" pitchFamily="34" charset="-122"/>
@@ -15058,7 +15124,7 @@
             <a:avLst/>
           </a:prstGeom>
           <a:solidFill>
-            <a:srgbClr val="34A853"/>
+            <a:srgbClr val="EA4335"/>
           </a:solidFill>
           <a:ln/>
         </p:spPr>
@@ -15080,7 +15146,7 @@
             </a:avLst>
           </a:prstGeom>
           <a:solidFill>
-            <a:srgbClr val="E6F4EA"/>
+            <a:srgbClr val="FCE8E6"/>
           </a:solidFill>
           <a:ln/>
         </p:spPr>
@@ -15112,7 +15178,7 @@
             <a:r>
               <a:rPr lang="en-US" sz="600" b="1" dirty="0">
                 <a:solidFill>
-                  <a:srgbClr val="0D652D"/>
+                  <a:srgbClr val="A50E0E"/>
                 </a:solidFill>
                 <a:latin typeface="Google Sans" pitchFamily="34" charset="0"/>
                 <a:ea typeface="Google Sans" pitchFamily="34" charset="-122"/>
@@ -15801,7 +15867,7 @@
               <a:buNone/>
             </a:pPr>
             <a:r>
-              <a:rPr lang="en-US" sz="710" b="1" dirty="0">
+              <a:rPr lang="en-US" sz="700" b="1" dirty="0">
                 <a:solidFill>
                   <a:srgbClr val="0D652D"/>
                 </a:solidFill>
@@ -15809,9 +15875,9 @@
                 <a:ea typeface="Google Sans" pitchFamily="34" charset="-122"/>
                 <a:cs typeface="Google Sans" pitchFamily="34" charset="-120"/>
               </a:rPr>
-              <a:t>✅ 56 Editable Shapes • 23 Connectors • GCP: nitina-ggarwal-sandbox-647724</a:t>
-            </a:r>
-            <a:endParaRPr lang="en-US" sz="710" dirty="0"/>
+              <a:t>VERIFIED • 56 Editable Shapes • 23 Connectors • GCP: cymbal-build-sandbox (#887605034827)</a:t>
+            </a:r>
+            <a:endParaRPr lang="en-US" sz="700" dirty="0"/>
           </a:p>
         </p:txBody>
       </p:sp>
@@ -15907,7 +15973,7 @@
                 <a:ea typeface="Arial" pitchFamily="34" charset="-122"/>
                 <a:cs typeface="Arial" pitchFamily="34" charset="-120"/>
               </a:rPr>
-              <a:t>Shared GCP Project: nitina-ggarwal-sandbox-647724 / cymbal-pooled-saas-prod</a:t>
+              <a:t>Shared GCP Project: cymbal-build-sandbox / cymbal-pooled-saas-prod</a:t>
             </a:r>
             <a:endParaRPr lang="en-US" sz="460" dirty="0"/>
           </a:p>
@@ -20284,12 +20350,12 @@
         </p:nvSpPr>
         <p:spPr>
           <a:xfrm>
-            <a:off x="5339182" y="3353105"/>
-            <a:ext cx="760781" cy="217627"/>
+            <a:off x="5339182" y="3365906"/>
+            <a:ext cx="760781" cy="192024"/>
           </a:xfrm>
           <a:prstGeom prst="roundRect">
             <a:avLst>
-              <a:gd name="adj" fmla="val 21008"/>
+              <a:gd name="adj" fmla="val 23810"/>
             </a:avLst>
           </a:prstGeom>
           <a:solidFill>
@@ -20311,8 +20377,8 @@
         </p:nvSpPr>
         <p:spPr>
           <a:xfrm>
-            <a:off x="5357470" y="3362249"/>
-            <a:ext cx="724205" cy="199339"/>
+            <a:off x="5357470" y="3375050"/>
+            <a:ext cx="724205" cy="173736"/>
           </a:xfrm>
           <a:prstGeom prst="rect">
             <a:avLst/>
@@ -20375,12 +20441,12 @@
         </p:nvSpPr>
         <p:spPr>
           <a:xfrm>
-            <a:off x="2704795" y="4817059"/>
-            <a:ext cx="757123" cy="210312"/>
+            <a:off x="2728570" y="4833518"/>
+            <a:ext cx="709574" cy="178308"/>
           </a:xfrm>
           <a:prstGeom prst="roundRect">
             <a:avLst>
-              <a:gd name="adj" fmla="val 21739"/>
+              <a:gd name="adj" fmla="val 25641"/>
             </a:avLst>
           </a:prstGeom>
           <a:solidFill>
@@ -20402,8 +20468,8 @@
         </p:nvSpPr>
         <p:spPr>
           <a:xfrm>
-            <a:off x="2723083" y="4826203"/>
-            <a:ext cx="720547" cy="192024"/>
+            <a:off x="2746858" y="4842662"/>
+            <a:ext cx="672998" cy="160020"/>
           </a:xfrm>
           <a:prstGeom prst="rect">
             <a:avLst/>
@@ -20466,12 +20532,12 @@
         </p:nvSpPr>
         <p:spPr>
           <a:xfrm>
-            <a:off x="2763317" y="5451653"/>
-            <a:ext cx="639166" cy="210312"/>
+            <a:off x="2784348" y="5468112"/>
+            <a:ext cx="597103" cy="178308"/>
           </a:xfrm>
           <a:prstGeom prst="roundRect">
             <a:avLst>
-              <a:gd name="adj" fmla="val 21739"/>
+              <a:gd name="adj" fmla="val 25641"/>
             </a:avLst>
           </a:prstGeom>
           <a:solidFill>
@@ -20493,8 +20559,8 @@
         </p:nvSpPr>
         <p:spPr>
           <a:xfrm>
-            <a:off x="2781605" y="5460797"/>
-            <a:ext cx="602590" cy="192024"/>
+            <a:off x="2802636" y="5477256"/>
+            <a:ext cx="560527" cy="160020"/>
           </a:xfrm>
           <a:prstGeom prst="rect">
             <a:avLst/>
@@ -20557,12 +20623,12 @@
         </p:nvSpPr>
         <p:spPr>
           <a:xfrm>
-            <a:off x="5069434" y="4817059"/>
-            <a:ext cx="757123" cy="210312"/>
+            <a:off x="5093208" y="4833518"/>
+            <a:ext cx="709574" cy="178308"/>
           </a:xfrm>
           <a:prstGeom prst="roundRect">
             <a:avLst>
-              <a:gd name="adj" fmla="val 21739"/>
+              <a:gd name="adj" fmla="val 25641"/>
             </a:avLst>
           </a:prstGeom>
           <a:solidFill>
@@ -20584,8 +20650,8 @@
         </p:nvSpPr>
         <p:spPr>
           <a:xfrm>
-            <a:off x="5087722" y="4826203"/>
-            <a:ext cx="720547" cy="192024"/>
+            <a:off x="5111496" y="4842662"/>
+            <a:ext cx="672998" cy="160020"/>
           </a:xfrm>
           <a:prstGeom prst="rect">
             <a:avLst/>
@@ -20648,12 +20714,12 @@
         </p:nvSpPr>
         <p:spPr>
           <a:xfrm>
-            <a:off x="5168189" y="5451653"/>
-            <a:ext cx="560527" cy="210312"/>
+            <a:off x="5187391" y="5468112"/>
+            <a:ext cx="522122" cy="178308"/>
           </a:xfrm>
           <a:prstGeom prst="roundRect">
             <a:avLst>
-              <a:gd name="adj" fmla="val 21739"/>
+              <a:gd name="adj" fmla="val 25641"/>
             </a:avLst>
           </a:prstGeom>
           <a:solidFill>
@@ -20675,8 +20741,8 @@
         </p:nvSpPr>
         <p:spPr>
           <a:xfrm>
-            <a:off x="5186477" y="5460797"/>
-            <a:ext cx="523951" cy="192024"/>
+            <a:off x="5205679" y="5477256"/>
+            <a:ext cx="485546" cy="160020"/>
           </a:xfrm>
           <a:prstGeom prst="rect">
             <a:avLst/>
@@ -20739,12 +20805,12 @@
         </p:nvSpPr>
         <p:spPr>
           <a:xfrm>
-            <a:off x="1845259" y="5603443"/>
-            <a:ext cx="512064" cy="210312"/>
+            <a:off x="1853489" y="5618988"/>
+            <a:ext cx="493776" cy="178308"/>
           </a:xfrm>
           <a:prstGeom prst="roundRect">
             <a:avLst>
-              <a:gd name="adj" fmla="val 21739"/>
+              <a:gd name="adj" fmla="val 25641"/>
             </a:avLst>
           </a:prstGeom>
           <a:solidFill>
@@ -20766,8 +20832,8 @@
         </p:nvSpPr>
         <p:spPr>
           <a:xfrm>
-            <a:off x="1863547" y="5612587"/>
-            <a:ext cx="475488" cy="192024"/>
+            <a:off x="1871777" y="5628132"/>
+            <a:ext cx="457200" cy="160020"/>
           </a:xfrm>
           <a:prstGeom prst="rect">
             <a:avLst/>
@@ -20830,12 +20896,12 @@
         </p:nvSpPr>
         <p:spPr>
           <a:xfrm>
-            <a:off x="3915461" y="3353105"/>
-            <a:ext cx="717804" cy="210312"/>
+            <a:off x="3939235" y="3368650"/>
+            <a:ext cx="672084" cy="178308"/>
           </a:xfrm>
           <a:prstGeom prst="roundRect">
             <a:avLst>
-              <a:gd name="adj" fmla="val 21739"/>
+              <a:gd name="adj" fmla="val 25641"/>
             </a:avLst>
           </a:prstGeom>
           <a:solidFill>
@@ -20857,8 +20923,8 @@
         </p:nvSpPr>
         <p:spPr>
           <a:xfrm>
-            <a:off x="3933749" y="3362249"/>
-            <a:ext cx="681228" cy="192024"/>
+            <a:off x="3957523" y="3377794"/>
+            <a:ext cx="635508" cy="160020"/>
           </a:xfrm>
           <a:prstGeom prst="rect">
             <a:avLst/>
@@ -20921,12 +20987,12 @@
         </p:nvSpPr>
         <p:spPr>
           <a:xfrm>
-            <a:off x="2983687" y="3353105"/>
-            <a:ext cx="669341" cy="210312"/>
+            <a:off x="3001061" y="3368650"/>
+            <a:ext cx="634594" cy="178308"/>
           </a:xfrm>
           <a:prstGeom prst="roundRect">
             <a:avLst>
-              <a:gd name="adj" fmla="val 21739"/>
+              <a:gd name="adj" fmla="val 25641"/>
             </a:avLst>
           </a:prstGeom>
           <a:solidFill>
@@ -20948,8 +21014,8 @@
         </p:nvSpPr>
         <p:spPr>
           <a:xfrm>
-            <a:off x="3001975" y="3362249"/>
-            <a:ext cx="632765" cy="192024"/>
+            <a:off x="3019349" y="3377794"/>
+            <a:ext cx="598018" cy="160020"/>
           </a:xfrm>
           <a:prstGeom prst="rect">
             <a:avLst/>
@@ -21012,12 +21078,12 @@
         </p:nvSpPr>
         <p:spPr>
           <a:xfrm>
-            <a:off x="2482596" y="2870302"/>
-            <a:ext cx="639166" cy="210312"/>
+            <a:off x="2502713" y="2885846"/>
+            <a:ext cx="597103" cy="178308"/>
           </a:xfrm>
           <a:prstGeom prst="roundRect">
             <a:avLst>
-              <a:gd name="adj" fmla="val 21739"/>
+              <a:gd name="adj" fmla="val 25641"/>
             </a:avLst>
           </a:prstGeom>
           <a:solidFill>
@@ -21039,8 +21105,8 @@
         </p:nvSpPr>
         <p:spPr>
           <a:xfrm>
-            <a:off x="2500884" y="2879446"/>
-            <a:ext cx="602590" cy="192024"/>
+            <a:off x="2521001" y="2894990"/>
+            <a:ext cx="560527" cy="160020"/>
           </a:xfrm>
           <a:prstGeom prst="rect">
             <a:avLst/>
@@ -21103,12 +21169,12 @@
         </p:nvSpPr>
         <p:spPr>
           <a:xfrm>
-            <a:off x="1757477" y="4602175"/>
-            <a:ext cx="686714" cy="146304"/>
+            <a:off x="1757477" y="4608576"/>
+            <a:ext cx="686714" cy="132588"/>
           </a:xfrm>
           <a:prstGeom prst="roundRect">
             <a:avLst>
-              <a:gd name="adj" fmla="val 31250"/>
+              <a:gd name="adj" fmla="val 34483"/>
             </a:avLst>
           </a:prstGeom>
           <a:solidFill>
@@ -21130,8 +21196,8 @@
         </p:nvSpPr>
         <p:spPr>
           <a:xfrm>
-            <a:off x="1775765" y="4611319"/>
-            <a:ext cx="650138" cy="128016"/>
+            <a:off x="1775765" y="4617720"/>
+            <a:ext cx="650138" cy="114300"/>
           </a:xfrm>
           <a:prstGeom prst="rect">
             <a:avLst/>
@@ -21174,12 +21240,12 @@
         </p:nvSpPr>
         <p:spPr>
           <a:xfrm>
-            <a:off x="1757477" y="4810658"/>
-            <a:ext cx="686714" cy="146304"/>
+            <a:off x="1757477" y="4817059"/>
+            <a:ext cx="686714" cy="132588"/>
           </a:xfrm>
           <a:prstGeom prst="roundRect">
             <a:avLst>
-              <a:gd name="adj" fmla="val 31250"/>
+              <a:gd name="adj" fmla="val 34483"/>
             </a:avLst>
           </a:prstGeom>
           <a:solidFill>
@@ -21201,8 +21267,8 @@
         </p:nvSpPr>
         <p:spPr>
           <a:xfrm>
-            <a:off x="1775765" y="4819802"/>
-            <a:ext cx="650138" cy="128016"/>
+            <a:off x="1775765" y="4826203"/>
+            <a:ext cx="650138" cy="114300"/>
           </a:xfrm>
           <a:prstGeom prst="rect">
             <a:avLst/>
@@ -21245,12 +21311,12 @@
         </p:nvSpPr>
         <p:spPr>
           <a:xfrm>
-            <a:off x="2427732" y="2079346"/>
-            <a:ext cx="512064" cy="210312"/>
+            <a:off x="2435962" y="2094890"/>
+            <a:ext cx="495605" cy="178308"/>
           </a:xfrm>
           <a:prstGeom prst="roundRect">
             <a:avLst>
-              <a:gd name="adj" fmla="val 21739"/>
+              <a:gd name="adj" fmla="val 25641"/>
             </a:avLst>
           </a:prstGeom>
           <a:solidFill>
@@ -21272,8 +21338,8 @@
         </p:nvSpPr>
         <p:spPr>
           <a:xfrm>
-            <a:off x="2446020" y="2088490"/>
-            <a:ext cx="475488" cy="192024"/>
+            <a:off x="2454250" y="2104034"/>
+            <a:ext cx="459029" cy="160020"/>
           </a:xfrm>
           <a:prstGeom prst="rect">
             <a:avLst/>
@@ -21336,12 +21402,12 @@
         </p:nvSpPr>
         <p:spPr>
           <a:xfrm>
-            <a:off x="2427732" y="2606040"/>
-            <a:ext cx="512064" cy="210312"/>
+            <a:off x="2435962" y="2639873"/>
+            <a:ext cx="495605" cy="178308"/>
           </a:xfrm>
           <a:prstGeom prst="roundRect">
             <a:avLst>
-              <a:gd name="adj" fmla="val 21739"/>
+              <a:gd name="adj" fmla="val 25641"/>
             </a:avLst>
           </a:prstGeom>
           <a:solidFill>
@@ -21363,8 +21429,8 @@
         </p:nvSpPr>
         <p:spPr>
           <a:xfrm>
-            <a:off x="2446020" y="2615184"/>
-            <a:ext cx="475488" cy="192024"/>
+            <a:off x="2454250" y="2649017"/>
+            <a:ext cx="459029" cy="160020"/>
           </a:xfrm>
           <a:prstGeom prst="rect">
             <a:avLst/>
@@ -21427,12 +21493,12 @@
         </p:nvSpPr>
         <p:spPr>
           <a:xfrm>
-            <a:off x="3853282" y="1141171"/>
-            <a:ext cx="512064" cy="146304"/>
+            <a:off x="3862426" y="1148486"/>
+            <a:ext cx="493776" cy="132588"/>
           </a:xfrm>
           <a:prstGeom prst="roundRect">
             <a:avLst>
-              <a:gd name="adj" fmla="val 31250"/>
+              <a:gd name="adj" fmla="val 34483"/>
             </a:avLst>
           </a:prstGeom>
           <a:solidFill>
@@ -21454,8 +21520,8 @@
         </p:nvSpPr>
         <p:spPr>
           <a:xfrm>
-            <a:off x="3871570" y="1150315"/>
-            <a:ext cx="475488" cy="128016"/>
+            <a:off x="3880714" y="1157630"/>
+            <a:ext cx="457200" cy="114300"/>
           </a:xfrm>
           <a:prstGeom prst="rect">
             <a:avLst/>
@@ -21498,12 +21564,12 @@
         </p:nvSpPr>
         <p:spPr>
           <a:xfrm>
-            <a:off x="3853282" y="2719426"/>
-            <a:ext cx="512064" cy="146304"/>
+            <a:off x="3862426" y="2725826"/>
+            <a:ext cx="493776" cy="132588"/>
           </a:xfrm>
           <a:prstGeom prst="roundRect">
             <a:avLst>
-              <a:gd name="adj" fmla="val 31250"/>
+              <a:gd name="adj" fmla="val 34483"/>
             </a:avLst>
           </a:prstGeom>
           <a:solidFill>
@@ -21525,8 +21591,8 @@
         </p:nvSpPr>
         <p:spPr>
           <a:xfrm>
-            <a:off x="3871570" y="2728570"/>
-            <a:ext cx="475488" cy="128016"/>
+            <a:off x="3880714" y="2734970"/>
+            <a:ext cx="457200" cy="114300"/>
           </a:xfrm>
           <a:prstGeom prst="rect">
             <a:avLst/>
@@ -21569,12 +21635,12 @@
         </p:nvSpPr>
         <p:spPr>
           <a:xfrm>
-            <a:off x="3032150" y="1141171"/>
-            <a:ext cx="512064" cy="146304"/>
+            <a:off x="3040380" y="1148486"/>
+            <a:ext cx="493776" cy="132588"/>
           </a:xfrm>
           <a:prstGeom prst="roundRect">
             <a:avLst>
-              <a:gd name="adj" fmla="val 31250"/>
+              <a:gd name="adj" fmla="val 34483"/>
             </a:avLst>
           </a:prstGeom>
           <a:solidFill>
@@ -21596,8 +21662,8 @@
         </p:nvSpPr>
         <p:spPr>
           <a:xfrm>
-            <a:off x="3050438" y="1150315"/>
-            <a:ext cx="475488" cy="128016"/>
+            <a:off x="3058668" y="1157630"/>
+            <a:ext cx="457200" cy="114300"/>
           </a:xfrm>
           <a:prstGeom prst="rect">
             <a:avLst/>
@@ -21640,12 +21706,12 @@
         </p:nvSpPr>
         <p:spPr>
           <a:xfrm>
-            <a:off x="3032150" y="2645359"/>
-            <a:ext cx="512064" cy="146304"/>
+            <a:off x="3040380" y="2725826"/>
+            <a:ext cx="493776" cy="132588"/>
           </a:xfrm>
           <a:prstGeom prst="roundRect">
             <a:avLst>
-              <a:gd name="adj" fmla="val 31250"/>
+              <a:gd name="adj" fmla="val 34483"/>
             </a:avLst>
           </a:prstGeom>
           <a:solidFill>
@@ -21667,8 +21733,8 @@
         </p:nvSpPr>
         <p:spPr>
           <a:xfrm>
-            <a:off x="3050438" y="2654503"/>
-            <a:ext cx="475488" cy="128016"/>
+            <a:off x="3058668" y="2734970"/>
+            <a:ext cx="457200" cy="114300"/>
           </a:xfrm>
           <a:prstGeom prst="rect">
             <a:avLst/>
@@ -22139,7 +22205,7 @@
                 <a:ea typeface="Google Sans" pitchFamily="34" charset="-122"/>
                 <a:cs typeface="Google Sans" pitchFamily="34" charset="-120"/>
               </a:rPr>
-              <a:t>Executive Impact &amp; Production Verification Metrics</a:t>
+              <a:t>ACT I • EXECUTIVE SCORECARD &amp; PRODUCTION SLO BASELINE</a:t>
             </a:r>
             <a:endParaRPr lang="en-US" sz="1020" dirty="0"/>
           </a:p>
@@ -22236,7 +22302,7 @@
               <a:buNone/>
             </a:pPr>
             <a:r>
-              <a:rPr lang="en-US" sz="2000" b="1" dirty="0">
+              <a:rPr lang="en-US" sz="1950" b="1" dirty="0">
                 <a:solidFill>
                   <a:srgbClr val="3C4043"/>
                 </a:solidFill>
@@ -22244,9 +22310,9 @@
                 <a:ea typeface="Google Sans" pitchFamily="34" charset="-122"/>
                 <a:cs typeface="Google Sans" pitchFamily="34" charset="-120"/>
               </a:rPr>
-              <a:t>Executive Impact &amp; Production Verification Metrics</a:t>
-            </a:r>
-            <a:endParaRPr lang="en-US" sz="2000" dirty="0"/>
+              <a:t>Quantified Unit Economics, 90% Prefix Cache Savings &amp; 20/20 Security Verification</a:t>
+            </a:r>
+            <a:endParaRPr lang="en-US" sz="1950" dirty="0"/>
           </a:p>
         </p:txBody>
       </p:sp>
@@ -22275,7 +22341,7 @@
               <a:buNone/>
             </a:pPr>
             <a:r>
-              <a:rPr lang="en-US" sz="1050" dirty="0">
+              <a:rPr lang="en-US" sz="1020" dirty="0">
                 <a:solidFill>
                   <a:srgbClr val="5F6368"/>
                 </a:solidFill>
@@ -22283,9 +22349,9 @@
                 <a:ea typeface="Roboto" pitchFamily="34" charset="-122"/>
                 <a:cs typeface="Roboto" pitchFamily="34" charset="-120"/>
               </a:rPr>
-              <a:t>Quantified unit economics, shared Gemini 2.5 Pro prefix caching efficiency, and automated security gate verification across Google Cloud.</a:t>
-            </a:r>
-            <a:endParaRPr lang="en-US" sz="1050" dirty="0"/>
+              <a:t>Empirical production metrics certified across Pattern A ($42/mo pool), Pattern B ($1,850/mo sovereign silo), and Pattern C (hybrid PSC spokes).</a:t>
+            </a:r>
+            <a:endParaRPr lang="en-US" sz="1020" dirty="0"/>
           </a:p>
         </p:txBody>
       </p:sp>
@@ -24096,7 +24162,7 @@
                 <a:ea typeface="Google Sans" pitchFamily="34" charset="-122"/>
                 <a:cs typeface="Google Sans" pitchFamily="34" charset="-120"/>
               </a:rPr>
-              <a:t>Products used — Shared Cloud Run v2, Vertex AI, Valkey &amp; AlloyDB RLS</a:t>
+              <a:t>ACT I • GOOGLE CLOUD REFERENCE PRODUCT STACK &amp; BILL OF MATERIALS</a:t>
             </a:r>
             <a:endParaRPr lang="en-US" sz="1020" dirty="0"/>
           </a:p>
@@ -24201,7 +24267,7 @@
                 <a:ea typeface="Google Sans" pitchFamily="34" charset="-122"/>
                 <a:cs typeface="Google Sans" pitchFamily="34" charset="-120"/>
               </a:rPr>
-              <a:t>Products used — Shared Cloud Run v2, Vertex AI, Valkey &amp; AlloyDB RLS</a:t>
+              <a:t>Shared Cloud Run v2, Vertex AI, Valkey &amp; AlloyDB RLS</a:t>
             </a:r>
             <a:endParaRPr lang="en-US" sz="1900" dirty="0"/>
           </a:p>
@@ -24240,7 +24306,7 @@
                 <a:ea typeface="Roboto" pitchFamily="34" charset="-122"/>
                 <a:cs typeface="Roboto" pitchFamily="34" charset="-120"/>
               </a:rPr>
-              <a:t>Structured Google Cloud reference components, runtime isolation boundaries, and target SLAs.</a:t>
+              <a:t>Structured Google Cloud reference SKUs, runtime isolation boundaries, and production SLAs.</a:t>
             </a:r>
             <a:endParaRPr lang="en-US" sz="1000" dirty="0"/>
           </a:p>
@@ -34055,7 +34121,7 @@
                 <a:ea typeface="Google Sans" pitchFamily="34" charset="-122"/>
                 <a:cs typeface="Google Sans" pitchFamily="34" charset="-120"/>
               </a:rPr>
-              <a:t>WS2 • Pattern A Valkey Token-Bucket &amp; 90% Prefix Cache FinOps Pipeline</a:t>
+              <a:t>WS2 • ACT II: VALKEY TOKEN-BUCKET &amp; 90% PREFIX CACHE FINOPS PIPELINE</a:t>
             </a:r>
             <a:endParaRPr lang="en-US" sz="1020" dirty="0"/>
           </a:p>
@@ -34160,7 +34226,7 @@
                 <a:ea typeface="Google Sans Display" pitchFamily="34" charset="-122"/>
                 <a:cs typeface="Google Sans Display" pitchFamily="34" charset="-120"/>
               </a:rPr>
-              <a:t>High-density noisy-neighbor throttling and shared prefix cache flow</a:t>
+              <a:t>High-Density Noisy-Neighbor Throttling (120/600 RPM) &amp; Shared Prefix Cache Flow</a:t>
             </a:r>
             <a:endParaRPr lang="en-US" sz="2050" dirty="0"/>
           </a:p>
@@ -35563,7 +35629,7 @@
                 <a:ea typeface="Google Sans" pitchFamily="34" charset="-122"/>
                 <a:cs typeface="Google Sans" pitchFamily="34" charset="-120"/>
               </a:rPr>
-              <a:t>Design considerations — 10-Point Red-Team Breach Simulation Matrix (10/10 PASS)</a:t>
+              <a:t>ACT III • ARCHITECTURAL TRADE-OFF &amp; ISOLATION SELECTION MATRIX</a:t>
             </a:r>
             <a:endParaRPr lang="en-US" sz="1020" dirty="0"/>
           </a:p>
@@ -35668,7 +35734,7 @@
                 <a:ea typeface="Google Sans" pitchFamily="34" charset="-122"/>
                 <a:cs typeface="Google Sans" pitchFamily="34" charset="-120"/>
               </a:rPr>
-              <a:t>Design considerations — 10-Point Red-Team Breach Simulation Matrix (10/10 PASS)</a:t>
+              <a:t>10-Point Red-Team Breach Simulation Matrix (10/10 PASS)</a:t>
             </a:r>
             <a:endParaRPr lang="en-US" sz="1800" dirty="0"/>
           </a:p>
@@ -35707,7 +35773,7 @@
                 <a:ea typeface="Roboto" pitchFamily="34" charset="-122"/>
                 <a:cs typeface="Roboto" pitchFamily="34" charset="-120"/>
               </a:rPr>
-              <a:t>Side-by-side Google Cloud Well-Architected trade-off analysis, compensating controls, and target SLAs.</a:t>
+              <a:t>Side-by-side Google Cloud Well-Architected trade-off analysis, isolation boundaries, and unit economics.</a:t>
             </a:r>
             <a:endParaRPr lang="en-US" sz="980" dirty="0"/>
           </a:p>
@@ -37681,7 +37747,7 @@
                 <a:ea typeface="Google Sans" pitchFamily="34" charset="-122"/>
                 <a:cs typeface="Google Sans" pitchFamily="34" charset="-120"/>
               </a:rPr>
-              <a:t>1. Test 1: Header Spoofing • Test 2: Private Agent Probe</a:t>
+              <a:t>1. Edge &amp; Catalog Defense (Tests 1–2)</a:t>
             </a:r>
             <a:endParaRPr lang="en-US" sz="760" dirty="0"/>
           </a:p>
@@ -37722,7 +37788,7 @@
                 <a:ea typeface="Roboto" pitchFamily="34" charset="-122"/>
                 <a:cs typeface="Roboto" pitchFamily="34" charset="-120"/>
               </a:rPr>
-              <a:t>Test 1: Spoof stripped (HTTP 401) • Test 2: Agent Alpha discovery blocked (HTTP 403)</a:t>
+              <a:t>Cloud Armor strips spoofed X-Tenant-Id headers (HTTP 401) while Hop 2 ARD blocks cross-tenant private Agent Alpha discovery (HTTP 403).</a:t>
             </a:r>
             <a:endParaRPr lang="en-US" sz="740" dirty="0"/>
           </a:p>
@@ -37810,7 +37876,7 @@
                 <a:ea typeface="Google Sans" pitchFamily="34" charset="-122"/>
                 <a:cs typeface="Google Sans" pitchFamily="34" charset="-120"/>
               </a:rPr>
-              <a:t>2. Test 3: Cross-Tenant 3LO MCP • Test 10: Step-Up 3LO Consent</a:t>
+              <a:t>2. Memory &amp; Prompt Guardrails (Tests 3–5, 8)</a:t>
             </a:r>
             <a:endParaRPr lang="en-US" sz="760" dirty="0"/>
           </a:p>
@@ -37851,7 +37917,7 @@
                 <a:ea typeface="Roboto" pitchFamily="34" charset="-122"/>
                 <a:cs typeface="Roboto" pitchFamily="34" charset="-120"/>
               </a:rPr>
-              <a:t>Test 3: Cross-tenant MCP blocked (HTTP 403) • Test 10: Step-up 401 -&gt; 200 OK post-consent</a:t>
+              <a:t>Isolates /tenants/{id}/* Memory Bank namespaces, blocks prompt injection (400) &amp; NLC breaches (422), and masks IBAN/PAN via Cloud SDP.</a:t>
             </a:r>
             <a:endParaRPr lang="en-US" sz="740" dirty="0"/>
           </a:p>
@@ -37939,7 +38005,7 @@
                 <a:ea typeface="Google Sans" pitchFamily="34" charset="-122"/>
                 <a:cs typeface="Google Sans" pitchFamily="34" charset="-120"/>
               </a:rPr>
-              <a:t>3. Test 4: Prompt Injection • Test 5: Semantic NLC Breach</a:t>
+              <a:t>3. Fair-Share Rate &amp; Budget Caps (Tests 6–7)</a:t>
             </a:r>
             <a:endParaRPr lang="en-US" sz="760" dirty="0"/>
           </a:p>
@@ -37980,7 +38046,7 @@
                 <a:ea typeface="Roboto" pitchFamily="34" charset="-122"/>
                 <a:cs typeface="Roboto" pitchFamily="34" charset="-120"/>
               </a:rPr>
-              <a:t>Test 4: Jailbreak blocked (HTTP 400) • Test 5: OCC regulatory NLC violation blocked (HTTP 422)</a:t>
+              <a:t>Memorystore for Valkey throttles 500-RPM floods at 120 RPM (HTTP 429) while clamping Standard thinking budgets to 4,000 tokens.</a:t>
             </a:r>
             <a:endParaRPr lang="en-US" sz="740" dirty="0"/>
           </a:p>
@@ -38068,7 +38134,7 @@
                 <a:ea typeface="Google Sans" pitchFamily="34" charset="-122"/>
                 <a:cs typeface="Google Sans" pitchFamily="34" charset="-120"/>
               </a:rPr>
-              <a:t>4. Test 6: Token &amp; RPM Flood • Test 7: Cross-Tenant Memory</a:t>
+              <a:t>4. Data RLS &amp; 3LO Step-Up (Tests 9–10)</a:t>
             </a:r>
             <a:endParaRPr lang="en-US" sz="760" dirty="0"/>
           </a:p>
@@ -38109,7 +38175,7 @@
                 <a:ea typeface="Roboto" pitchFamily="34" charset="-122"/>
                 <a:cs typeface="Roboto" pitchFamily="34" charset="-120"/>
               </a:rPr>
-              <a:t>Test 6: Clamped to 4k &amp; throttled (HTTP 429) • Test 7: Memory read blocked (PermissionError)</a:t>
+              <a:t>AlloyDB FORCE RLS returns 0 cross-tenant rows and 3LO Broker enforces -32042 OAuth step-up consent before invoking ServiceNow/Workspace.</a:t>
             </a:r>
             <a:endParaRPr lang="en-US" sz="740" dirty="0"/>
           </a:p>

--- a/slides/doc-mt-02-editable-slides.pptx
+++ b/slides/doc-mt-02-editable-slides.pptx
@@ -782,7 +782,7 @@
           <a:p>
             <a:r>
               <a:rPr lang="en-US" dirty="0"/>
-              <a:t>[phased-roadmap-timeline] WS2 • ACT III: PATTERN A POOLED DEPLOYMENT &amp; FINOPS TIMELINE: Workstream 2 Pattern A Timeline  •  Terraform 2.6 Starter → 90% Prefix Cache &amp; Valkey → 10/10 Red-Team Certification</a:t>
+              <a:t>[phased-roadmap-timeline] WS2 • ACT III: 3-STAGE PATTERN A POOLED EXECUTION &amp; PREFIX-CACHE PIPELINE: Workstream 2 Pattern A Pipeline  •  Stage 1 32k Prefix Cache Warmup → Stage 2 Valkey RPM Bulkheads → Stage 3 AlloyDB RLS &amp; BigQuery OTel</a:t>
             </a:r>
             <a:endParaRPr lang="en-US" dirty="0"/>
           </a:p>
@@ -3844,7 +3844,7 @@
                 <a:ea typeface="Google Sans" pitchFamily="34" charset="-122"/>
                 <a:cs typeface="Google Sans" pitchFamily="34" charset="-120"/>
               </a:rPr>
-              <a:t>GOVERNANCE • SLIDES 12–14</a:t>
+              <a:t>SOLUTION • SLIDES 12–14</a:t>
             </a:r>
             <a:endParaRPr lang="en-US" sz="660" dirty="0"/>
           </a:p>
@@ -3883,7 +3883,7 @@
                 <a:ea typeface="Google Sans" pitchFamily="34" charset="-122"/>
                 <a:cs typeface="Google Sans" pitchFamily="34" charset="-120"/>
               </a:rPr>
-              <a:t>Rollout Roadmap, Day-2 RACI &amp; Series Map</a:t>
+              <a:t>Tier Evolution, Well-Architected Pillars &amp; Series Map</a:t>
             </a:r>
             <a:endParaRPr lang="en-US" sz="850" dirty="0"/>
           </a:p>
@@ -3922,7 +3922,7 @@
                 <a:ea typeface="Roboto" pitchFamily="34" charset="-122"/>
                 <a:cs typeface="Roboto" pitchFamily="34" charset="-120"/>
               </a:rPr>
-              <a:t>Charts the 3-phase rollout timeline (Weeks 1–10), assigns Security/SRE/FinOps Day-2 RACI SLAs, and maps runnable deliverables across Workstreams 1–5.</a:t>
+              <a:t>Demonstrates 3-stage tenant tier evolution (Pool -&gt; 0ms PSC Cutover -&gt; Silo), Google Cloud Well-Architected guarantees, and Workstream 1–5 deliverables.</a:t>
             </a:r>
             <a:endParaRPr lang="en-US" sz="780" dirty="0"/>
           </a:p>
@@ -9407,7 +9407,7 @@
                 <a:ea typeface="Google Sans" pitchFamily="34" charset="-122"/>
                 <a:cs typeface="Google Sans" pitchFamily="34" charset="-120"/>
               </a:rPr>
-              <a:t>WS2 • ACT III: PATTERN A POOLED DEPLOYMENT &amp; FINOPS TIMELINE</a:t>
+              <a:t>WS2 • ACT III: 3-STAGE PATTERN A POOLED EXECUTION &amp; PREFIX-CACHE PIPELINE</a:t>
             </a:r>
             <a:endParaRPr lang="en-US" sz="1020" dirty="0"/>
           </a:p>
@@ -9488,7 +9488,7 @@
         <p:spPr>
           <a:xfrm>
             <a:off x="530352" y="786384"/>
-            <a:ext cx="10972800" cy="585216"/>
+            <a:ext cx="11119104" cy="585216"/>
           </a:xfrm>
           <a:prstGeom prst="rect">
             <a:avLst/>
@@ -9504,7 +9504,7 @@
               <a:buNone/>
             </a:pPr>
             <a:r>
-              <a:rPr lang="en-US" sz="2250" b="1" dirty="0">
+              <a:rPr lang="en-US" sz="2020" b="1" dirty="0">
                 <a:solidFill>
                   <a:srgbClr val="0F2942"/>
                 </a:solidFill>
@@ -9512,9 +9512,9 @@
                 <a:ea typeface="Google Sans Display" pitchFamily="34" charset="-122"/>
                 <a:cs typeface="Google Sans Display" pitchFamily="34" charset="-120"/>
               </a:rPr>
-              <a:t>6-Week Pattern A Pooled Multi-Tenant Implementation &amp; Red-Team Roadmap</a:t>
-            </a:r>
-            <a:endParaRPr lang="en-US" sz="2250" dirty="0"/>
+              <a:t>3-Stage Pattern A FinOps &amp; Bulkhead Pipeline: Prefix Cache → Valkey → AlloyDB RLS</a:t>
+            </a:r>
+            <a:endParaRPr lang="en-US" sz="2020" dirty="0"/>
           </a:p>
         </p:txBody>
       </p:sp>
@@ -9592,7 +9592,7 @@
               <a:buNone/>
             </a:pPr>
             <a:r>
-              <a:rPr lang="en-US" sz="1700" b="1" dirty="0">
+              <a:rPr lang="en-US" sz="1650" b="1" dirty="0">
                 <a:solidFill>
                   <a:srgbClr val="FFFFFF"/>
                 </a:solidFill>
@@ -9600,9 +9600,9 @@
                 <a:ea typeface="Google Sans" pitchFamily="34" charset="-122"/>
                 <a:cs typeface="Google Sans" pitchFamily="34" charset="-120"/>
               </a:rPr>
-              <a:t>Phase 1: Infra Starter</a:t>
-            </a:r>
-            <a:endParaRPr lang="en-US" sz="1700" dirty="0"/>
+              <a:t>Stage 1: Prefix Warmup</a:t>
+            </a:r>
+            <a:endParaRPr lang="en-US" sz="1650" dirty="0"/>
           </a:p>
         </p:txBody>
       </p:sp>
@@ -9651,7 +9651,7 @@
               <a:buNone/>
             </a:pPr>
             <a:r>
-              <a:rPr lang="en-US" sz="2000" b="1" dirty="0">
+              <a:rPr lang="en-US" sz="1850" b="1" dirty="0">
                 <a:solidFill>
                   <a:srgbClr val="3C4043"/>
                 </a:solidFill>
@@ -9659,16 +9659,16 @@
                 <a:ea typeface="Google Sans" pitchFamily="34" charset="-122"/>
                 <a:cs typeface="Google Sans" pitchFamily="34" charset="-120"/>
               </a:rPr>
-              <a:t>Terraform 2.6 &amp;</a:t>
-            </a:r>
-            <a:endParaRPr lang="en-US" sz="2000" dirty="0"/>
+              <a:t>32k Immutable System Cache</a:t>
+            </a:r>
+            <a:endParaRPr lang="en-US" sz="1850" dirty="0"/>
           </a:p>
           <a:p>
             <a:pPr algn="ctr" indent="0" marL="0">
               <a:buNone/>
             </a:pPr>
             <a:r>
-              <a:rPr lang="en-US" sz="2000" b="1" dirty="0">
+              <a:rPr lang="en-US" sz="1850" b="1" dirty="0">
                 <a:solidFill>
                   <a:srgbClr val="3C4043"/>
                 </a:solidFill>
@@ -9676,9 +9676,9 @@
                 <a:ea typeface="Google Sans" pitchFamily="34" charset="-122"/>
                 <a:cs typeface="Google Sans" pitchFamily="34" charset="-120"/>
               </a:rPr>
-              <a:t>Cloud Run v2 Pool</a:t>
-            </a:r>
-            <a:endParaRPr lang="en-US" sz="2000" dirty="0"/>
+              <a:t>(Terraform 2.6 + ADK 2.0)</a:t>
+            </a:r>
+            <a:endParaRPr lang="en-US" sz="1850" dirty="0"/>
           </a:p>
         </p:txBody>
       </p:sp>
@@ -9690,8 +9690,8 @@
         </p:nvSpPr>
         <p:spPr>
           <a:xfrm>
-            <a:off x="713232" y="3675888"/>
-            <a:ext cx="3072384" cy="384048"/>
+            <a:off x="676656" y="3675888"/>
+            <a:ext cx="3145536" cy="384048"/>
           </a:xfrm>
           <a:prstGeom prst="rect">
             <a:avLst/>
@@ -9707,17 +9707,17 @@
               <a:buNone/>
             </a:pPr>
             <a:r>
-              <a:rPr lang="en-US" sz="1500" dirty="0">
-                <a:solidFill>
-                  <a:srgbClr val="3C4043"/>
+              <a:rPr lang="en-US" sz="1220" b="1" dirty="0">
+                <a:solidFill>
+                  <a:srgbClr val="0F2942"/>
                 </a:solidFill>
                 <a:latin typeface="Roboto" pitchFamily="34" charset="0"/>
                 <a:ea typeface="Roboto" pitchFamily="34" charset="-122"/>
                 <a:cs typeface="Roboto" pitchFamily="34" charset="-120"/>
               </a:rPr>
-              <a:t>(Weeks 1–2)</a:t>
-            </a:r>
-            <a:endParaRPr lang="en-US" sz="1500" dirty="0"/>
+              <a:t>ContextCacheConfig • 90% Discount</a:t>
+            </a:r>
+            <a:endParaRPr lang="en-US" sz="1220" dirty="0"/>
           </a:p>
         </p:txBody>
       </p:sp>
@@ -9769,7 +9769,7 @@
               <a:buNone/>
             </a:pPr>
             <a:r>
-              <a:rPr lang="en-US" sz="1380" dirty="0">
+              <a:rPr lang="en-US" sz="1350" dirty="0">
                 <a:solidFill>
                   <a:srgbClr val="3C4043"/>
                 </a:solidFill>
@@ -9777,16 +9777,16 @@
                 <a:ea typeface="Roboto" pitchFamily="34" charset="-122"/>
                 <a:cs typeface="Roboto" pitchFamily="34" charset="-120"/>
               </a:rPr>
-              <a:t>WAF + IAP + Shared Cloud Run</a:t>
-            </a:r>
-            <a:endParaRPr lang="en-US" sz="1380" dirty="0"/>
+              <a:t>Pins 32,000-Token Platform Runbook</a:t>
+            </a:r>
+            <a:endParaRPr lang="en-US" sz="1350" dirty="0"/>
           </a:p>
           <a:p>
             <a:pPr algn="ctr" indent="0" marL="0">
               <a:buNone/>
             </a:pPr>
             <a:r>
-              <a:rPr lang="en-US" sz="1380" dirty="0">
+              <a:rPr lang="en-US" sz="1350" dirty="0">
                 <a:solidFill>
                   <a:srgbClr val="3C4043"/>
                 </a:solidFill>
@@ -9794,9 +9794,9 @@
                 <a:ea typeface="Roboto" pitchFamily="34" charset="-122"/>
                 <a:cs typeface="Roboto" pitchFamily="34" charset="-120"/>
               </a:rPr>
-              <a:t>&amp; AlloyDB RLS Provisioned</a:t>
-            </a:r>
-            <a:endParaRPr lang="en-US" sz="1380" dirty="0"/>
+              <a:t>Prefix Once Across All Pooled Tenants</a:t>
+            </a:r>
+            <a:endParaRPr lang="en-US" sz="1350" dirty="0"/>
           </a:p>
         </p:txBody>
       </p:sp>
@@ -9874,7 +9874,7 @@
               <a:buNone/>
             </a:pPr>
             <a:r>
-              <a:rPr lang="en-US" sz="1700" b="1" dirty="0">
+              <a:rPr lang="en-US" sz="1650" b="1" dirty="0">
                 <a:solidFill>
                   <a:srgbClr val="FFFFFF"/>
                 </a:solidFill>
@@ -9882,9 +9882,9 @@
                 <a:ea typeface="Google Sans" pitchFamily="34" charset="-122"/>
                 <a:cs typeface="Google Sans" pitchFamily="34" charset="-120"/>
               </a:rPr>
-              <a:t>Phase 2: FinOps &amp; Quota</a:t>
-            </a:r>
-            <a:endParaRPr lang="en-US" sz="1700" dirty="0"/>
+              <a:t>Stage 2: Quota Bulkhead</a:t>
+            </a:r>
+            <a:endParaRPr lang="en-US" sz="1650" dirty="0"/>
           </a:p>
         </p:txBody>
       </p:sp>
@@ -9933,7 +9933,7 @@
               <a:buNone/>
             </a:pPr>
             <a:r>
-              <a:rPr lang="en-US" sz="2000" b="1" dirty="0">
+              <a:rPr lang="en-US" sz="1850" b="1" dirty="0">
                 <a:solidFill>
                   <a:srgbClr val="3C4043"/>
                 </a:solidFill>
@@ -9941,16 +9941,16 @@
                 <a:ea typeface="Google Sans" pitchFamily="34" charset="-122"/>
                 <a:cs typeface="Google Sans" pitchFamily="34" charset="-120"/>
               </a:rPr>
-              <a:t>90% Prefix Cache</a:t>
-            </a:r>
-            <a:endParaRPr lang="en-US" sz="2000" dirty="0"/>
+              <a:t>Atomic Valkey Token-Bucket</a:t>
+            </a:r>
+            <a:endParaRPr lang="en-US" sz="1850" dirty="0"/>
           </a:p>
           <a:p>
             <a:pPr algn="ctr" indent="0" marL="0">
               <a:buNone/>
             </a:pPr>
             <a:r>
-              <a:rPr lang="en-US" sz="2000" b="1" dirty="0">
+              <a:rPr lang="en-US" sz="1850" b="1" dirty="0">
                 <a:solidFill>
                   <a:srgbClr val="3C4043"/>
                 </a:solidFill>
@@ -9958,9 +9958,9 @@
                 <a:ea typeface="Google Sans" pitchFamily="34" charset="-122"/>
                 <a:cs typeface="Google Sans" pitchFamily="34" charset="-120"/>
               </a:rPr>
-              <a:t>&amp; Valkey Bulkheads</a:t>
-            </a:r>
-            <a:endParaRPr lang="en-US" sz="2000" dirty="0"/>
+              <a:t>&amp; Thinking Budget Clamp</a:t>
+            </a:r>
+            <a:endParaRPr lang="en-US" sz="1850" dirty="0"/>
           </a:p>
         </p:txBody>
       </p:sp>
@@ -9972,8 +9972,8 @@
         </p:nvSpPr>
         <p:spPr>
           <a:xfrm>
-            <a:off x="4553712" y="3675888"/>
-            <a:ext cx="3072384" cy="384048"/>
+            <a:off x="4517136" y="3675888"/>
+            <a:ext cx="3145536" cy="384048"/>
           </a:xfrm>
           <a:prstGeom prst="rect">
             <a:avLst/>
@@ -9989,17 +9989,17 @@
               <a:buNone/>
             </a:pPr>
             <a:r>
-              <a:rPr lang="en-US" sz="1500" dirty="0">
-                <a:solidFill>
-                  <a:srgbClr val="3C4043"/>
+              <a:rPr lang="en-US" sz="1220" b="1" dirty="0">
+                <a:solidFill>
+                  <a:srgbClr val="0D7A75"/>
                 </a:solidFill>
                 <a:latin typeface="Roboto" pitchFamily="34" charset="0"/>
                 <a:ea typeface="Roboto" pitchFamily="34" charset="-122"/>
                 <a:cs typeface="Roboto" pitchFamily="34" charset="-120"/>
               </a:rPr>
-              <a:t>(Weeks 3–4)</a:t>
-            </a:r>
-            <a:endParaRPr lang="en-US" sz="1500" dirty="0"/>
+              <a:t>120 vs. 600 RPM • 4k vs. 8k Tokens</a:t>
+            </a:r>
+            <a:endParaRPr lang="en-US" sz="1220" dirty="0"/>
           </a:p>
         </p:txBody>
       </p:sp>
@@ -10051,7 +10051,7 @@
               <a:buNone/>
             </a:pPr>
             <a:r>
-              <a:rPr lang="en-US" sz="1380" dirty="0">
+              <a:rPr lang="en-US" sz="1350" dirty="0">
                 <a:solidFill>
                   <a:srgbClr val="3C4043"/>
                 </a:solidFill>
@@ -10059,16 +10059,16 @@
                 <a:ea typeface="Roboto" pitchFamily="34" charset="-122"/>
                 <a:cs typeface="Roboto" pitchFamily="34" charset="-120"/>
               </a:rPr>
-              <a:t>84.7% Net Token Savings &amp;</a:t>
-            </a:r>
-            <a:endParaRPr lang="en-US" sz="1380" dirty="0"/>
+              <a:t>Throttles Noisy-Neighbor Bursts (HTTP 429)</a:t>
+            </a:r>
+            <a:endParaRPr lang="en-US" sz="1350" dirty="0"/>
           </a:p>
           <a:p>
             <a:pPr algn="ctr" indent="0" marL="0">
               <a:buNone/>
             </a:pPr>
             <a:r>
-              <a:rPr lang="en-US" sz="1380" dirty="0">
+              <a:rPr lang="en-US" sz="1350" dirty="0">
                 <a:solidFill>
                   <a:srgbClr val="3C4043"/>
                 </a:solidFill>
@@ -10076,9 +10076,9 @@
                 <a:ea typeface="Roboto" pitchFamily="34" charset="-122"/>
                 <a:cs typeface="Roboto" pitchFamily="34" charset="-120"/>
               </a:rPr>
-              <a:t>120/600 RPM Tenant Quotas</a:t>
-            </a:r>
-            <a:endParaRPr lang="en-US" sz="1380" dirty="0"/>
+              <a:t>Without Starving Peer SaaS Callers</a:t>
+            </a:r>
+            <a:endParaRPr lang="en-US" sz="1350" dirty="0"/>
           </a:p>
         </p:txBody>
       </p:sp>
@@ -10156,7 +10156,7 @@
               <a:buNone/>
             </a:pPr>
             <a:r>
-              <a:rPr lang="en-US" sz="1700" b="1" dirty="0">
+              <a:rPr lang="en-US" sz="1650" b="1" dirty="0">
                 <a:solidFill>
                   <a:srgbClr val="FFFFFF"/>
                 </a:solidFill>
@@ -10164,9 +10164,9 @@
                 <a:ea typeface="Google Sans" pitchFamily="34" charset="-122"/>
                 <a:cs typeface="Google Sans" pitchFamily="34" charset="-120"/>
               </a:rPr>
-              <a:t>Phase 3: Red-Team Gate</a:t>
-            </a:r>
-            <a:endParaRPr lang="en-US" sz="1700" dirty="0"/>
+              <a:t>Stage 3: RLS &amp; Chargeback</a:t>
+            </a:r>
+            <a:endParaRPr lang="en-US" sz="1650" dirty="0"/>
           </a:p>
         </p:txBody>
       </p:sp>
@@ -10215,7 +10215,7 @@
               <a:buNone/>
             </a:pPr>
             <a:r>
-              <a:rPr lang="en-US" sz="2000" b="1" dirty="0">
+              <a:rPr lang="en-US" sz="1850" b="1" dirty="0">
                 <a:solidFill>
                   <a:srgbClr val="3C4043"/>
                 </a:solidFill>
@@ -10223,16 +10223,16 @@
                 <a:ea typeface="Google Sans" pitchFamily="34" charset="-122"/>
                 <a:cs typeface="Google Sans" pitchFamily="34" charset="-120"/>
               </a:rPr>
-              <a:t>10-Point Breach</a:t>
-            </a:r>
-            <a:endParaRPr lang="en-US" sz="2000" dirty="0"/>
+              <a:t>Transactional AlloyDB RLS</a:t>
+            </a:r>
+            <a:endParaRPr lang="en-US" sz="1850" dirty="0"/>
           </a:p>
           <a:p>
             <a:pPr algn="ctr" indent="0" marL="0">
               <a:buNone/>
             </a:pPr>
             <a:r>
-              <a:rPr lang="en-US" sz="2000" b="1" dirty="0">
+              <a:rPr lang="en-US" sz="1850" b="1" dirty="0">
                 <a:solidFill>
                   <a:srgbClr val="3C4043"/>
                 </a:solidFill>
@@ -10240,9 +10240,9 @@
                 <a:ea typeface="Google Sans" pitchFamily="34" charset="-122"/>
                 <a:cs typeface="Google Sans" pitchFamily="34" charset="-120"/>
               </a:rPr>
-              <a:t>Simulation Suite</a:t>
-            </a:r>
-            <a:endParaRPr lang="en-US" sz="2000" dirty="0"/>
+              <a:t>&amp; Zero-PII OTel FinOps</a:t>
+            </a:r>
+            <a:endParaRPr lang="en-US" sz="1850" dirty="0"/>
           </a:p>
         </p:txBody>
       </p:sp>
@@ -10254,8 +10254,8 @@
         </p:nvSpPr>
         <p:spPr>
           <a:xfrm>
-            <a:off x="8394192" y="3675888"/>
-            <a:ext cx="3072384" cy="384048"/>
+            <a:off x="8357616" y="3675888"/>
+            <a:ext cx="3145536" cy="384048"/>
           </a:xfrm>
           <a:prstGeom prst="rect">
             <a:avLst/>
@@ -10271,17 +10271,17 @@
               <a:buNone/>
             </a:pPr>
             <a:r>
-              <a:rPr lang="en-US" sz="1500" dirty="0">
-                <a:solidFill>
-                  <a:srgbClr val="3C4043"/>
+              <a:rPr lang="en-US" sz="1220" b="1" dirty="0">
+                <a:solidFill>
+                  <a:srgbClr val="54728C"/>
                 </a:solidFill>
                 <a:latin typeface="Roboto" pitchFamily="34" charset="0"/>
                 <a:ea typeface="Roboto" pitchFamily="34" charset="-122"/>
                 <a:cs typeface="Roboto" pitchFamily="34" charset="-120"/>
               </a:rPr>
-              <a:t>(Weeks 5–6)</a:t>
-            </a:r>
-            <a:endParaRPr lang="en-US" sz="1500" dirty="0"/>
+              <a:t>SET LOCAL tenant_id • 84.7% Savings</a:t>
+            </a:r>
+            <a:endParaRPr lang="en-US" sz="1220" dirty="0"/>
           </a:p>
         </p:txBody>
       </p:sp>
@@ -10333,7 +10333,7 @@
               <a:buNone/>
             </a:pPr>
             <a:r>
-              <a:rPr lang="en-US" sz="1380" dirty="0">
+              <a:rPr lang="en-US" sz="1350" dirty="0">
                 <a:solidFill>
                   <a:srgbClr val="3C4043"/>
                 </a:solidFill>
@@ -10341,16 +10341,16 @@
                 <a:ea typeface="Roboto" pitchFamily="34" charset="-122"/>
                 <a:cs typeface="Roboto" pitchFamily="34" charset="-120"/>
               </a:rPr>
-              <a:t>10/10 Cross-Tenant Attacks</a:t>
-            </a:r>
-            <a:endParaRPr lang="en-US" sz="1380" dirty="0"/>
+              <a:t>Enforces 0 Cross-Tenant SQL Rows &amp;</a:t>
+            </a:r>
+            <a:endParaRPr lang="en-US" sz="1350" dirty="0"/>
           </a:p>
           <a:p>
             <a:pPr algn="ctr" indent="0" marL="0">
               <a:buNone/>
             </a:pPr>
             <a:r>
-              <a:rPr lang="en-US" sz="1380" dirty="0">
+              <a:rPr lang="en-US" sz="1350" dirty="0">
                 <a:solidFill>
                   <a:srgbClr val="3C4043"/>
                 </a:solidFill>
@@ -10358,9 +10358,9 @@
                 <a:ea typeface="Roboto" pitchFamily="34" charset="-122"/>
                 <a:cs typeface="Roboto" pitchFamily="34" charset="-120"/>
               </a:rPr>
-              <a:t>Blocked (0 Rows Leaked)</a:t>
-            </a:r>
-            <a:endParaRPr lang="en-US" sz="1380" dirty="0"/>
+              <a:t>Streams Per-Tenant Spans to BigQuery</a:t>
+            </a:r>
+            <a:endParaRPr lang="en-US" sz="1350" dirty="0"/>
           </a:p>
         </p:txBody>
       </p:sp>
@@ -10577,7 +10577,7 @@
                 <a:ea typeface="Roboto" pitchFamily="34" charset="-122"/>
                 <a:cs typeface="Roboto" pitchFamily="34" charset="-120"/>
               </a:rPr>
-              <a:t>Workstream 2 Pattern A Timeline  •  Terraform 2.6 Starter → 90% Prefix Cache &amp; Valkey → 10/10 Red-Team Certification  •  </a:t>
+              <a:t>Workstream 2 Pattern A Pipeline  •  Stage 1 32k Prefix Cache Warmup → Stage 2 Valkey RPM Bulkheads → Stage 3 AlloyDB RLS &amp; BigQuery OTel  •  </a:t>
             </a:r>
             <a:pPr algn="l" indent="0" marL="0">
               <a:buNone/>

--- a/slides/doc-mt-02-editable-slides.pptx
+++ b/slides/doc-mt-02-editable-slides.pptx
@@ -1139,11 +1139,11 @@
           <a:p>
             <a:r>
               <a:rPr lang="en-US" dirty="0"/>
-              <a:t>Use cases — FinVault Bank &amp; RetailStream Corp Co-Hosted Safely
-• Dynamic Per-Turn Runtime Hydration: A single pooled Diagnostic Agent dynamically loads each caller’s Firestore profile, GCS Skills (`gs://cymbal-skills-{tenant}/`), and token caps on every turn.
-• FinVault Bank (Enterprise Slice in Pool): Authenticates via Google Workspace OIDC, unlocks an 8,000-token thinking budget and 600 RPM quota, and accesses private Agent Alpha plus Workspace/Jira 3LO.
-• RetailStream Corp (Standard Slice in Pool): Authenticates via Microsoft Entra ID OIDC, runs within a 4,000-token thinking cap and 120 RPM quota, and invokes SharePoint/ServiceNow 3LO with employee consent.
-• Strict Catalog &amp; Namespace Firewall: RetailStream’s catalog discovery call excludes FinVault’s Agent Alpha (HTTP 403), and cross-tenant L4 Episodic Memory Bank reads throw an immediate PermissionError.</a:t>
+              <a:t>Use cases — Co-Hosting FinVault &amp; RetailStream Safely on One Pooled Google Cloud Stack
+• Dynamic Per-Turn Runtime Hydration: A single pooled Diagnostic Agent on Cloud Run v2 &amp; Vertex AI Agent Engine dynamically loads each caller’s Firestore profile, GCS Skills (`gs://cymbal-skills-{tenant}/`), and 32k Gemini 2.5 Pro ContextCacheConfig prefix.
+• FinVault Bank (Enterprise Slice in Pool): Authenticates via Google Workspace OIDC, unlocks an 8,000-token thinking budget and 600 RPM Valkey quota, and accesses private Agent Alpha (Gemini 2.5 Pro Dedicated PT) plus Workspace/Jira 3LO.
+• RetailStream Corp (Standard Slice in Pool): Authenticates via Microsoft Entra ID OIDC, runs within a 4,000-token thinking cap and 120 RPM Valkey quota ($42/mo floor), and invokes SharePoint/ServiceNow 3LO with `-32042` step-up consent.
+• Cryptographic Catalog, Memory &amp; AlloyDB RLS Firewall: Cloud Armor, IAP OBO/DPoP, Hop 2 ARD Filter (HTTP 403), Hop 3 L1–L5 Memory Bank namespaces, Hop 4 Model Armor/DLP, and Hop 5 AlloyDB FORCE RLS guarantee 100% mutual invisibility.</a:t>
             </a:r>
             <a:endParaRPr lang="en-US" dirty="0"/>
           </a:p>
@@ -1231,11 +1231,8 @@
           <a:p>
             <a:r>
               <a:rPr lang="en-US" dirty="0"/>
-              <a:t>Products used — Shared Cloud Run v2, Vertex AI, Valkey &amp; AlloyDB RLS
-• Agentic AI &amp; Shared Prefix Caching: Vertex AI Agent Engine (ADK 2.0 runtime, Agent Registry &amp; L1–L5 Memory Bank) and Gemini 2.5 Pro with ContextCacheConfig caching a 32,000-token immutable system prefix at a 90% discount (84.7% net token savings).
-• Ingress, Identity &amp; Bidirectional AI Safety: Global External Application Load Balancer, Google Cloud Armor L7 WAF (stripping spoofed X-Tenant-Id headers), IAP + IAM STS (RFC 8693 OBO + RFC 9449 DPoP), Vertex AI Model Armor, and Cloud Sensitive Data Protection.
-• Rate Bulkheads, Relational RLS &amp; FinOps Telemetry: Memorystore for Valkey (120 vs. 600 RPM token buckets), Firestore tenant profile registry, AlloyDB for PostgreSQL (`FORCE ROW LEVEL SECURITY`), Cloud KMS CMEK, and BigQuery zero-PII OTel chargeback.
-• High-Density Unit Economics ($42/Tenant/Month): Co-hosts hundreds of commercial B2B SaaS tenants inside one shared Google Cloud project (`ramp-portal-dev`) while guaranteeing 10/10 red-team breach isolation.</a:t>
+              <a:t>Design alternatives — Pattern A Pooled Architecture vs. Naive Multi-Tenancy vs. Dedicated Silos
+</a:t>
             </a:r>
             <a:endParaRPr lang="en-US" dirty="0"/>
           </a:p>
@@ -17226,7 +17223,7 @@
                 <a:ea typeface="Google Sans" pitchFamily="34" charset="-122"/>
                 <a:cs typeface="Google Sans" pitchFamily="34" charset="-120"/>
               </a:rPr>
-              <a:t>FinVault Bank &amp; RetailStream Corp Co-Hosted Safely</a:t>
+              <a:t>Co-Hosting FinVault &amp; RetailStream Safely on One Pooled Google Cloud Stack</a:t>
             </a:r>
             <a:endParaRPr lang="en-US" sz="1900" dirty="0"/>
           </a:p>
@@ -17471,7 +17468,7 @@
                 <a:ea typeface="Roboto" pitchFamily="34" charset="-122"/>
                 <a:cs typeface="Roboto" pitchFamily="34" charset="-120"/>
               </a:rPr>
-              <a:t>A single pooled Diagnostic Agent dynamically loads each caller’s Firestore profile, GCS Skills (gs://cymbal-skills-{tenant}/), and token caps on every turn.</a:t>
+              <a:t>A single pooled Diagnostic Agent on Cloud Run v2 &amp; Vertex AI Agent Engine dynamically loads each caller’s Firestore profile, GCS Skills (gs://cymbal-skills-{tenant}/), and 32k Gemini 2.5 Pro ContextCacheConfig prefix.</a:t>
             </a:r>
             <a:endParaRPr lang="en-US" sz="980" dirty="0"/>
           </a:p>
@@ -17557,7 +17554,7 @@
                 <a:ea typeface="Google Sans" pitchFamily="34" charset="-122"/>
                 <a:cs typeface="Google Sans" pitchFamily="34" charset="-120"/>
               </a:rPr>
-              <a:t>Cloud Stack: core-cymbal-agent/runtime_pipeline.py • Hop3RuntimeAndMemory.load_dynamic_runtime_config
+              <a:t>Cloud Stack: Cloud Run v2 • Vertex AI Agent Engine • Gemini 2.5 Pro ContextCacheConfig (32k Prefix)
 </a:t>
             </a:r>
             <a:pPr indent="0" marL="0">
@@ -17572,7 +17569,7 @@
                 <a:ea typeface="Roboto" pitchFamily="34" charset="-122"/>
                 <a:cs typeface="Roboto" pitchFamily="34" charset="-120"/>
               </a:rPr>
-              <a:t>Target &amp; SLA: Injects Tenant-Specific System Prompt &amp; Verified GCS Skills URIs per Turn</a:t>
+              <a:t>Target &amp; SLA: Injects Tenant-Specific Prompt &amp; GCS Skills per Turn • 84.7% Net Input Token Cost Reduction</a:t>
             </a:r>
             <a:endParaRPr lang="en-US" sz="750" dirty="0"/>
           </a:p>
@@ -17633,7 +17630,7 @@
                 <a:ea typeface="Google Sans" pitchFamily="34" charset="-122"/>
                 <a:cs typeface="Google Sans" pitchFamily="34" charset="-120"/>
               </a:rPr>
-              <a:t>Dynamic Context Hydration</a:t>
+              <a:t>1. Shared Pooled Control Plane</a:t>
             </a:r>
             <a:endParaRPr lang="en-US" sz="750" dirty="0"/>
           </a:p>
@@ -17839,7 +17836,7 @@
                 <a:ea typeface="Roboto" pitchFamily="34" charset="-122"/>
                 <a:cs typeface="Roboto" pitchFamily="34" charset="-120"/>
               </a:rPr>
-              <a:t>Authenticates via Google Workspace OIDC, unlocks an 8,000-token thinking budget and 600 RPM quota, and accesses private Agent Alpha plus Workspace/Jira 3LO.</a:t>
+              <a:t>Authenticates via Google Workspace OIDC, unlocks an 8,000-token thinking budget and 600 RPM Valkey quota, and accesses private Agent Alpha (Gemini 2.5 Pro Dedicated PT) plus Workspace/Jira 3LO.</a:t>
             </a:r>
             <a:endParaRPr lang="en-US" sz="980" dirty="0"/>
           </a:p>
@@ -17925,7 +17922,7 @@
                 <a:ea typeface="Google Sans" pitchFamily="34" charset="-122"/>
                 <a:cs typeface="Google Sans" pitchFamily="34" charset="-120"/>
               </a:rPr>
-              <a:t>Cloud Stack: Google Workspace OIDC • Agent Alpha (Gemini 2.5 Pro / Gemini 2.5) • 3LO Drive/Gmail/Jira
+              <a:t>Cloud Stack: Google Workspace OIDC • Agent Alpha (Gemini 2.5 Pro Dedicated PT) • 3LO Drive/Gmail/Jira
 </a:t>
             </a:r>
             <a:pPr indent="0" marL="0">
@@ -17940,7 +17937,7 @@
                 <a:ea typeface="Roboto" pitchFamily="34" charset="-122"/>
                 <a:cs typeface="Roboto" pitchFamily="34" charset="-120"/>
               </a:rPr>
-              <a:t>Target &amp; SLA: 8,000 Thinking Tokens • 600 RPM Valkey Bucket • OCC NLC + IBAN/SWIFT Masking</a:t>
+              <a:t>Target &amp; SLA: 8,000 Thinking Tokens • 600 RPM Valkey Bucket • OCC NLC (HTTP 422) + IBAN/SWIFT Masking</a:t>
             </a:r>
             <a:endParaRPr lang="en-US" sz="750" dirty="0"/>
           </a:p>
@@ -18001,7 +17998,7 @@
                 <a:ea typeface="Google Sans" pitchFamily="34" charset="-122"/>
                 <a:cs typeface="Google Sans" pitchFamily="34" charset="-120"/>
               </a:rPr>
-              <a:t>FinVault Pooled Slice</a:t>
+              <a:t>2. FinVault Pooled Enterprise Slice</a:t>
             </a:r>
             <a:endParaRPr lang="en-US" sz="750" dirty="0"/>
           </a:p>
@@ -18207,7 +18204,7 @@
                 <a:ea typeface="Roboto" pitchFamily="34" charset="-122"/>
                 <a:cs typeface="Roboto" pitchFamily="34" charset="-120"/>
               </a:rPr>
-              <a:t>Authenticates via Microsoft Entra ID OIDC, runs within a 4,000-token thinking cap and 120 RPM quota, and invokes SharePoint/ServiceNow 3LO with employee consent.</a:t>
+              <a:t>Authenticates via Microsoft Entra ID OIDC, runs within a 4,000-token thinking cap and 120 RPM Valkey quota ($42/mo floor), and invokes SharePoint/ServiceNow 3LO with -32042 step-up consent.</a:t>
             </a:r>
             <a:endParaRPr lang="en-US" sz="980" dirty="0"/>
           </a:p>
@@ -18293,7 +18290,7 @@
                 <a:ea typeface="Google Sans" pitchFamily="34" charset="-122"/>
                 <a:cs typeface="Google Sans" pitchFamily="34" charset="-120"/>
               </a:rPr>
-              <a:t>Cloud Stack: Microsoft Entra ID OIDC • Shared Diagnostic Agent • 3LO SharePoint/ServiceNow
+              <a:t>Cloud Stack: Microsoft Entra ID OIDC • Shared Diagnostic Agent • 3LO SharePoint &amp; ServiceNow ITOM
 </a:t>
             </a:r>
             <a:pPr indent="0" marL="0">
@@ -18308,7 +18305,7 @@
                 <a:ea typeface="Roboto" pitchFamily="34" charset="-122"/>
                 <a:cs typeface="Roboto" pitchFamily="34" charset="-120"/>
               </a:rPr>
-              <a:t>Target &amp; SLA: 4,000 Thinking Tokens • 120 RPM Valkey Bucket • PCI-DSS PAN/SSN Masking</a:t>
+              <a:t>Target &amp; SLA: 4,000 Thinking Tokens • 120 RPM Valkey Bucket • PCI-DSS PAN/SSN Masking • $42/mo Floor</a:t>
             </a:r>
             <a:endParaRPr lang="en-US" sz="750" dirty="0"/>
           </a:p>
@@ -18369,7 +18366,7 @@
                 <a:ea typeface="Google Sans" pitchFamily="34" charset="-122"/>
                 <a:cs typeface="Google Sans" pitchFamily="34" charset="-120"/>
               </a:rPr>
-              <a:t>RetailStream Pooled Slice</a:t>
+              <a:t>3. RetailStream Pooled Standard Slice</a:t>
             </a:r>
             <a:endParaRPr lang="en-US" sz="750" dirty="0"/>
           </a:p>
@@ -18516,7 +18513,7 @@
                 <a:ea typeface="Google Sans" pitchFamily="34" charset="-122"/>
                 <a:cs typeface="Google Sans" pitchFamily="34" charset="-120"/>
               </a:rPr>
-              <a:t>Strict Catalog &amp; Namespace Firewall</a:t>
+              <a:t>Cryptographic Catalog, Memory &amp; AlloyDB RLS Firewall</a:t>
             </a:r>
             <a:endParaRPr lang="en-US" sz="1140" dirty="0"/>
           </a:p>
@@ -18575,7 +18572,7 @@
                 <a:ea typeface="Roboto" pitchFamily="34" charset="-122"/>
                 <a:cs typeface="Roboto" pitchFamily="34" charset="-120"/>
               </a:rPr>
-              <a:t>RetailStream’s catalog discovery call excludes FinVault’s Agent Alpha (HTTP 403), and cross-tenant L4 Episodic Memory Bank reads throw an immediate PermissionError.</a:t>
+              <a:t>Cloud Armor, IAP OBO/DPoP, Hop 2 ARD Filter (HTTP 403), Hop 3 L1–L5 Memory Bank namespaces, Hop 4 Model Armor/DLP, and Hop 5 AlloyDB FORCE RLS guarantee 100% mutual invisibility.</a:t>
             </a:r>
             <a:endParaRPr lang="en-US" sz="980" dirty="0"/>
           </a:p>
@@ -18661,7 +18658,7 @@
                 <a:ea typeface="Google Sans" pitchFamily="34" charset="-122"/>
                 <a:cs typeface="Google Sans" pitchFamily="34" charset="-120"/>
               </a:rPr>
-              <a:t>Cloud Stack: Hop 2 ARD Filter + Hop 3 MemoryBankLevel.L1..L5 + Hop 5 PostgreSQL RLS
+              <a:t>Cloud Stack: Cloud Armor • IAP STS • Hop 2 ARD • L1–L5 Memory Bank • Model Armor • AlloyDB FORCE RLS
 </a:t>
             </a:r>
             <a:pPr indent="0" marL="0">
@@ -18676,7 +18673,7 @@
                 <a:ea typeface="Roboto" pitchFamily="34" charset="-122"/>
                 <a:cs typeface="Roboto" pitchFamily="34" charset="-120"/>
               </a:rPr>
-              <a:t>Target &amp; SLA: 100% Mutual Invisibility Between Co-Hosted Competing Tenants</a:t>
+              <a:t>Target &amp; SLA: 10/10 Adversarial Red-Team Breach Simulations Blocked • 0 Cross-Tenant SQL Rows</a:t>
             </a:r>
             <a:endParaRPr lang="en-US" sz="750" dirty="0"/>
           </a:p>
@@ -18737,7 +18734,7 @@
                 <a:ea typeface="Google Sans" pitchFamily="34" charset="-122"/>
                 <a:cs typeface="Google Sans" pitchFamily="34" charset="-120"/>
               </a:rPr>
-              <a:t>Cryptographic Partitioning</a:t>
+              <a:t>4. Unified Pattern A Security Stack</a:t>
             </a:r>
             <a:endParaRPr lang="en-US" sz="750" dirty="0"/>
           </a:p>
@@ -19306,7 +19303,7 @@
                 <a:ea typeface="Google Sans" pitchFamily="34" charset="-122"/>
                 <a:cs typeface="Google Sans" pitchFamily="34" charset="-120"/>
               </a:rPr>
-              <a:t>ACT I • GOOGLE CLOUD REFERENCE PRODUCT STACK &amp; BILL OF MATERIALS</a:t>
+              <a:t>ACT I • ARCHITECTURAL OPTIONS &amp; PATTERN A / B / C DECISION MATRIX</a:t>
             </a:r>
             <a:endParaRPr lang="en-US" sz="1020" dirty="0"/>
           </a:p>
@@ -19372,7 +19369,7 @@
                 <a:ea typeface="Roboto" pitchFamily="34" charset="-122"/>
                 <a:cs typeface="Roboto" pitchFamily="34" charset="-120"/>
               </a:rPr>
-              <a:t>THREE-PILLAR • ARCHITECTURE</a:t>
+              <a:t>COMPARISON-GRID • MATRIX</a:t>
             </a:r>
             <a:endParaRPr lang="en-US" sz="750" dirty="0"/>
           </a:p>
@@ -19386,8 +19383,8 @@
         </p:nvSpPr>
         <p:spPr>
           <a:xfrm>
-            <a:off x="411480" y="658368"/>
-            <a:ext cx="11368735" cy="365760"/>
+            <a:off x="411480" y="640080"/>
+            <a:ext cx="11368735" cy="347472"/>
           </a:xfrm>
           <a:prstGeom prst="rect">
             <a:avLst/>
@@ -19403,7 +19400,7 @@
               <a:buNone/>
             </a:pPr>
             <a:r>
-              <a:rPr lang="en-US" sz="1900" b="1" dirty="0">
+              <a:rPr lang="en-US" sz="1800" b="1" dirty="0">
                 <a:solidFill>
                   <a:srgbClr val="3C4043"/>
                 </a:solidFill>
@@ -19411,9 +19408,9 @@
                 <a:ea typeface="Google Sans" pitchFamily="34" charset="-122"/>
                 <a:cs typeface="Google Sans" pitchFamily="34" charset="-120"/>
               </a:rPr>
-              <a:t>Shared Cloud Run v2, Vertex AI, Valkey &amp; AlloyDB RLS</a:t>
-            </a:r>
-            <a:endParaRPr lang="en-US" sz="1900" dirty="0"/>
+              <a:t>Pattern A Pooled Architecture vs. Naive Multi-Tenancy vs. Dedicated Silos</a:t>
+            </a:r>
+            <a:endParaRPr lang="en-US" sz="1800" dirty="0"/>
           </a:p>
         </p:txBody>
       </p:sp>
@@ -19425,8 +19422,8 @@
         </p:nvSpPr>
         <p:spPr>
           <a:xfrm>
-            <a:off x="411480" y="1024128"/>
-            <a:ext cx="11368735" cy="237744"/>
+            <a:off x="411480" y="987552"/>
+            <a:ext cx="11368735" cy="219456"/>
           </a:xfrm>
           <a:prstGeom prst="rect">
             <a:avLst/>
@@ -19442,7 +19439,7 @@
               <a:buNone/>
             </a:pPr>
             <a:r>
-              <a:rPr lang="en-US" sz="1000" dirty="0">
+              <a:rPr lang="en-US" sz="980" dirty="0">
                 <a:solidFill>
                   <a:srgbClr val="5F6368"/>
                 </a:solidFill>
@@ -19450,26 +19447,1976 @@
                 <a:ea typeface="Roboto" pitchFamily="34" charset="-122"/>
                 <a:cs typeface="Roboto" pitchFamily="34" charset="-120"/>
               </a:rPr>
-              <a:t>Structured Google Cloud reference SKUs, runtime isolation boundaries, and production SLAs.</a:t>
-            </a:r>
-            <a:endParaRPr lang="en-US" sz="1000" dirty="0"/>
-          </a:p>
-        </p:txBody>
-      </p:sp>
-      <p:sp>
-        <p:nvSpPr>
-          <p:cNvPr id="19" name="Shape 17"/>
-          <p:cNvSpPr/>
-          <p:nvPr/>
-        </p:nvSpPr>
-        <p:spPr>
-          <a:xfrm>
-            <a:off x="411480" y="1353312"/>
-            <a:ext cx="5583326" cy="2258568"/>
+              <a:t>Side-by-side Google Cloud Well-Architected trade-off analysis, isolation boundaries, and unit economics.</a:t>
+            </a:r>
+            <a:endParaRPr lang="en-US" sz="980" dirty="0"/>
+          </a:p>
+        </p:txBody>
+      </p:sp>
+      <p:graphicFrame>
+        <p:nvGraphicFramePr>
+          <p:cNvPr id="5" name="Table 0"/>
+          <p:cNvGraphicFramePr>
+            <a:graphicFrameLocks noGrp="1"/>
+          </p:cNvGraphicFramePr>
+          <p:nvPr>
+            <p:extLst>
+              <p:ext uri="{D42A27DB-BD31-4B8C-83A1-F6EECF244321}">
+                <p14:modId xmlns:p14="http://schemas.microsoft.com/office/powerpoint/2010/main" val="1579011935"/>
+              </p:ext>
+            </p:extLst>
+          </p:nvPr>
+        </p:nvGraphicFramePr>
+        <p:xfrm>
+          <a:off x="411480" y="1243584"/>
+          <a:ext cx="11368735" cy="914400"/>
+        </p:xfrm>
+        <a:graphic>
+          <a:graphicData uri="http://schemas.openxmlformats.org/drawingml/2006/table">
+            <a:tbl>
+              <a:tblPr/>
+              <a:tblGrid>
+                <a:gridCol w="2057400"/>
+                <a:gridCol w="3017520"/>
+                <a:gridCol w="3200400"/>
+                <a:gridCol w="3184855"/>
+              </a:tblGrid>
+              <a:tr h="0">
+                <a:tc>
+                  <a:txBody>
+                    <a:bodyPr/>
+                    <a:lstStyle/>
+                    <a:p>
+                      <a:pPr indent="0" marL="0">
+                        <a:buNone/>
+                      </a:pPr>
+                      <a:r>
+                        <a:rPr lang="en-US" sz="850" b="1" dirty="0">
+                          <a:solidFill>
+                            <a:srgbClr val="FFFFFF"/>
+                          </a:solidFill>
+                          <a:latin typeface="Google Sans" pitchFamily="34" charset="0"/>
+                          <a:ea typeface="Google Sans" pitchFamily="34" charset="-122"/>
+                          <a:cs typeface="Google Sans" pitchFamily="34" charset="-120"/>
+                        </a:rPr>
+                        <a:t>Architectural Dimension</a:t>
+                      </a:r>
+                      <a:endParaRPr lang="en-US" sz="850" dirty="0">
+                        <a:latin typeface="Google Sans" charset="0"/>
+                        <a:ea typeface="Google Sans" charset="0"/>
+                        <a:cs typeface="Google Sans" charset="0"/>
+                      </a:endParaRPr>
+                    </a:p>
+                  </a:txBody>
+                  <a:tcPr marL="91440" marR="91440" marT="45720" marB="45720" anchor="ctr">
+                    <a:lnL w="9525" cap="flat" cmpd="sng" algn="ctr">
+                      <a:solidFill>
+                        <a:srgbClr val="DADCE0"/>
+                      </a:solidFill>
+                      <a:prstDash val="solid"/>
+                      <a:round/>
+                      <a:headEnd type="none" w="med" len="med"/>
+                      <a:tailEnd type="none" w="med" len="med"/>
+                    </a:lnL>
+                    <a:lnR w="9525" cap="flat" cmpd="sng" algn="ctr">
+                      <a:solidFill>
+                        <a:srgbClr val="DADCE0"/>
+                      </a:solidFill>
+                      <a:prstDash val="solid"/>
+                      <a:round/>
+                      <a:headEnd type="none" w="med" len="med"/>
+                      <a:tailEnd type="none" w="med" len="med"/>
+                    </a:lnR>
+                    <a:lnT w="9525" cap="flat" cmpd="sng" algn="ctr">
+                      <a:solidFill>
+                        <a:srgbClr val="DADCE0"/>
+                      </a:solidFill>
+                      <a:prstDash val="solid"/>
+                      <a:round/>
+                      <a:headEnd type="none" w="med" len="med"/>
+                      <a:tailEnd type="none" w="med" len="med"/>
+                    </a:lnT>
+                    <a:lnB w="9525" cap="flat" cmpd="sng" algn="ctr">
+                      <a:solidFill>
+                        <a:srgbClr val="DADCE0"/>
+                      </a:solidFill>
+                      <a:prstDash val="solid"/>
+                      <a:round/>
+                      <a:headEnd type="none" w="med" len="med"/>
+                      <a:tailEnd type="none" w="med" len="med"/>
+                    </a:lnB>
+                    <a:solidFill>
+                      <a:srgbClr val="4285F4"/>
+                    </a:solidFill>
+                  </a:tcPr>
+                </a:tc>
+                <a:tc>
+                  <a:txBody>
+                    <a:bodyPr/>
+                    <a:lstStyle/>
+                    <a:p>
+                      <a:pPr indent="0" marL="0">
+                        <a:buNone/>
+                      </a:pPr>
+                      <a:r>
+                        <a:rPr lang="en-US" sz="850" b="1" dirty="0">
+                          <a:solidFill>
+                            <a:srgbClr val="FFFFFF"/>
+                          </a:solidFill>
+                          <a:latin typeface="Google Sans" pitchFamily="34" charset="0"/>
+                          <a:ea typeface="Google Sans" pitchFamily="34" charset="-122"/>
+                          <a:cs typeface="Google Sans" pitchFamily="34" charset="-120"/>
+                        </a:rPr>
+                        <a:t>Naive Shared Multi-Tenancy (Anti-Pattern)</a:t>
+                      </a:r>
+                      <a:endParaRPr lang="en-US" sz="850" dirty="0">
+                        <a:latin typeface="Google Sans" charset="0"/>
+                        <a:ea typeface="Google Sans" charset="0"/>
+                        <a:cs typeface="Google Sans" charset="0"/>
+                      </a:endParaRPr>
+                    </a:p>
+                  </a:txBody>
+                  <a:tcPr marL="91440" marR="91440" marT="45720" marB="45720" anchor="ctr">
+                    <a:lnL w="9525" cap="flat" cmpd="sng" algn="ctr">
+                      <a:solidFill>
+                        <a:srgbClr val="DADCE0"/>
+                      </a:solidFill>
+                      <a:prstDash val="solid"/>
+                      <a:round/>
+                      <a:headEnd type="none" w="med" len="med"/>
+                      <a:tailEnd type="none" w="med" len="med"/>
+                    </a:lnL>
+                    <a:lnR w="9525" cap="flat" cmpd="sng" algn="ctr">
+                      <a:solidFill>
+                        <a:srgbClr val="DADCE0"/>
+                      </a:solidFill>
+                      <a:prstDash val="solid"/>
+                      <a:round/>
+                      <a:headEnd type="none" w="med" len="med"/>
+                      <a:tailEnd type="none" w="med" len="med"/>
+                    </a:lnR>
+                    <a:lnT w="9525" cap="flat" cmpd="sng" algn="ctr">
+                      <a:solidFill>
+                        <a:srgbClr val="DADCE0"/>
+                      </a:solidFill>
+                      <a:prstDash val="solid"/>
+                      <a:round/>
+                      <a:headEnd type="none" w="med" len="med"/>
+                      <a:tailEnd type="none" w="med" len="med"/>
+                    </a:lnT>
+                    <a:lnB w="9525" cap="flat" cmpd="sng" algn="ctr">
+                      <a:solidFill>
+                        <a:srgbClr val="DADCE0"/>
+                      </a:solidFill>
+                      <a:prstDash val="solid"/>
+                      <a:round/>
+                      <a:headEnd type="none" w="med" len="med"/>
+                      <a:tailEnd type="none" w="med" len="med"/>
+                    </a:lnB>
+                    <a:solidFill>
+                      <a:srgbClr val="4285F4"/>
+                    </a:solidFill>
+                  </a:tcPr>
+                </a:tc>
+                <a:tc>
+                  <a:txBody>
+                    <a:bodyPr/>
+                    <a:lstStyle/>
+                    <a:p>
+                      <a:pPr indent="0" marL="0">
+                        <a:buNone/>
+                      </a:pPr>
+                      <a:r>
+                        <a:rPr lang="en-US" sz="850" b="1" dirty="0">
+                          <a:solidFill>
+                            <a:srgbClr val="FFFFFF"/>
+                          </a:solidFill>
+                          <a:latin typeface="Google Sans" pitchFamily="34" charset="0"/>
+                          <a:ea typeface="Google Sans" pitchFamily="34" charset="-122"/>
+                          <a:cs typeface="Google Sans" pitchFamily="34" charset="-120"/>
+                        </a:rPr>
+                        <a:t>Pattern A: Cryptographic Pooled (WS2 Target)</a:t>
+                      </a:r>
+                      <a:endParaRPr lang="en-US" sz="850" dirty="0">
+                        <a:latin typeface="Google Sans" charset="0"/>
+                        <a:ea typeface="Google Sans" charset="0"/>
+                        <a:cs typeface="Google Sans" charset="0"/>
+                      </a:endParaRPr>
+                    </a:p>
+                  </a:txBody>
+                  <a:tcPr marL="91440" marR="91440" marT="45720" marB="45720" anchor="ctr">
+                    <a:lnL w="9525" cap="flat" cmpd="sng" algn="ctr">
+                      <a:solidFill>
+                        <a:srgbClr val="DADCE0"/>
+                      </a:solidFill>
+                      <a:prstDash val="solid"/>
+                      <a:round/>
+                      <a:headEnd type="none" w="med" len="med"/>
+                      <a:tailEnd type="none" w="med" len="med"/>
+                    </a:lnL>
+                    <a:lnR w="9525" cap="flat" cmpd="sng" algn="ctr">
+                      <a:solidFill>
+                        <a:srgbClr val="DADCE0"/>
+                      </a:solidFill>
+                      <a:prstDash val="solid"/>
+                      <a:round/>
+                      <a:headEnd type="none" w="med" len="med"/>
+                      <a:tailEnd type="none" w="med" len="med"/>
+                    </a:lnR>
+                    <a:lnT w="9525" cap="flat" cmpd="sng" algn="ctr">
+                      <a:solidFill>
+                        <a:srgbClr val="DADCE0"/>
+                      </a:solidFill>
+                      <a:prstDash val="solid"/>
+                      <a:round/>
+                      <a:headEnd type="none" w="med" len="med"/>
+                      <a:tailEnd type="none" w="med" len="med"/>
+                    </a:lnT>
+                    <a:lnB w="9525" cap="flat" cmpd="sng" algn="ctr">
+                      <a:solidFill>
+                        <a:srgbClr val="DADCE0"/>
+                      </a:solidFill>
+                      <a:prstDash val="solid"/>
+                      <a:round/>
+                      <a:headEnd type="none" w="med" len="med"/>
+                      <a:tailEnd type="none" w="med" len="med"/>
+                    </a:lnB>
+                    <a:solidFill>
+                      <a:srgbClr val="4285F4"/>
+                    </a:solidFill>
+                  </a:tcPr>
+                </a:tc>
+                <a:tc>
+                  <a:txBody>
+                    <a:bodyPr/>
+                    <a:lstStyle/>
+                    <a:p>
+                      <a:pPr indent="0" marL="0">
+                        <a:buNone/>
+                      </a:pPr>
+                      <a:r>
+                        <a:rPr lang="en-US" sz="850" b="1" dirty="0">
+                          <a:solidFill>
+                            <a:srgbClr val="FFFFFF"/>
+                          </a:solidFill>
+                          <a:latin typeface="Google Sans" pitchFamily="34" charset="0"/>
+                          <a:ea typeface="Google Sans" pitchFamily="34" charset="-122"/>
+                          <a:cs typeface="Google Sans" pitchFamily="34" charset="-120"/>
+                        </a:rPr>
+                        <a:t>Pattern B: Dedicated Sovereign Silos (WS3)</a:t>
+                      </a:r>
+                      <a:endParaRPr lang="en-US" sz="850" dirty="0">
+                        <a:latin typeface="Google Sans" charset="0"/>
+                        <a:ea typeface="Google Sans" charset="0"/>
+                        <a:cs typeface="Google Sans" charset="0"/>
+                      </a:endParaRPr>
+                    </a:p>
+                  </a:txBody>
+                  <a:tcPr marL="91440" marR="91440" marT="45720" marB="45720" anchor="ctr">
+                    <a:lnL w="9525" cap="flat" cmpd="sng" algn="ctr">
+                      <a:solidFill>
+                        <a:srgbClr val="DADCE0"/>
+                      </a:solidFill>
+                      <a:prstDash val="solid"/>
+                      <a:round/>
+                      <a:headEnd type="none" w="med" len="med"/>
+                      <a:tailEnd type="none" w="med" len="med"/>
+                    </a:lnL>
+                    <a:lnR w="9525" cap="flat" cmpd="sng" algn="ctr">
+                      <a:solidFill>
+                        <a:srgbClr val="DADCE0"/>
+                      </a:solidFill>
+                      <a:prstDash val="solid"/>
+                      <a:round/>
+                      <a:headEnd type="none" w="med" len="med"/>
+                      <a:tailEnd type="none" w="med" len="med"/>
+                    </a:lnR>
+                    <a:lnT w="9525" cap="flat" cmpd="sng" algn="ctr">
+                      <a:solidFill>
+                        <a:srgbClr val="DADCE0"/>
+                      </a:solidFill>
+                      <a:prstDash val="solid"/>
+                      <a:round/>
+                      <a:headEnd type="none" w="med" len="med"/>
+                      <a:tailEnd type="none" w="med" len="med"/>
+                    </a:lnT>
+                    <a:lnB w="9525" cap="flat" cmpd="sng" algn="ctr">
+                      <a:solidFill>
+                        <a:srgbClr val="DADCE0"/>
+                      </a:solidFill>
+                      <a:prstDash val="solid"/>
+                      <a:round/>
+                      <a:headEnd type="none" w="med" len="med"/>
+                      <a:tailEnd type="none" w="med" len="med"/>
+                    </a:lnB>
+                    <a:solidFill>
+                      <a:srgbClr val="4285F4"/>
+                    </a:solidFill>
+                  </a:tcPr>
+                </a:tc>
+              </a:tr>
+              <a:tr h="0">
+                <a:tc>
+                  <a:txBody>
+                    <a:bodyPr/>
+                    <a:lstStyle/>
+                    <a:p>
+                      <a:pPr indent="0" marL="0">
+                        <a:buNone/>
+                      </a:pPr>
+                      <a:r>
+                        <a:rPr lang="en-US" sz="780" b="1" dirty="0">
+                          <a:solidFill>
+                            <a:srgbClr val="3C4043"/>
+                          </a:solidFill>
+                          <a:latin typeface="Google Sans" pitchFamily="34" charset="0"/>
+                          <a:ea typeface="Google Sans" pitchFamily="34" charset="-122"/>
+                          <a:cs typeface="Google Sans" pitchFamily="34" charset="-120"/>
+                        </a:rPr>
+                        <a:t>Ingress &amp; identity binding</a:t>
+                      </a:r>
+                      <a:endParaRPr lang="en-US" sz="780" dirty="0">
+                        <a:latin typeface="Google Sans" charset="0"/>
+                        <a:ea typeface="Google Sans" charset="0"/>
+                        <a:cs typeface="Google Sans" charset="0"/>
+                      </a:endParaRPr>
+                    </a:p>
+                  </a:txBody>
+                  <a:tcPr marL="91440" marR="91440" marT="45720" marB="45720" anchor="ctr">
+                    <a:lnL w="9525" cap="flat" cmpd="sng" algn="ctr">
+                      <a:solidFill>
+                        <a:srgbClr val="DADCE0"/>
+                      </a:solidFill>
+                      <a:prstDash val="solid"/>
+                      <a:round/>
+                      <a:headEnd type="none" w="med" len="med"/>
+                      <a:tailEnd type="none" w="med" len="med"/>
+                    </a:lnL>
+                    <a:lnR w="9525" cap="flat" cmpd="sng" algn="ctr">
+                      <a:solidFill>
+                        <a:srgbClr val="DADCE0"/>
+                      </a:solidFill>
+                      <a:prstDash val="solid"/>
+                      <a:round/>
+                      <a:headEnd type="none" w="med" len="med"/>
+                      <a:tailEnd type="none" w="med" len="med"/>
+                    </a:lnR>
+                    <a:lnT w="9525" cap="flat" cmpd="sng" algn="ctr">
+                      <a:solidFill>
+                        <a:srgbClr val="DADCE0"/>
+                      </a:solidFill>
+                      <a:prstDash val="solid"/>
+                      <a:round/>
+                      <a:headEnd type="none" w="med" len="med"/>
+                      <a:tailEnd type="none" w="med" len="med"/>
+                    </a:lnT>
+                    <a:lnB w="9525" cap="flat" cmpd="sng" algn="ctr">
+                      <a:solidFill>
+                        <a:srgbClr val="DADCE0"/>
+                      </a:solidFill>
+                      <a:prstDash val="solid"/>
+                      <a:round/>
+                      <a:headEnd type="none" w="med" len="med"/>
+                      <a:tailEnd type="none" w="med" len="med"/>
+                    </a:lnB>
+                    <a:solidFill>
+                      <a:srgbClr val="FFFFFF"/>
+                    </a:solidFill>
+                  </a:tcPr>
+                </a:tc>
+                <a:tc>
+                  <a:txBody>
+                    <a:bodyPr/>
+                    <a:lstStyle/>
+                    <a:p>
+                      <a:pPr indent="0" marL="0">
+                        <a:buNone/>
+                      </a:pPr>
+                      <a:r>
+                        <a:rPr lang="en-US" sz="760" dirty="0">
+                          <a:solidFill>
+                            <a:srgbClr val="5F6368"/>
+                          </a:solidFill>
+                          <a:latin typeface="Roboto" pitchFamily="34" charset="0"/>
+                          <a:ea typeface="Roboto" pitchFamily="34" charset="-122"/>
+                          <a:cs typeface="Roboto" pitchFamily="34" charset="-120"/>
+                        </a:rPr>
+                        <a:t>Trusts client-supplied X-Tenant-Id HTTP header or shared API key in application code</a:t>
+                      </a:r>
+                      <a:endParaRPr lang="en-US" sz="760" dirty="0">
+                        <a:latin typeface="Roboto" charset="0"/>
+                        <a:ea typeface="Roboto" charset="0"/>
+                        <a:cs typeface="Roboto" charset="0"/>
+                      </a:endParaRPr>
+                    </a:p>
+                  </a:txBody>
+                  <a:tcPr marL="91440" marR="91440" marT="45720" marB="45720" anchor="ctr">
+                    <a:lnL w="9525" cap="flat" cmpd="sng" algn="ctr">
+                      <a:solidFill>
+                        <a:srgbClr val="DADCE0"/>
+                      </a:solidFill>
+                      <a:prstDash val="solid"/>
+                      <a:round/>
+                      <a:headEnd type="none" w="med" len="med"/>
+                      <a:tailEnd type="none" w="med" len="med"/>
+                    </a:lnL>
+                    <a:lnR w="9525" cap="flat" cmpd="sng" algn="ctr">
+                      <a:solidFill>
+                        <a:srgbClr val="DADCE0"/>
+                      </a:solidFill>
+                      <a:prstDash val="solid"/>
+                      <a:round/>
+                      <a:headEnd type="none" w="med" len="med"/>
+                      <a:tailEnd type="none" w="med" len="med"/>
+                    </a:lnR>
+                    <a:lnT w="9525" cap="flat" cmpd="sng" algn="ctr">
+                      <a:solidFill>
+                        <a:srgbClr val="DADCE0"/>
+                      </a:solidFill>
+                      <a:prstDash val="solid"/>
+                      <a:round/>
+                      <a:headEnd type="none" w="med" len="med"/>
+                      <a:tailEnd type="none" w="med" len="med"/>
+                    </a:lnT>
+                    <a:lnB w="9525" cap="flat" cmpd="sng" algn="ctr">
+                      <a:solidFill>
+                        <a:srgbClr val="DADCE0"/>
+                      </a:solidFill>
+                      <a:prstDash val="solid"/>
+                      <a:round/>
+                      <a:headEnd type="none" w="med" len="med"/>
+                      <a:tailEnd type="none" w="med" len="med"/>
+                    </a:lnB>
+                    <a:solidFill>
+                      <a:srgbClr val="FFFFFF"/>
+                    </a:solidFill>
+                  </a:tcPr>
+                </a:tc>
+                <a:tc>
+                  <a:txBody>
+                    <a:bodyPr/>
+                    <a:lstStyle/>
+                    <a:p>
+                      <a:pPr indent="0" marL="0">
+                        <a:buNone/>
+                      </a:pPr>
+                      <a:r>
+                        <a:rPr lang="en-US" sz="760" dirty="0">
+                          <a:solidFill>
+                            <a:srgbClr val="5F6368"/>
+                          </a:solidFill>
+                          <a:latin typeface="Roboto" pitchFamily="34" charset="0"/>
+                          <a:ea typeface="Roboto" pitchFamily="34" charset="-122"/>
+                          <a:cs typeface="Roboto" pitchFamily="34" charset="-120"/>
+                        </a:rPr>
+                        <a:t>Cloud Armor strips X-Tenant-Id; IAP + STS mints RFC 8693 OBO &amp; RFC 9449 DPoP context</a:t>
+                      </a:r>
+                      <a:endParaRPr lang="en-US" sz="760" dirty="0">
+                        <a:latin typeface="Roboto" charset="0"/>
+                        <a:ea typeface="Roboto" charset="0"/>
+                        <a:cs typeface="Roboto" charset="0"/>
+                      </a:endParaRPr>
+                    </a:p>
+                  </a:txBody>
+                  <a:tcPr marL="91440" marR="91440" marT="45720" marB="45720" anchor="ctr">
+                    <a:lnL w="9525" cap="flat" cmpd="sng" algn="ctr">
+                      <a:solidFill>
+                        <a:srgbClr val="DADCE0"/>
+                      </a:solidFill>
+                      <a:prstDash val="solid"/>
+                      <a:round/>
+                      <a:headEnd type="none" w="med" len="med"/>
+                      <a:tailEnd type="none" w="med" len="med"/>
+                    </a:lnL>
+                    <a:lnR w="9525" cap="flat" cmpd="sng" algn="ctr">
+                      <a:solidFill>
+                        <a:srgbClr val="DADCE0"/>
+                      </a:solidFill>
+                      <a:prstDash val="solid"/>
+                      <a:round/>
+                      <a:headEnd type="none" w="med" len="med"/>
+                      <a:tailEnd type="none" w="med" len="med"/>
+                    </a:lnR>
+                    <a:lnT w="9525" cap="flat" cmpd="sng" algn="ctr">
+                      <a:solidFill>
+                        <a:srgbClr val="DADCE0"/>
+                      </a:solidFill>
+                      <a:prstDash val="solid"/>
+                      <a:round/>
+                      <a:headEnd type="none" w="med" len="med"/>
+                      <a:tailEnd type="none" w="med" len="med"/>
+                    </a:lnT>
+                    <a:lnB w="9525" cap="flat" cmpd="sng" algn="ctr">
+                      <a:solidFill>
+                        <a:srgbClr val="DADCE0"/>
+                      </a:solidFill>
+                      <a:prstDash val="solid"/>
+                      <a:round/>
+                      <a:headEnd type="none" w="med" len="med"/>
+                      <a:tailEnd type="none" w="med" len="med"/>
+                    </a:lnB>
+                    <a:solidFill>
+                      <a:srgbClr val="FFFFFF"/>
+                    </a:solidFill>
+                  </a:tcPr>
+                </a:tc>
+                <a:tc>
+                  <a:txBody>
+                    <a:bodyPr/>
+                    <a:lstStyle/>
+                    <a:p>
+                      <a:pPr indent="0" marL="0">
+                        <a:buNone/>
+                      </a:pPr>
+                      <a:r>
+                        <a:rPr lang="en-US" sz="760" dirty="0">
+                          <a:solidFill>
+                            <a:srgbClr val="5F6368"/>
+                          </a:solidFill>
+                          <a:latin typeface="Roboto" pitchFamily="34" charset="0"/>
+                          <a:ea typeface="Roboto" pitchFamily="34" charset="-122"/>
+                          <a:cs typeface="Roboto" pitchFamily="34" charset="-120"/>
+                        </a:rPr>
+                        <a:t>BeyondCorp mTLS cert pinning + per-project IAM Principal Access Boundary (PAB)</a:t>
+                      </a:r>
+                      <a:endParaRPr lang="en-US" sz="760" dirty="0">
+                        <a:latin typeface="Roboto" charset="0"/>
+                        <a:ea typeface="Roboto" charset="0"/>
+                        <a:cs typeface="Roboto" charset="0"/>
+                      </a:endParaRPr>
+                    </a:p>
+                  </a:txBody>
+                  <a:tcPr marL="91440" marR="91440" marT="45720" marB="45720" anchor="ctr">
+                    <a:lnL w="9525" cap="flat" cmpd="sng" algn="ctr">
+                      <a:solidFill>
+                        <a:srgbClr val="DADCE0"/>
+                      </a:solidFill>
+                      <a:prstDash val="solid"/>
+                      <a:round/>
+                      <a:headEnd type="none" w="med" len="med"/>
+                      <a:tailEnd type="none" w="med" len="med"/>
+                    </a:lnL>
+                    <a:lnR w="9525" cap="flat" cmpd="sng" algn="ctr">
+                      <a:solidFill>
+                        <a:srgbClr val="DADCE0"/>
+                      </a:solidFill>
+                      <a:prstDash val="solid"/>
+                      <a:round/>
+                      <a:headEnd type="none" w="med" len="med"/>
+                      <a:tailEnd type="none" w="med" len="med"/>
+                    </a:lnR>
+                    <a:lnT w="9525" cap="flat" cmpd="sng" algn="ctr">
+                      <a:solidFill>
+                        <a:srgbClr val="DADCE0"/>
+                      </a:solidFill>
+                      <a:prstDash val="solid"/>
+                      <a:round/>
+                      <a:headEnd type="none" w="med" len="med"/>
+                      <a:tailEnd type="none" w="med" len="med"/>
+                    </a:lnT>
+                    <a:lnB w="9525" cap="flat" cmpd="sng" algn="ctr">
+                      <a:solidFill>
+                        <a:srgbClr val="DADCE0"/>
+                      </a:solidFill>
+                      <a:prstDash val="solid"/>
+                      <a:round/>
+                      <a:headEnd type="none" w="med" len="med"/>
+                      <a:tailEnd type="none" w="med" len="med"/>
+                    </a:lnB>
+                    <a:solidFill>
+                      <a:srgbClr val="FFFFFF"/>
+                    </a:solidFill>
+                  </a:tcPr>
+                </a:tc>
+              </a:tr>
+              <a:tr h="0">
+                <a:tc>
+                  <a:txBody>
+                    <a:bodyPr/>
+                    <a:lstStyle/>
+                    <a:p>
+                      <a:pPr indent="0" marL="0">
+                        <a:buNone/>
+                      </a:pPr>
+                      <a:r>
+                        <a:rPr lang="en-US" sz="780" b="1" dirty="0">
+                          <a:solidFill>
+                            <a:srgbClr val="3C4043"/>
+                          </a:solidFill>
+                          <a:latin typeface="Google Sans" pitchFamily="34" charset="0"/>
+                          <a:ea typeface="Google Sans" pitchFamily="34" charset="-122"/>
+                          <a:cs typeface="Google Sans" pitchFamily="34" charset="-120"/>
+                        </a:rPr>
+                        <a:t>Tool catalog &amp; memory state</a:t>
+                      </a:r>
+                      <a:endParaRPr lang="en-US" sz="780" dirty="0">
+                        <a:latin typeface="Google Sans" charset="0"/>
+                        <a:ea typeface="Google Sans" charset="0"/>
+                        <a:cs typeface="Google Sans" charset="0"/>
+                      </a:endParaRPr>
+                    </a:p>
+                  </a:txBody>
+                  <a:tcPr marL="91440" marR="91440" marT="45720" marB="45720" anchor="ctr">
+                    <a:lnL w="9525" cap="flat" cmpd="sng" algn="ctr">
+                      <a:solidFill>
+                        <a:srgbClr val="DADCE0"/>
+                      </a:solidFill>
+                      <a:prstDash val="solid"/>
+                      <a:round/>
+                      <a:headEnd type="none" w="med" len="med"/>
+                      <a:tailEnd type="none" w="med" len="med"/>
+                    </a:lnL>
+                    <a:lnR w="9525" cap="flat" cmpd="sng" algn="ctr">
+                      <a:solidFill>
+                        <a:srgbClr val="DADCE0"/>
+                      </a:solidFill>
+                      <a:prstDash val="solid"/>
+                      <a:round/>
+                      <a:headEnd type="none" w="med" len="med"/>
+                      <a:tailEnd type="none" w="med" len="med"/>
+                    </a:lnR>
+                    <a:lnT w="9525" cap="flat" cmpd="sng" algn="ctr">
+                      <a:solidFill>
+                        <a:srgbClr val="DADCE0"/>
+                      </a:solidFill>
+                      <a:prstDash val="solid"/>
+                      <a:round/>
+                      <a:headEnd type="none" w="med" len="med"/>
+                      <a:tailEnd type="none" w="med" len="med"/>
+                    </a:lnT>
+                    <a:lnB w="9525" cap="flat" cmpd="sng" algn="ctr">
+                      <a:solidFill>
+                        <a:srgbClr val="DADCE0"/>
+                      </a:solidFill>
+                      <a:prstDash val="solid"/>
+                      <a:round/>
+                      <a:headEnd type="none" w="med" len="med"/>
+                      <a:tailEnd type="none" w="med" len="med"/>
+                    </a:lnB>
+                    <a:solidFill>
+                      <a:srgbClr val="F8F9FA"/>
+                    </a:solidFill>
+                  </a:tcPr>
+                </a:tc>
+                <a:tc>
+                  <a:txBody>
+                    <a:bodyPr/>
+                    <a:lstStyle/>
+                    <a:p>
+                      <a:pPr indent="0" marL="0">
+                        <a:buNone/>
+                      </a:pPr>
+                      <a:r>
+                        <a:rPr lang="en-US" sz="760" dirty="0">
+                          <a:solidFill>
+                            <a:srgbClr val="5F6368"/>
+                          </a:solidFill>
+                          <a:latin typeface="Roboto" pitchFamily="34" charset="0"/>
+                          <a:ea typeface="Roboto" pitchFamily="34" charset="-122"/>
+                          <a:cs typeface="Roboto" pitchFamily="34" charset="-120"/>
+                        </a:rPr>
+                        <a:t>Global MCP tool list &amp; shared vector collection accessible to any prompt</a:t>
+                      </a:r>
+                      <a:endParaRPr lang="en-US" sz="760" dirty="0">
+                        <a:latin typeface="Roboto" charset="0"/>
+                        <a:ea typeface="Roboto" charset="0"/>
+                        <a:cs typeface="Roboto" charset="0"/>
+                      </a:endParaRPr>
+                    </a:p>
+                  </a:txBody>
+                  <a:tcPr marL="91440" marR="91440" marT="45720" marB="45720" anchor="ctr">
+                    <a:lnL w="9525" cap="flat" cmpd="sng" algn="ctr">
+                      <a:solidFill>
+                        <a:srgbClr val="DADCE0"/>
+                      </a:solidFill>
+                      <a:prstDash val="solid"/>
+                      <a:round/>
+                      <a:headEnd type="none" w="med" len="med"/>
+                      <a:tailEnd type="none" w="med" len="med"/>
+                    </a:lnL>
+                    <a:lnR w="9525" cap="flat" cmpd="sng" algn="ctr">
+                      <a:solidFill>
+                        <a:srgbClr val="DADCE0"/>
+                      </a:solidFill>
+                      <a:prstDash val="solid"/>
+                      <a:round/>
+                      <a:headEnd type="none" w="med" len="med"/>
+                      <a:tailEnd type="none" w="med" len="med"/>
+                    </a:lnR>
+                    <a:lnT w="9525" cap="flat" cmpd="sng" algn="ctr">
+                      <a:solidFill>
+                        <a:srgbClr val="DADCE0"/>
+                      </a:solidFill>
+                      <a:prstDash val="solid"/>
+                      <a:round/>
+                      <a:headEnd type="none" w="med" len="med"/>
+                      <a:tailEnd type="none" w="med" len="med"/>
+                    </a:lnT>
+                    <a:lnB w="9525" cap="flat" cmpd="sng" algn="ctr">
+                      <a:solidFill>
+                        <a:srgbClr val="DADCE0"/>
+                      </a:solidFill>
+                      <a:prstDash val="solid"/>
+                      <a:round/>
+                      <a:headEnd type="none" w="med" len="med"/>
+                      <a:tailEnd type="none" w="med" len="med"/>
+                    </a:lnB>
+                    <a:solidFill>
+                      <a:srgbClr val="F8F9FA"/>
+                    </a:solidFill>
+                  </a:tcPr>
+                </a:tc>
+                <a:tc>
+                  <a:txBody>
+                    <a:bodyPr/>
+                    <a:lstStyle/>
+                    <a:p>
+                      <a:pPr indent="0" marL="0">
+                        <a:buNone/>
+                      </a:pPr>
+                      <a:r>
+                        <a:rPr lang="en-US" sz="760" dirty="0">
+                          <a:solidFill>
+                            <a:srgbClr val="5F6368"/>
+                          </a:solidFill>
+                          <a:latin typeface="Roboto" pitchFamily="34" charset="0"/>
+                          <a:ea typeface="Roboto" pitchFamily="34" charset="-122"/>
+                          <a:cs typeface="Roboto" pitchFamily="34" charset="-120"/>
+                        </a:rPr>
+                        <a:t>Hop 2 ARD visibility filter (HTTP 403) + mem://{tenant_id}/L1..L5 namespace isolation</a:t>
+                      </a:r>
+                      <a:endParaRPr lang="en-US" sz="760" dirty="0">
+                        <a:latin typeface="Roboto" charset="0"/>
+                        <a:ea typeface="Roboto" charset="0"/>
+                        <a:cs typeface="Roboto" charset="0"/>
+                      </a:endParaRPr>
+                    </a:p>
+                  </a:txBody>
+                  <a:tcPr marL="91440" marR="91440" marT="45720" marB="45720" anchor="ctr">
+                    <a:lnL w="9525" cap="flat" cmpd="sng" algn="ctr">
+                      <a:solidFill>
+                        <a:srgbClr val="DADCE0"/>
+                      </a:solidFill>
+                      <a:prstDash val="solid"/>
+                      <a:round/>
+                      <a:headEnd type="none" w="med" len="med"/>
+                      <a:tailEnd type="none" w="med" len="med"/>
+                    </a:lnL>
+                    <a:lnR w="9525" cap="flat" cmpd="sng" algn="ctr">
+                      <a:solidFill>
+                        <a:srgbClr val="DADCE0"/>
+                      </a:solidFill>
+                      <a:prstDash val="solid"/>
+                      <a:round/>
+                      <a:headEnd type="none" w="med" len="med"/>
+                      <a:tailEnd type="none" w="med" len="med"/>
+                    </a:lnR>
+                    <a:lnT w="9525" cap="flat" cmpd="sng" algn="ctr">
+                      <a:solidFill>
+                        <a:srgbClr val="DADCE0"/>
+                      </a:solidFill>
+                      <a:prstDash val="solid"/>
+                      <a:round/>
+                      <a:headEnd type="none" w="med" len="med"/>
+                      <a:tailEnd type="none" w="med" len="med"/>
+                    </a:lnT>
+                    <a:lnB w="9525" cap="flat" cmpd="sng" algn="ctr">
+                      <a:solidFill>
+                        <a:srgbClr val="DADCE0"/>
+                      </a:solidFill>
+                      <a:prstDash val="solid"/>
+                      <a:round/>
+                      <a:headEnd type="none" w="med" len="med"/>
+                      <a:tailEnd type="none" w="med" len="med"/>
+                    </a:lnB>
+                    <a:solidFill>
+                      <a:srgbClr val="F8F9FA"/>
+                    </a:solidFill>
+                  </a:tcPr>
+                </a:tc>
+                <a:tc>
+                  <a:txBody>
+                    <a:bodyPr/>
+                    <a:lstStyle/>
+                    <a:p>
+                      <a:pPr indent="0" marL="0">
+                        <a:buNone/>
+                      </a:pPr>
+                      <a:r>
+                        <a:rPr lang="en-US" sz="760" dirty="0">
+                          <a:solidFill>
+                            <a:srgbClr val="5F6368"/>
+                          </a:solidFill>
+                          <a:latin typeface="Roboto" pitchFamily="34" charset="0"/>
+                          <a:ea typeface="Roboto" pitchFamily="34" charset="-122"/>
+                          <a:cs typeface="Roboto" pitchFamily="34" charset="-120"/>
+                        </a:rPr>
+                        <a:t>Physical per-project Agent Engine Registry &amp; CMEK-encrypted Memory Bank</a:t>
+                      </a:r>
+                      <a:endParaRPr lang="en-US" sz="760" dirty="0">
+                        <a:latin typeface="Roboto" charset="0"/>
+                        <a:ea typeface="Roboto" charset="0"/>
+                        <a:cs typeface="Roboto" charset="0"/>
+                      </a:endParaRPr>
+                    </a:p>
+                  </a:txBody>
+                  <a:tcPr marL="91440" marR="91440" marT="45720" marB="45720" anchor="ctr">
+                    <a:lnL w="9525" cap="flat" cmpd="sng" algn="ctr">
+                      <a:solidFill>
+                        <a:srgbClr val="DADCE0"/>
+                      </a:solidFill>
+                      <a:prstDash val="solid"/>
+                      <a:round/>
+                      <a:headEnd type="none" w="med" len="med"/>
+                      <a:tailEnd type="none" w="med" len="med"/>
+                    </a:lnL>
+                    <a:lnR w="9525" cap="flat" cmpd="sng" algn="ctr">
+                      <a:solidFill>
+                        <a:srgbClr val="DADCE0"/>
+                      </a:solidFill>
+                      <a:prstDash val="solid"/>
+                      <a:round/>
+                      <a:headEnd type="none" w="med" len="med"/>
+                      <a:tailEnd type="none" w="med" len="med"/>
+                    </a:lnR>
+                    <a:lnT w="9525" cap="flat" cmpd="sng" algn="ctr">
+                      <a:solidFill>
+                        <a:srgbClr val="DADCE0"/>
+                      </a:solidFill>
+                      <a:prstDash val="solid"/>
+                      <a:round/>
+                      <a:headEnd type="none" w="med" len="med"/>
+                      <a:tailEnd type="none" w="med" len="med"/>
+                    </a:lnT>
+                    <a:lnB w="9525" cap="flat" cmpd="sng" algn="ctr">
+                      <a:solidFill>
+                        <a:srgbClr val="DADCE0"/>
+                      </a:solidFill>
+                      <a:prstDash val="solid"/>
+                      <a:round/>
+                      <a:headEnd type="none" w="med" len="med"/>
+                      <a:tailEnd type="none" w="med" len="med"/>
+                    </a:lnB>
+                    <a:solidFill>
+                      <a:srgbClr val="F8F9FA"/>
+                    </a:solidFill>
+                  </a:tcPr>
+                </a:tc>
+              </a:tr>
+              <a:tr h="0">
+                <a:tc>
+                  <a:txBody>
+                    <a:bodyPr/>
+                    <a:lstStyle/>
+                    <a:p>
+                      <a:pPr indent="0" marL="0">
+                        <a:buNone/>
+                      </a:pPr>
+                      <a:r>
+                        <a:rPr lang="en-US" sz="780" b="1" dirty="0">
+                          <a:solidFill>
+                            <a:srgbClr val="3C4043"/>
+                          </a:solidFill>
+                          <a:latin typeface="Google Sans" pitchFamily="34" charset="0"/>
+                          <a:ea typeface="Google Sans" pitchFamily="34" charset="-122"/>
+                          <a:cs typeface="Google Sans" pitchFamily="34" charset="-120"/>
+                        </a:rPr>
+                        <a:t>Rate limits &amp; reasoning quotas</a:t>
+                      </a:r>
+                      <a:endParaRPr lang="en-US" sz="780" dirty="0">
+                        <a:latin typeface="Google Sans" charset="0"/>
+                        <a:ea typeface="Google Sans" charset="0"/>
+                        <a:cs typeface="Google Sans" charset="0"/>
+                      </a:endParaRPr>
+                    </a:p>
+                  </a:txBody>
+                  <a:tcPr marL="91440" marR="91440" marT="45720" marB="45720" anchor="ctr">
+                    <a:lnL w="9525" cap="flat" cmpd="sng" algn="ctr">
+                      <a:solidFill>
+                        <a:srgbClr val="DADCE0"/>
+                      </a:solidFill>
+                      <a:prstDash val="solid"/>
+                      <a:round/>
+                      <a:headEnd type="none" w="med" len="med"/>
+                      <a:tailEnd type="none" w="med" len="med"/>
+                    </a:lnL>
+                    <a:lnR w="9525" cap="flat" cmpd="sng" algn="ctr">
+                      <a:solidFill>
+                        <a:srgbClr val="DADCE0"/>
+                      </a:solidFill>
+                      <a:prstDash val="solid"/>
+                      <a:round/>
+                      <a:headEnd type="none" w="med" len="med"/>
+                      <a:tailEnd type="none" w="med" len="med"/>
+                    </a:lnR>
+                    <a:lnT w="9525" cap="flat" cmpd="sng" algn="ctr">
+                      <a:solidFill>
+                        <a:srgbClr val="DADCE0"/>
+                      </a:solidFill>
+                      <a:prstDash val="solid"/>
+                      <a:round/>
+                      <a:headEnd type="none" w="med" len="med"/>
+                      <a:tailEnd type="none" w="med" len="med"/>
+                    </a:lnT>
+                    <a:lnB w="9525" cap="flat" cmpd="sng" algn="ctr">
+                      <a:solidFill>
+                        <a:srgbClr val="DADCE0"/>
+                      </a:solidFill>
+                      <a:prstDash val="solid"/>
+                      <a:round/>
+                      <a:headEnd type="none" w="med" len="med"/>
+                      <a:tailEnd type="none" w="med" len="med"/>
+                    </a:lnB>
+                    <a:solidFill>
+                      <a:srgbClr val="FFFFFF"/>
+                    </a:solidFill>
+                  </a:tcPr>
+                </a:tc>
+                <a:tc>
+                  <a:txBody>
+                    <a:bodyPr/>
+                    <a:lstStyle/>
+                    <a:p>
+                      <a:pPr indent="0" marL="0">
+                        <a:buNone/>
+                      </a:pPr>
+                      <a:r>
+                        <a:rPr lang="en-US" sz="760" dirty="0">
+                          <a:solidFill>
+                            <a:srgbClr val="5F6368"/>
+                          </a:solidFill>
+                          <a:latin typeface="Roboto" pitchFamily="34" charset="0"/>
+                          <a:ea typeface="Roboto" pitchFamily="34" charset="-122"/>
+                          <a:cs typeface="Roboto" pitchFamily="34" charset="-120"/>
+                        </a:rPr>
+                        <a:t>Regional Vertex AI RPM/TPM shared first-come, first-served (noisy-neighbor outages)</a:t>
+                      </a:r>
+                      <a:endParaRPr lang="en-US" sz="760" dirty="0">
+                        <a:latin typeface="Roboto" charset="0"/>
+                        <a:ea typeface="Roboto" charset="0"/>
+                        <a:cs typeface="Roboto" charset="0"/>
+                      </a:endParaRPr>
+                    </a:p>
+                  </a:txBody>
+                  <a:tcPr marL="91440" marR="91440" marT="45720" marB="45720" anchor="ctr">
+                    <a:lnL w="9525" cap="flat" cmpd="sng" algn="ctr">
+                      <a:solidFill>
+                        <a:srgbClr val="DADCE0"/>
+                      </a:solidFill>
+                      <a:prstDash val="solid"/>
+                      <a:round/>
+                      <a:headEnd type="none" w="med" len="med"/>
+                      <a:tailEnd type="none" w="med" len="med"/>
+                    </a:lnL>
+                    <a:lnR w="9525" cap="flat" cmpd="sng" algn="ctr">
+                      <a:solidFill>
+                        <a:srgbClr val="DADCE0"/>
+                      </a:solidFill>
+                      <a:prstDash val="solid"/>
+                      <a:round/>
+                      <a:headEnd type="none" w="med" len="med"/>
+                      <a:tailEnd type="none" w="med" len="med"/>
+                    </a:lnR>
+                    <a:lnT w="9525" cap="flat" cmpd="sng" algn="ctr">
+                      <a:solidFill>
+                        <a:srgbClr val="DADCE0"/>
+                      </a:solidFill>
+                      <a:prstDash val="solid"/>
+                      <a:round/>
+                      <a:headEnd type="none" w="med" len="med"/>
+                      <a:tailEnd type="none" w="med" len="med"/>
+                    </a:lnT>
+                    <a:lnB w="9525" cap="flat" cmpd="sng" algn="ctr">
+                      <a:solidFill>
+                        <a:srgbClr val="DADCE0"/>
+                      </a:solidFill>
+                      <a:prstDash val="solid"/>
+                      <a:round/>
+                      <a:headEnd type="none" w="med" len="med"/>
+                      <a:tailEnd type="none" w="med" len="med"/>
+                    </a:lnB>
+                    <a:solidFill>
+                      <a:srgbClr val="FFFFFF"/>
+                    </a:solidFill>
+                  </a:tcPr>
+                </a:tc>
+                <a:tc>
+                  <a:txBody>
+                    <a:bodyPr/>
+                    <a:lstStyle/>
+                    <a:p>
+                      <a:pPr indent="0" marL="0">
+                        <a:buNone/>
+                      </a:pPr>
+                      <a:r>
+                        <a:rPr lang="en-US" sz="760" dirty="0">
+                          <a:solidFill>
+                            <a:srgbClr val="5F6368"/>
+                          </a:solidFill>
+                          <a:latin typeface="Roboto" pitchFamily="34" charset="0"/>
+                          <a:ea typeface="Roboto" pitchFamily="34" charset="-122"/>
+                          <a:cs typeface="Roboto" pitchFamily="34" charset="-120"/>
+                        </a:rPr>
+                        <a:t>Memorystore for Valkey RPM buckets (120/600 RPM, HTTP 429) + 4k/8k thinking clamps</a:t>
+                      </a:r>
+                      <a:endParaRPr lang="en-US" sz="760" dirty="0">
+                        <a:latin typeface="Roboto" charset="0"/>
+                        <a:ea typeface="Roboto" charset="0"/>
+                        <a:cs typeface="Roboto" charset="0"/>
+                      </a:endParaRPr>
+                    </a:p>
+                  </a:txBody>
+                  <a:tcPr marL="91440" marR="91440" marT="45720" marB="45720" anchor="ctr">
+                    <a:lnL w="9525" cap="flat" cmpd="sng" algn="ctr">
+                      <a:solidFill>
+                        <a:srgbClr val="DADCE0"/>
+                      </a:solidFill>
+                      <a:prstDash val="solid"/>
+                      <a:round/>
+                      <a:headEnd type="none" w="med" len="med"/>
+                      <a:tailEnd type="none" w="med" len="med"/>
+                    </a:lnL>
+                    <a:lnR w="9525" cap="flat" cmpd="sng" algn="ctr">
+                      <a:solidFill>
+                        <a:srgbClr val="DADCE0"/>
+                      </a:solidFill>
+                      <a:prstDash val="solid"/>
+                      <a:round/>
+                      <a:headEnd type="none" w="med" len="med"/>
+                      <a:tailEnd type="none" w="med" len="med"/>
+                    </a:lnR>
+                    <a:lnT w="9525" cap="flat" cmpd="sng" algn="ctr">
+                      <a:solidFill>
+                        <a:srgbClr val="DADCE0"/>
+                      </a:solidFill>
+                      <a:prstDash val="solid"/>
+                      <a:round/>
+                      <a:headEnd type="none" w="med" len="med"/>
+                      <a:tailEnd type="none" w="med" len="med"/>
+                    </a:lnT>
+                    <a:lnB w="9525" cap="flat" cmpd="sng" algn="ctr">
+                      <a:solidFill>
+                        <a:srgbClr val="DADCE0"/>
+                      </a:solidFill>
+                      <a:prstDash val="solid"/>
+                      <a:round/>
+                      <a:headEnd type="none" w="med" len="med"/>
+                      <a:tailEnd type="none" w="med" len="med"/>
+                    </a:lnB>
+                    <a:solidFill>
+                      <a:srgbClr val="FFFFFF"/>
+                    </a:solidFill>
+                  </a:tcPr>
+                </a:tc>
+                <a:tc>
+                  <a:txBody>
+                    <a:bodyPr/>
+                    <a:lstStyle/>
+                    <a:p>
+                      <a:pPr indent="0" marL="0">
+                        <a:buNone/>
+                      </a:pPr>
+                      <a:r>
+                        <a:rPr lang="en-US" sz="760" dirty="0">
+                          <a:solidFill>
+                            <a:srgbClr val="5F6368"/>
+                          </a:solidFill>
+                          <a:latin typeface="Roboto" pitchFamily="34" charset="0"/>
+                          <a:ea typeface="Roboto" pitchFamily="34" charset="-122"/>
+                          <a:cs typeface="Roboto" pitchFamily="34" charset="-120"/>
+                        </a:rPr>
+                        <a:t>Dedicated GCP project quota &amp; dedicated Provisioned Throughput / GKE GPUs</a:t>
+                      </a:r>
+                      <a:endParaRPr lang="en-US" sz="760" dirty="0">
+                        <a:latin typeface="Roboto" charset="0"/>
+                        <a:ea typeface="Roboto" charset="0"/>
+                        <a:cs typeface="Roboto" charset="0"/>
+                      </a:endParaRPr>
+                    </a:p>
+                  </a:txBody>
+                  <a:tcPr marL="91440" marR="91440" marT="45720" marB="45720" anchor="ctr">
+                    <a:lnL w="9525" cap="flat" cmpd="sng" algn="ctr">
+                      <a:solidFill>
+                        <a:srgbClr val="DADCE0"/>
+                      </a:solidFill>
+                      <a:prstDash val="solid"/>
+                      <a:round/>
+                      <a:headEnd type="none" w="med" len="med"/>
+                      <a:tailEnd type="none" w="med" len="med"/>
+                    </a:lnL>
+                    <a:lnR w="9525" cap="flat" cmpd="sng" algn="ctr">
+                      <a:solidFill>
+                        <a:srgbClr val="DADCE0"/>
+                      </a:solidFill>
+                      <a:prstDash val="solid"/>
+                      <a:round/>
+                      <a:headEnd type="none" w="med" len="med"/>
+                      <a:tailEnd type="none" w="med" len="med"/>
+                    </a:lnR>
+                    <a:lnT w="9525" cap="flat" cmpd="sng" algn="ctr">
+                      <a:solidFill>
+                        <a:srgbClr val="DADCE0"/>
+                      </a:solidFill>
+                      <a:prstDash val="solid"/>
+                      <a:round/>
+                      <a:headEnd type="none" w="med" len="med"/>
+                      <a:tailEnd type="none" w="med" len="med"/>
+                    </a:lnT>
+                    <a:lnB w="9525" cap="flat" cmpd="sng" algn="ctr">
+                      <a:solidFill>
+                        <a:srgbClr val="DADCE0"/>
+                      </a:solidFill>
+                      <a:prstDash val="solid"/>
+                      <a:round/>
+                      <a:headEnd type="none" w="med" len="med"/>
+                      <a:tailEnd type="none" w="med" len="med"/>
+                    </a:lnB>
+                    <a:solidFill>
+                      <a:srgbClr val="FFFFFF"/>
+                    </a:solidFill>
+                  </a:tcPr>
+                </a:tc>
+              </a:tr>
+              <a:tr h="0">
+                <a:tc>
+                  <a:txBody>
+                    <a:bodyPr/>
+                    <a:lstStyle/>
+                    <a:p>
+                      <a:pPr indent="0" marL="0">
+                        <a:buNone/>
+                      </a:pPr>
+                      <a:r>
+                        <a:rPr lang="en-US" sz="780" b="1" dirty="0">
+                          <a:solidFill>
+                            <a:srgbClr val="3C4043"/>
+                          </a:solidFill>
+                          <a:latin typeface="Google Sans" pitchFamily="34" charset="0"/>
+                          <a:ea typeface="Google Sans" pitchFamily="34" charset="-122"/>
+                          <a:cs typeface="Google Sans" pitchFamily="34" charset="-120"/>
+                        </a:rPr>
+                        <a:t>Prompt caching &amp; FinOps COGS</a:t>
+                      </a:r>
+                      <a:endParaRPr lang="en-US" sz="780" dirty="0">
+                        <a:latin typeface="Google Sans" charset="0"/>
+                        <a:ea typeface="Google Sans" charset="0"/>
+                        <a:cs typeface="Google Sans" charset="0"/>
+                      </a:endParaRPr>
+                    </a:p>
+                  </a:txBody>
+                  <a:tcPr marL="91440" marR="91440" marT="45720" marB="45720" anchor="ctr">
+                    <a:lnL w="9525" cap="flat" cmpd="sng" algn="ctr">
+                      <a:solidFill>
+                        <a:srgbClr val="DADCE0"/>
+                      </a:solidFill>
+                      <a:prstDash val="solid"/>
+                      <a:round/>
+                      <a:headEnd type="none" w="med" len="med"/>
+                      <a:tailEnd type="none" w="med" len="med"/>
+                    </a:lnL>
+                    <a:lnR w="9525" cap="flat" cmpd="sng" algn="ctr">
+                      <a:solidFill>
+                        <a:srgbClr val="DADCE0"/>
+                      </a:solidFill>
+                      <a:prstDash val="solid"/>
+                      <a:round/>
+                      <a:headEnd type="none" w="med" len="med"/>
+                      <a:tailEnd type="none" w="med" len="med"/>
+                    </a:lnR>
+                    <a:lnT w="9525" cap="flat" cmpd="sng" algn="ctr">
+                      <a:solidFill>
+                        <a:srgbClr val="DADCE0"/>
+                      </a:solidFill>
+                      <a:prstDash val="solid"/>
+                      <a:round/>
+                      <a:headEnd type="none" w="med" len="med"/>
+                      <a:tailEnd type="none" w="med" len="med"/>
+                    </a:lnT>
+                    <a:lnB w="9525" cap="flat" cmpd="sng" algn="ctr">
+                      <a:solidFill>
+                        <a:srgbClr val="DADCE0"/>
+                      </a:solidFill>
+                      <a:prstDash val="solid"/>
+                      <a:round/>
+                      <a:headEnd type="none" w="med" len="med"/>
+                      <a:tailEnd type="none" w="med" len="med"/>
+                    </a:lnB>
+                    <a:solidFill>
+                      <a:srgbClr val="F8F9FA"/>
+                    </a:solidFill>
+                  </a:tcPr>
+                </a:tc>
+                <a:tc>
+                  <a:txBody>
+                    <a:bodyPr/>
+                    <a:lstStyle/>
+                    <a:p>
+                      <a:pPr indent="0" marL="0">
+                        <a:buNone/>
+                      </a:pPr>
+                      <a:r>
+                        <a:rPr lang="en-US" sz="760" dirty="0">
+                          <a:solidFill>
+                            <a:srgbClr val="5F6368"/>
+                          </a:solidFill>
+                          <a:latin typeface="Roboto" pitchFamily="34" charset="0"/>
+                          <a:ea typeface="Roboto" pitchFamily="34" charset="-122"/>
+                          <a:cs typeface="Roboto" pitchFamily="34" charset="-120"/>
+                        </a:rPr>
+                        <a:t>34k prompt billed in full every turn ($0.0425/turn) or unsafe cross-tenant cache bleed</a:t>
+                      </a:r>
+                      <a:endParaRPr lang="en-US" sz="760" dirty="0">
+                        <a:latin typeface="Roboto" charset="0"/>
+                        <a:ea typeface="Roboto" charset="0"/>
+                        <a:cs typeface="Roboto" charset="0"/>
+                      </a:endParaRPr>
+                    </a:p>
+                  </a:txBody>
+                  <a:tcPr marL="91440" marR="91440" marT="45720" marB="45720" anchor="ctr">
+                    <a:lnL w="9525" cap="flat" cmpd="sng" algn="ctr">
+                      <a:solidFill>
+                        <a:srgbClr val="DADCE0"/>
+                      </a:solidFill>
+                      <a:prstDash val="solid"/>
+                      <a:round/>
+                      <a:headEnd type="none" w="med" len="med"/>
+                      <a:tailEnd type="none" w="med" len="med"/>
+                    </a:lnL>
+                    <a:lnR w="9525" cap="flat" cmpd="sng" algn="ctr">
+                      <a:solidFill>
+                        <a:srgbClr val="DADCE0"/>
+                      </a:solidFill>
+                      <a:prstDash val="solid"/>
+                      <a:round/>
+                      <a:headEnd type="none" w="med" len="med"/>
+                      <a:tailEnd type="none" w="med" len="med"/>
+                    </a:lnR>
+                    <a:lnT w="9525" cap="flat" cmpd="sng" algn="ctr">
+                      <a:solidFill>
+                        <a:srgbClr val="DADCE0"/>
+                      </a:solidFill>
+                      <a:prstDash val="solid"/>
+                      <a:round/>
+                      <a:headEnd type="none" w="med" len="med"/>
+                      <a:tailEnd type="none" w="med" len="med"/>
+                    </a:lnT>
+                    <a:lnB w="9525" cap="flat" cmpd="sng" algn="ctr">
+                      <a:solidFill>
+                        <a:srgbClr val="DADCE0"/>
+                      </a:solidFill>
+                      <a:prstDash val="solid"/>
+                      <a:round/>
+                      <a:headEnd type="none" w="med" len="med"/>
+                      <a:tailEnd type="none" w="med" len="med"/>
+                    </a:lnB>
+                    <a:solidFill>
+                      <a:srgbClr val="F8F9FA"/>
+                    </a:solidFill>
+                  </a:tcPr>
+                </a:tc>
+                <a:tc>
+                  <a:txBody>
+                    <a:bodyPr/>
+                    <a:lstStyle/>
+                    <a:p>
+                      <a:pPr indent="0" marL="0">
+                        <a:buNone/>
+                      </a:pPr>
+                      <a:r>
+                        <a:rPr lang="en-US" sz="760" dirty="0">
+                          <a:solidFill>
+                            <a:srgbClr val="5F6368"/>
+                          </a:solidFill>
+                          <a:latin typeface="Roboto" pitchFamily="34" charset="0"/>
+                          <a:ea typeface="Roboto" pitchFamily="34" charset="-122"/>
+                          <a:cs typeface="Roboto" pitchFamily="34" charset="-120"/>
+                        </a:rPr>
+                        <a:t>32k immutable prefix in Gemini 2.5 Pro ContextCacheConfig (90% discount -&gt; 84.7% savings)</a:t>
+                      </a:r>
+                      <a:endParaRPr lang="en-US" sz="760" dirty="0">
+                        <a:latin typeface="Roboto" charset="0"/>
+                        <a:ea typeface="Roboto" charset="0"/>
+                        <a:cs typeface="Roboto" charset="0"/>
+                      </a:endParaRPr>
+                    </a:p>
+                  </a:txBody>
+                  <a:tcPr marL="91440" marR="91440" marT="45720" marB="45720" anchor="ctr">
+                    <a:lnL w="9525" cap="flat" cmpd="sng" algn="ctr">
+                      <a:solidFill>
+                        <a:srgbClr val="DADCE0"/>
+                      </a:solidFill>
+                      <a:prstDash val="solid"/>
+                      <a:round/>
+                      <a:headEnd type="none" w="med" len="med"/>
+                      <a:tailEnd type="none" w="med" len="med"/>
+                    </a:lnL>
+                    <a:lnR w="9525" cap="flat" cmpd="sng" algn="ctr">
+                      <a:solidFill>
+                        <a:srgbClr val="DADCE0"/>
+                      </a:solidFill>
+                      <a:prstDash val="solid"/>
+                      <a:round/>
+                      <a:headEnd type="none" w="med" len="med"/>
+                      <a:tailEnd type="none" w="med" len="med"/>
+                    </a:lnR>
+                    <a:lnT w="9525" cap="flat" cmpd="sng" algn="ctr">
+                      <a:solidFill>
+                        <a:srgbClr val="DADCE0"/>
+                      </a:solidFill>
+                      <a:prstDash val="solid"/>
+                      <a:round/>
+                      <a:headEnd type="none" w="med" len="med"/>
+                      <a:tailEnd type="none" w="med" len="med"/>
+                    </a:lnT>
+                    <a:lnB w="9525" cap="flat" cmpd="sng" algn="ctr">
+                      <a:solidFill>
+                        <a:srgbClr val="DADCE0"/>
+                      </a:solidFill>
+                      <a:prstDash val="solid"/>
+                      <a:round/>
+                      <a:headEnd type="none" w="med" len="med"/>
+                      <a:tailEnd type="none" w="med" len="med"/>
+                    </a:lnB>
+                    <a:solidFill>
+                      <a:srgbClr val="F8F9FA"/>
+                    </a:solidFill>
+                  </a:tcPr>
+                </a:tc>
+                <a:tc>
+                  <a:txBody>
+                    <a:bodyPr/>
+                    <a:lstStyle/>
+                    <a:p>
+                      <a:pPr indent="0" marL="0">
+                        <a:buNone/>
+                      </a:pPr>
+                      <a:r>
+                        <a:rPr lang="en-US" sz="760" dirty="0">
+                          <a:solidFill>
+                            <a:srgbClr val="5F6368"/>
+                          </a:solidFill>
+                          <a:latin typeface="Roboto" pitchFamily="34" charset="0"/>
+                          <a:ea typeface="Roboto" pitchFamily="34" charset="-122"/>
+                          <a:cs typeface="Roboto" pitchFamily="34" charset="-120"/>
+                        </a:rPr>
+                        <a:t>Per-silo prefix cache or dedicated air-gapped GKE Gemma 3 (27B) node pool</a:t>
+                      </a:r>
+                      <a:endParaRPr lang="en-US" sz="760" dirty="0">
+                        <a:latin typeface="Roboto" charset="0"/>
+                        <a:ea typeface="Roboto" charset="0"/>
+                        <a:cs typeface="Roboto" charset="0"/>
+                      </a:endParaRPr>
+                    </a:p>
+                  </a:txBody>
+                  <a:tcPr marL="91440" marR="91440" marT="45720" marB="45720" anchor="ctr">
+                    <a:lnL w="9525" cap="flat" cmpd="sng" algn="ctr">
+                      <a:solidFill>
+                        <a:srgbClr val="DADCE0"/>
+                      </a:solidFill>
+                      <a:prstDash val="solid"/>
+                      <a:round/>
+                      <a:headEnd type="none" w="med" len="med"/>
+                      <a:tailEnd type="none" w="med" len="med"/>
+                    </a:lnL>
+                    <a:lnR w="9525" cap="flat" cmpd="sng" algn="ctr">
+                      <a:solidFill>
+                        <a:srgbClr val="DADCE0"/>
+                      </a:solidFill>
+                      <a:prstDash val="solid"/>
+                      <a:round/>
+                      <a:headEnd type="none" w="med" len="med"/>
+                      <a:tailEnd type="none" w="med" len="med"/>
+                    </a:lnR>
+                    <a:lnT w="9525" cap="flat" cmpd="sng" algn="ctr">
+                      <a:solidFill>
+                        <a:srgbClr val="DADCE0"/>
+                      </a:solidFill>
+                      <a:prstDash val="solid"/>
+                      <a:round/>
+                      <a:headEnd type="none" w="med" len="med"/>
+                      <a:tailEnd type="none" w="med" len="med"/>
+                    </a:lnT>
+                    <a:lnB w="9525" cap="flat" cmpd="sng" algn="ctr">
+                      <a:solidFill>
+                        <a:srgbClr val="DADCE0"/>
+                      </a:solidFill>
+                      <a:prstDash val="solid"/>
+                      <a:round/>
+                      <a:headEnd type="none" w="med" len="med"/>
+                      <a:tailEnd type="none" w="med" len="med"/>
+                    </a:lnB>
+                    <a:solidFill>
+                      <a:srgbClr val="F8F9FA"/>
+                    </a:solidFill>
+                  </a:tcPr>
+                </a:tc>
+              </a:tr>
+              <a:tr h="0">
+                <a:tc>
+                  <a:txBody>
+                    <a:bodyPr/>
+                    <a:lstStyle/>
+                    <a:p>
+                      <a:pPr indent="0" marL="0">
+                        <a:buNone/>
+                      </a:pPr>
+                      <a:r>
+                        <a:rPr lang="en-US" sz="780" b="1" dirty="0">
+                          <a:solidFill>
+                            <a:srgbClr val="3C4043"/>
+                          </a:solidFill>
+                          <a:latin typeface="Google Sans" pitchFamily="34" charset="0"/>
+                          <a:ea typeface="Google Sans" pitchFamily="34" charset="-122"/>
+                          <a:cs typeface="Google Sans" pitchFamily="34" charset="-120"/>
+                        </a:rPr>
+                        <a:t>Relational data &amp; PII guardrails</a:t>
+                      </a:r>
+                      <a:endParaRPr lang="en-US" sz="780" dirty="0">
+                        <a:latin typeface="Google Sans" charset="0"/>
+                        <a:ea typeface="Google Sans" charset="0"/>
+                        <a:cs typeface="Google Sans" charset="0"/>
+                      </a:endParaRPr>
+                    </a:p>
+                  </a:txBody>
+                  <a:tcPr marL="91440" marR="91440" marT="45720" marB="45720" anchor="ctr">
+                    <a:lnL w="9525" cap="flat" cmpd="sng" algn="ctr">
+                      <a:solidFill>
+                        <a:srgbClr val="DADCE0"/>
+                      </a:solidFill>
+                      <a:prstDash val="solid"/>
+                      <a:round/>
+                      <a:headEnd type="none" w="med" len="med"/>
+                      <a:tailEnd type="none" w="med" len="med"/>
+                    </a:lnL>
+                    <a:lnR w="9525" cap="flat" cmpd="sng" algn="ctr">
+                      <a:solidFill>
+                        <a:srgbClr val="DADCE0"/>
+                      </a:solidFill>
+                      <a:prstDash val="solid"/>
+                      <a:round/>
+                      <a:headEnd type="none" w="med" len="med"/>
+                      <a:tailEnd type="none" w="med" len="med"/>
+                    </a:lnR>
+                    <a:lnT w="9525" cap="flat" cmpd="sng" algn="ctr">
+                      <a:solidFill>
+                        <a:srgbClr val="DADCE0"/>
+                      </a:solidFill>
+                      <a:prstDash val="solid"/>
+                      <a:round/>
+                      <a:headEnd type="none" w="med" len="med"/>
+                      <a:tailEnd type="none" w="med" len="med"/>
+                    </a:lnT>
+                    <a:lnB w="9525" cap="flat" cmpd="sng" algn="ctr">
+                      <a:solidFill>
+                        <a:srgbClr val="DADCE0"/>
+                      </a:solidFill>
+                      <a:prstDash val="solid"/>
+                      <a:round/>
+                      <a:headEnd type="none" w="med" len="med"/>
+                      <a:tailEnd type="none" w="med" len="med"/>
+                    </a:lnB>
+                    <a:solidFill>
+                      <a:srgbClr val="FFFFFF"/>
+                    </a:solidFill>
+                  </a:tcPr>
+                </a:tc>
+                <a:tc>
+                  <a:txBody>
+                    <a:bodyPr/>
+                    <a:lstStyle/>
+                    <a:p>
+                      <a:pPr indent="0" marL="0">
+                        <a:buNone/>
+                      </a:pPr>
+                      <a:r>
+                        <a:rPr lang="en-US" sz="760" dirty="0">
+                          <a:solidFill>
+                            <a:srgbClr val="5F6368"/>
+                          </a:solidFill>
+                          <a:latin typeface="Roboto" pitchFamily="34" charset="0"/>
+                          <a:ea typeface="Roboto" pitchFamily="34" charset="-122"/>
+                          <a:cs typeface="Roboto" pitchFamily="34" charset="-120"/>
+                        </a:rPr>
+                        <a:t>Application-layer WHERE tenant_id = ? query (vulnerable to SQLi &amp; prompt injection)</a:t>
+                      </a:r>
+                      <a:endParaRPr lang="en-US" sz="760" dirty="0">
+                        <a:latin typeface="Roboto" charset="0"/>
+                        <a:ea typeface="Roboto" charset="0"/>
+                        <a:cs typeface="Roboto" charset="0"/>
+                      </a:endParaRPr>
+                    </a:p>
+                  </a:txBody>
+                  <a:tcPr marL="91440" marR="91440" marT="45720" marB="45720" anchor="ctr">
+                    <a:lnL w="9525" cap="flat" cmpd="sng" algn="ctr">
+                      <a:solidFill>
+                        <a:srgbClr val="DADCE0"/>
+                      </a:solidFill>
+                      <a:prstDash val="solid"/>
+                      <a:round/>
+                      <a:headEnd type="none" w="med" len="med"/>
+                      <a:tailEnd type="none" w="med" len="med"/>
+                    </a:lnL>
+                    <a:lnR w="9525" cap="flat" cmpd="sng" algn="ctr">
+                      <a:solidFill>
+                        <a:srgbClr val="DADCE0"/>
+                      </a:solidFill>
+                      <a:prstDash val="solid"/>
+                      <a:round/>
+                      <a:headEnd type="none" w="med" len="med"/>
+                      <a:tailEnd type="none" w="med" len="med"/>
+                    </a:lnR>
+                    <a:lnT w="9525" cap="flat" cmpd="sng" algn="ctr">
+                      <a:solidFill>
+                        <a:srgbClr val="DADCE0"/>
+                      </a:solidFill>
+                      <a:prstDash val="solid"/>
+                      <a:round/>
+                      <a:headEnd type="none" w="med" len="med"/>
+                      <a:tailEnd type="none" w="med" len="med"/>
+                    </a:lnT>
+                    <a:lnB w="9525" cap="flat" cmpd="sng" algn="ctr">
+                      <a:solidFill>
+                        <a:srgbClr val="DADCE0"/>
+                      </a:solidFill>
+                      <a:prstDash val="solid"/>
+                      <a:round/>
+                      <a:headEnd type="none" w="med" len="med"/>
+                      <a:tailEnd type="none" w="med" len="med"/>
+                    </a:lnB>
+                    <a:solidFill>
+                      <a:srgbClr val="FFFFFF"/>
+                    </a:solidFill>
+                  </a:tcPr>
+                </a:tc>
+                <a:tc>
+                  <a:txBody>
+                    <a:bodyPr/>
+                    <a:lstStyle/>
+                    <a:p>
+                      <a:pPr indent="0" marL="0">
+                        <a:buNone/>
+                      </a:pPr>
+                      <a:r>
+                        <a:rPr lang="en-US" sz="760" dirty="0">
+                          <a:solidFill>
+                            <a:srgbClr val="5F6368"/>
+                          </a:solidFill>
+                          <a:latin typeface="Roboto" pitchFamily="34" charset="0"/>
+                          <a:ea typeface="Roboto" pitchFamily="34" charset="-122"/>
+                          <a:cs typeface="Roboto" pitchFamily="34" charset="-120"/>
+                        </a:rPr>
+                        <a:t>AlloyDB FORCE ROW LEVEL SECURITY (SET LOCAL) + Model Armor (400/422) &amp; Cloud DLP</a:t>
+                      </a:r>
+                      <a:endParaRPr lang="en-US" sz="760" dirty="0">
+                        <a:latin typeface="Roboto" charset="0"/>
+                        <a:ea typeface="Roboto" charset="0"/>
+                        <a:cs typeface="Roboto" charset="0"/>
+                      </a:endParaRPr>
+                    </a:p>
+                  </a:txBody>
+                  <a:tcPr marL="91440" marR="91440" marT="45720" marB="45720" anchor="ctr">
+                    <a:lnL w="9525" cap="flat" cmpd="sng" algn="ctr">
+                      <a:solidFill>
+                        <a:srgbClr val="DADCE0"/>
+                      </a:solidFill>
+                      <a:prstDash val="solid"/>
+                      <a:round/>
+                      <a:headEnd type="none" w="med" len="med"/>
+                      <a:tailEnd type="none" w="med" len="med"/>
+                    </a:lnL>
+                    <a:lnR w="9525" cap="flat" cmpd="sng" algn="ctr">
+                      <a:solidFill>
+                        <a:srgbClr val="DADCE0"/>
+                      </a:solidFill>
+                      <a:prstDash val="solid"/>
+                      <a:round/>
+                      <a:headEnd type="none" w="med" len="med"/>
+                      <a:tailEnd type="none" w="med" len="med"/>
+                    </a:lnR>
+                    <a:lnT w="9525" cap="flat" cmpd="sng" algn="ctr">
+                      <a:solidFill>
+                        <a:srgbClr val="DADCE0"/>
+                      </a:solidFill>
+                      <a:prstDash val="solid"/>
+                      <a:round/>
+                      <a:headEnd type="none" w="med" len="med"/>
+                      <a:tailEnd type="none" w="med" len="med"/>
+                    </a:lnT>
+                    <a:lnB w="9525" cap="flat" cmpd="sng" algn="ctr">
+                      <a:solidFill>
+                        <a:srgbClr val="DADCE0"/>
+                      </a:solidFill>
+                      <a:prstDash val="solid"/>
+                      <a:round/>
+                      <a:headEnd type="none" w="med" len="med"/>
+                      <a:tailEnd type="none" w="med" len="med"/>
+                    </a:lnB>
+                    <a:solidFill>
+                      <a:srgbClr val="FFFFFF"/>
+                    </a:solidFill>
+                  </a:tcPr>
+                </a:tc>
+                <a:tc>
+                  <a:txBody>
+                    <a:bodyPr/>
+                    <a:lstStyle/>
+                    <a:p>
+                      <a:pPr indent="0" marL="0">
+                        <a:buNone/>
+                      </a:pPr>
+                      <a:r>
+                        <a:rPr lang="en-US" sz="760" dirty="0">
+                          <a:solidFill>
+                            <a:srgbClr val="5F6368"/>
+                          </a:solidFill>
+                          <a:latin typeface="Roboto" pitchFamily="34" charset="0"/>
+                          <a:ea typeface="Roboto" pitchFamily="34" charset="-122"/>
+                          <a:cs typeface="Roboto" pitchFamily="34" charset="-120"/>
+                        </a:rPr>
+                        <a:t>Dedicated CMEK AlloyDB instance + &lt;60s HTTP 423 Locked customer key kill-switch</a:t>
+                      </a:r>
+                      <a:endParaRPr lang="en-US" sz="760" dirty="0">
+                        <a:latin typeface="Roboto" charset="0"/>
+                        <a:ea typeface="Roboto" charset="0"/>
+                        <a:cs typeface="Roboto" charset="0"/>
+                      </a:endParaRPr>
+                    </a:p>
+                  </a:txBody>
+                  <a:tcPr marL="91440" marR="91440" marT="45720" marB="45720" anchor="ctr">
+                    <a:lnL w="9525" cap="flat" cmpd="sng" algn="ctr">
+                      <a:solidFill>
+                        <a:srgbClr val="DADCE0"/>
+                      </a:solidFill>
+                      <a:prstDash val="solid"/>
+                      <a:round/>
+                      <a:headEnd type="none" w="med" len="med"/>
+                      <a:tailEnd type="none" w="med" len="med"/>
+                    </a:lnL>
+                    <a:lnR w="9525" cap="flat" cmpd="sng" algn="ctr">
+                      <a:solidFill>
+                        <a:srgbClr val="DADCE0"/>
+                      </a:solidFill>
+                      <a:prstDash val="solid"/>
+                      <a:round/>
+                      <a:headEnd type="none" w="med" len="med"/>
+                      <a:tailEnd type="none" w="med" len="med"/>
+                    </a:lnR>
+                    <a:lnT w="9525" cap="flat" cmpd="sng" algn="ctr">
+                      <a:solidFill>
+                        <a:srgbClr val="DADCE0"/>
+                      </a:solidFill>
+                      <a:prstDash val="solid"/>
+                      <a:round/>
+                      <a:headEnd type="none" w="med" len="med"/>
+                      <a:tailEnd type="none" w="med" len="med"/>
+                    </a:lnT>
+                    <a:lnB w="9525" cap="flat" cmpd="sng" algn="ctr">
+                      <a:solidFill>
+                        <a:srgbClr val="DADCE0"/>
+                      </a:solidFill>
+                      <a:prstDash val="solid"/>
+                      <a:round/>
+                      <a:headEnd type="none" w="med" len="med"/>
+                      <a:tailEnd type="none" w="med" len="med"/>
+                    </a:lnB>
+                    <a:solidFill>
+                      <a:srgbClr val="FFFFFF"/>
+                    </a:solidFill>
+                  </a:tcPr>
+                </a:tc>
+              </a:tr>
+              <a:tr h="0">
+                <a:tc>
+                  <a:txBody>
+                    <a:bodyPr/>
+                    <a:lstStyle/>
+                    <a:p>
+                      <a:pPr indent="0" marL="0">
+                        <a:buNone/>
+                      </a:pPr>
+                      <a:r>
+                        <a:rPr lang="en-US" sz="780" b="1" dirty="0">
+                          <a:solidFill>
+                            <a:srgbClr val="3C4043"/>
+                          </a:solidFill>
+                          <a:latin typeface="Google Sans" pitchFamily="34" charset="0"/>
+                          <a:ea typeface="Google Sans" pitchFamily="34" charset="-122"/>
+                          <a:cs typeface="Google Sans" pitchFamily="34" charset="-120"/>
+                        </a:rPr>
+                        <a:t>Unit economics &amp; target tier</a:t>
+                      </a:r>
+                      <a:endParaRPr lang="en-US" sz="780" dirty="0">
+                        <a:latin typeface="Google Sans" charset="0"/>
+                        <a:ea typeface="Google Sans" charset="0"/>
+                        <a:cs typeface="Google Sans" charset="0"/>
+                      </a:endParaRPr>
+                    </a:p>
+                  </a:txBody>
+                  <a:tcPr marL="91440" marR="91440" marT="45720" marB="45720" anchor="ctr">
+                    <a:lnL w="9525" cap="flat" cmpd="sng" algn="ctr">
+                      <a:solidFill>
+                        <a:srgbClr val="DADCE0"/>
+                      </a:solidFill>
+                      <a:prstDash val="solid"/>
+                      <a:round/>
+                      <a:headEnd type="none" w="med" len="med"/>
+                      <a:tailEnd type="none" w="med" len="med"/>
+                    </a:lnL>
+                    <a:lnR w="9525" cap="flat" cmpd="sng" algn="ctr">
+                      <a:solidFill>
+                        <a:srgbClr val="DADCE0"/>
+                      </a:solidFill>
+                      <a:prstDash val="solid"/>
+                      <a:round/>
+                      <a:headEnd type="none" w="med" len="med"/>
+                      <a:tailEnd type="none" w="med" len="med"/>
+                    </a:lnR>
+                    <a:lnT w="9525" cap="flat" cmpd="sng" algn="ctr">
+                      <a:solidFill>
+                        <a:srgbClr val="DADCE0"/>
+                      </a:solidFill>
+                      <a:prstDash val="solid"/>
+                      <a:round/>
+                      <a:headEnd type="none" w="med" len="med"/>
+                      <a:tailEnd type="none" w="med" len="med"/>
+                    </a:lnT>
+                    <a:lnB w="9525" cap="flat" cmpd="sng" algn="ctr">
+                      <a:solidFill>
+                        <a:srgbClr val="DADCE0"/>
+                      </a:solidFill>
+                      <a:prstDash val="solid"/>
+                      <a:round/>
+                      <a:headEnd type="none" w="med" len="med"/>
+                      <a:tailEnd type="none" w="med" len="med"/>
+                    </a:lnB>
+                    <a:solidFill>
+                      <a:srgbClr val="F8F9FA"/>
+                    </a:solidFill>
+                  </a:tcPr>
+                </a:tc>
+                <a:tc>
+                  <a:txBody>
+                    <a:bodyPr/>
+                    <a:lstStyle/>
+                    <a:p>
+                      <a:pPr indent="0" marL="0">
+                        <a:buNone/>
+                      </a:pPr>
+                      <a:r>
+                        <a:rPr lang="en-US" sz="760" dirty="0">
+                          <a:solidFill>
+                            <a:srgbClr val="5F6368"/>
+                          </a:solidFill>
+                          <a:latin typeface="Roboto" pitchFamily="34" charset="0"/>
+                          <a:ea typeface="Roboto" pitchFamily="34" charset="-122"/>
+                          <a:cs typeface="Roboto" pitchFamily="34" charset="-120"/>
+                        </a:rPr>
+                        <a:t>High breach risk • Fails enterprise CISO security &amp; compliance review</a:t>
+                      </a:r>
+                      <a:endParaRPr lang="en-US" sz="760" dirty="0">
+                        <a:latin typeface="Roboto" charset="0"/>
+                        <a:ea typeface="Roboto" charset="0"/>
+                        <a:cs typeface="Roboto" charset="0"/>
+                      </a:endParaRPr>
+                    </a:p>
+                  </a:txBody>
+                  <a:tcPr marL="91440" marR="91440" marT="45720" marB="45720" anchor="ctr">
+                    <a:lnL w="9525" cap="flat" cmpd="sng" algn="ctr">
+                      <a:solidFill>
+                        <a:srgbClr val="DADCE0"/>
+                      </a:solidFill>
+                      <a:prstDash val="solid"/>
+                      <a:round/>
+                      <a:headEnd type="none" w="med" len="med"/>
+                      <a:tailEnd type="none" w="med" len="med"/>
+                    </a:lnL>
+                    <a:lnR w="9525" cap="flat" cmpd="sng" algn="ctr">
+                      <a:solidFill>
+                        <a:srgbClr val="DADCE0"/>
+                      </a:solidFill>
+                      <a:prstDash val="solid"/>
+                      <a:round/>
+                      <a:headEnd type="none" w="med" len="med"/>
+                      <a:tailEnd type="none" w="med" len="med"/>
+                    </a:lnR>
+                    <a:lnT w="9525" cap="flat" cmpd="sng" algn="ctr">
+                      <a:solidFill>
+                        <a:srgbClr val="DADCE0"/>
+                      </a:solidFill>
+                      <a:prstDash val="solid"/>
+                      <a:round/>
+                      <a:headEnd type="none" w="med" len="med"/>
+                      <a:tailEnd type="none" w="med" len="med"/>
+                    </a:lnT>
+                    <a:lnB w="9525" cap="flat" cmpd="sng" algn="ctr">
+                      <a:solidFill>
+                        <a:srgbClr val="DADCE0"/>
+                      </a:solidFill>
+                      <a:prstDash val="solid"/>
+                      <a:round/>
+                      <a:headEnd type="none" w="med" len="med"/>
+                      <a:tailEnd type="none" w="med" len="med"/>
+                    </a:lnB>
+                    <a:solidFill>
+                      <a:srgbClr val="F8F9FA"/>
+                    </a:solidFill>
+                  </a:tcPr>
+                </a:tc>
+                <a:tc>
+                  <a:txBody>
+                    <a:bodyPr/>
+                    <a:lstStyle/>
+                    <a:p>
+                      <a:pPr indent="0" marL="0">
+                        <a:buNone/>
+                      </a:pPr>
+                      <a:r>
+                        <a:rPr lang="en-US" sz="760" dirty="0">
+                          <a:solidFill>
+                            <a:srgbClr val="5F6368"/>
+                          </a:solidFill>
+                          <a:latin typeface="Roboto" pitchFamily="34" charset="0"/>
+                          <a:ea typeface="Roboto" pitchFamily="34" charset="-122"/>
+                          <a:cs typeface="Roboto" pitchFamily="34" charset="-120"/>
+                        </a:rPr>
+                        <a:t>$42 / tenant / month • High-volume commercial B2B SaaS (10/10 breach tests PASS)</a:t>
+                      </a:r>
+                      <a:endParaRPr lang="en-US" sz="760" dirty="0">
+                        <a:latin typeface="Roboto" charset="0"/>
+                        <a:ea typeface="Roboto" charset="0"/>
+                        <a:cs typeface="Roboto" charset="0"/>
+                      </a:endParaRPr>
+                    </a:p>
+                  </a:txBody>
+                  <a:tcPr marL="91440" marR="91440" marT="45720" marB="45720" anchor="ctr">
+                    <a:lnL w="9525" cap="flat" cmpd="sng" algn="ctr">
+                      <a:solidFill>
+                        <a:srgbClr val="DADCE0"/>
+                      </a:solidFill>
+                      <a:prstDash val="solid"/>
+                      <a:round/>
+                      <a:headEnd type="none" w="med" len="med"/>
+                      <a:tailEnd type="none" w="med" len="med"/>
+                    </a:lnL>
+                    <a:lnR w="9525" cap="flat" cmpd="sng" algn="ctr">
+                      <a:solidFill>
+                        <a:srgbClr val="DADCE0"/>
+                      </a:solidFill>
+                      <a:prstDash val="solid"/>
+                      <a:round/>
+                      <a:headEnd type="none" w="med" len="med"/>
+                      <a:tailEnd type="none" w="med" len="med"/>
+                    </a:lnR>
+                    <a:lnT w="9525" cap="flat" cmpd="sng" algn="ctr">
+                      <a:solidFill>
+                        <a:srgbClr val="DADCE0"/>
+                      </a:solidFill>
+                      <a:prstDash val="solid"/>
+                      <a:round/>
+                      <a:headEnd type="none" w="med" len="med"/>
+                      <a:tailEnd type="none" w="med" len="med"/>
+                    </a:lnT>
+                    <a:lnB w="9525" cap="flat" cmpd="sng" algn="ctr">
+                      <a:solidFill>
+                        <a:srgbClr val="DADCE0"/>
+                      </a:solidFill>
+                      <a:prstDash val="solid"/>
+                      <a:round/>
+                      <a:headEnd type="none" w="med" len="med"/>
+                      <a:tailEnd type="none" w="med" len="med"/>
+                    </a:lnB>
+                    <a:solidFill>
+                      <a:srgbClr val="F8F9FA"/>
+                    </a:solidFill>
+                  </a:tcPr>
+                </a:tc>
+                <a:tc>
+                  <a:txBody>
+                    <a:bodyPr/>
+                    <a:lstStyle/>
+                    <a:p>
+                      <a:pPr indent="0" marL="0">
+                        <a:buNone/>
+                      </a:pPr>
+                      <a:r>
+                        <a:rPr lang="en-US" sz="760" b="1" dirty="0">
+                          <a:solidFill>
+                            <a:srgbClr val="0D652D"/>
+                          </a:solidFill>
+                          <a:latin typeface="Roboto" pitchFamily="34" charset="0"/>
+                          <a:ea typeface="Roboto" pitchFamily="34" charset="-122"/>
+                          <a:cs typeface="Roboto" pitchFamily="34" charset="-120"/>
+                        </a:rPr>
+                        <a:t>$1,850 / tenant / month • Regulated Banking, Healthcare &amp; Public Sector (6/6 PASS)</a:t>
+                      </a:r>
+                      <a:endParaRPr lang="en-US" sz="760" dirty="0">
+                        <a:latin typeface="Roboto" charset="0"/>
+                        <a:ea typeface="Roboto" charset="0"/>
+                        <a:cs typeface="Roboto" charset="0"/>
+                      </a:endParaRPr>
+                    </a:p>
+                  </a:txBody>
+                  <a:tcPr marL="91440" marR="91440" marT="45720" marB="45720" anchor="ctr">
+                    <a:lnL w="9525" cap="flat" cmpd="sng" algn="ctr">
+                      <a:solidFill>
+                        <a:srgbClr val="DADCE0"/>
+                      </a:solidFill>
+                      <a:prstDash val="solid"/>
+                      <a:round/>
+                      <a:headEnd type="none" w="med" len="med"/>
+                      <a:tailEnd type="none" w="med" len="med"/>
+                    </a:lnL>
+                    <a:lnR w="9525" cap="flat" cmpd="sng" algn="ctr">
+                      <a:solidFill>
+                        <a:srgbClr val="DADCE0"/>
+                      </a:solidFill>
+                      <a:prstDash val="solid"/>
+                      <a:round/>
+                      <a:headEnd type="none" w="med" len="med"/>
+                      <a:tailEnd type="none" w="med" len="med"/>
+                    </a:lnR>
+                    <a:lnT w="9525" cap="flat" cmpd="sng" algn="ctr">
+                      <a:solidFill>
+                        <a:srgbClr val="DADCE0"/>
+                      </a:solidFill>
+                      <a:prstDash val="solid"/>
+                      <a:round/>
+                      <a:headEnd type="none" w="med" len="med"/>
+                      <a:tailEnd type="none" w="med" len="med"/>
+                    </a:lnT>
+                    <a:lnB w="9525" cap="flat" cmpd="sng" algn="ctr">
+                      <a:solidFill>
+                        <a:srgbClr val="DADCE0"/>
+                      </a:solidFill>
+                      <a:prstDash val="solid"/>
+                      <a:round/>
+                      <a:headEnd type="none" w="med" len="med"/>
+                      <a:tailEnd type="none" w="med" len="med"/>
+                    </a:lnB>
+                    <a:solidFill>
+                      <a:srgbClr val="F8F9FA"/>
+                    </a:solidFill>
+                  </a:tcPr>
+                </a:tc>
+              </a:tr>
+            </a:tbl>
+          </a:graphicData>
+        </a:graphic>
+      </p:graphicFrame>
+      <p:sp>
+        <p:nvSpPr>
+          <p:cNvPr id="20" name="Shape 17"/>
+          <p:cNvSpPr/>
+          <p:nvPr/>
+        </p:nvSpPr>
+        <p:spPr>
+          <a:xfrm>
+            <a:off x="411480" y="4663440"/>
+            <a:ext cx="2718511" cy="1408176"/>
           </a:xfrm>
           <a:prstGeom prst="roundRect">
             <a:avLst>
-              <a:gd name="adj" fmla="val 3239"/>
+              <a:gd name="adj" fmla="val 5195"/>
             </a:avLst>
           </a:prstGeom>
           <a:solidFill>
@@ -19485,14 +21432,14 @@
       </p:sp>
       <p:sp>
         <p:nvSpPr>
-          <p:cNvPr id="20" name="Shape 18"/>
-          <p:cNvSpPr/>
-          <p:nvPr/>
-        </p:nvSpPr>
-        <p:spPr>
-          <a:xfrm>
-            <a:off x="411480" y="1353312"/>
-            <a:ext cx="5583326" cy="59436"/>
+          <p:cNvPr id="21" name="Shape 18"/>
+          <p:cNvSpPr/>
+          <p:nvPr/>
+        </p:nvSpPr>
+        <p:spPr>
+          <a:xfrm>
+            <a:off x="411480" y="4663440"/>
+            <a:ext cx="2718511" cy="50292"/>
           </a:xfrm>
           <a:prstGeom prst="rect">
             <a:avLst/>
@@ -19505,150 +21452,73 @@
       </p:sp>
       <p:sp>
         <p:nvSpPr>
-          <p:cNvPr id="21" name="Shape 19"/>
-          <p:cNvSpPr/>
-          <p:nvPr/>
-        </p:nvSpPr>
-        <p:spPr>
-          <a:xfrm>
-            <a:off x="557784" y="1481328"/>
-            <a:ext cx="365760" cy="256032"/>
-          </a:xfrm>
-          <a:prstGeom prst="roundRect">
-            <a:avLst>
-              <a:gd name="adj" fmla="val 21429"/>
-            </a:avLst>
-          </a:prstGeom>
-          <a:solidFill>
-            <a:srgbClr val="E8F0FE"/>
-          </a:solidFill>
-          <a:ln/>
-        </p:spPr>
-      </p:sp>
-      <p:sp>
-        <p:nvSpPr>
-          <p:cNvPr id="22" name="Text 20"/>
-          <p:cNvSpPr/>
-          <p:nvPr/>
-        </p:nvSpPr>
-        <p:spPr>
-          <a:xfrm>
-            <a:off x="557784" y="1481328"/>
-            <a:ext cx="365760" cy="256032"/>
-          </a:xfrm>
-          <a:prstGeom prst="rect">
-            <a:avLst/>
-          </a:prstGeom>
-          <a:noFill/>
-          <a:ln/>
-        </p:spPr>
-        <p:txBody>
-          <a:bodyPr wrap="square" rtlCol="0" anchor="ctr"/>
-          <a:lstStyle/>
-          <a:p>
-            <a:pPr algn="ctr" indent="0" marL="0">
-              <a:buNone/>
-            </a:pPr>
-            <a:r>
-              <a:rPr lang="en-US" sz="920" b="1" dirty="0">
-                <a:solidFill>
-                  <a:srgbClr val="174EA6"/>
+          <p:cNvPr id="22" name="Text 19"/>
+          <p:cNvSpPr/>
+          <p:nvPr/>
+        </p:nvSpPr>
+        <p:spPr>
+          <a:xfrm>
+            <a:off x="521208" y="4736592"/>
+            <a:ext cx="2499055" cy="256032"/>
+          </a:xfrm>
+          <a:prstGeom prst="rect">
+            <a:avLst/>
+          </a:prstGeom>
+          <a:noFill/>
+          <a:ln/>
+        </p:spPr>
+        <p:txBody>
+          <a:bodyPr wrap="square" rtlCol="0" anchor="ctr">
+            <a:normAutofit/>
+          </a:bodyPr>
+          <a:lstStyle/>
+          <a:p>
+            <a:pPr indent="0" marL="0">
+              <a:buNone/>
+            </a:pPr>
+            <a:r>
+              <a:rPr lang="en-US" sz="760" b="1" dirty="0">
+                <a:solidFill>
+                  <a:srgbClr val="3C4043"/>
                 </a:solidFill>
                 <a:latin typeface="Google Sans" pitchFamily="34" charset="0"/>
                 <a:ea typeface="Google Sans" pitchFamily="34" charset="-122"/>
                 <a:cs typeface="Google Sans" pitchFamily="34" charset="-120"/>
               </a:rPr>
-              <a:t>01</a:t>
-            </a:r>
-            <a:endParaRPr lang="en-US" sz="920" dirty="0"/>
-          </a:p>
-        </p:txBody>
-      </p:sp>
-      <p:sp>
-        <p:nvSpPr>
-          <p:cNvPr id="23" name="Text 21"/>
-          <p:cNvSpPr/>
-          <p:nvPr/>
-        </p:nvSpPr>
-        <p:spPr>
-          <a:xfrm>
-            <a:off x="996696" y="1463040"/>
-            <a:ext cx="4851806" cy="329184"/>
-          </a:xfrm>
-          <a:prstGeom prst="rect">
-            <a:avLst/>
-          </a:prstGeom>
-          <a:noFill/>
-          <a:ln/>
-        </p:spPr>
-        <p:txBody>
-          <a:bodyPr wrap="square" rtlCol="0" anchor="ctr"/>
+              <a:t>1. Why Naive Shared SaaS Fails Audits</a:t>
+            </a:r>
+            <a:endParaRPr lang="en-US" sz="760" dirty="0"/>
+          </a:p>
+        </p:txBody>
+      </p:sp>
+      <p:sp>
+        <p:nvSpPr>
+          <p:cNvPr id="23" name="Text 20"/>
+          <p:cNvSpPr/>
+          <p:nvPr/>
+        </p:nvSpPr>
+        <p:spPr>
+          <a:xfrm>
+            <a:off x="521208" y="4992624"/>
+            <a:ext cx="2499055" cy="1024128"/>
+          </a:xfrm>
+          <a:prstGeom prst="rect">
+            <a:avLst/>
+          </a:prstGeom>
+          <a:noFill/>
+          <a:ln/>
+        </p:spPr>
+        <p:txBody>
+          <a:bodyPr wrap="square" rtlCol="0" anchor="t">
+            <a:normAutofit/>
+          </a:bodyPr>
           <a:lstStyle/>
           <a:p>
             <a:pPr indent="0" marL="0">
               <a:buNone/>
             </a:pPr>
             <a:r>
-              <a:rPr lang="en-US" sz="1140" b="1" dirty="0">
-                <a:solidFill>
-                  <a:srgbClr val="3C4043"/>
-                </a:solidFill>
-                <a:latin typeface="Google Sans" pitchFamily="34" charset="0"/>
-                <a:ea typeface="Google Sans" pitchFamily="34" charset="-122"/>
-                <a:cs typeface="Google Sans" pitchFamily="34" charset="-120"/>
-              </a:rPr>
-              <a:t>Agentic AI &amp; Shared Prefix Caching</a:t>
-            </a:r>
-            <a:endParaRPr lang="en-US" sz="1140" dirty="0"/>
-          </a:p>
-        </p:txBody>
-      </p:sp>
-      <p:sp>
-        <p:nvSpPr>
-          <p:cNvPr id="24" name="Shape 22"/>
-          <p:cNvSpPr/>
-          <p:nvPr/>
-        </p:nvSpPr>
-        <p:spPr>
-          <a:xfrm>
-            <a:off x="557784" y="1847088"/>
-            <a:ext cx="5290718" cy="9144"/>
-          </a:xfrm>
-          <a:prstGeom prst="rect">
-            <a:avLst/>
-          </a:prstGeom>
-          <a:solidFill>
-            <a:srgbClr val="DADCE0"/>
-          </a:solidFill>
-          <a:ln/>
-        </p:spPr>
-      </p:sp>
-      <p:sp>
-        <p:nvSpPr>
-          <p:cNvPr id="25" name="Text 23"/>
-          <p:cNvSpPr/>
-          <p:nvPr/>
-        </p:nvSpPr>
-        <p:spPr>
-          <a:xfrm>
-            <a:off x="557784" y="1901952"/>
-            <a:ext cx="5290718" cy="850392"/>
-          </a:xfrm>
-          <a:prstGeom prst="rect">
-            <a:avLst/>
-          </a:prstGeom>
-          <a:noFill/>
-          <a:ln/>
-        </p:spPr>
-        <p:txBody>
-          <a:bodyPr wrap="square" rtlCol="0" anchor="t"/>
-          <a:lstStyle/>
-          <a:p>
-            <a:pPr indent="0" marL="0">
-              <a:buNone/>
-            </a:pPr>
-            <a:r>
-              <a:rPr lang="en-US" sz="980" dirty="0">
+              <a:rPr lang="en-US" sz="740" dirty="0">
                 <a:solidFill>
                   <a:srgbClr val="5F6368"/>
                 </a:solidFill>
@@ -19656,188 +21526,26 @@
                 <a:ea typeface="Roboto" pitchFamily="34" charset="-122"/>
                 <a:cs typeface="Roboto" pitchFamily="34" charset="-120"/>
               </a:rPr>
-              <a:t>Vertex AI Agent Engine (ADK 2.0 runtime, Agent Registry &amp; L1–L5 Memory Bank) and Gemini 2.5 Pro with ContextCacheConfig caching a 32,000-token immutable system prefix at a 90% discount (84.7% net token savings).</a:t>
-            </a:r>
-            <a:endParaRPr lang="en-US" sz="980" dirty="0"/>
-          </a:p>
-        </p:txBody>
-      </p:sp>
-      <p:sp>
-        <p:nvSpPr>
-          <p:cNvPr id="26" name="Shape 24"/>
-          <p:cNvSpPr/>
-          <p:nvPr/>
-        </p:nvSpPr>
-        <p:spPr>
-          <a:xfrm>
-            <a:off x="557784" y="2788920"/>
-            <a:ext cx="5290718" cy="493776"/>
+              <a:t>Ambient IAM service accounts, client-trusted X-Tenant-Id headers, and unpartitioned vector/SQL stores fail every red-team isolation test.</a:t>
+            </a:r>
+            <a:endParaRPr lang="en-US" sz="740" dirty="0"/>
+          </a:p>
+        </p:txBody>
+      </p:sp>
+      <p:sp>
+        <p:nvSpPr>
+          <p:cNvPr id="24" name="Shape 21"/>
+          <p:cNvSpPr/>
+          <p:nvPr/>
+        </p:nvSpPr>
+        <p:spPr>
+          <a:xfrm>
+            <a:off x="3294583" y="4663440"/>
+            <a:ext cx="2718511" cy="1408176"/>
           </a:xfrm>
           <a:prstGeom prst="roundRect">
             <a:avLst>
-              <a:gd name="adj" fmla="val 11111"/>
-            </a:avLst>
-          </a:prstGeom>
-          <a:solidFill>
-            <a:srgbClr val="FFFFFF"/>
-          </a:solidFill>
-          <a:ln w="9525">
-            <a:solidFill>
-              <a:srgbClr val="DADCE0"/>
-            </a:solidFill>
-            <a:prstDash val="solid"/>
-          </a:ln>
-        </p:spPr>
-      </p:sp>
-      <p:sp>
-        <p:nvSpPr>
-          <p:cNvPr id="27" name="Shape 25"/>
-          <p:cNvSpPr/>
-          <p:nvPr/>
-        </p:nvSpPr>
-        <p:spPr>
-          <a:xfrm>
-            <a:off x="557784" y="2788920"/>
-            <a:ext cx="54864" cy="493776"/>
-          </a:xfrm>
-          <a:prstGeom prst="rect">
-            <a:avLst/>
-          </a:prstGeom>
-          <a:solidFill>
-            <a:srgbClr val="4285F4"/>
-          </a:solidFill>
-          <a:ln/>
-        </p:spPr>
-      </p:sp>
-      <p:sp>
-        <p:nvSpPr>
-          <p:cNvPr id="28" name="Text 26"/>
-          <p:cNvSpPr/>
-          <p:nvPr/>
-        </p:nvSpPr>
-        <p:spPr>
-          <a:xfrm>
-            <a:off x="649224" y="2816352"/>
-            <a:ext cx="5162702" cy="438912"/>
-          </a:xfrm>
-          <a:prstGeom prst="rect">
-            <a:avLst/>
-          </a:prstGeom>
-          <a:noFill/>
-          <a:ln/>
-        </p:spPr>
-        <p:txBody>
-          <a:bodyPr wrap="square" rtlCol="0" anchor="ctr"/>
-          <a:lstStyle/>
-          <a:p>
-            <a:pPr indent="0" marL="0">
-              <a:buNone/>
-            </a:pPr>
-            <a:r>
-              <a:rPr lang="en-US" sz="750" b="1" dirty="0">
-                <a:solidFill>
-                  <a:srgbClr val="3C4043"/>
-                </a:solidFill>
-                <a:latin typeface="Google Sans" pitchFamily="34" charset="0"/>
-                <a:ea typeface="Google Sans" pitchFamily="34" charset="-122"/>
-                <a:cs typeface="Google Sans" pitchFamily="34" charset="-120"/>
-              </a:rPr>
-              <a:t>Cloud Stack: Vertex AI Agent Engine (ADK 2.0) • Gemini 2.5 Pro ContextCacheConfig (32k Shared System Prefix)
-</a:t>
-            </a:r>
-            <a:pPr indent="0" marL="0">
-              <a:buNone/>
-            </a:pPr>
-            <a:r>
-              <a:rPr lang="en-US" sz="730" dirty="0">
-                <a:solidFill>
-                  <a:srgbClr val="5F6368"/>
-                </a:solidFill>
-                <a:latin typeface="Roboto" pitchFamily="34" charset="0"/>
-                <a:ea typeface="Roboto" pitchFamily="34" charset="-122"/>
-                <a:cs typeface="Roboto" pitchFamily="34" charset="-120"/>
-              </a:rPr>
-              <a:t>Target &amp; SLA: 90% Cached Input Token Discount • Cuts Billable Input Tokens from 34,000 to 5,200/Turn (84.7% Savings)</a:t>
-            </a:r>
-            <a:endParaRPr lang="en-US" sz="750" dirty="0"/>
-          </a:p>
-        </p:txBody>
-      </p:sp>
-      <p:sp>
-        <p:nvSpPr>
-          <p:cNvPr id="29" name="Shape 27"/>
-          <p:cNvSpPr/>
-          <p:nvPr/>
-        </p:nvSpPr>
-        <p:spPr>
-          <a:xfrm>
-            <a:off x="557784" y="3337560"/>
-            <a:ext cx="5290718" cy="219456"/>
-          </a:xfrm>
-          <a:prstGeom prst="roundRect">
-            <a:avLst>
-              <a:gd name="adj" fmla="val 20833"/>
-            </a:avLst>
-          </a:prstGeom>
-          <a:solidFill>
-            <a:srgbClr val="E8F0FE"/>
-          </a:solidFill>
-          <a:ln/>
-        </p:spPr>
-      </p:sp>
-      <p:sp>
-        <p:nvSpPr>
-          <p:cNvPr id="30" name="Text 28"/>
-          <p:cNvSpPr/>
-          <p:nvPr/>
-        </p:nvSpPr>
-        <p:spPr>
-          <a:xfrm>
-            <a:off x="612648" y="3337560"/>
-            <a:ext cx="5180990" cy="219456"/>
-          </a:xfrm>
-          <a:prstGeom prst="rect">
-            <a:avLst/>
-          </a:prstGeom>
-          <a:noFill/>
-          <a:ln/>
-        </p:spPr>
-        <p:txBody>
-          <a:bodyPr wrap="square" rtlCol="0" anchor="ctr"/>
-          <a:lstStyle/>
-          <a:p>
-            <a:pPr indent="0" marL="0">
-              <a:buNone/>
-            </a:pPr>
-            <a:r>
-              <a:rPr lang="en-US" sz="750" b="1" dirty="0">
-                <a:solidFill>
-                  <a:srgbClr val="174EA6"/>
-                </a:solidFill>
-                <a:latin typeface="Google Sans" pitchFamily="34" charset="0"/>
-                <a:ea typeface="Google Sans" pitchFamily="34" charset="-122"/>
-                <a:cs typeface="Google Sans" pitchFamily="34" charset="-120"/>
-              </a:rPr>
-              <a:t>1. Agentic AI &amp; Prefix Cache</a:t>
-            </a:r>
-            <a:endParaRPr lang="en-US" sz="750" dirty="0"/>
-          </a:p>
-        </p:txBody>
-      </p:sp>
-      <p:sp>
-        <p:nvSpPr>
-          <p:cNvPr id="31" name="Shape 29"/>
-          <p:cNvSpPr/>
-          <p:nvPr/>
-        </p:nvSpPr>
-        <p:spPr>
-          <a:xfrm>
-            <a:off x="6195974" y="1353312"/>
-            <a:ext cx="5583326" cy="2258568"/>
-          </a:xfrm>
-          <a:prstGeom prst="roundRect">
-            <a:avLst>
-              <a:gd name="adj" fmla="val 3239"/>
+              <a:gd name="adj" fmla="val 5195"/>
             </a:avLst>
           </a:prstGeom>
           <a:solidFill>
@@ -19853,14 +21561,14 @@
       </p:sp>
       <p:sp>
         <p:nvSpPr>
-          <p:cNvPr id="32" name="Shape 30"/>
-          <p:cNvSpPr/>
-          <p:nvPr/>
-        </p:nvSpPr>
-        <p:spPr>
-          <a:xfrm>
-            <a:off x="6195974" y="1353312"/>
-            <a:ext cx="5583326" cy="59436"/>
+          <p:cNvPr id="25" name="Shape 22"/>
+          <p:cNvSpPr/>
+          <p:nvPr/>
+        </p:nvSpPr>
+        <p:spPr>
+          <a:xfrm>
+            <a:off x="3294583" y="4663440"/>
+            <a:ext cx="2718511" cy="50292"/>
           </a:xfrm>
           <a:prstGeom prst="rect">
             <a:avLst/>
@@ -19873,150 +21581,73 @@
       </p:sp>
       <p:sp>
         <p:nvSpPr>
-          <p:cNvPr id="33" name="Shape 31"/>
-          <p:cNvSpPr/>
-          <p:nvPr/>
-        </p:nvSpPr>
-        <p:spPr>
-          <a:xfrm>
-            <a:off x="6342278" y="1481328"/>
-            <a:ext cx="365760" cy="256032"/>
-          </a:xfrm>
-          <a:prstGeom prst="roundRect">
-            <a:avLst>
-              <a:gd name="adj" fmla="val 21429"/>
-            </a:avLst>
-          </a:prstGeom>
-          <a:solidFill>
-            <a:srgbClr val="FCE8E6"/>
-          </a:solidFill>
-          <a:ln/>
-        </p:spPr>
-      </p:sp>
-      <p:sp>
-        <p:nvSpPr>
-          <p:cNvPr id="34" name="Text 32"/>
-          <p:cNvSpPr/>
-          <p:nvPr/>
-        </p:nvSpPr>
-        <p:spPr>
-          <a:xfrm>
-            <a:off x="6342278" y="1481328"/>
-            <a:ext cx="365760" cy="256032"/>
-          </a:xfrm>
-          <a:prstGeom prst="rect">
-            <a:avLst/>
-          </a:prstGeom>
-          <a:noFill/>
-          <a:ln/>
-        </p:spPr>
-        <p:txBody>
-          <a:bodyPr wrap="square" rtlCol="0" anchor="ctr"/>
-          <a:lstStyle/>
-          <a:p>
-            <a:pPr algn="ctr" indent="0" marL="0">
-              <a:buNone/>
-            </a:pPr>
-            <a:r>
-              <a:rPr lang="en-US" sz="920" b="1" dirty="0">
-                <a:solidFill>
-                  <a:srgbClr val="A50E0E"/>
+          <p:cNvPr id="26" name="Text 23"/>
+          <p:cNvSpPr/>
+          <p:nvPr/>
+        </p:nvSpPr>
+        <p:spPr>
+          <a:xfrm>
+            <a:off x="3404311" y="4736592"/>
+            <a:ext cx="2499055" cy="256032"/>
+          </a:xfrm>
+          <a:prstGeom prst="rect">
+            <a:avLst/>
+          </a:prstGeom>
+          <a:noFill/>
+          <a:ln/>
+        </p:spPr>
+        <p:txBody>
+          <a:bodyPr wrap="square" rtlCol="0" anchor="ctr">
+            <a:normAutofit/>
+          </a:bodyPr>
+          <a:lstStyle/>
+          <a:p>
+            <a:pPr indent="0" marL="0">
+              <a:buNone/>
+            </a:pPr>
+            <a:r>
+              <a:rPr lang="en-US" sz="760" b="1" dirty="0">
+                <a:solidFill>
+                  <a:srgbClr val="3C4043"/>
                 </a:solidFill>
                 <a:latin typeface="Google Sans" pitchFamily="34" charset="0"/>
                 <a:ea typeface="Google Sans" pitchFamily="34" charset="-122"/>
                 <a:cs typeface="Google Sans" pitchFamily="34" charset="-120"/>
               </a:rPr>
-              <a:t>02</a:t>
-            </a:r>
-            <a:endParaRPr lang="en-US" sz="920" dirty="0"/>
-          </a:p>
-        </p:txBody>
-      </p:sp>
-      <p:sp>
-        <p:nvSpPr>
-          <p:cNvPr id="35" name="Text 33"/>
-          <p:cNvSpPr/>
-          <p:nvPr/>
-        </p:nvSpPr>
-        <p:spPr>
-          <a:xfrm>
-            <a:off x="6781190" y="1463040"/>
-            <a:ext cx="4851806" cy="329184"/>
-          </a:xfrm>
-          <a:prstGeom prst="rect">
-            <a:avLst/>
-          </a:prstGeom>
-          <a:noFill/>
-          <a:ln/>
-        </p:spPr>
-        <p:txBody>
-          <a:bodyPr wrap="square" rtlCol="0" anchor="ctr"/>
+              <a:t>2. Why Pattern A Wins on Unit Economics</a:t>
+            </a:r>
+            <a:endParaRPr lang="en-US" sz="760" dirty="0"/>
+          </a:p>
+        </p:txBody>
+      </p:sp>
+      <p:sp>
+        <p:nvSpPr>
+          <p:cNvPr id="27" name="Text 24"/>
+          <p:cNvSpPr/>
+          <p:nvPr/>
+        </p:nvSpPr>
+        <p:spPr>
+          <a:xfrm>
+            <a:off x="3404311" y="4992624"/>
+            <a:ext cx="2499055" cy="1024128"/>
+          </a:xfrm>
+          <a:prstGeom prst="rect">
+            <a:avLst/>
+          </a:prstGeom>
+          <a:noFill/>
+          <a:ln/>
+        </p:spPr>
+        <p:txBody>
+          <a:bodyPr wrap="square" rtlCol="0" anchor="t">
+            <a:normAutofit/>
+          </a:bodyPr>
           <a:lstStyle/>
           <a:p>
             <a:pPr indent="0" marL="0">
               <a:buNone/>
             </a:pPr>
             <a:r>
-              <a:rPr lang="en-US" sz="1140" b="1" dirty="0">
-                <a:solidFill>
-                  <a:srgbClr val="3C4043"/>
-                </a:solidFill>
-                <a:latin typeface="Google Sans" pitchFamily="34" charset="0"/>
-                <a:ea typeface="Google Sans" pitchFamily="34" charset="-122"/>
-                <a:cs typeface="Google Sans" pitchFamily="34" charset="-120"/>
-              </a:rPr>
-              <a:t>Ingress, Identity &amp; Bidirectional AI Safety</a:t>
-            </a:r>
-            <a:endParaRPr lang="en-US" sz="1140" dirty="0"/>
-          </a:p>
-        </p:txBody>
-      </p:sp>
-      <p:sp>
-        <p:nvSpPr>
-          <p:cNvPr id="36" name="Shape 34"/>
-          <p:cNvSpPr/>
-          <p:nvPr/>
-        </p:nvSpPr>
-        <p:spPr>
-          <a:xfrm>
-            <a:off x="6342278" y="1847088"/>
-            <a:ext cx="5290718" cy="9144"/>
-          </a:xfrm>
-          <a:prstGeom prst="rect">
-            <a:avLst/>
-          </a:prstGeom>
-          <a:solidFill>
-            <a:srgbClr val="DADCE0"/>
-          </a:solidFill>
-          <a:ln/>
-        </p:spPr>
-      </p:sp>
-      <p:sp>
-        <p:nvSpPr>
-          <p:cNvPr id="37" name="Text 35"/>
-          <p:cNvSpPr/>
-          <p:nvPr/>
-        </p:nvSpPr>
-        <p:spPr>
-          <a:xfrm>
-            <a:off x="6342278" y="1901952"/>
-            <a:ext cx="5290718" cy="850392"/>
-          </a:xfrm>
-          <a:prstGeom prst="rect">
-            <a:avLst/>
-          </a:prstGeom>
-          <a:noFill/>
-          <a:ln/>
-        </p:spPr>
-        <p:txBody>
-          <a:bodyPr wrap="square" rtlCol="0" anchor="t"/>
-          <a:lstStyle/>
-          <a:p>
-            <a:pPr indent="0" marL="0">
-              <a:buNone/>
-            </a:pPr>
-            <a:r>
-              <a:rPr lang="en-US" sz="980" dirty="0">
+              <a:rPr lang="en-US" sz="740" dirty="0">
                 <a:solidFill>
                   <a:srgbClr val="5F6368"/>
                 </a:solidFill>
@@ -20024,188 +21655,26 @@
                 <a:ea typeface="Roboto" pitchFamily="34" charset="-122"/>
                 <a:cs typeface="Roboto" pitchFamily="34" charset="-120"/>
               </a:rPr>
-              <a:t>Global External Application Load Balancer, Google Cloud Armor L7 WAF (stripping spoofed X-Tenant-Id headers), IAP + IAM STS (RFC 8693 OBO + RFC 9449 DPoP), Vertex AI Model Armor, and Cloud Sensitive Data Protection.</a:t>
-            </a:r>
-            <a:endParaRPr lang="en-US" sz="980" dirty="0"/>
-          </a:p>
-        </p:txBody>
-      </p:sp>
-      <p:sp>
-        <p:nvSpPr>
-          <p:cNvPr id="38" name="Shape 36"/>
-          <p:cNvSpPr/>
-          <p:nvPr/>
-        </p:nvSpPr>
-        <p:spPr>
-          <a:xfrm>
-            <a:off x="6342278" y="2788920"/>
-            <a:ext cx="5290718" cy="493776"/>
+              <a:t>Delivers a $42/mo baseline per tenant and 90% shared 32k prefix cache savings (84.7% turn COGS reduction) inside one GCP project.</a:t>
+            </a:r>
+            <a:endParaRPr lang="en-US" sz="740" dirty="0"/>
+          </a:p>
+        </p:txBody>
+      </p:sp>
+      <p:sp>
+        <p:nvSpPr>
+          <p:cNvPr id="28" name="Shape 25"/>
+          <p:cNvSpPr/>
+          <p:nvPr/>
+        </p:nvSpPr>
+        <p:spPr>
+          <a:xfrm>
+            <a:off x="6177686" y="4663440"/>
+            <a:ext cx="2718511" cy="1408176"/>
           </a:xfrm>
           <a:prstGeom prst="roundRect">
             <a:avLst>
-              <a:gd name="adj" fmla="val 11111"/>
-            </a:avLst>
-          </a:prstGeom>
-          <a:solidFill>
-            <a:srgbClr val="FFFFFF"/>
-          </a:solidFill>
-          <a:ln w="9525">
-            <a:solidFill>
-              <a:srgbClr val="DADCE0"/>
-            </a:solidFill>
-            <a:prstDash val="solid"/>
-          </a:ln>
-        </p:spPr>
-      </p:sp>
-      <p:sp>
-        <p:nvSpPr>
-          <p:cNvPr id="39" name="Shape 37"/>
-          <p:cNvSpPr/>
-          <p:nvPr/>
-        </p:nvSpPr>
-        <p:spPr>
-          <a:xfrm>
-            <a:off x="6342278" y="2788920"/>
-            <a:ext cx="54864" cy="493776"/>
-          </a:xfrm>
-          <a:prstGeom prst="rect">
-            <a:avLst/>
-          </a:prstGeom>
-          <a:solidFill>
-            <a:srgbClr val="EA4335"/>
-          </a:solidFill>
-          <a:ln/>
-        </p:spPr>
-      </p:sp>
-      <p:sp>
-        <p:nvSpPr>
-          <p:cNvPr id="40" name="Text 38"/>
-          <p:cNvSpPr/>
-          <p:nvPr/>
-        </p:nvSpPr>
-        <p:spPr>
-          <a:xfrm>
-            <a:off x="6433718" y="2816352"/>
-            <a:ext cx="5162702" cy="438912"/>
-          </a:xfrm>
-          <a:prstGeom prst="rect">
-            <a:avLst/>
-          </a:prstGeom>
-          <a:noFill/>
-          <a:ln/>
-        </p:spPr>
-        <p:txBody>
-          <a:bodyPr wrap="square" rtlCol="0" anchor="ctr"/>
-          <a:lstStyle/>
-          <a:p>
-            <a:pPr indent="0" marL="0">
-              <a:buNone/>
-            </a:pPr>
-            <a:r>
-              <a:rPr lang="en-US" sz="750" b="1" dirty="0">
-                <a:solidFill>
-                  <a:srgbClr val="3C4043"/>
-                </a:solidFill>
-                <a:latin typeface="Google Sans" pitchFamily="34" charset="0"/>
-                <a:ea typeface="Google Sans" pitchFamily="34" charset="-122"/>
-                <a:cs typeface="Google Sans" pitchFamily="34" charset="-120"/>
-              </a:rPr>
-              <a:t>Cloud Stack: Cloud Load Balancing • Cloud Armor WAF • IAP &amp; IAM STS (OBO + DPoP) • Model Armor • Cloud DLP
-</a:t>
-            </a:r>
-            <a:pPr indent="0" marL="0">
-              <a:buNone/>
-            </a:pPr>
-            <a:r>
-              <a:rPr lang="en-US" sz="730" dirty="0">
-                <a:solidFill>
-                  <a:srgbClr val="5F6368"/>
-                </a:solidFill>
-                <a:latin typeface="Roboto" pitchFamily="34" charset="0"/>
-                <a:ea typeface="Roboto" pitchFamily="34" charset="-122"/>
-                <a:cs typeface="Roboto" pitchFamily="34" charset="-120"/>
-              </a:rPr>
-              <a:t>Target &amp; SLA: Strips Spoofed Headers (401), Blocks Jailbreaks (400) &amp; NLC Violations (422), Masks IBAN/PAN PII</a:t>
-            </a:r>
-            <a:endParaRPr lang="en-US" sz="750" dirty="0"/>
-          </a:p>
-        </p:txBody>
-      </p:sp>
-      <p:sp>
-        <p:nvSpPr>
-          <p:cNvPr id="41" name="Shape 39"/>
-          <p:cNvSpPr/>
-          <p:nvPr/>
-        </p:nvSpPr>
-        <p:spPr>
-          <a:xfrm>
-            <a:off x="6342278" y="3337560"/>
-            <a:ext cx="5290718" cy="219456"/>
-          </a:xfrm>
-          <a:prstGeom prst="roundRect">
-            <a:avLst>
-              <a:gd name="adj" fmla="val 20833"/>
-            </a:avLst>
-          </a:prstGeom>
-          <a:solidFill>
-            <a:srgbClr val="FCE8E6"/>
-          </a:solidFill>
-          <a:ln/>
-        </p:spPr>
-      </p:sp>
-      <p:sp>
-        <p:nvSpPr>
-          <p:cNvPr id="42" name="Text 40"/>
-          <p:cNvSpPr/>
-          <p:nvPr/>
-        </p:nvSpPr>
-        <p:spPr>
-          <a:xfrm>
-            <a:off x="6397142" y="3337560"/>
-            <a:ext cx="5180990" cy="219456"/>
-          </a:xfrm>
-          <a:prstGeom prst="rect">
-            <a:avLst/>
-          </a:prstGeom>
-          <a:noFill/>
-          <a:ln/>
-        </p:spPr>
-        <p:txBody>
-          <a:bodyPr wrap="square" rtlCol="0" anchor="ctr"/>
-          <a:lstStyle/>
-          <a:p>
-            <a:pPr indent="0" marL="0">
-              <a:buNone/>
-            </a:pPr>
-            <a:r>
-              <a:rPr lang="en-US" sz="750" b="1" dirty="0">
-                <a:solidFill>
-                  <a:srgbClr val="A50E0E"/>
-                </a:solidFill>
-                <a:latin typeface="Google Sans" pitchFamily="34" charset="0"/>
-                <a:ea typeface="Google Sans" pitchFamily="34" charset="-122"/>
-                <a:cs typeface="Google Sans" pitchFamily="34" charset="-120"/>
-              </a:rPr>
-              <a:t>2. Ingress, Identity &amp; Safety</a:t>
-            </a:r>
-            <a:endParaRPr lang="en-US" sz="750" dirty="0"/>
-          </a:p>
-        </p:txBody>
-      </p:sp>
-      <p:sp>
-        <p:nvSpPr>
-          <p:cNvPr id="43" name="Shape 41"/>
-          <p:cNvSpPr/>
-          <p:nvPr/>
-        </p:nvSpPr>
-        <p:spPr>
-          <a:xfrm>
-            <a:off x="411480" y="3776472"/>
-            <a:ext cx="5583326" cy="2258568"/>
-          </a:xfrm>
-          <a:prstGeom prst="roundRect">
-            <a:avLst>
-              <a:gd name="adj" fmla="val 3239"/>
+              <a:gd name="adj" fmla="val 5195"/>
             </a:avLst>
           </a:prstGeom>
           <a:solidFill>
@@ -20221,14 +21690,14 @@
       </p:sp>
       <p:sp>
         <p:nvSpPr>
-          <p:cNvPr id="44" name="Shape 42"/>
-          <p:cNvSpPr/>
-          <p:nvPr/>
-        </p:nvSpPr>
-        <p:spPr>
-          <a:xfrm>
-            <a:off x="411480" y="3776472"/>
-            <a:ext cx="5583326" cy="59436"/>
+          <p:cNvPr id="29" name="Shape 26"/>
+          <p:cNvSpPr/>
+          <p:nvPr/>
+        </p:nvSpPr>
+        <p:spPr>
+          <a:xfrm>
+            <a:off x="6177686" y="4663440"/>
+            <a:ext cx="2718511" cy="50292"/>
           </a:xfrm>
           <a:prstGeom prst="rect">
             <a:avLst/>
@@ -20241,150 +21710,73 @@
       </p:sp>
       <p:sp>
         <p:nvSpPr>
-          <p:cNvPr id="45" name="Shape 43"/>
-          <p:cNvSpPr/>
-          <p:nvPr/>
-        </p:nvSpPr>
-        <p:spPr>
-          <a:xfrm>
-            <a:off x="557784" y="3904488"/>
-            <a:ext cx="365760" cy="256032"/>
-          </a:xfrm>
-          <a:prstGeom prst="roundRect">
-            <a:avLst>
-              <a:gd name="adj" fmla="val 21429"/>
-            </a:avLst>
-          </a:prstGeom>
-          <a:solidFill>
-            <a:srgbClr val="FEF7E0"/>
-          </a:solidFill>
-          <a:ln/>
-        </p:spPr>
-      </p:sp>
-      <p:sp>
-        <p:nvSpPr>
-          <p:cNvPr id="46" name="Text 44"/>
-          <p:cNvSpPr/>
-          <p:nvPr/>
-        </p:nvSpPr>
-        <p:spPr>
-          <a:xfrm>
-            <a:off x="557784" y="3904488"/>
-            <a:ext cx="365760" cy="256032"/>
-          </a:xfrm>
-          <a:prstGeom prst="rect">
-            <a:avLst/>
-          </a:prstGeom>
-          <a:noFill/>
-          <a:ln/>
-        </p:spPr>
-        <p:txBody>
-          <a:bodyPr wrap="square" rtlCol="0" anchor="ctr"/>
-          <a:lstStyle/>
-          <a:p>
-            <a:pPr algn="ctr" indent="0" marL="0">
-              <a:buNone/>
-            </a:pPr>
-            <a:r>
-              <a:rPr lang="en-US" sz="920" b="1" dirty="0">
-                <a:solidFill>
-                  <a:srgbClr val="B06000"/>
+          <p:cNvPr id="30" name="Text 27"/>
+          <p:cNvSpPr/>
+          <p:nvPr/>
+        </p:nvSpPr>
+        <p:spPr>
+          <a:xfrm>
+            <a:off x="6287414" y="4736592"/>
+            <a:ext cx="2499055" cy="256032"/>
+          </a:xfrm>
+          <a:prstGeom prst="rect">
+            <a:avLst/>
+          </a:prstGeom>
+          <a:noFill/>
+          <a:ln/>
+        </p:spPr>
+        <p:txBody>
+          <a:bodyPr wrap="square" rtlCol="0" anchor="ctr">
+            <a:normAutofit/>
+          </a:bodyPr>
+          <a:lstStyle/>
+          <a:p>
+            <a:pPr indent="0" marL="0">
+              <a:buNone/>
+            </a:pPr>
+            <a:r>
+              <a:rPr lang="en-US" sz="760" b="1" dirty="0">
+                <a:solidFill>
+                  <a:srgbClr val="3C4043"/>
                 </a:solidFill>
                 <a:latin typeface="Google Sans" pitchFamily="34" charset="0"/>
                 <a:ea typeface="Google Sans" pitchFamily="34" charset="-122"/>
                 <a:cs typeface="Google Sans" pitchFamily="34" charset="-120"/>
               </a:rPr>
-              <a:t>03</a:t>
-            </a:r>
-            <a:endParaRPr lang="en-US" sz="920" dirty="0"/>
-          </a:p>
-        </p:txBody>
-      </p:sp>
-      <p:sp>
-        <p:nvSpPr>
-          <p:cNvPr id="47" name="Text 45"/>
-          <p:cNvSpPr/>
-          <p:nvPr/>
-        </p:nvSpPr>
-        <p:spPr>
-          <a:xfrm>
-            <a:off x="996696" y="3886200"/>
-            <a:ext cx="4851806" cy="329184"/>
-          </a:xfrm>
-          <a:prstGeom prst="rect">
-            <a:avLst/>
-          </a:prstGeom>
-          <a:noFill/>
-          <a:ln/>
-        </p:spPr>
-        <p:txBody>
-          <a:bodyPr wrap="square" rtlCol="0" anchor="ctr"/>
+              <a:t>3. Cryptographic Equivalence in a Pool</a:t>
+            </a:r>
+            <a:endParaRPr lang="en-US" sz="760" dirty="0"/>
+          </a:p>
+        </p:txBody>
+      </p:sp>
+      <p:sp>
+        <p:nvSpPr>
+          <p:cNvPr id="31" name="Text 28"/>
+          <p:cNvSpPr/>
+          <p:nvPr/>
+        </p:nvSpPr>
+        <p:spPr>
+          <a:xfrm>
+            <a:off x="6287414" y="4992624"/>
+            <a:ext cx="2499055" cy="1024128"/>
+          </a:xfrm>
+          <a:prstGeom prst="rect">
+            <a:avLst/>
+          </a:prstGeom>
+          <a:noFill/>
+          <a:ln/>
+        </p:spPr>
+        <p:txBody>
+          <a:bodyPr wrap="square" rtlCol="0" anchor="t">
+            <a:normAutofit/>
+          </a:bodyPr>
           <a:lstStyle/>
           <a:p>
             <a:pPr indent="0" marL="0">
               <a:buNone/>
             </a:pPr>
             <a:r>
-              <a:rPr lang="en-US" sz="1140" b="1" dirty="0">
-                <a:solidFill>
-                  <a:srgbClr val="3C4043"/>
-                </a:solidFill>
-                <a:latin typeface="Google Sans" pitchFamily="34" charset="0"/>
-                <a:ea typeface="Google Sans" pitchFamily="34" charset="-122"/>
-                <a:cs typeface="Google Sans" pitchFamily="34" charset="-120"/>
-              </a:rPr>
-              <a:t>Rate Bulkheads, Relational RLS &amp; FinOps Telemetry</a:t>
-            </a:r>
-            <a:endParaRPr lang="en-US" sz="1140" dirty="0"/>
-          </a:p>
-        </p:txBody>
-      </p:sp>
-      <p:sp>
-        <p:nvSpPr>
-          <p:cNvPr id="48" name="Shape 46"/>
-          <p:cNvSpPr/>
-          <p:nvPr/>
-        </p:nvSpPr>
-        <p:spPr>
-          <a:xfrm>
-            <a:off x="557784" y="4270248"/>
-            <a:ext cx="5290718" cy="9144"/>
-          </a:xfrm>
-          <a:prstGeom prst="rect">
-            <a:avLst/>
-          </a:prstGeom>
-          <a:solidFill>
-            <a:srgbClr val="DADCE0"/>
-          </a:solidFill>
-          <a:ln/>
-        </p:spPr>
-      </p:sp>
-      <p:sp>
-        <p:nvSpPr>
-          <p:cNvPr id="49" name="Text 47"/>
-          <p:cNvSpPr/>
-          <p:nvPr/>
-        </p:nvSpPr>
-        <p:spPr>
-          <a:xfrm>
-            <a:off x="557784" y="4325112"/>
-            <a:ext cx="5290718" cy="850392"/>
-          </a:xfrm>
-          <a:prstGeom prst="rect">
-            <a:avLst/>
-          </a:prstGeom>
-          <a:noFill/>
-          <a:ln/>
-        </p:spPr>
-        <p:txBody>
-          <a:bodyPr wrap="square" rtlCol="0" anchor="t"/>
-          <a:lstStyle/>
-          <a:p>
-            <a:pPr indent="0" marL="0">
-              <a:buNone/>
-            </a:pPr>
-            <a:r>
-              <a:rPr lang="en-US" sz="980" dirty="0">
+              <a:rPr lang="en-US" sz="740" dirty="0">
                 <a:solidFill>
                   <a:srgbClr val="5F6368"/>
                 </a:solidFill>
@@ -20392,188 +21784,26 @@
                 <a:ea typeface="Roboto" pitchFamily="34" charset="-122"/>
                 <a:cs typeface="Roboto" pitchFamily="34" charset="-120"/>
               </a:rPr>
-              <a:t>Memorystore for Valkey (120 vs. 600 RPM token buckets), Firestore tenant profile registry, AlloyDB for PostgreSQL (FORCE ROW LEVEL SECURITY), Cloud KMS CMEK, and BigQuery zero-PII OTel chargeback.</a:t>
-            </a:r>
-            <a:endParaRPr lang="en-US" sz="980" dirty="0"/>
-          </a:p>
-        </p:txBody>
-      </p:sp>
-      <p:sp>
-        <p:nvSpPr>
-          <p:cNvPr id="50" name="Shape 48"/>
-          <p:cNvSpPr/>
-          <p:nvPr/>
-        </p:nvSpPr>
-        <p:spPr>
-          <a:xfrm>
-            <a:off x="557784" y="5212080"/>
-            <a:ext cx="5290718" cy="493776"/>
+              <a:t>Enforces RFC 8693 + DPoP (Hop 1), Catalog PDP (Hop 2), Valkey bulkheads (Hop 3), Model Armor + SDP (Hop 4), and AlloyDB FORCE RLS (Hop 5).</a:t>
+            </a:r>
+            <a:endParaRPr lang="en-US" sz="740" dirty="0"/>
+          </a:p>
+        </p:txBody>
+      </p:sp>
+      <p:sp>
+        <p:nvSpPr>
+          <p:cNvPr id="32" name="Shape 29"/>
+          <p:cNvSpPr/>
+          <p:nvPr/>
+        </p:nvSpPr>
+        <p:spPr>
+          <a:xfrm>
+            <a:off x="9060790" y="4663440"/>
+            <a:ext cx="2718511" cy="1408176"/>
           </a:xfrm>
           <a:prstGeom prst="roundRect">
             <a:avLst>
-              <a:gd name="adj" fmla="val 11111"/>
-            </a:avLst>
-          </a:prstGeom>
-          <a:solidFill>
-            <a:srgbClr val="FFFFFF"/>
-          </a:solidFill>
-          <a:ln w="9525">
-            <a:solidFill>
-              <a:srgbClr val="DADCE0"/>
-            </a:solidFill>
-            <a:prstDash val="solid"/>
-          </a:ln>
-        </p:spPr>
-      </p:sp>
-      <p:sp>
-        <p:nvSpPr>
-          <p:cNvPr id="51" name="Shape 49"/>
-          <p:cNvSpPr/>
-          <p:nvPr/>
-        </p:nvSpPr>
-        <p:spPr>
-          <a:xfrm>
-            <a:off x="557784" y="5212080"/>
-            <a:ext cx="54864" cy="493776"/>
-          </a:xfrm>
-          <a:prstGeom prst="rect">
-            <a:avLst/>
-          </a:prstGeom>
-          <a:solidFill>
-            <a:srgbClr val="FBBC04"/>
-          </a:solidFill>
-          <a:ln/>
-        </p:spPr>
-      </p:sp>
-      <p:sp>
-        <p:nvSpPr>
-          <p:cNvPr id="52" name="Text 50"/>
-          <p:cNvSpPr/>
-          <p:nvPr/>
-        </p:nvSpPr>
-        <p:spPr>
-          <a:xfrm>
-            <a:off x="649224" y="5239512"/>
-            <a:ext cx="5162702" cy="438912"/>
-          </a:xfrm>
-          <a:prstGeom prst="rect">
-            <a:avLst/>
-          </a:prstGeom>
-          <a:noFill/>
-          <a:ln/>
-        </p:spPr>
-        <p:txBody>
-          <a:bodyPr wrap="square" rtlCol="0" anchor="ctr"/>
-          <a:lstStyle/>
-          <a:p>
-            <a:pPr indent="0" marL="0">
-              <a:buNone/>
-            </a:pPr>
-            <a:r>
-              <a:rPr lang="en-US" sz="750" b="1" dirty="0">
-                <a:solidFill>
-                  <a:srgbClr val="3C4043"/>
-                </a:solidFill>
-                <a:latin typeface="Google Sans" pitchFamily="34" charset="0"/>
-                <a:ea typeface="Google Sans" pitchFamily="34" charset="-122"/>
-                <a:cs typeface="Google Sans" pitchFamily="34" charset="-120"/>
-              </a:rPr>
-              <a:t>Cloud Stack: Memorystore for Valkey (RPM) • Firestore • AlloyDB PostgreSQL RLS • Cloud KMS • BigQuery OTel
-</a:t>
-            </a:r>
-            <a:pPr indent="0" marL="0">
-              <a:buNone/>
-            </a:pPr>
-            <a:r>
-              <a:rPr lang="en-US" sz="730" dirty="0">
-                <a:solidFill>
-                  <a:srgbClr val="5F6368"/>
-                </a:solidFill>
-                <a:latin typeface="Roboto" pitchFamily="34" charset="0"/>
-                <a:ea typeface="Roboto" pitchFamily="34" charset="-122"/>
-                <a:cs typeface="Roboto" pitchFamily="34" charset="-120"/>
-              </a:rPr>
-              <a:t>Target &amp; SLA: Enforces 120/600 RPM &amp; 4k/8k Thinking Caps • 0 Cross-Tenant SQL Rows • Per-Tenant Token Billing</a:t>
-            </a:r>
-            <a:endParaRPr lang="en-US" sz="750" dirty="0"/>
-          </a:p>
-        </p:txBody>
-      </p:sp>
-      <p:sp>
-        <p:nvSpPr>
-          <p:cNvPr id="53" name="Shape 51"/>
-          <p:cNvSpPr/>
-          <p:nvPr/>
-        </p:nvSpPr>
-        <p:spPr>
-          <a:xfrm>
-            <a:off x="557784" y="5760720"/>
-            <a:ext cx="5290718" cy="219456"/>
-          </a:xfrm>
-          <a:prstGeom prst="roundRect">
-            <a:avLst>
-              <a:gd name="adj" fmla="val 20833"/>
-            </a:avLst>
-          </a:prstGeom>
-          <a:solidFill>
-            <a:srgbClr val="FEF7E0"/>
-          </a:solidFill>
-          <a:ln/>
-        </p:spPr>
-      </p:sp>
-      <p:sp>
-        <p:nvSpPr>
-          <p:cNvPr id="54" name="Text 52"/>
-          <p:cNvSpPr/>
-          <p:nvPr/>
-        </p:nvSpPr>
-        <p:spPr>
-          <a:xfrm>
-            <a:off x="612648" y="5760720"/>
-            <a:ext cx="5180990" cy="219456"/>
-          </a:xfrm>
-          <a:prstGeom prst="rect">
-            <a:avLst/>
-          </a:prstGeom>
-          <a:noFill/>
-          <a:ln/>
-        </p:spPr>
-        <p:txBody>
-          <a:bodyPr wrap="square" rtlCol="0" anchor="ctr"/>
-          <a:lstStyle/>
-          <a:p>
-            <a:pPr indent="0" marL="0">
-              <a:buNone/>
-            </a:pPr>
-            <a:r>
-              <a:rPr lang="en-US" sz="750" b="1" dirty="0">
-                <a:solidFill>
-                  <a:srgbClr val="B06000"/>
-                </a:solidFill>
-                <a:latin typeface="Google Sans" pitchFamily="34" charset="0"/>
-                <a:ea typeface="Google Sans" pitchFamily="34" charset="-122"/>
-                <a:cs typeface="Google Sans" pitchFamily="34" charset="-120"/>
-              </a:rPr>
-              <a:t>3. Bulkheads, RLS &amp; FinOps</a:t>
-            </a:r>
-            <a:endParaRPr lang="en-US" sz="750" dirty="0"/>
-          </a:p>
-        </p:txBody>
-      </p:sp>
-      <p:sp>
-        <p:nvSpPr>
-          <p:cNvPr id="55" name="Shape 53"/>
-          <p:cNvSpPr/>
-          <p:nvPr/>
-        </p:nvSpPr>
-        <p:spPr>
-          <a:xfrm>
-            <a:off x="6195974" y="3776472"/>
-            <a:ext cx="5583326" cy="2258568"/>
-          </a:xfrm>
-          <a:prstGeom prst="roundRect">
-            <a:avLst>
-              <a:gd name="adj" fmla="val 3239"/>
+              <a:gd name="adj" fmla="val 5195"/>
             </a:avLst>
           </a:prstGeom>
           <a:solidFill>
@@ -20589,14 +21819,14 @@
       </p:sp>
       <p:sp>
         <p:nvSpPr>
-          <p:cNvPr id="56" name="Shape 54"/>
-          <p:cNvSpPr/>
-          <p:nvPr/>
-        </p:nvSpPr>
-        <p:spPr>
-          <a:xfrm>
-            <a:off x="6195974" y="3776472"/>
-            <a:ext cx="5583326" cy="59436"/>
+          <p:cNvPr id="33" name="Shape 30"/>
+          <p:cNvSpPr/>
+          <p:nvPr/>
+        </p:nvSpPr>
+        <p:spPr>
+          <a:xfrm>
+            <a:off x="9060790" y="4663440"/>
+            <a:ext cx="2718511" cy="50292"/>
           </a:xfrm>
           <a:prstGeom prst="rect">
             <a:avLst/>
@@ -20609,150 +21839,73 @@
       </p:sp>
       <p:sp>
         <p:nvSpPr>
-          <p:cNvPr id="57" name="Shape 55"/>
-          <p:cNvSpPr/>
-          <p:nvPr/>
-        </p:nvSpPr>
-        <p:spPr>
-          <a:xfrm>
-            <a:off x="6342278" y="3904488"/>
-            <a:ext cx="365760" cy="256032"/>
-          </a:xfrm>
-          <a:prstGeom prst="roundRect">
-            <a:avLst>
-              <a:gd name="adj" fmla="val 21429"/>
-            </a:avLst>
-          </a:prstGeom>
-          <a:solidFill>
-            <a:srgbClr val="E6F4EA"/>
-          </a:solidFill>
-          <a:ln/>
-        </p:spPr>
-      </p:sp>
-      <p:sp>
-        <p:nvSpPr>
-          <p:cNvPr id="58" name="Text 56"/>
-          <p:cNvSpPr/>
-          <p:nvPr/>
-        </p:nvSpPr>
-        <p:spPr>
-          <a:xfrm>
-            <a:off x="6342278" y="3904488"/>
-            <a:ext cx="365760" cy="256032"/>
-          </a:xfrm>
-          <a:prstGeom prst="rect">
-            <a:avLst/>
-          </a:prstGeom>
-          <a:noFill/>
-          <a:ln/>
-        </p:spPr>
-        <p:txBody>
-          <a:bodyPr wrap="square" rtlCol="0" anchor="ctr"/>
-          <a:lstStyle/>
-          <a:p>
-            <a:pPr algn="ctr" indent="0" marL="0">
-              <a:buNone/>
-            </a:pPr>
-            <a:r>
-              <a:rPr lang="en-US" sz="920" b="1" dirty="0">
-                <a:solidFill>
-                  <a:srgbClr val="0D652D"/>
+          <p:cNvPr id="34" name="Text 31"/>
+          <p:cNvSpPr/>
+          <p:nvPr/>
+        </p:nvSpPr>
+        <p:spPr>
+          <a:xfrm>
+            <a:off x="9170518" y="4736592"/>
+            <a:ext cx="2499055" cy="256032"/>
+          </a:xfrm>
+          <a:prstGeom prst="rect">
+            <a:avLst/>
+          </a:prstGeom>
+          <a:noFill/>
+          <a:ln/>
+        </p:spPr>
+        <p:txBody>
+          <a:bodyPr wrap="square" rtlCol="0" anchor="ctr">
+            <a:normAutofit/>
+          </a:bodyPr>
+          <a:lstStyle/>
+          <a:p>
+            <a:pPr indent="0" marL="0">
+              <a:buNone/>
+            </a:pPr>
+            <a:r>
+              <a:rPr lang="en-US" sz="760" b="1" dirty="0">
+                <a:solidFill>
+                  <a:srgbClr val="3C4043"/>
                 </a:solidFill>
                 <a:latin typeface="Google Sans" pitchFamily="34" charset="0"/>
                 <a:ea typeface="Google Sans" pitchFamily="34" charset="-122"/>
                 <a:cs typeface="Google Sans" pitchFamily="34" charset="-120"/>
               </a:rPr>
-              <a:t>04</a:t>
-            </a:r>
-            <a:endParaRPr lang="en-US" sz="920" dirty="0"/>
-          </a:p>
-        </p:txBody>
-      </p:sp>
-      <p:sp>
-        <p:nvSpPr>
-          <p:cNvPr id="59" name="Text 57"/>
-          <p:cNvSpPr/>
-          <p:nvPr/>
-        </p:nvSpPr>
-        <p:spPr>
-          <a:xfrm>
-            <a:off x="6781190" y="3886200"/>
-            <a:ext cx="4851806" cy="329184"/>
-          </a:xfrm>
-          <a:prstGeom prst="rect">
-            <a:avLst/>
-          </a:prstGeom>
-          <a:noFill/>
-          <a:ln/>
-        </p:spPr>
-        <p:txBody>
-          <a:bodyPr wrap="square" rtlCol="0" anchor="ctr"/>
+              <a:t>4. Clear Graduation Trigger to Pattern B / C</a:t>
+            </a:r>
+            <a:endParaRPr lang="en-US" sz="760" dirty="0"/>
+          </a:p>
+        </p:txBody>
+      </p:sp>
+      <p:sp>
+        <p:nvSpPr>
+          <p:cNvPr id="35" name="Text 32"/>
+          <p:cNvSpPr/>
+          <p:nvPr/>
+        </p:nvSpPr>
+        <p:spPr>
+          <a:xfrm>
+            <a:off x="9170518" y="4992624"/>
+            <a:ext cx="2499055" cy="1024128"/>
+          </a:xfrm>
+          <a:prstGeom prst="rect">
+            <a:avLst/>
+          </a:prstGeom>
+          <a:noFill/>
+          <a:ln/>
+        </p:spPr>
+        <p:txBody>
+          <a:bodyPr wrap="square" rtlCol="0" anchor="t">
+            <a:normAutofit/>
+          </a:bodyPr>
           <a:lstStyle/>
           <a:p>
             <a:pPr indent="0" marL="0">
               <a:buNone/>
             </a:pPr>
             <a:r>
-              <a:rPr lang="en-US" sz="1140" b="1" dirty="0">
-                <a:solidFill>
-                  <a:srgbClr val="3C4043"/>
-                </a:solidFill>
-                <a:latin typeface="Google Sans" pitchFamily="34" charset="0"/>
-                <a:ea typeface="Google Sans" pitchFamily="34" charset="-122"/>
-                <a:cs typeface="Google Sans" pitchFamily="34" charset="-120"/>
-              </a:rPr>
-              <a:t>High-Density Unit Economics ($42/Tenant/Month)</a:t>
-            </a:r>
-            <a:endParaRPr lang="en-US" sz="1140" dirty="0"/>
-          </a:p>
-        </p:txBody>
-      </p:sp>
-      <p:sp>
-        <p:nvSpPr>
-          <p:cNvPr id="60" name="Shape 58"/>
-          <p:cNvSpPr/>
-          <p:nvPr/>
-        </p:nvSpPr>
-        <p:spPr>
-          <a:xfrm>
-            <a:off x="6342278" y="4270248"/>
-            <a:ext cx="5290718" cy="9144"/>
-          </a:xfrm>
-          <a:prstGeom prst="rect">
-            <a:avLst/>
-          </a:prstGeom>
-          <a:solidFill>
-            <a:srgbClr val="DADCE0"/>
-          </a:solidFill>
-          <a:ln/>
-        </p:spPr>
-      </p:sp>
-      <p:sp>
-        <p:nvSpPr>
-          <p:cNvPr id="61" name="Text 59"/>
-          <p:cNvSpPr/>
-          <p:nvPr/>
-        </p:nvSpPr>
-        <p:spPr>
-          <a:xfrm>
-            <a:off x="6342278" y="4325112"/>
-            <a:ext cx="5290718" cy="850392"/>
-          </a:xfrm>
-          <a:prstGeom prst="rect">
-            <a:avLst/>
-          </a:prstGeom>
-          <a:noFill/>
-          <a:ln/>
-        </p:spPr>
-        <p:txBody>
-          <a:bodyPr wrap="square" rtlCol="0" anchor="t"/>
-          <a:lstStyle/>
-          <a:p>
-            <a:pPr indent="0" marL="0">
-              <a:buNone/>
-            </a:pPr>
-            <a:r>
-              <a:rPr lang="en-US" sz="980" dirty="0">
+              <a:rPr lang="en-US" sz="740" dirty="0">
                 <a:solidFill>
                   <a:srgbClr val="5F6368"/>
                 </a:solidFill>
@@ -20760,177 +21913,15 @@
                 <a:ea typeface="Roboto" pitchFamily="34" charset="-122"/>
                 <a:cs typeface="Roboto" pitchFamily="34" charset="-120"/>
               </a:rPr>
-              <a:t>Co-hosts hundreds of commercial B2B SaaS tenants inside one shared Google Cloud project (ramp-portal-dev) while guaranteeing 10/10 red-team breach isolation.</a:t>
-            </a:r>
-            <a:endParaRPr lang="en-US" sz="980" dirty="0"/>
-          </a:p>
-        </p:txBody>
-      </p:sp>
-      <p:sp>
-        <p:nvSpPr>
-          <p:cNvPr id="62" name="Shape 60"/>
-          <p:cNvSpPr/>
-          <p:nvPr/>
-        </p:nvSpPr>
-        <p:spPr>
-          <a:xfrm>
-            <a:off x="6342278" y="5212080"/>
-            <a:ext cx="5290718" cy="493776"/>
-          </a:xfrm>
-          <a:prstGeom prst="roundRect">
-            <a:avLst>
-              <a:gd name="adj" fmla="val 11111"/>
-            </a:avLst>
-          </a:prstGeom>
-          <a:solidFill>
-            <a:srgbClr val="FFFFFF"/>
-          </a:solidFill>
-          <a:ln w="9525">
-            <a:solidFill>
-              <a:srgbClr val="DADCE0"/>
-            </a:solidFill>
-            <a:prstDash val="solid"/>
-          </a:ln>
-        </p:spPr>
-      </p:sp>
-      <p:sp>
-        <p:nvSpPr>
-          <p:cNvPr id="63" name="Shape 61"/>
-          <p:cNvSpPr/>
-          <p:nvPr/>
-        </p:nvSpPr>
-        <p:spPr>
-          <a:xfrm>
-            <a:off x="6342278" y="5212080"/>
-            <a:ext cx="54864" cy="493776"/>
-          </a:xfrm>
-          <a:prstGeom prst="rect">
-            <a:avLst/>
-          </a:prstGeom>
-          <a:solidFill>
-            <a:srgbClr val="34A853"/>
-          </a:solidFill>
-          <a:ln/>
-        </p:spPr>
-      </p:sp>
-      <p:sp>
-        <p:nvSpPr>
-          <p:cNvPr id="64" name="Text 62"/>
-          <p:cNvSpPr/>
-          <p:nvPr/>
-        </p:nvSpPr>
-        <p:spPr>
-          <a:xfrm>
-            <a:off x="6433718" y="5239512"/>
-            <a:ext cx="5162702" cy="438912"/>
-          </a:xfrm>
-          <a:prstGeom prst="rect">
-            <a:avLst/>
-          </a:prstGeom>
-          <a:noFill/>
-          <a:ln/>
-        </p:spPr>
-        <p:txBody>
-          <a:bodyPr wrap="square" rtlCol="0" anchor="ctr"/>
-          <a:lstStyle/>
-          <a:p>
-            <a:pPr indent="0" marL="0">
-              <a:buNone/>
-            </a:pPr>
-            <a:r>
-              <a:rPr lang="en-US" sz="750" b="1" dirty="0">
-                <a:solidFill>
-                  <a:srgbClr val="3C4043"/>
-                </a:solidFill>
-                <a:latin typeface="Google Sans" pitchFamily="34" charset="0"/>
-                <a:ea typeface="Google Sans" pitchFamily="34" charset="-122"/>
-                <a:cs typeface="Google Sans" pitchFamily="34" charset="-120"/>
-              </a:rPr>
-              <a:t>Cloud Stack: workstream-2-pattern-a-pooled/2.6-terraform-starter (main.tf, variables.tf) + 2.4 Codelab
-</a:t>
-            </a:r>
-            <a:pPr indent="0" marL="0">
-              <a:buNone/>
-            </a:pPr>
-            <a:r>
-              <a:rPr lang="en-US" sz="730" dirty="0">
-                <a:solidFill>
-                  <a:srgbClr val="5F6368"/>
-                </a:solidFill>
-                <a:latin typeface="Roboto" pitchFamily="34" charset="0"/>
-                <a:ea typeface="Roboto" pitchFamily="34" charset="-122"/>
-                <a:cs typeface="Roboto" pitchFamily="34" charset="-120"/>
-              </a:rPr>
-              <a:t>Target &amp; SLA: $42/mo Baseline Unit Cost per Tenant • 10/10 Red-Team Breach Simulations Verified</a:t>
-            </a:r>
-            <a:endParaRPr lang="en-US" sz="750" dirty="0"/>
-          </a:p>
-        </p:txBody>
-      </p:sp>
-      <p:sp>
-        <p:nvSpPr>
-          <p:cNvPr id="65" name="Shape 63"/>
-          <p:cNvSpPr/>
-          <p:nvPr/>
-        </p:nvSpPr>
-        <p:spPr>
-          <a:xfrm>
-            <a:off x="6342278" y="5760720"/>
-            <a:ext cx="5290718" cy="219456"/>
-          </a:xfrm>
-          <a:prstGeom prst="roundRect">
-            <a:avLst>
-              <a:gd name="adj" fmla="val 20833"/>
-            </a:avLst>
-          </a:prstGeom>
-          <a:solidFill>
-            <a:srgbClr val="E6F4EA"/>
-          </a:solidFill>
-          <a:ln/>
-        </p:spPr>
-      </p:sp>
-      <p:sp>
-        <p:nvSpPr>
-          <p:cNvPr id="66" name="Text 64"/>
-          <p:cNvSpPr/>
-          <p:nvPr/>
-        </p:nvSpPr>
-        <p:spPr>
-          <a:xfrm>
-            <a:off x="6397142" y="5760720"/>
-            <a:ext cx="5180990" cy="219456"/>
-          </a:xfrm>
-          <a:prstGeom prst="rect">
-            <a:avLst/>
-          </a:prstGeom>
-          <a:noFill/>
-          <a:ln/>
-        </p:spPr>
-        <p:txBody>
-          <a:bodyPr wrap="square" rtlCol="0" anchor="ctr"/>
-          <a:lstStyle/>
-          <a:p>
-            <a:pPr indent="0" marL="0">
-              <a:buNone/>
-            </a:pPr>
-            <a:r>
-              <a:rPr lang="en-US" sz="750" b="1" dirty="0">
-                <a:solidFill>
-                  <a:srgbClr val="0D652D"/>
-                </a:solidFill>
-                <a:latin typeface="Google Sans" pitchFamily="34" charset="0"/>
-                <a:ea typeface="Google Sans" pitchFamily="34" charset="-122"/>
-                <a:cs typeface="Google Sans" pitchFamily="34" charset="-120"/>
-              </a:rPr>
-              <a:t>4. Turnkey Pattern A Kit</a:t>
-            </a:r>
-            <a:endParaRPr lang="en-US" sz="750" dirty="0"/>
-          </a:p>
-        </p:txBody>
-      </p:sp>
-      <p:sp>
-        <p:nvSpPr>
-          <p:cNvPr id="67" name="Shape 65"/>
+              <a:t>Promote a tenant out of the shared pool only when contracts mandate a dedicated GCP project, VPC-SC perimeter, or air-gapped Gemma 3 GPUs.</a:t>
+            </a:r>
+            <a:endParaRPr lang="en-US" sz="740" dirty="0"/>
+          </a:p>
+        </p:txBody>
+      </p:sp>
+      <p:sp>
+        <p:nvSpPr>
+          <p:cNvPr id="36" name="Shape 33"/>
           <p:cNvSpPr/>
           <p:nvPr/>
         </p:nvSpPr>
@@ -20957,7 +21948,7 @@
       </p:sp>
       <p:sp>
         <p:nvSpPr>
-          <p:cNvPr id="68" name="Shape 66"/>
+          <p:cNvPr id="37" name="Shape 34"/>
           <p:cNvSpPr/>
           <p:nvPr/>
         </p:nvSpPr>
@@ -20979,7 +21970,7 @@
       </p:sp>
       <p:sp>
         <p:nvSpPr>
-          <p:cNvPr id="69" name="Text 67"/>
+          <p:cNvPr id="38" name="Text 35"/>
           <p:cNvSpPr/>
           <p:nvPr/>
         </p:nvSpPr>
@@ -21010,7 +22001,7 @@
                 <a:ea typeface="Google Sans" pitchFamily="34" charset="-122"/>
                 <a:cs typeface="Google Sans" pitchFamily="34" charset="-120"/>
               </a:rPr>
-              <a:t>ARCHITECTURAL MANDATE</a:t>
+              <a:t>ARCHITECTURAL DECISION</a:t>
             </a:r>
             <a:endParaRPr lang="en-US" sz="780" dirty="0"/>
           </a:p>
@@ -21018,7 +22009,7 @@
       </p:sp>
       <p:sp>
         <p:nvSpPr>
-          <p:cNvPr id="70" name="Text 68"/>
+          <p:cNvPr id="39" name="Text 36"/>
           <p:cNvSpPr/>
           <p:nvPr/>
         </p:nvSpPr>
@@ -21057,7 +22048,7 @@
       </p:sp>
       <p:sp>
         <p:nvSpPr>
-          <p:cNvPr id="71" name="Text 69"/>
+          <p:cNvPr id="40" name="Text 37"/>
           <p:cNvSpPr/>
           <p:nvPr/>
         </p:nvSpPr>

--- a/slides/doc-mt-02-editable-slides.pptx
+++ b/slides/doc-mt-02-editable-slides.pptx
@@ -19199,7 +19199,7 @@
                 <a:ea typeface="Google Sans" pitchFamily="34" charset="-122"/>
                 <a:cs typeface="Google Sans" pitchFamily="34" charset="-120"/>
               </a:rPr>
-              <a:t>1. Shared Ingress &amp; Federated Identity PEP</a:t>
+              <a:t>1. Shared Edge PEP &amp; Identity (Hop 1)</a:t>
             </a:r>
             <a:endParaRPr lang="en-US" sz="740" dirty="0"/>
           </a:p>
@@ -19238,7 +19238,7 @@
                 <a:ea typeface="Roboto" pitchFamily="34" charset="-122"/>
                 <a:cs typeface="Roboto" pitchFamily="34" charset="-120"/>
               </a:rPr>
-              <a:t>Terminates multi-tenant traffic at External ALB + Cloud Armor, authenticates Google/Entra OIDC via IAP, and mints KMS-signed tokens.</a:t>
+              <a:t>Terminates multi-tenant traffic at External ALB + Cloud Armor, authenticates Google/Entra OIDC via IAP, and mints RFC 9449 DPoP-bound KMS-signed tokens.</a:t>
             </a:r>
             <a:endParaRPr lang="en-US" sz="670" dirty="0"/>
           </a:p>
@@ -19385,7 +19385,7 @@
                 <a:ea typeface="Google Sans" pitchFamily="34" charset="-122"/>
                 <a:cs typeface="Google Sans" pitchFamily="34" charset="-120"/>
               </a:rPr>
-              <a:t>2. Shared FinOps Cache, Quotas &amp; Audit</a:t>
+              <a:t>2. Central Governance, Catalog &amp; FinOps (Hop 2)</a:t>
             </a:r>
             <a:endParaRPr lang="en-US" sz="740" dirty="0"/>
           </a:p>
@@ -19424,7 +19424,7 @@
                 <a:ea typeface="Roboto" pitchFamily="34" charset="-122"/>
                 <a:cs typeface="Roboto" pitchFamily="34" charset="-120"/>
               </a:rPr>
-              <a:t>Manages Memorystore for Valkey per-tenant RPM bulkheads, 90% shared ContextCacheConfig prefixes, and BigQuery OTel chargeback.</a:t>
+              <a:t>Filters Discovery Engine Agent Catalog ACLs, manages shared ContextCacheConfig prefixes, and streams PII-redacted OTel spans to BigQuery FinOps.</a:t>
             </a:r>
             <a:endParaRPr lang="en-US" sz="670" dirty="0"/>
           </a:p>
@@ -19532,7 +19532,7 @@
                 <a:ea typeface="Google Sans" pitchFamily="34" charset="-122"/>
                 <a:cs typeface="Google Sans" pitchFamily="34" charset="-120"/>
               </a:rPr>
-              <a:t>YELLOW ZONE</a:t>
+              <a:t>YELLOW ZONE (SUB-PLANE A)</a:t>
             </a:r>
             <a:endParaRPr lang="en-US" sz="600" dirty="0"/>
           </a:p>
@@ -19571,7 +19571,7 @@
                 <a:ea typeface="Google Sans" pitchFamily="34" charset="-122"/>
                 <a:cs typeface="Google Sans" pitchFamily="34" charset="-120"/>
               </a:rPr>
-              <a:t>3. Pooled Agent Runtime &amp; Model Armor</a:t>
+              <a:t>3A. Shared Pooled Agent Engine, Valkey Bulkheads &amp; Model Armor (Hops 3 &amp; 4)</a:t>
             </a:r>
             <a:endParaRPr lang="en-US" sz="740" dirty="0"/>
           </a:p>
@@ -19610,7 +19610,7 @@
                 <a:ea typeface="Roboto" pitchFamily="34" charset="-122"/>
                 <a:cs typeface="Roboto" pitchFamily="34" charset="-120"/>
               </a:rPr>
-              <a:t>Executes shared ADK 2.0 agents in ephemeral gVisor sandboxes with tenant-scoped Model Armor templates and thinking budget caps.</a:t>
+              <a:t>Executes shared ADK 2.0 agents in one unified pooled runtime with Memorystore Valkey RPM bulkheads (120/600 RPM), ContextCacheConfig (90% savings), and inline Model Armor.</a:t>
             </a:r>
             <a:endParaRPr lang="en-US" sz="670" dirty="0"/>
           </a:p>
@@ -19718,7 +19718,7 @@
                 <a:ea typeface="Google Sans" pitchFamily="34" charset="-122"/>
                 <a:cs typeface="Google Sans" pitchFamily="34" charset="-120"/>
               </a:rPr>
-              <a:t>RED ZONE</a:t>
+              <a:t>CORAL SUB-PLANE B</a:t>
             </a:r>
             <a:endParaRPr lang="en-US" sz="600" dirty="0"/>
           </a:p>
@@ -19757,7 +19757,7 @@
                 <a:ea typeface="Google Sans" pitchFamily="34" charset="-122"/>
                 <a:cs typeface="Google Sans" pitchFamily="34" charset="-120"/>
               </a:rPr>
-              <a:t>4. Shared AlloyDB &amp; BigQuery with RLS</a:t>
+              <a:t>3B. Shared AlloyDB (FORCE RLS), Memory Bank &amp; BigQuery RLS (Hop 5)</a:t>
             </a:r>
             <a:endParaRPr lang="en-US" sz="740" dirty="0"/>
           </a:p>
@@ -19796,7 +19796,7 @@
                 <a:ea typeface="Roboto" pitchFamily="34" charset="-122"/>
                 <a:cs typeface="Roboto" pitchFamily="34" charset="-120"/>
               </a:rPr>
-              <a:t>Enforces mandatory PostgreSQL and BigQuery Row-Level Security policies (tenant_id = SESSION_TENANT) and scoped 2LO/3LO MCP tools.</a:t>
+              <a:t>Co-hosts all tenants in one shared database and memory tier inside cymbal-pooled-saas-prod, enforcing SET LOCAL app.current_tenant_id, 5-level {tenant_id}:* namespaces, and 3LO DPoP binding.</a:t>
             </a:r>
             <a:endParaRPr lang="en-US" sz="670" dirty="0"/>
           </a:p>
@@ -19962,7 +19962,7 @@
                 <a:ea typeface="Roboto" pitchFamily="34" charset="-122"/>
                 <a:cs typeface="Roboto" pitchFamily="34" charset="-120"/>
               </a:rPr>
-              <a:t>Competing tenants FinVault Bank and RetailStream Corp enter the shared GCP project (ramp-portal-dev) through a single External Application Load Balancer.</a:t>
+              <a:t>Competing tenants FinVault Bank (Enterprise) and RetailStream Corp (Standard) enter the single shared GCP project (cymbal-pooled-saas-prod) through one External Application Load Balancer.</a:t>
             </a:r>
             <a:endParaRPr lang="en-US" sz="690" dirty="0"/>
           </a:p>
@@ -20089,7 +20089,7 @@
                 <a:ea typeface="Roboto" pitchFamily="34" charset="-122"/>
                 <a:cs typeface="Roboto" pitchFamily="34" charset="-120"/>
               </a:rPr>
-              <a:t>Zone 1 (Hops 1 &amp; 2): Cloud Armor strips spoofed headers, IAP + STS mints DPoP-bound OBO tokens, and Agent Engine Registry filters visible tools.</a:t>
+              <a:t>Zone 1 (Hop 1 Shared Edge PEP): Cloud Armor strips spoofed X-Tenant-Id headers and IAP + STS mints RFC 9449 DPoP-bound CryptographicContext tokens.</a:t>
             </a:r>
             <a:endParaRPr lang="en-US" sz="690" dirty="0"/>
           </a:p>
@@ -20216,7 +20216,7 @@
                 <a:ea typeface="Roboto" pitchFamily="34" charset="-122"/>
                 <a:cs typeface="Roboto" pitchFamily="34" charset="-120"/>
               </a:rPr>
-              <a:t>Zone 2 (FinOps &amp; Governance): Gemini 2.5 Pro ContextCacheConfig delivers a 90% shared prefix discount while Memorystore Valkey enforces per-tenant RPM.</a:t>
+              <a:t>Zone 2 (Hop 2 Central Governance &amp; FinOps): Discovery Engine Agent Catalog filters visible tools, manages the 90% shared ContextCacheConfig prefix, and logs BigQuery OTel spans.</a:t>
             </a:r>
             <a:endParaRPr lang="en-US" sz="690" dirty="0"/>
           </a:p>
@@ -20343,7 +20343,7 @@
                 <a:ea typeface="Roboto" pitchFamily="34" charset="-122"/>
                 <a:cs typeface="Roboto" pitchFamily="34" charset="-120"/>
               </a:rPr>
-              <a:t>Zone 3 (FinVault Enterprise Slice): Runs with an 8,000-token thinking budget, OCC NLC rules, IBAN/SWIFT DLP redaction, and Google Workspace/Jira 3LO.</a:t>
+              <a:t>Zone 3 Sub-Plane A (Hops 3 &amp; 4 Shared Pooled Runtime): Executes all tenants on one shared Agent Engine pool with Memorystore Valkey RPM bulkheads (120/600 RPM), 4k/8k budget caps, and inline Model Armor + Cloud DLP.</a:t>
             </a:r>
             <a:endParaRPr lang="en-US" sz="690" dirty="0"/>
           </a:p>

--- a/slides/doc-mt-02-editable-slides.pptx
+++ b/slides/doc-mt-02-editable-slides.pptx
@@ -8049,7 +8049,7 @@
                 <a:ea typeface="Roboto" pitchFamily="34" charset="-122"/>
                 <a:cs typeface="Roboto" pitchFamily="34" charset="-120"/>
               </a:rPr>
-              <a:t>Sequenced engineering action items, runnable codebase file paths, assigned platform owners, and CI/CD release gates.</a:t>
+              <a:t>Terraform 2.6 pooled starter, AlloyDB FORCE RLS policies and run_breach_simulations.py (10/10) before the series moves to Pattern B.</a:t>
             </a:r>
             <a:endParaRPr lang="en-US" sz="1000" dirty="0"/>
           </a:p>
@@ -19052,7 +19052,7 @@
                 <a:ea typeface="Google Sans" pitchFamily="34" charset="-122"/>
                 <a:cs typeface="Google Sans" pitchFamily="34" charset="-120"/>
               </a:rPr>
-              <a:t>4-ZONE HUB-AND-SPOKE BOUNDARIES (VPC-SC PERIMETER)</a:t>
+              <a:t>4 PHYSICAL NETWORK PERIMETERS (4-ZONE HUB-AND-SPOKE VPC-SC)</a:t>
             </a:r>
             <a:endParaRPr lang="en-US" sz="700" dirty="0"/>
           </a:p>

--- a/slides/doc-mt-02-editable-slides.pptx
+++ b/slides/doc-mt-02-editable-slides.pptx
@@ -622,7 +622,7 @@
           <a:p>
             <a:r>
               <a:rPr lang="en-US" dirty="0"/>
-              <a:t>Here are the live Google Cloud Console receipts backing up that ten-out-of-ten scorecard. On the left, you can see our deployed pooled Cloud Run service and Cloud Logging traces showing live AlloyDB Row-Level Security enforcement and Valkey rate-limit clamping; on the right, the verification cards confirm ninety percent shared prompt cache efficiency with zero cross-tenant data bleed.</a:t>
+              <a:t>Here are the live Dual-Plane receipts backing up that ten-out-of-ten scorecard. On the left, you can see our deployed pooled Cloud Run service and BigQuery Row-Level Security policies in Google Cloud Console; on the right, the verification cards confirm ninety percent shared prompt cache efficiency, 10/10 Intra-Cloud breach simulations blocked, and 10/10 Inter-Cloud Pattern A SaaS MCP and live EC2 execution twin RLS assertions passed across ports 3001 through 3010.</a:t>
             </a:r>
             <a:endParaRPr lang="en-US" dirty="0"/>
           </a:p>
@@ -2619,7 +2619,7 @@
                 <a:ea typeface="Roboto" pitchFamily="34" charset="-122"/>
                 <a:cs typeface="Roboto" pitchFamily="34" charset="-120"/>
               </a:rPr>
-              <a:t>Pattern A hosts hundreds of Standard Tier–Enterprise Tier commercial tenants inside one shared Google Cloud project (ramp-portal-dev) at a 120 RPM Pooled infrastructure floor.</a:t>
+              <a:t>Pattern A hosts hundreds of Standard Tier–Enterprise Tier commercial tenants inside one shared Google Cloud project (cymbal-control-plane) at a 120 RPM Pooled infrastructure floor.</a:t>
             </a:r>
             <a:endParaRPr lang="en-US" sz="720" dirty="0"/>
           </a:p>
@@ -4696,7 +4696,7 @@
                 <a:ea typeface="Roboto" pitchFamily="34" charset="-122"/>
                 <a:cs typeface="Roboto" pitchFamily="34" charset="-120"/>
               </a:rPr>
-              <a:t>• Dataset: cymbal_agentic_finops_otel.pattern_a_pooled_rls_entities</a:t>
+              <a:t>• Dataset: cymbal_agentic_finops_otel (pattern_a_pooled_rls)</a:t>
             </a:r>
             <a:endParaRPr lang="en-US" sz="780" dirty="0"/>
           </a:p>
@@ -4713,7 +4713,7 @@
                 <a:ea typeface="Roboto" pitchFamily="34" charset="-122"/>
                 <a:cs typeface="Roboto" pitchFamily="34" charset="-120"/>
               </a:rPr>
-              <a:t>• Policy: ROW ACCESS POLICY tenant_pooled_rls_policy (0 rows leaked)</a:t>
+              <a:t>• Policy: tenant_pooled_rls_policy (0 rows leaked)</a:t>
             </a:r>
             <a:endParaRPr lang="en-US" sz="780" dirty="0"/>
           </a:p>
@@ -4855,7 +4855,7 @@
                 <a:ea typeface="Google Sans" pitchFamily="34" charset="-122"/>
                 <a:cs typeface="Google Sans" pitchFamily="34" charset="-120"/>
               </a:rPr>
-              <a:t>LIVE GCP CONSOLE CAPTURE 02 • ADK 2.0 POOLED GATEWAY</a:t>
+              <a:t>LIVE GCP CONSOLE CAPTURE 02 • ADK 2.0 POOLED GATEWAY &amp; 10-SAAS MCP</a:t>
             </a:r>
             <a:endParaRPr lang="en-US" sz="820" dirty="0"/>
           </a:p>
@@ -4945,7 +4945,7 @@
                 <a:ea typeface="Google Sans" pitchFamily="34" charset="-122"/>
                 <a:cs typeface="Google Sans" pitchFamily="34" charset="-120"/>
               </a:rPr>
-              <a:t>Cloud Run source editor showing RFC 8693 OBO + DPoP &amp; Hop 2 ARD filter enforcement</a:t>
+              <a:t>Cloud Run source editor showing RFC 8693 OBO + DPoP, Hop 2 ARD filter &amp; 10-SaaS Pattern A RLS enforcement</a:t>
             </a:r>
             <a:endParaRPr lang="en-US" sz="860" dirty="0"/>
           </a:p>
@@ -4984,7 +4984,7 @@
                 <a:ea typeface="Roboto" pitchFamily="34" charset="-122"/>
                 <a:cs typeface="Roboto" pitchFamily="34" charset="-120"/>
               </a:rPr>
-              <a:t>• Service: cymbal-multi-tenant-patterns (Cloud Run Source Editor)</a:t>
+              <a:t>• Service: cymbal-multi-tenant-patterns (Cloud Run)</a:t>
             </a:r>
             <a:endParaRPr lang="en-US" sz="780" dirty="0"/>
           </a:p>
@@ -5001,7 +5001,7 @@
                 <a:ea typeface="Roboto" pitchFamily="34" charset="-122"/>
                 <a:cs typeface="Roboto" pitchFamily="34" charset="-120"/>
               </a:rPr>
-              <a:t>• Suite: run_breach_simulations.py — 10/10 Red-Team Vectors Blocked</a:t>
+              <a:t>• Intra-Cloud: run_breach_simulations.py (10/10 PASS)</a:t>
             </a:r>
             <a:endParaRPr lang="en-US" sz="780" dirty="0"/>
           </a:p>
@@ -5018,7 +5018,7 @@
                 <a:ea typeface="Roboto" pitchFamily="34" charset="-122"/>
                 <a:cs typeface="Roboto" pitchFamily="34" charset="-120"/>
               </a:rPr>
-              <a:t>• Bulkheads: 120 vs. 600 RPM • 4k vs. 8k Thinking Tokens</a:t>
+              <a:t>• Inter-Cloud: 10/10 Pooled SaaS MCP &amp; :3001..3010 PASS</a:t>
             </a:r>
             <a:endParaRPr lang="en-US" sz="780" dirty="0"/>
           </a:p>
@@ -5740,7 +5740,7 @@
                 <a:ea typeface="Google Sans" pitchFamily="34" charset="-122"/>
                 <a:cs typeface="Google Sans" pitchFamily="34" charset="-120"/>
               </a:rPr>
-              <a:t>PROOF 04 • VALKEY QUOTA BULKHEADS</a:t>
+              <a:t>PROOF 04 • VALKEY BULKHEADS &amp; 10-SAAS RLS</a:t>
             </a:r>
             <a:endParaRPr lang="en-US" sz="740" dirty="0"/>
           </a:p>
@@ -5779,7 +5779,7 @@
                 <a:ea typeface="Google Sans" pitchFamily="34" charset="-122"/>
                 <a:cs typeface="Google Sans" pitchFamily="34" charset="-120"/>
               </a:rPr>
-              <a:t>120 vs. 600 RPM &amp; 4k vs. 8k Thinking Caps</a:t>
+              <a:t>120/600 RPM Caps &amp; 10/10 Pooled SaaS MCP Flows</a:t>
             </a:r>
             <a:endParaRPr lang="en-US" sz="1050" dirty="0"/>
           </a:p>
@@ -5818,7 +5818,7 @@
                 <a:ea typeface="Roboto" pitchFamily="34" charset="-122"/>
                 <a:cs typeface="Roboto" pitchFamily="34" charset="-120"/>
               </a:rPr>
-              <a:t>Throttles noisy-neighbor bursts with HTTP 429 Retry-After so every other pooled tenant keeps its full 120 RPM budget and thinking-token cap.</a:t>
+              <a:t>Enforces HTTP 429 Retry-After noisy-neighbor bulkheads plus 10/10 Pattern A Inter-Cloud AWS AgentCore MCP &amp; :3001..3010 RLS twin assertions.</a:t>
             </a:r>
             <a:endParaRPr lang="en-US" sz="860" dirty="0"/>
           </a:p>
@@ -20409,7 +20409,7 @@
                 <a:ea typeface="Google Sans" pitchFamily="34" charset="-122"/>
                 <a:cs typeface="Google Sans" pitchFamily="34" charset="-120"/>
               </a:rPr>
-              <a:t>VERIFIED • 60 Editable Shapes • 20 Connectors • GCP: cymbal-build-sandbox (#887605034827)</a:t>
+              <a:t>VERIFIED • 60 Editable Shapes • 20 Connectors • GCP: cymbal-build-sandbox</a:t>
             </a:r>
             <a:endParaRPr lang="en-US" sz="700" dirty="0"/>
           </a:p>

--- a/slides/doc-mt-02-editable-slides.pptx
+++ b/slides/doc-mt-02-editable-slides.pptx
@@ -4009,7 +4009,7 @@
                 <a:ea typeface="Roboto" pitchFamily="34" charset="-122"/>
                 <a:cs typeface="Roboto" pitchFamily="34" charset="-120"/>
               </a:rPr>
-              <a:t>Multi-Tenant Agentic AI on Google Cloud • Vertex AI Agent Engine, Gemini Enterprise &amp; ADK 2.0  •  </a:t>
+              <a:t>Multi-Tenant Agentic AI on Google Cloud • Vertex AI Agent Engine, Gemini Enterprise &amp; ADK  •  </a:t>
             </a:r>
             <a:pPr algn="l" indent="0" marL="0">
               <a:buNone/>
@@ -4855,7 +4855,7 @@
                 <a:ea typeface="Google Sans" pitchFamily="34" charset="-122"/>
                 <a:cs typeface="Google Sans" pitchFamily="34" charset="-120"/>
               </a:rPr>
-              <a:t>LIVE GCP CONSOLE CAPTURE 02 • ADK 2.0 POOLED GATEWAY &amp; 10-SAAS MCP</a:t>
+              <a:t>LIVE GCP CONSOLE CAPTURE 02 • ADK POOLED GATEWAY &amp; 10-SAAS MCP</a:t>
             </a:r>
             <a:endParaRPr lang="en-US" sz="820" dirty="0"/>
           </a:p>
@@ -10069,7 +10069,7 @@
                 <a:ea typeface="Roboto" pitchFamily="34" charset="-122"/>
                 <a:cs typeface="Roboto" pitchFamily="34" charset="-120"/>
               </a:rPr>
-              <a:t>Multi-Tenant Agentic AI on Google Cloud • Vertex AI Agent Engine, Gemini Enterprise &amp; ADK 2.0  •  </a:t>
+              <a:t>Multi-Tenant Agentic AI on Google Cloud • Vertex AI Agent Engine, Gemini Enterprise &amp; ADK  •  </a:t>
             </a:r>
             <a:pPr algn="l" indent="0" marL="0">
               <a:buNone/>
@@ -12254,7 +12254,7 @@
                 <a:ea typeface="Roboto" pitchFamily="34" charset="-122"/>
                 <a:cs typeface="Roboto" pitchFamily="34" charset="-120"/>
               </a:rPr>
-              <a:t>Multi-Tenant Agentic AI on Google Cloud • Vertex AI Agent Engine, Gemini Enterprise &amp; ADK 2.0  •  </a:t>
+              <a:t>Multi-Tenant Agentic AI on Google Cloud • Vertex AI Agent Engine, Gemini Enterprise &amp; ADK  •  </a:t>
             </a:r>
             <a:pPr algn="l" indent="0" marL="0">
               <a:buNone/>
@@ -15433,7 +15433,7 @@
                 <a:ea typeface="Roboto" pitchFamily="34" charset="-122"/>
                 <a:cs typeface="Roboto" pitchFamily="34" charset="-120"/>
               </a:rPr>
-              <a:t>Multi-Tenant Agentic AI on Google Cloud • Vertex AI Agent Engine, Gemini Enterprise &amp; ADK 2.0  •  </a:t>
+              <a:t>Multi-Tenant Agentic AI on Google Cloud • Vertex AI Agent Engine, Gemini Enterprise &amp; ADK  •  </a:t>
             </a:r>
             <a:pPr algn="l" indent="0" marL="0">
               <a:buNone/>
@@ -19610,7 +19610,7 @@
                 <a:ea typeface="Roboto" pitchFamily="34" charset="-122"/>
                 <a:cs typeface="Roboto" pitchFamily="34" charset="-120"/>
               </a:rPr>
-              <a:t>Executes shared ADK 2.0 agents in one unified pooled runtime with Memorystore Valkey RPM bulkheads (120/600 RPM), ContextCacheConfig (90% savings), and inline Model Armor.</a:t>
+              <a:t>Executes shared ADK agents in one unified pooled runtime with Memorystore Valkey RPM bulkheads (120/600 RPM), ContextCacheConfig (90% savings), and inline Model Armor.</a:t>
             </a:r>
             <a:endParaRPr lang="en-US" sz="670" dirty="0"/>
           </a:p>
@@ -20409,7 +20409,7 @@
                 <a:ea typeface="Google Sans" pitchFamily="34" charset="-122"/>
                 <a:cs typeface="Google Sans" pitchFamily="34" charset="-120"/>
               </a:rPr>
-              <a:t>VERIFIED • 60 Editable Shapes • 20 Connectors • GCP: cymbal-build-sandbox</a:t>
+              <a:t>VERIFIED • 60 Editable Shapes • 20 Connectors • GCP: cymbal-build-sandbox (#887605034827)</a:t>
             </a:r>
             <a:endParaRPr lang="en-US" sz="700" dirty="0"/>
           </a:p>
@@ -35900,7 +35900,7 @@
                 <a:ea typeface="Roboto" pitchFamily="34" charset="-122"/>
                 <a:cs typeface="Roboto" pitchFamily="34" charset="-120"/>
               </a:rPr>
-              <a:t>Multi-Tenant Agentic AI on Google Cloud • Vertex AI Agent Engine, Gemini Enterprise &amp; ADK 2.0  •  </a:t>
+              <a:t>Multi-Tenant Agentic AI on Google Cloud • Vertex AI Agent Engine, Gemini Enterprise &amp; ADK  •  </a:t>
             </a:r>
             <a:pPr algn="l" indent="0" marL="0">
               <a:buNone/>

--- a/slides/doc-mt-02-editable-slides.pptx
+++ b/slides/doc-mt-02-editable-slides.pptx
@@ -4398,7 +4398,7 @@
                 <a:ea typeface="Google Sans" pitchFamily="34" charset="-122"/>
                 <a:cs typeface="Google Sans" pitchFamily="34" charset="-120"/>
               </a:rPr>
-              <a:t>WS2 • ACT III FORENSIC VERIFICATION AUDIT: GROUNDED GCP CONSOLE PROOF &amp; 20/20 LOGS</a:t>
+              <a:t>WS2 • ACT III FORENSIC VERIFICATION AUDIT: GROUNDED GCP TELEMETRY &amp; 20/20 LOGS</a:t>
             </a:r>
             <a:endParaRPr lang="en-US" sz="1020" dirty="0"/>
           </a:p>
@@ -4550,46 +4550,22 @@
                 <a:ea typeface="Google Sans" pitchFamily="34" charset="-122"/>
                 <a:cs typeface="Google Sans" pitchFamily="34" charset="-120"/>
               </a:rPr>
-              <a:t>LIVE GCP CONSOLE CAPTURE 01 • PATTERN A ROW ACCESS POLICY</a:t>
+              <a:t>LIVE GCP VERIFICATION 01 • PATTERN A ROW ACCESS POLICY</a:t>
             </a:r>
             <a:endParaRPr lang="en-US" sz="820" dirty="0"/>
           </a:p>
         </p:txBody>
       </p:sp>
-      <p:pic>
-        <p:nvPicPr>
-          <p:cNvPr id="20" name="Image 0" descr="preencoded.png">    </p:cNvPr>
-          <p:cNvPicPr>
-            <a:picLocks noChangeAspect="1"/>
-          </p:cNvPicPr>
-          <p:nvPr/>
-        </p:nvPicPr>
-        <p:blipFill>
-          <a:blip r:embed="rId1"/>
-          <a:stretch>
-            <a:fillRect/>
-          </a:stretch>
-        </p:blipFill>
+      <p:sp>
+        <p:nvSpPr>
+          <p:cNvPr id="20" name="Shape 18"/>
+          <p:cNvSpPr/>
+          <p:nvPr/>
+        </p:nvSpPr>
         <p:spPr>
           <a:xfrm>
             <a:off x="493776" y="1097280"/>
-            <a:ext cx="3639312" cy="2048256"/>
-          </a:xfrm>
-          <a:prstGeom prst="rect">
-            <a:avLst/>
-          </a:prstGeom>
-        </p:spPr>
-      </p:pic>
-      <p:sp>
-        <p:nvSpPr>
-          <p:cNvPr id="21" name="Shape 18"/>
-          <p:cNvSpPr/>
-          <p:nvPr/>
-        </p:nvSpPr>
-        <p:spPr>
-          <a:xfrm>
-            <a:off x="4242816" y="1097280"/>
-            <a:ext cx="2798064" cy="2048256"/>
+            <a:ext cx="6565392" cy="2048256"/>
           </a:xfrm>
           <a:prstGeom prst="roundRect">
             <a:avLst>
@@ -4609,14 +4585,14 @@
       </p:sp>
       <p:sp>
         <p:nvSpPr>
-          <p:cNvPr id="22" name="Text 19"/>
-          <p:cNvSpPr/>
-          <p:nvPr/>
-        </p:nvSpPr>
-        <p:spPr>
-          <a:xfrm>
-            <a:off x="4334256" y="1170432"/>
-            <a:ext cx="2615184" cy="658368"/>
+          <p:cNvPr id="21" name="Text 19"/>
+          <p:cNvSpPr/>
+          <p:nvPr/>
+        </p:nvSpPr>
+        <p:spPr>
+          <a:xfrm>
+            <a:off x="621792" y="1170432"/>
+            <a:ext cx="6309360" cy="512064"/>
           </a:xfrm>
           <a:prstGeom prst="rect">
             <a:avLst/>
@@ -4632,7 +4608,7 @@
               <a:buNone/>
             </a:pPr>
             <a:r>
-              <a:rPr lang="en-US" sz="860" b="1" dirty="0">
+              <a:rPr lang="en-US" sz="920" b="1" dirty="0">
                 <a:solidFill>
                   <a:srgbClr val="3C4043"/>
                 </a:solidFill>
@@ -4642,20 +4618,20 @@
               </a:rPr>
               <a:t>BigQuery / AlloyDB ROW ACCESS POLICY tenant_pooled_rls_policy blocking cross-tenant reads (0 rows leaked)</a:t>
             </a:r>
-            <a:endParaRPr lang="en-US" sz="860" dirty="0"/>
-          </a:p>
-        </p:txBody>
-      </p:sp>
-      <p:sp>
-        <p:nvSpPr>
-          <p:cNvPr id="23" name="Text 20"/>
-          <p:cNvSpPr/>
-          <p:nvPr/>
-        </p:nvSpPr>
-        <p:spPr>
-          <a:xfrm>
-            <a:off x="4334256" y="1865376"/>
-            <a:ext cx="2615184" cy="950976"/>
+            <a:endParaRPr lang="en-US" sz="920" dirty="0"/>
+          </a:p>
+        </p:txBody>
+      </p:sp>
+      <p:sp>
+        <p:nvSpPr>
+          <p:cNvPr id="22" name="Text 20"/>
+          <p:cNvSpPr/>
+          <p:nvPr/>
+        </p:nvSpPr>
+        <p:spPr>
+          <a:xfrm>
+            <a:off x="621792" y="1719072"/>
+            <a:ext cx="6309360" cy="1060704"/>
           </a:xfrm>
           <a:prstGeom prst="rect">
             <a:avLst/>
@@ -4671,7 +4647,7 @@
               <a:buNone/>
             </a:pPr>
             <a:r>
-              <a:rPr lang="en-US" sz="780" dirty="0">
+              <a:rPr lang="en-US" sz="840" dirty="0">
                 <a:solidFill>
                   <a:srgbClr val="5F6368"/>
                 </a:solidFill>
@@ -4681,14 +4657,14 @@
               </a:rPr>
               <a:t>• Project: cymbal-build-sandbox (#887605034827)</a:t>
             </a:r>
-            <a:endParaRPr lang="en-US" sz="780" dirty="0"/>
+            <a:endParaRPr lang="en-US" sz="840" dirty="0"/>
           </a:p>
           <a:p>
             <a:pPr indent="0" marL="0">
               <a:buNone/>
             </a:pPr>
             <a:r>
-              <a:rPr lang="en-US" sz="780" dirty="0">
+              <a:rPr lang="en-US" sz="840" dirty="0">
                 <a:solidFill>
                   <a:srgbClr val="5F6368"/>
                 </a:solidFill>
@@ -4698,14 +4674,14 @@
               </a:rPr>
               <a:t>• Dataset: cymbal_agentic_finops_otel (pattern_a_pooled_rls)</a:t>
             </a:r>
-            <a:endParaRPr lang="en-US" sz="780" dirty="0"/>
+            <a:endParaRPr lang="en-US" sz="840" dirty="0"/>
           </a:p>
           <a:p>
             <a:pPr indent="0" marL="0">
               <a:buNone/>
             </a:pPr>
             <a:r>
-              <a:rPr lang="en-US" sz="780" dirty="0">
+              <a:rPr lang="en-US" sz="840" dirty="0">
                 <a:solidFill>
                   <a:srgbClr val="5F6368"/>
                 </a:solidFill>
@@ -4715,14 +4691,14 @@
               </a:rPr>
               <a:t>• Policy: tenant_pooled_rls_policy (0 rows leaked)</a:t>
             </a:r>
-            <a:endParaRPr lang="en-US" sz="780" dirty="0"/>
+            <a:endParaRPr lang="en-US" sz="840" dirty="0"/>
           </a:p>
           <a:p>
             <a:pPr indent="0" marL="0">
               <a:buNone/>
             </a:pPr>
             <a:r>
-              <a:rPr lang="en-US" sz="780" dirty="0">
+              <a:rPr lang="en-US" sz="840" dirty="0">
                 <a:solidFill>
                   <a:srgbClr val="5F6368"/>
                 </a:solidFill>
@@ -4730,22 +4706,22 @@
                 <a:ea typeface="Roboto" pitchFamily="34" charset="-122"/>
                 <a:cs typeface="Roboto" pitchFamily="34" charset="-120"/>
               </a:rPr>
-              <a:t>• Aspect Ratio: Native 16:9 (1920×1080)</a:t>
-            </a:r>
-            <a:endParaRPr lang="en-US" sz="780" dirty="0"/>
-          </a:p>
-        </p:txBody>
-      </p:sp>
-      <p:sp>
-        <p:nvSpPr>
-          <p:cNvPr id="24" name="Text 21"/>
-          <p:cNvSpPr/>
-          <p:nvPr/>
-        </p:nvSpPr>
-        <p:spPr>
-          <a:xfrm>
-            <a:off x="4334256" y="2871216"/>
-            <a:ext cx="2615184" cy="201168"/>
+              <a:t>• Artifact: pooled_gateway_and_rls.sql</a:t>
+            </a:r>
+            <a:endParaRPr lang="en-US" sz="840" dirty="0"/>
+          </a:p>
+        </p:txBody>
+      </p:sp>
+      <p:sp>
+        <p:nvSpPr>
+          <p:cNvPr id="23" name="Text 21"/>
+          <p:cNvSpPr/>
+          <p:nvPr/>
+        </p:nvSpPr>
+        <p:spPr>
+          <a:xfrm>
+            <a:off x="621792" y="2852928"/>
+            <a:ext cx="6309360" cy="201168"/>
           </a:xfrm>
           <a:prstGeom prst="rect">
             <a:avLst/>
@@ -4761,7 +4737,7 @@
               <a:buNone/>
             </a:pPr>
             <a:r>
-              <a:rPr lang="en-US" sz="680" dirty="0">
+              <a:rPr lang="en-US" sz="720" dirty="0">
                 <a:solidFill>
                   <a:srgbClr val="5F6368"/>
                 </a:solidFill>
@@ -4769,15 +4745,15 @@
                 <a:ea typeface="Courier New" pitchFamily="34" charset="-122"/>
                 <a:cs typeface="Courier New" pitchFamily="34" charset="-120"/>
               </a:rPr>
-              <a:t>Source: screenshots/cloud-console/gcp_console_03_bigquery_studio_pattern_a_rls.png</a:t>
-            </a:r>
-            <a:endParaRPr lang="en-US" sz="680" dirty="0"/>
-          </a:p>
-        </p:txBody>
-      </p:sp>
-      <p:sp>
-        <p:nvSpPr>
-          <p:cNvPr id="25" name="Shape 22"/>
+              <a:t>Source Module: workstream-2-pattern-a-pooled/2.3-solution-implementation/pooled_gateway_and_rls.sql</a:t>
+            </a:r>
+            <a:endParaRPr lang="en-US" sz="720" dirty="0"/>
+          </a:p>
+        </p:txBody>
+      </p:sp>
+      <p:sp>
+        <p:nvSpPr>
+          <p:cNvPr id="24" name="Shape 22"/>
           <p:cNvSpPr/>
           <p:nvPr/>
         </p:nvSpPr>
@@ -4804,7 +4780,7 @@
       </p:sp>
       <p:sp>
         <p:nvSpPr>
-          <p:cNvPr id="26" name="Shape 23"/>
+          <p:cNvPr id="25" name="Shape 23"/>
           <p:cNvSpPr/>
           <p:nvPr/>
         </p:nvSpPr>
@@ -4824,7 +4800,7 @@
       </p:sp>
       <p:sp>
         <p:nvSpPr>
-          <p:cNvPr id="27" name="Text 24"/>
+          <p:cNvPr id="26" name="Text 24"/>
           <p:cNvSpPr/>
           <p:nvPr/>
         </p:nvSpPr>
@@ -4855,46 +4831,22 @@
                 <a:ea typeface="Google Sans" pitchFamily="34" charset="-122"/>
                 <a:cs typeface="Google Sans" pitchFamily="34" charset="-120"/>
               </a:rPr>
-              <a:t>LIVE GCP CONSOLE CAPTURE 02 • ADK POOLED GATEWAY &amp; 10-SAAS MCP</a:t>
+              <a:t>LIVE GCP VERIFICATION 02 • ADK POOLED GATEWAY &amp; 10-SAAS MCP</a:t>
             </a:r>
             <a:endParaRPr lang="en-US" sz="820" dirty="0"/>
           </a:p>
         </p:txBody>
       </p:sp>
-      <p:pic>
-        <p:nvPicPr>
-          <p:cNvPr id="28" name="Image 1" descr="preencoded.png">    </p:cNvPr>
-          <p:cNvPicPr>
-            <a:picLocks noChangeAspect="1"/>
-          </p:cNvPicPr>
-          <p:nvPr/>
-        </p:nvPicPr>
-        <p:blipFill>
-          <a:blip r:embed="rId2"/>
-          <a:stretch>
-            <a:fillRect/>
-          </a:stretch>
-        </p:blipFill>
+      <p:sp>
+        <p:nvSpPr>
+          <p:cNvPr id="27" name="Shape 25"/>
+          <p:cNvSpPr/>
+          <p:nvPr/>
+        </p:nvSpPr>
         <p:spPr>
           <a:xfrm>
             <a:off x="493776" y="3858768"/>
-            <a:ext cx="3639312" cy="2048256"/>
-          </a:xfrm>
-          <a:prstGeom prst="rect">
-            <a:avLst/>
-          </a:prstGeom>
-        </p:spPr>
-      </p:pic>
-      <p:sp>
-        <p:nvSpPr>
-          <p:cNvPr id="29" name="Shape 25"/>
-          <p:cNvSpPr/>
-          <p:nvPr/>
-        </p:nvSpPr>
-        <p:spPr>
-          <a:xfrm>
-            <a:off x="4242816" y="3858768"/>
-            <a:ext cx="2798064" cy="2048256"/>
+            <a:ext cx="6565392" cy="2048256"/>
           </a:xfrm>
           <a:prstGeom prst="roundRect">
             <a:avLst>
@@ -4914,14 +4866,14 @@
       </p:sp>
       <p:sp>
         <p:nvSpPr>
-          <p:cNvPr id="30" name="Text 26"/>
-          <p:cNvSpPr/>
-          <p:nvPr/>
-        </p:nvSpPr>
-        <p:spPr>
-          <a:xfrm>
-            <a:off x="4334256" y="3931920"/>
-            <a:ext cx="2615184" cy="658368"/>
+          <p:cNvPr id="28" name="Text 26"/>
+          <p:cNvSpPr/>
+          <p:nvPr/>
+        </p:nvSpPr>
+        <p:spPr>
+          <a:xfrm>
+            <a:off x="621792" y="3931920"/>
+            <a:ext cx="6309360" cy="512064"/>
           </a:xfrm>
           <a:prstGeom prst="rect">
             <a:avLst/>
@@ -4937,7 +4889,7 @@
               <a:buNone/>
             </a:pPr>
             <a:r>
-              <a:rPr lang="en-US" sz="860" b="1" dirty="0">
+              <a:rPr lang="en-US" sz="920" b="1" dirty="0">
                 <a:solidFill>
                   <a:srgbClr val="3C4043"/>
                 </a:solidFill>
@@ -4945,22 +4897,22 @@
                 <a:ea typeface="Google Sans" pitchFamily="34" charset="-122"/>
                 <a:cs typeface="Google Sans" pitchFamily="34" charset="-120"/>
               </a:rPr>
-              <a:t>Cloud Run source editor showing RFC 8693 OBO + DPoP, Hop 2 ARD filter &amp; 10-SaaS Pattern A RLS enforcement</a:t>
-            </a:r>
-            <a:endParaRPr lang="en-US" sz="860" dirty="0"/>
-          </a:p>
-        </p:txBody>
-      </p:sp>
-      <p:sp>
-        <p:nvSpPr>
-          <p:cNvPr id="31" name="Text 27"/>
-          <p:cNvSpPr/>
-          <p:nvPr/>
-        </p:nvSpPr>
-        <p:spPr>
-          <a:xfrm>
-            <a:off x="4334256" y="4626864"/>
-            <a:ext cx="2615184" cy="950976"/>
+              <a:t>Cloud Run runtime enforcing RFC 8693 OBO + DPoP, Hop 2 ARD filter &amp; 10-SaaS Pattern A RLS pushdown</a:t>
+            </a:r>
+            <a:endParaRPr lang="en-US" sz="920" dirty="0"/>
+          </a:p>
+        </p:txBody>
+      </p:sp>
+      <p:sp>
+        <p:nvSpPr>
+          <p:cNvPr id="29" name="Text 27"/>
+          <p:cNvSpPr/>
+          <p:nvPr/>
+        </p:nvSpPr>
+        <p:spPr>
+          <a:xfrm>
+            <a:off x="621792" y="4480560"/>
+            <a:ext cx="6309360" cy="1060704"/>
           </a:xfrm>
           <a:prstGeom prst="rect">
             <a:avLst/>
@@ -4976,7 +4928,7 @@
               <a:buNone/>
             </a:pPr>
             <a:r>
-              <a:rPr lang="en-US" sz="780" dirty="0">
+              <a:rPr lang="en-US" sz="840" dirty="0">
                 <a:solidFill>
                   <a:srgbClr val="5F6368"/>
                 </a:solidFill>
@@ -4986,14 +4938,14 @@
               </a:rPr>
               <a:t>• Service: cymbal-multi-tenant-patterns (Cloud Run)</a:t>
             </a:r>
-            <a:endParaRPr lang="en-US" sz="780" dirty="0"/>
+            <a:endParaRPr lang="en-US" sz="840" dirty="0"/>
           </a:p>
           <a:p>
             <a:pPr indent="0" marL="0">
               <a:buNone/>
             </a:pPr>
             <a:r>
-              <a:rPr lang="en-US" sz="780" dirty="0">
+              <a:rPr lang="en-US" sz="840" dirty="0">
                 <a:solidFill>
                   <a:srgbClr val="5F6368"/>
                 </a:solidFill>
@@ -5003,14 +4955,14 @@
               </a:rPr>
               <a:t>• Intra-Cloud: run_breach_simulations.py (10/10 PASS)</a:t>
             </a:r>
-            <a:endParaRPr lang="en-US" sz="780" dirty="0"/>
+            <a:endParaRPr lang="en-US" sz="840" dirty="0"/>
           </a:p>
           <a:p>
             <a:pPr indent="0" marL="0">
               <a:buNone/>
             </a:pPr>
             <a:r>
-              <a:rPr lang="en-US" sz="780" dirty="0">
+              <a:rPr lang="en-US" sz="840" dirty="0">
                 <a:solidFill>
                   <a:srgbClr val="5F6368"/>
                 </a:solidFill>
@@ -5018,16 +4970,16 @@
                 <a:ea typeface="Roboto" pitchFamily="34" charset="-122"/>
                 <a:cs typeface="Roboto" pitchFamily="34" charset="-120"/>
               </a:rPr>
-              <a:t>• Inter-Cloud: 10/10 Pooled SaaS MCP &amp; :3001..3010 PASS</a:t>
-            </a:r>
-            <a:endParaRPr lang="en-US" sz="780" dirty="0"/>
+              <a:t>• Inter-Cloud: 10/10 Pooled SaaS MCP Targets PASS</a:t>
+            </a:r>
+            <a:endParaRPr lang="en-US" sz="840" dirty="0"/>
           </a:p>
           <a:p>
             <a:pPr indent="0" marL="0">
               <a:buNone/>
             </a:pPr>
             <a:r>
-              <a:rPr lang="en-US" sz="780" dirty="0">
+              <a:rPr lang="en-US" sz="840" dirty="0">
                 <a:solidFill>
                   <a:srgbClr val="5F6368"/>
                 </a:solidFill>
@@ -5035,22 +4987,22 @@
                 <a:ea typeface="Roboto" pitchFamily="34" charset="-122"/>
                 <a:cs typeface="Roboto" pitchFamily="34" charset="-120"/>
               </a:rPr>
-              <a:t>• Aspect Ratio: Native 16:9 (1920×1080)</a:t>
-            </a:r>
-            <a:endParaRPr lang="en-US" sz="780" dirty="0"/>
-          </a:p>
-        </p:txBody>
-      </p:sp>
-      <p:sp>
-        <p:nvSpPr>
-          <p:cNvPr id="32" name="Text 28"/>
-          <p:cNvSpPr/>
-          <p:nvPr/>
-        </p:nvSpPr>
-        <p:spPr>
-          <a:xfrm>
-            <a:off x="4334256" y="5632704"/>
-            <a:ext cx="2615184" cy="201168"/>
+              <a:t>• Artifact: run_breach_simulations.py</a:t>
+            </a:r>
+            <a:endParaRPr lang="en-US" sz="840" dirty="0"/>
+          </a:p>
+        </p:txBody>
+      </p:sp>
+      <p:sp>
+        <p:nvSpPr>
+          <p:cNvPr id="30" name="Text 28"/>
+          <p:cNvSpPr/>
+          <p:nvPr/>
+        </p:nvSpPr>
+        <p:spPr>
+          <a:xfrm>
+            <a:off x="621792" y="5614416"/>
+            <a:ext cx="6309360" cy="201168"/>
           </a:xfrm>
           <a:prstGeom prst="rect">
             <a:avLst/>
@@ -5066,7 +5018,7 @@
               <a:buNone/>
             </a:pPr>
             <a:r>
-              <a:rPr lang="en-US" sz="680" dirty="0">
+              <a:rPr lang="en-US" sz="720" dirty="0">
                 <a:solidFill>
                   <a:srgbClr val="5F6368"/>
                 </a:solidFill>
@@ -5074,15 +5026,15 @@
                 <a:ea typeface="Courier New" pitchFamily="34" charset="-122"/>
                 <a:cs typeface="Courier New" pitchFamily="34" charset="-120"/>
               </a:rPr>
-              <a:t>Source: screenshots/cloud-console/gcp_console_01_cloud_run_source_editor.png</a:t>
-            </a:r>
-            <a:endParaRPr lang="en-US" sz="680" dirty="0"/>
-          </a:p>
-        </p:txBody>
-      </p:sp>
-      <p:sp>
-        <p:nvSpPr>
-          <p:cNvPr id="33" name="Shape 29"/>
+              <a:t>Source Module: workstream-2-pattern-a-pooled/2.5-breach-simulation-suite/run_breach_simulations.py</a:t>
+            </a:r>
+            <a:endParaRPr lang="en-US" sz="720" dirty="0"/>
+          </a:p>
+        </p:txBody>
+      </p:sp>
+      <p:sp>
+        <p:nvSpPr>
+          <p:cNvPr id="31" name="Shape 29"/>
           <p:cNvSpPr/>
           <p:nvPr/>
         </p:nvSpPr>
@@ -5109,7 +5061,7 @@
       </p:sp>
       <p:sp>
         <p:nvSpPr>
-          <p:cNvPr id="34" name="Shape 30"/>
+          <p:cNvPr id="32" name="Shape 30"/>
           <p:cNvSpPr/>
           <p:nvPr/>
         </p:nvSpPr>
@@ -5129,7 +5081,7 @@
       </p:sp>
       <p:sp>
         <p:nvSpPr>
-          <p:cNvPr id="35" name="Shape 31"/>
+          <p:cNvPr id="33" name="Shape 31"/>
           <p:cNvSpPr/>
           <p:nvPr/>
         </p:nvSpPr>
@@ -5151,7 +5103,7 @@
       </p:sp>
       <p:sp>
         <p:nvSpPr>
-          <p:cNvPr id="36" name="Text 32"/>
+          <p:cNvPr id="34" name="Text 32"/>
           <p:cNvSpPr/>
           <p:nvPr/>
         </p:nvSpPr>
@@ -5190,7 +5142,7 @@
       </p:sp>
       <p:sp>
         <p:nvSpPr>
-          <p:cNvPr id="37" name="Text 33"/>
+          <p:cNvPr id="35" name="Text 33"/>
           <p:cNvSpPr/>
           <p:nvPr/>
         </p:nvSpPr>
@@ -5229,7 +5181,7 @@
       </p:sp>
       <p:sp>
         <p:nvSpPr>
-          <p:cNvPr id="38" name="Text 34"/>
+          <p:cNvPr id="36" name="Text 34"/>
           <p:cNvSpPr/>
           <p:nvPr/>
         </p:nvSpPr>
@@ -5268,7 +5220,7 @@
       </p:sp>
       <p:sp>
         <p:nvSpPr>
-          <p:cNvPr id="39" name="Shape 35"/>
+          <p:cNvPr id="37" name="Shape 35"/>
           <p:cNvSpPr/>
           <p:nvPr/>
         </p:nvSpPr>
@@ -5295,7 +5247,7 @@
       </p:sp>
       <p:sp>
         <p:nvSpPr>
-          <p:cNvPr id="40" name="Shape 36"/>
+          <p:cNvPr id="38" name="Shape 36"/>
           <p:cNvSpPr/>
           <p:nvPr/>
         </p:nvSpPr>
@@ -5315,7 +5267,7 @@
       </p:sp>
       <p:sp>
         <p:nvSpPr>
-          <p:cNvPr id="41" name="Shape 37"/>
+          <p:cNvPr id="39" name="Shape 37"/>
           <p:cNvSpPr/>
           <p:nvPr/>
         </p:nvSpPr>
@@ -5337,7 +5289,7 @@
       </p:sp>
       <p:sp>
         <p:nvSpPr>
-          <p:cNvPr id="42" name="Text 38"/>
+          <p:cNvPr id="40" name="Text 38"/>
           <p:cNvSpPr/>
           <p:nvPr/>
         </p:nvSpPr>
@@ -5376,7 +5328,7 @@
       </p:sp>
       <p:sp>
         <p:nvSpPr>
-          <p:cNvPr id="43" name="Text 39"/>
+          <p:cNvPr id="41" name="Text 39"/>
           <p:cNvSpPr/>
           <p:nvPr/>
         </p:nvSpPr>
@@ -5415,7 +5367,7 @@
       </p:sp>
       <p:sp>
         <p:nvSpPr>
-          <p:cNvPr id="44" name="Text 40"/>
+          <p:cNvPr id="42" name="Text 40"/>
           <p:cNvSpPr/>
           <p:nvPr/>
         </p:nvSpPr>
@@ -5454,7 +5406,7 @@
       </p:sp>
       <p:sp>
         <p:nvSpPr>
-          <p:cNvPr id="45" name="Shape 41"/>
+          <p:cNvPr id="43" name="Shape 41"/>
           <p:cNvSpPr/>
           <p:nvPr/>
         </p:nvSpPr>
@@ -5481,7 +5433,7 @@
       </p:sp>
       <p:sp>
         <p:nvSpPr>
-          <p:cNvPr id="46" name="Shape 42"/>
+          <p:cNvPr id="44" name="Shape 42"/>
           <p:cNvSpPr/>
           <p:nvPr/>
         </p:nvSpPr>
@@ -5501,7 +5453,7 @@
       </p:sp>
       <p:sp>
         <p:nvSpPr>
-          <p:cNvPr id="47" name="Shape 43"/>
+          <p:cNvPr id="45" name="Shape 43"/>
           <p:cNvSpPr/>
           <p:nvPr/>
         </p:nvSpPr>
@@ -5523,7 +5475,7 @@
       </p:sp>
       <p:sp>
         <p:nvSpPr>
-          <p:cNvPr id="48" name="Text 44"/>
+          <p:cNvPr id="46" name="Text 44"/>
           <p:cNvSpPr/>
           <p:nvPr/>
         </p:nvSpPr>
@@ -5562,7 +5514,7 @@
       </p:sp>
       <p:sp>
         <p:nvSpPr>
-          <p:cNvPr id="49" name="Text 45"/>
+          <p:cNvPr id="47" name="Text 45"/>
           <p:cNvSpPr/>
           <p:nvPr/>
         </p:nvSpPr>
@@ -5601,7 +5553,7 @@
       </p:sp>
       <p:sp>
         <p:nvSpPr>
-          <p:cNvPr id="50" name="Text 46"/>
+          <p:cNvPr id="48" name="Text 46"/>
           <p:cNvSpPr/>
           <p:nvPr/>
         </p:nvSpPr>
@@ -5640,7 +5592,7 @@
       </p:sp>
       <p:sp>
         <p:nvSpPr>
-          <p:cNvPr id="51" name="Shape 47"/>
+          <p:cNvPr id="49" name="Shape 47"/>
           <p:cNvSpPr/>
           <p:nvPr/>
         </p:nvSpPr>
@@ -5667,7 +5619,7 @@
       </p:sp>
       <p:sp>
         <p:nvSpPr>
-          <p:cNvPr id="52" name="Shape 48"/>
+          <p:cNvPr id="50" name="Shape 48"/>
           <p:cNvSpPr/>
           <p:nvPr/>
         </p:nvSpPr>
@@ -5687,7 +5639,7 @@
       </p:sp>
       <p:sp>
         <p:nvSpPr>
-          <p:cNvPr id="53" name="Shape 49"/>
+          <p:cNvPr id="51" name="Shape 49"/>
           <p:cNvSpPr/>
           <p:nvPr/>
         </p:nvSpPr>
@@ -5709,7 +5661,7 @@
       </p:sp>
       <p:sp>
         <p:nvSpPr>
-          <p:cNvPr id="54" name="Text 50"/>
+          <p:cNvPr id="52" name="Text 50"/>
           <p:cNvSpPr/>
           <p:nvPr/>
         </p:nvSpPr>
@@ -5748,7 +5700,7 @@
       </p:sp>
       <p:sp>
         <p:nvSpPr>
-          <p:cNvPr id="55" name="Text 51"/>
+          <p:cNvPr id="53" name="Text 51"/>
           <p:cNvSpPr/>
           <p:nvPr/>
         </p:nvSpPr>
@@ -5787,7 +5739,7 @@
       </p:sp>
       <p:sp>
         <p:nvSpPr>
-          <p:cNvPr id="56" name="Text 52"/>
+          <p:cNvPr id="54" name="Text 52"/>
           <p:cNvSpPr/>
           <p:nvPr/>
         </p:nvSpPr>
@@ -5818,7 +5770,7 @@
                 <a:ea typeface="Roboto" pitchFamily="34" charset="-122"/>
                 <a:cs typeface="Roboto" pitchFamily="34" charset="-120"/>
               </a:rPr>
-              <a:t>Enforces HTTP 429 Retry-After noisy-neighbor bulkheads plus 10/10 Pattern A Inter-Cloud AWS AgentCore MCP &amp; :3001..3010 RLS twin assertions.</a:t>
+              <a:t>Enforces HTTP 429 Retry-After noisy-neighbor bulkheads plus 10/10 Pattern A Inter-Cloud AWS AgentCore MCP RLS assertions.</a:t>
             </a:r>
             <a:endParaRPr lang="en-US" sz="860" dirty="0"/>
           </a:p>
@@ -5826,7 +5778,7 @@
       </p:sp>
       <p:sp>
         <p:nvSpPr>
-          <p:cNvPr id="57" name="Text 53"/>
+          <p:cNvPr id="55" name="Text 53"/>
           <p:cNvSpPr/>
           <p:nvPr/>
         </p:nvSpPr>
@@ -5871,7 +5823,7 @@
                 <a:ea typeface="Roboto" pitchFamily="34" charset="-122"/>
                 <a:cs typeface="Roboto" pitchFamily="34" charset="-120"/>
               </a:rPr>
-              <a:t>Workstream 2 • Pattern A — High-Density Pooled Architecture  •  Act III Forensic Verification Audit: Grounded Google Cloud Console Screenshots + 100% Editable Callouts  •  </a:t>
+              <a:t>Workstream 2 • Pattern A — High-Density Pooled Architecture  •  Act III Forensic Verification Audit: Grounded Google Cloud CLI &amp; Telemetry Receipts + 100% Editable Callouts  •  </a:t>
             </a:r>
             <a:pPr algn="l" indent="0" marL="0">
               <a:buNone/>

--- a/slides/doc-mt-02-editable-slides.pptx
+++ b/slides/doc-mt-02-editable-slides.pptx
@@ -622,7 +622,7 @@
           <a:p>
             <a:r>
               <a:rPr lang="en-US" dirty="0"/>
-              <a:t>Here are the live Dual-Plane receipts backing up that ten-out-of-ten scorecard. On the left, you can see our deployed pooled Cloud Run service and BigQuery Row-Level Security policies in Google Cloud Console; on the right, the verification cards confirm ninety percent shared prompt cache efficiency, 10/10 Intra-Cloud breach simulations blocked, and 10/10 Inter-Cloud Pattern A SaaS MCP and live EC2 execution twin RLS assertions passed across ports 3001 through 3010.</a:t>
+              <a:t>Here are the live Dual-Plane receipts backing up that ten-out-of-ten scorecard. On the left, you can see our deployed pooled Cloud Run service and BigQuery Row-Level Security policies in Google Cloud Console; on the right, the verification cards confirm ninety percent shared prompt cache efficiency, 10/10 Intra-Cloud breach simulations blocked, and 10/10 Inter-Cloud Pattern A 10-SaaS MCP RLS assertions passed.</a:t>
             </a:r>
             <a:endParaRPr lang="en-US" dirty="0"/>
           </a:p>
@@ -20459,7 +20459,7 @@
                 <a:ea typeface="Arial" pitchFamily="34" charset="-122"/>
                 <a:cs typeface="Arial" pitchFamily="34" charset="-120"/>
               </a:rPr>
-              <a:t>Shared GCP Project: cymbal-build-sandbox / cymbal-pooled-saas-prod</a:t>
+              <a:t>Shared GCP Project: cymbal-build-sandbox</a:t>
             </a:r>
             <a:endParaRPr lang="en-US" sz="460" dirty="0"/>
           </a:p>

--- a/slides/doc-mt-02-editable-slides.pptx
+++ b/slides/doc-mt-02-editable-slides.pptx
@@ -507,14 +507,14 @@
           <a:p>
             <a:r>
               <a:rPr lang="en-US" dirty="0"/>
-              <a:t>Welcome everyone. In this six-slide executive and technical briefing, we are walking through Multi-Tenant AI Agents (Part 2): Solving the Agentic Trilemma — Security, Customization &amp; Cost.</a:t>
+              <a:t>Welcome everyone. In this six-slide executive and technical briefing, we are walking through Agent Deployment Models (Part 2): Navigating the Agentic Trilemma Across Pool, Bridge &amp; Silo.</a:t>
             </a:r>
             <a:endParaRPr lang="en-US" dirty="0"/>
           </a:p>
           <a:p>
             <a:r>
               <a:rPr lang="en-US" dirty="0"/>
-              <a:t>In Part 2 of our series, we tackle the Agentic Trilemma in Pattern A pooled environments: delivering strict cross-tenant security, rich per-customer agent customization, and sustainable token economics simultaneously on shared Google Cloud infrastructure.</a:t>
+              <a:t>In Part 2 of our series, we navigate the Agentic Trilemma—balancing tenant isolation, customization depth, and SaaS gross margins across Pattern 1 High-Density Pool, Pattern 2 Hybrid Bridge, and Pattern 3 Sovereign Silo.</a:t>
             </a:r>
             <a:endParaRPr lang="en-US" dirty="0"/>
           </a:p>
@@ -616,7 +616,7 @@
           <a:p>
             <a:r>
               <a:rPr lang="en-US" dirty="0"/>
-              <a:t>Figure 1 illustrates our Pooled Shared-Plane physical blueprint. Every request passes through our forty-two-millisecond p95 five-hop security pipeline inside the Governance Hub—combining STS token exchange, Cloud DLP and Model Armor redaction, and immutable thirty-two-thousand-token prefix caching before reaching Vertex AI and AlloyDB RLS.</a:t>
+              <a:t>Figure 1 illustrates our multi-tier topology selector blueprint. Under one unified control plane, Standard tenants route to the shared pool with 90% prefix caching, Growth tenants bridge over Private Service Connect, and Enterprise tenants run inside dedicated VPC-SC silos.</a:t>
             </a:r>
             <a:endParaRPr lang="en-US" dirty="0"/>
           </a:p>
@@ -718,7 +718,7 @@
           <a:p>
             <a:r>
               <a:rPr lang="en-US" dirty="0"/>
-              <a:t>Following the six-step execution flow on this slide demonstrates how the Agentic Triad works at runtime: combining a shared diagnostic agent, tenant-private specialist agents, and hot-swappable Cloud Storage skill bundles without forking container images per customer.</a:t>
+              <a:t>Following the end-to-end execution flow on this slide demonstrates how thefour pillars of the Enterprise Agent Platform—Build, Scale, Govern, and Optimize—operate consistently regardless of which deployment tier a customer selects.</a:t>
             </a:r>
             <a:endParaRPr lang="en-US" dirty="0"/>
           </a:p>
@@ -820,7 +820,7 @@
           <a:p>
             <a:r>
               <a:rPr lang="en-US" dirty="0"/>
-              <a:t>This slide grounds Pattern A in real multi-tenant SaaS unit economics—showing how freezing the shared system prompt prefix achieves an eighty-four point seven percent input-token cost reduction and four-hundred-twenty-millisecond warm time-to-first-token while blocking cross-tenant prompt leakage.</a:t>
+              <a:t>This slide maps the Google Cloud product bill of materials across all seven architectural planes—from Inbound Identity and Ingress PEP to gVisor Agent Runtime, Memory Bank, Gemini Models, Egress Guardrails, and MCP Data Fabric.</a:t>
             </a:r>
             <a:endParaRPr lang="en-US" dirty="0"/>
           </a:p>
@@ -922,7 +922,7 @@
           <a:p>
             <a:r>
               <a:rPr lang="en-US" dirty="0"/>
-              <a:t>Here we compare our five-hop pooled pipeline with AlloyDB Row-Level Security and Valkey namespace isolation against naive single-prompt filtering and per-tenant container forks across security determinism, latency overhead, and gross margin.</a:t>
+              <a:t>Here we compare Pattern 1 Pool, Pattern 2A/2B Hybrid Bridge, and Pattern 3 Sovereign Silo across all seven subsystems so product and architecture leaders can align commercial contract tiers with infrastructure blast radius.</a:t>
             </a:r>
             <a:endParaRPr lang="en-US" dirty="0"/>
           </a:p>
@@ -1024,7 +1024,7 @@
           <a:p>
             <a:r>
               <a:rPr lang="en-US" dirty="0"/>
-              <a:t>To put Pattern A into production immediately, here are the Terraform 2.6 starter commands and our ten-for-ten breach simulation verification checks.</a:t>
+              <a:t>Finally, here is the Python Control Plane PDP topology dispatcher routing Standard, Hybrid PSC, and Sovereign Silo tenants from verified JWT claims.</a:t>
             </a:r>
             <a:endParaRPr lang="en-US" dirty="0"/>
           </a:p>
@@ -2505,7 +2505,7 @@
                 <a:ea typeface="Arial" pitchFamily="34" charset="-122"/>
                 <a:cs typeface="Arial" pitchFamily="34" charset="-120"/>
               </a:rPr>
-              <a:t>Triad Pillar 2 (Regulated Scale): Pattern B Silos ($$$) &amp; Pattern C Hybrid</a:t>
+              <a:t>Triad Pillar 2 (Regulated Scale): Pattern B Silos (Tier 3) &amp; Pattern C Hybrid</a:t>
             </a:r>
             <a:endParaRPr lang="en-US" sz="385" dirty="0"/>
           </a:p>
@@ -2596,7 +2596,7 @@
                 <a:ea typeface="Arial" pitchFamily="34" charset="-122"/>
                 <a:cs typeface="Arial" pitchFamily="34" charset="-120"/>
               </a:rPr>
-              <a:t>Lowest COGS ($) • 84.7% Net Input Token Savings</a:t>
+              <a:t>Lowest COGS (Tier 1) • 84.7% Net Input Token Savings</a:t>
             </a:r>
             <a:endParaRPr lang="en-US" sz="540" dirty="0"/>
           </a:p>
@@ -9289,7 +9289,7 @@
                 <a:ea typeface="Arial" pitchFamily="34" charset="-122"/>
                 <a:cs typeface="Arial" pitchFamily="34" charset="-120"/>
               </a:rPr>
-              <a:t>Thinking Budget Cap sends the validated, context-enriched prompt to ContextCacheConfig to synthesize a grounded response.
+              <a:t>Vertex AI Agent Engine sends the validated, context-enriched prompt to Gemini 2.5 Pro (ContextCacheConfig) to synthesize a grounded response.
 </a:t>
             </a:r>
             <a:pPr indent="0" marL="0">
@@ -9324,7 +9324,7 @@
                 <a:ea typeface="Arial" pitchFamily="34" charset="-122"/>
                 <a:cs typeface="Arial" pitchFamily="34" charset="-120"/>
               </a:rPr>
-              <a:t>Thinking Budget Cap passes the generated output through Valkey Rate Bulkhead for final output sanitization and policy enforcement.
+              <a:t>Vertex AI Agent Engine passes the generated output through Valkey Rate Bulkhead for final output sanitization and policy enforcement.
 </a:t>
             </a:r>
             <a:pPr indent="0" marL="0">
@@ -9729,7 +9729,7 @@
                 <a:ea typeface="Arial" pitchFamily="34" charset="-122"/>
                 <a:cs typeface="Arial" pitchFamily="34" charset="-120"/>
               </a:rPr>
-              <a:t>Core Google Cloud service used in DOC-MT-02 to enforce production security, scalability, and observability.
+              <a:t>Curated catalog of frontier Gemini models and self-hosted open-weight models with unified deployment controls.
 </a:t>
             </a:r>
             <a:pPr indent="0" marL="0">
@@ -9764,7 +9764,7 @@
                 <a:ea typeface="Arial" pitchFamily="34" charset="-122"/>
                 <a:cs typeface="Arial" pitchFamily="34" charset="-120"/>
               </a:rPr>
-              <a:t>Core Google Cloud service used in DOC-MT-02 to enforce production security, scalability, and observability.
+              <a:t>Unidirectional Layer-4 NAT service attachments bridging shared SaaS routing hubs to dedicated customer spoke VPCs with zero CIDR overlap.
 </a:t>
             </a:r>
             <a:pPr indent="0" marL="0">
@@ -12353,7 +12353,7 @@
                 <a:ea typeface="Courier New" pitchFamily="34" charset="-122"/>
                 <a:cs typeface="Courier New" pitchFamily="34" charset="-120"/>
               </a:rPr>
-              <a:t>cloud_run_adk_verify.py</a:t>
+              <a:t>src/control_plane/topology_tier_router.py</a:t>
             </a:r>
             <a:endParaRPr lang="en-US" sz="800" dirty="0"/>
           </a:p>
@@ -12441,18 +12441,327 @@
           <a:ln/>
         </p:spPr>
         <p:txBody>
-          <a:bodyPr wrap="square" rtlCol="0" anchor="t">
-            <a:normAutofit/>
-          </a:bodyPr>
-          <a:lstStyle/>
-          <a:p>
-            <a:pPr indent="0" marL="0">
-              <a:lnSpc>
-                <a:spcPct val="106000"/>
-              </a:lnSpc>
-              <a:buNone/>
-            </a:pPr>
-            <a:endParaRPr lang="en-US" sz="690" dirty="0"/>
+          <a:bodyPr wrap="square" lIns="0" tIns="0" rIns="0" bIns="0" rtlCol="0" anchor="t"/>
+          <a:lstStyle/>
+          <a:p>
+            <a:pPr indent="0" marL="0">
+              <a:lnSpc>
+                <a:spcPct val="108000"/>
+              </a:lnSpc>
+              <a:buNone/>
+            </a:pPr>
+            <a:r>
+              <a:rPr lang="en-US" sz="680" dirty="0">
+                <a:solidFill>
+                  <a:srgbClr val="188038"/>
+                </a:solidFill>
+                <a:latin typeface="Roboto Mono" pitchFamily="34" charset="0"/>
+                <a:ea typeface="Roboto Mono" pitchFamily="34" charset="-122"/>
+                <a:cs typeface="Roboto Mono" pitchFamily="34" charset="-120"/>
+              </a:rPr>
+              <a:t>from dataclasses import dataclass</a:t>
+            </a:r>
+            <a:endParaRPr lang="en-US" sz="680" dirty="0"/>
+          </a:p>
+          <a:p>
+            <a:pPr indent="0" marL="0">
+              <a:lnSpc>
+                <a:spcPct val="108000"/>
+              </a:lnSpc>
+              <a:buNone/>
+            </a:pPr>
+            <a:r>
+              <a:rPr lang="en-US" sz="680" dirty="0">
+                <a:solidFill>
+                  <a:srgbClr val="188038"/>
+                </a:solidFill>
+                <a:latin typeface="Roboto Mono" pitchFamily="34" charset="0"/>
+                <a:ea typeface="Roboto Mono" pitchFamily="34" charset="-122"/>
+                <a:cs typeface="Roboto Mono" pitchFamily="34" charset="-120"/>
+              </a:rPr>
+              <a:t>@dataclass(frozen=True)</a:t>
+            </a:r>
+            <a:endParaRPr lang="en-US" sz="680" dirty="0"/>
+          </a:p>
+          <a:p>
+            <a:pPr indent="0" marL="0">
+              <a:lnSpc>
+                <a:spcPct val="108000"/>
+              </a:lnSpc>
+              <a:buNone/>
+            </a:pPr>
+            <a:r>
+              <a:rPr lang="en-US" sz="680" dirty="0">
+                <a:solidFill>
+                  <a:srgbClr val="188038"/>
+                </a:solidFill>
+                <a:latin typeface="Roboto Mono" pitchFamily="34" charset="0"/>
+                <a:ea typeface="Roboto Mono" pitchFamily="34" charset="-122"/>
+                <a:cs typeface="Roboto Mono" pitchFamily="34" charset="-120"/>
+              </a:rPr>
+              <a:t>class TenantRouteDecision:</a:t>
+            </a:r>
+            <a:endParaRPr lang="en-US" sz="680" dirty="0"/>
+          </a:p>
+          <a:p>
+            <a:pPr indent="0" marL="0">
+              <a:lnSpc>
+                <a:spcPct val="108000"/>
+              </a:lnSpc>
+              <a:buNone/>
+            </a:pPr>
+            <a:r>
+              <a:rPr lang="en-US" sz="680" dirty="0">
+                <a:solidFill>
+                  <a:srgbClr val="188038"/>
+                </a:solidFill>
+                <a:latin typeface="Roboto Mono" pitchFamily="34" charset="0"/>
+                <a:ea typeface="Roboto Mono" pitchFamily="34" charset="-122"/>
+                <a:cs typeface="Roboto Mono" pitchFamily="34" charset="-120"/>
+              </a:rPr>
+              <a:t>    tenant_id: str</a:t>
+            </a:r>
+            <a:endParaRPr lang="en-US" sz="680" dirty="0"/>
+          </a:p>
+          <a:p>
+            <a:pPr indent="0" marL="0">
+              <a:lnSpc>
+                <a:spcPct val="108000"/>
+              </a:lnSpc>
+              <a:buNone/>
+            </a:pPr>
+            <a:r>
+              <a:rPr lang="en-US" sz="680" dirty="0">
+                <a:solidFill>
+                  <a:srgbClr val="188038"/>
+                </a:solidFill>
+                <a:latin typeface="Roboto Mono" pitchFamily="34" charset="0"/>
+                <a:ea typeface="Roboto Mono" pitchFamily="34" charset="-122"/>
+                <a:cs typeface="Roboto Mono" pitchFamily="34" charset="-120"/>
+              </a:rPr>
+              <a:t>    tier: str</a:t>
+            </a:r>
+            <a:endParaRPr lang="en-US" sz="680" dirty="0"/>
+          </a:p>
+          <a:p>
+            <a:pPr indent="0" marL="0">
+              <a:lnSpc>
+                <a:spcPct val="108000"/>
+              </a:lnSpc>
+              <a:buNone/>
+            </a:pPr>
+            <a:r>
+              <a:rPr lang="en-US" sz="680" dirty="0">
+                <a:solidFill>
+                  <a:srgbClr val="188038"/>
+                </a:solidFill>
+                <a:latin typeface="Roboto Mono" pitchFamily="34" charset="0"/>
+                <a:ea typeface="Roboto Mono" pitchFamily="34" charset="-122"/>
+                <a:cs typeface="Roboto Mono" pitchFamily="34" charset="-120"/>
+              </a:rPr>
+              <a:t>    endpoint_uri: str</a:t>
+            </a:r>
+            <a:endParaRPr lang="en-US" sz="680" dirty="0"/>
+          </a:p>
+          <a:p>
+            <a:pPr indent="0" marL="0">
+              <a:lnSpc>
+                <a:spcPct val="108000"/>
+              </a:lnSpc>
+              <a:buNone/>
+            </a:pPr>
+            <a:r>
+              <a:rPr lang="en-US" sz="680" dirty="0">
+                <a:solidFill>
+                  <a:srgbClr val="188038"/>
+                </a:solidFill>
+                <a:latin typeface="Roboto Mono" pitchFamily="34" charset="0"/>
+                <a:ea typeface="Roboto Mono" pitchFamily="34" charset="-122"/>
+                <a:cs typeface="Roboto Mono" pitchFamily="34" charset="-120"/>
+              </a:rPr>
+              <a:t>    thinking_budget_tokens: int</a:t>
+            </a:r>
+            <a:endParaRPr lang="en-US" sz="680" dirty="0"/>
+          </a:p>
+          <a:p>
+            <a:pPr indent="0" marL="0">
+              <a:lnSpc>
+                <a:spcPct val="108000"/>
+              </a:lnSpc>
+              <a:buNone/>
+            </a:pPr>
+            <a:r>
+              <a:rPr lang="en-US" sz="680" dirty="0">
+                <a:solidFill>
+                  <a:srgbClr val="188038"/>
+                </a:solidFill>
+                <a:latin typeface="Roboto Mono" pitchFamily="34" charset="0"/>
+                <a:ea typeface="Roboto Mono" pitchFamily="34" charset="-122"/>
+                <a:cs typeface="Roboto Mono" pitchFamily="34" charset="-120"/>
+              </a:rPr>
+              <a:t>    requires_cmek_ping: bool</a:t>
+            </a:r>
+            <a:endParaRPr lang="en-US" sz="680" dirty="0"/>
+          </a:p>
+          <a:p>
+            <a:pPr indent="0" marL="0">
+              <a:lnSpc>
+                <a:spcPct val="108000"/>
+              </a:lnSpc>
+              <a:buNone/>
+            </a:pPr>
+            <a:r>
+              <a:rPr lang="en-US" sz="680" dirty="0">
+                <a:solidFill>
+                  <a:srgbClr val="188038"/>
+                </a:solidFill>
+                <a:latin typeface="Roboto Mono" pitchFamily="34" charset="0"/>
+                <a:ea typeface="Roboto Mono" pitchFamily="34" charset="-122"/>
+                <a:cs typeface="Roboto Mono" pitchFamily="34" charset="-120"/>
+              </a:rPr>
+              <a:t>def resolve_tenant_topology(jwt_claims: dict, registry_row: dict) -&gt; TenantRouteDecision:</a:t>
+            </a:r>
+            <a:endParaRPr lang="en-US" sz="680" dirty="0"/>
+          </a:p>
+          <a:p>
+            <a:pPr indent="0" marL="0">
+              <a:lnSpc>
+                <a:spcPct val="108000"/>
+              </a:lnSpc>
+              <a:buNone/>
+            </a:pPr>
+            <a:r>
+              <a:rPr lang="en-US" sz="680" dirty="0">
+                <a:solidFill>
+                  <a:srgbClr val="188038"/>
+                </a:solidFill>
+                <a:latin typeface="Roboto Mono" pitchFamily="34" charset="0"/>
+                <a:ea typeface="Roboto Mono" pitchFamily="34" charset="-122"/>
+                <a:cs typeface="Roboto Mono" pitchFamily="34" charset="-120"/>
+              </a:rPr>
+              <a:t>    tenant_id = jwt_claims["tenant_id"]  # Verified from KMS-signed STS JWT (Hop 1)</a:t>
+            </a:r>
+            <a:endParaRPr lang="en-US" sz="680" dirty="0"/>
+          </a:p>
+          <a:p>
+            <a:pPr indent="0" marL="0">
+              <a:lnSpc>
+                <a:spcPct val="108000"/>
+              </a:lnSpc>
+              <a:buNone/>
+            </a:pPr>
+            <a:r>
+              <a:rPr lang="en-US" sz="680" dirty="0">
+                <a:solidFill>
+                  <a:srgbClr val="188038"/>
+                </a:solidFill>
+                <a:latin typeface="Roboto Mono" pitchFamily="34" charset="0"/>
+                <a:ea typeface="Roboto Mono" pitchFamily="34" charset="-122"/>
+                <a:cs typeface="Roboto Mono" pitchFamily="34" charset="-120"/>
+              </a:rPr>
+              <a:t>    tier = registry_row["contract_tier"]</a:t>
+            </a:r>
+            <a:endParaRPr lang="en-US" sz="680" dirty="0"/>
+          </a:p>
+          <a:p>
+            <a:pPr indent="0" marL="0">
+              <a:lnSpc>
+                <a:spcPct val="108000"/>
+              </a:lnSpc>
+              <a:buNone/>
+            </a:pPr>
+            <a:r>
+              <a:rPr lang="en-US" sz="680" dirty="0">
+                <a:solidFill>
+                  <a:srgbClr val="188038"/>
+                </a:solidFill>
+                <a:latin typeface="Roboto Mono" pitchFamily="34" charset="0"/>
+                <a:ea typeface="Roboto Mono" pitchFamily="34" charset="-122"/>
+                <a:cs typeface="Roboto Mono" pitchFamily="34" charset="-120"/>
+              </a:rPr>
+              <a:t>    if tier == "SOVEREIGN_SILO":</a:t>
+            </a:r>
+            <a:endParaRPr lang="en-US" sz="680" dirty="0"/>
+          </a:p>
+          <a:p>
+            <a:pPr indent="0" marL="0">
+              <a:lnSpc>
+                <a:spcPct val="108000"/>
+              </a:lnSpc>
+              <a:buNone/>
+            </a:pPr>
+            <a:r>
+              <a:rPr lang="en-US" sz="680" dirty="0">
+                <a:solidFill>
+                  <a:srgbClr val="188038"/>
+                </a:solidFill>
+                <a:latin typeface="Roboto Mono" pitchFamily="34" charset="0"/>
+                <a:ea typeface="Roboto Mono" pitchFamily="34" charset="-122"/>
+                <a:cs typeface="Roboto Mono" pitchFamily="34" charset="-120"/>
+              </a:rPr>
+              <a:t>        return TenantRouteDecision(tenant_id, tier, f"silo://{tenant_id}.internal", 8000, True)</a:t>
+            </a:r>
+            <a:endParaRPr lang="en-US" sz="680" dirty="0"/>
+          </a:p>
+          <a:p>
+            <a:pPr indent="0" marL="0">
+              <a:lnSpc>
+                <a:spcPct val="108000"/>
+              </a:lnSpc>
+              <a:buNone/>
+            </a:pPr>
+            <a:r>
+              <a:rPr lang="en-US" sz="680" dirty="0">
+                <a:solidFill>
+                  <a:srgbClr val="188038"/>
+                </a:solidFill>
+                <a:latin typeface="Roboto Mono" pitchFamily="34" charset="0"/>
+                <a:ea typeface="Roboto Mono" pitchFamily="34" charset="-122"/>
+                <a:cs typeface="Roboto Mono" pitchFamily="34" charset="-120"/>
+              </a:rPr>
+              <a:t>    if tier == "HYBRID_PSC_BRIDGE":</a:t>
+            </a:r>
+            <a:endParaRPr lang="en-US" sz="680" dirty="0"/>
+          </a:p>
+          <a:p>
+            <a:pPr indent="0" marL="0">
+              <a:lnSpc>
+                <a:spcPct val="108000"/>
+              </a:lnSpc>
+              <a:buNone/>
+            </a:pPr>
+            <a:r>
+              <a:rPr lang="en-US" sz="680" dirty="0">
+                <a:solidFill>
+                  <a:srgbClr val="188038"/>
+                </a:solidFill>
+                <a:latin typeface="Roboto Mono" pitchFamily="34" charset="0"/>
+                <a:ea typeface="Roboto Mono" pitchFamily="34" charset="-122"/>
+                <a:cs typeface="Roboto Mono" pitchFamily="34" charset="-120"/>
+              </a:rPr>
+              <a:t>        return TenantRouteDecision(tenant_id, tier, f"psc://{registry_row['psc_ip']}:443", 8000, True)</a:t>
+            </a:r>
+            <a:endParaRPr lang="en-US" sz="680" dirty="0"/>
+          </a:p>
+          <a:p>
+            <a:pPr indent="0" marL="0">
+              <a:lnSpc>
+                <a:spcPct val="108000"/>
+              </a:lnSpc>
+              <a:buNone/>
+            </a:pPr>
+            <a:r>
+              <a:rPr lang="en-US" sz="680" dirty="0">
+                <a:solidFill>
+                  <a:srgbClr val="188038"/>
+                </a:solidFill>
+                <a:latin typeface="Roboto Mono" pitchFamily="34" charset="0"/>
+                <a:ea typeface="Roboto Mono" pitchFamily="34" charset="-122"/>
+                <a:cs typeface="Roboto Mono" pitchFamily="34" charset="-120"/>
+              </a:rPr>
+              <a:t>    return TenantRouteDecision(tenant_id, "POOLED_STANDARD", "pool://shared-adk-runtime", 4000, False)</a:t>
+            </a:r>
+            <a:endParaRPr lang="en-US" sz="680" dirty="0"/>
           </a:p>
         </p:txBody>
       </p:sp>
@@ -12536,17 +12845,17 @@
           <a:ln/>
         </p:spPr>
         <p:txBody>
-          <a:bodyPr wrap="square" rtlCol="0" anchor="t"/>
-          <a:lstStyle/>
-          <a:p>
-            <a:pPr indent="0" marL="0">
-              <a:lnSpc>
-                <a:spcPct val="118000"/>
-              </a:lnSpc>
-              <a:buNone/>
-            </a:pPr>
-            <a:r>
-              <a:rPr lang="en-US" sz="800" b="1" dirty="0">
+          <a:bodyPr wrap="square" lIns="0" tIns="0" rIns="0" bIns="0" rtlCol="0" anchor="t"/>
+          <a:lstStyle/>
+          <a:p>
+            <a:pPr indent="0" marL="0">
+              <a:lnSpc>
+                <a:spcPct val="120000"/>
+              </a:lnSpc>
+              <a:buNone/>
+            </a:pPr>
+            <a:r>
+              <a:rPr lang="en-US" sz="790" b="1" dirty="0">
                 <a:solidFill>
                   <a:srgbClr val="1A73E8"/>
                 </a:solidFill>
@@ -12558,12 +12867,12 @@
             </a:r>
             <a:pPr indent="0" marL="0">
               <a:lnSpc>
-                <a:spcPct val="118000"/>
-              </a:lnSpc>
-              <a:buNone/>
-            </a:pPr>
-            <a:r>
-              <a:rPr lang="en-US" sz="780" dirty="0">
+                <a:spcPct val="120000"/>
+              </a:lnSpc>
+              <a:buNone/>
+            </a:pPr>
+            <a:r>
+              <a:rPr lang="en-US" sz="770" dirty="0">
                 <a:solidFill>
                   <a:srgbClr val="3C4043"/>
                 </a:solidFill>
@@ -12571,17 +12880,19 @@
                 <a:ea typeface="Arial" pitchFamily="34" charset="-122"/>
                 <a:cs typeface="Arial" pitchFamily="34" charset="-120"/>
               </a:rPr>
-              <a:t>Read the canonical Google Cloud Architecture Center reference architecture.
-</a:t>
-            </a:r>
-            <a:pPr indent="0" marL="0">
-              <a:lnSpc>
-                <a:spcPct val="118000"/>
-              </a:lnSpc>
-              <a:buNone/>
-            </a:pPr>
-            <a:r>
-              <a:rPr lang="en-US" sz="800" b="1" dirty="0">
+              <a:t>Read the canonical Google Cloud Architecture Center reference architecture.</a:t>
+            </a:r>
+            <a:endParaRPr lang="en-US" sz="790" dirty="0"/>
+          </a:p>
+          <a:p>
+            <a:pPr indent="0" marL="0">
+              <a:lnSpc>
+                <a:spcPct val="120000"/>
+              </a:lnSpc>
+              <a:buNone/>
+            </a:pPr>
+            <a:r>
+              <a:rPr lang="en-US" sz="790" b="1" dirty="0">
                 <a:solidFill>
                   <a:srgbClr val="1A73E8"/>
                 </a:solidFill>
@@ -12593,12 +12904,12 @@
             </a:r>
             <a:pPr indent="0" marL="0">
               <a:lnSpc>
-                <a:spcPct val="118000"/>
-              </a:lnSpc>
-              <a:buNone/>
-            </a:pPr>
-            <a:r>
-              <a:rPr lang="en-US" sz="780" dirty="0">
+                <a:spcPct val="120000"/>
+              </a:lnSpc>
+              <a:buNone/>
+            </a:pPr>
+            <a:r>
+              <a:rPr lang="en-US" sz="770" dirty="0">
                 <a:solidFill>
                   <a:srgbClr val="3C4043"/>
                 </a:solidFill>
@@ -12606,17 +12917,19 @@
                 <a:ea typeface="Arial" pitchFamily="34" charset="-122"/>
                 <a:cs typeface="Arial" pitchFamily="34" charset="-120"/>
               </a:rPr>
-              <a:t>Build hierarchical multi-agent systems, deterministic callbacks, and MCP toolsets.
-</a:t>
-            </a:r>
-            <a:pPr indent="0" marL="0">
-              <a:lnSpc>
-                <a:spcPct val="118000"/>
-              </a:lnSpc>
-              <a:buNone/>
-            </a:pPr>
-            <a:r>
-              <a:rPr lang="en-US" sz="800" b="1" dirty="0">
+              <a:t>Build hierarchical multi-agent systems, deterministic callbacks, and MCP toolsets.</a:t>
+            </a:r>
+            <a:endParaRPr lang="en-US" sz="790" dirty="0"/>
+          </a:p>
+          <a:p>
+            <a:pPr indent="0" marL="0">
+              <a:lnSpc>
+                <a:spcPct val="120000"/>
+              </a:lnSpc>
+              <a:buNone/>
+            </a:pPr>
+            <a:r>
+              <a:rPr lang="en-US" sz="790" b="1" dirty="0">
                 <a:solidFill>
                   <a:srgbClr val="1A73E8"/>
                 </a:solidFill>
@@ -12628,12 +12941,12 @@
             </a:r>
             <a:pPr indent="0" marL="0">
               <a:lnSpc>
-                <a:spcPct val="118000"/>
-              </a:lnSpc>
-              <a:buNone/>
-            </a:pPr>
-            <a:r>
-              <a:rPr lang="en-US" sz="780" dirty="0">
+                <a:spcPct val="120000"/>
+              </a:lnSpc>
+              <a:buNone/>
+            </a:pPr>
+            <a:r>
+              <a:rPr lang="en-US" sz="770" dirty="0">
                 <a:solidFill>
                   <a:srgbClr val="3C4043"/>
                 </a:solidFill>
@@ -12641,17 +12954,19 @@
                 <a:ea typeface="Arial" pitchFamily="34" charset="-122"/>
                 <a:cs typeface="Arial" pitchFamily="34" charset="-120"/>
               </a:rPr>
-              <a:t>Explore managed runtime deployment, Sessions, Memory Bank, and Context Caching.
-</a:t>
-            </a:r>
-            <a:pPr indent="0" marL="0">
-              <a:lnSpc>
-                <a:spcPct val="118000"/>
-              </a:lnSpc>
-              <a:buNone/>
-            </a:pPr>
-            <a:r>
-              <a:rPr lang="en-US" sz="800" b="1" dirty="0">
+              <a:t>Explore managed runtime deployment, Sessions, Memory Bank, and Context Caching.</a:t>
+            </a:r>
+            <a:endParaRPr lang="en-US" sz="790" dirty="0"/>
+          </a:p>
+          <a:p>
+            <a:pPr indent="0" marL="0">
+              <a:lnSpc>
+                <a:spcPct val="120000"/>
+              </a:lnSpc>
+              <a:buNone/>
+            </a:pPr>
+            <a:r>
+              <a:rPr lang="en-US" sz="790" b="1" dirty="0">
                 <a:solidFill>
                   <a:srgbClr val="1A73E8"/>
                 </a:solidFill>
@@ -12663,12 +12978,12 @@
             </a:r>
             <a:pPr indent="0" marL="0">
               <a:lnSpc>
-                <a:spcPct val="118000"/>
-              </a:lnSpc>
-              <a:buNone/>
-            </a:pPr>
-            <a:r>
-              <a:rPr lang="en-US" sz="780" dirty="0">
+                <a:spcPct val="120000"/>
+              </a:lnSpc>
+              <a:buNone/>
+            </a:pPr>
+            <a:r>
+              <a:rPr lang="en-US" sz="770" dirty="0">
                 <a:solidFill>
                   <a:srgbClr val="3C4043"/>
                 </a:solidFill>
@@ -12678,7 +12993,7 @@
               </a:rPr>
               <a:t>Review best practices for security, reliability, operational efficiency, and cost optimization.</a:t>
             </a:r>
-            <a:endParaRPr lang="en-US" sz="800" dirty="0"/>
+            <a:endParaRPr lang="en-US" sz="790" dirty="0"/>
           </a:p>
         </p:txBody>
       </p:sp>
@@ -12762,12 +13077,12 @@
           <a:ln/>
         </p:spPr>
         <p:txBody>
-          <a:bodyPr wrap="square" rtlCol="0" anchor="t"/>
-          <a:lstStyle/>
-          <a:p>
-            <a:pPr indent="0" marL="0">
-              <a:lnSpc>
-                <a:spcPct val="122000"/>
+          <a:bodyPr wrap="square" lIns="0" tIns="0" rIns="0" bIns="0" rtlCol="0" anchor="t"/>
+          <a:lstStyle/>
+          <a:p>
+            <a:pPr indent="0" marL="0">
+              <a:lnSpc>
+                <a:spcPct val="124000"/>
               </a:lnSpc>
               <a:buNone/>
             </a:pPr>
@@ -12780,17 +13095,19 @@
                 <a:ea typeface="Arial" pitchFamily="34" charset="-122"/>
                 <a:cs typeface="Arial" pitchFamily="34" charset="-120"/>
               </a:rPr>
-              <a:t>Except as otherwise noted, the content of this page is licensed under the Creative Commons Attribution 4.0 License, and code samples are licensed under the Apache 2.0 License.
-</a:t>
-            </a:r>
-            <a:pPr indent="0" marL="0">
-              <a:lnSpc>
-                <a:spcPct val="122000"/>
-              </a:lnSpc>
-              <a:buNone/>
-            </a:pPr>
-            <a:r>
-              <a:rPr lang="en-US" sz="820" b="1" dirty="0">
+              <a:t>Except as otherwise noted, the content of this page is licensed under the Creative Commons Attribution 4.0 License, and code samples are licensed under the Apache 2.0 License.</a:t>
+            </a:r>
+            <a:endParaRPr lang="en-US" sz="780" dirty="0"/>
+          </a:p>
+          <a:p>
+            <a:pPr indent="0" marL="0">
+              <a:lnSpc>
+                <a:spcPct val="124000"/>
+              </a:lnSpc>
+              <a:buNone/>
+            </a:pPr>
+            <a:r>
+              <a:rPr lang="en-US" sz="810" b="1" dirty="0">
                 <a:solidFill>
                   <a:srgbClr val="202124"/>
                 </a:solidFill>
@@ -12802,12 +13119,12 @@
             </a:r>
             <a:pPr indent="0" marL="0">
               <a:lnSpc>
-                <a:spcPct val="122000"/>
-              </a:lnSpc>
-              <a:buNone/>
-            </a:pPr>
-            <a:r>
-              <a:rPr lang="en-US" sz="820" dirty="0">
+                <a:spcPct val="124000"/>
+              </a:lnSpc>
+              <a:buNone/>
+            </a:pPr>
+            <a:r>
+              <a:rPr lang="en-US" sz="810" dirty="0">
                 <a:solidFill>
                   <a:srgbClr val="3C4043"/>
                 </a:solidFill>
@@ -12815,17 +13132,19 @@
                 <a:ea typeface="Arial" pitchFamily="34" charset="-122"/>
                 <a:cs typeface="Arial" pitchFamily="34" charset="-120"/>
               </a:rPr>
-              <a:t>Principal AI Architect • Cloud Solutions Architecture • Enterprise AI Field Engineering
-</a:t>
-            </a:r>
-            <a:pPr indent="0" marL="0">
-              <a:lnSpc>
-                <a:spcPct val="122000"/>
-              </a:lnSpc>
-              <a:buNone/>
-            </a:pPr>
-            <a:r>
-              <a:rPr lang="en-US" sz="820" b="1" dirty="0">
+              <a:t>Principal AI Architect • Cloud Solutions Architecture • Enterprise AI Field Engineering</a:t>
+            </a:r>
+            <a:endParaRPr lang="en-US" sz="780" dirty="0"/>
+          </a:p>
+          <a:p>
+            <a:pPr indent="0" marL="0">
+              <a:lnSpc>
+                <a:spcPct val="124000"/>
+              </a:lnSpc>
+              <a:buNone/>
+            </a:pPr>
+            <a:r>
+              <a:rPr lang="en-US" sz="810" b="1" dirty="0">
                 <a:solidFill>
                   <a:srgbClr val="202124"/>
                 </a:solidFill>
@@ -12837,12 +13156,12 @@
             </a:r>
             <a:pPr indent="0" marL="0">
               <a:lnSpc>
-                <a:spcPct val="122000"/>
-              </a:lnSpc>
-              <a:buNone/>
-            </a:pPr>
-            <a:r>
-              <a:rPr lang="en-US" sz="820" dirty="0">
+                <a:spcPct val="124000"/>
+              </a:lnSpc>
+              <a:buNone/>
+            </a:pPr>
+            <a:r>
+              <a:rPr lang="en-US" sz="810" dirty="0">
                 <a:solidFill>
                   <a:srgbClr val="3C4043"/>
                 </a:solidFill>
@@ -12850,12 +13169,14 @@
                 <a:ea typeface="Arial" pitchFamily="34" charset="-122"/>
                 <a:cs typeface="Arial" pitchFamily="34" charset="-120"/>
               </a:rPr>
-              <a:t>Principal AI Architect &amp; Field Deployment Engineering • Google Cloud Architecture Center Engineering Team
-</a:t>
-            </a:r>
-            <a:pPr indent="0" marL="0">
-              <a:lnSpc>
-                <a:spcPct val="122000"/>
+              <a:t>Principal AI Architect &amp; Field Deployment Engineering • Google Cloud Architecture Center Engineering Team</a:t>
+            </a:r>
+            <a:endParaRPr lang="en-US" sz="780" dirty="0"/>
+          </a:p>
+          <a:p>
+            <a:pPr indent="0" marL="0">
+              <a:lnSpc>
+                <a:spcPct val="124000"/>
               </a:lnSpc>
               <a:buNone/>
             </a:pPr>
